--- a/4 курс/8 семестр/Преддипломная практика/010304_22И1429_Ким_КС_презентация_предзащита.pptx
+++ b/4 курс/8 семестр/Преддипломная практика/010304_22И1429_Ким_КС_презентация_предзащита.pptx
@@ -16,9 +16,9 @@
     <p:sldId id="265" r:id="rId7"/>
     <p:sldId id="264" r:id="rId8"/>
     <p:sldId id="271" r:id="rId9"/>
-    <p:sldId id="280" r:id="rId10"/>
-    <p:sldId id="263" r:id="rId11"/>
-    <p:sldId id="262" r:id="rId12"/>
+    <p:sldId id="263" r:id="rId10"/>
+    <p:sldId id="262" r:id="rId11"/>
+    <p:sldId id="280" r:id="rId12"/>
     <p:sldId id="267" r:id="rId13"/>
     <p:sldId id="274" r:id="rId14"/>
     <p:sldId id="275" r:id="rId15"/>
@@ -212,7 +212,7 @@
           <a:p>
             <a:fld id="{75B8F736-CFBC-DB42-8902-918977A31BB8}" type="datetimeFigureOut">
               <a:rPr lang="ru-RU" smtClean="0"/>
-              <a:t>28.04.2026</a:t>
+              <a:t>03.05.2026</a:t>
             </a:fld>
             <a:endParaRPr lang="ru-RU"/>
           </a:p>
@@ -733,7 +733,7 @@
           <a:p>
             <a:fld id="{107550DB-F8F9-A345-8ACF-B172BB4CC835}" type="datetime1">
               <a:rPr lang="ru-RU" smtClean="0"/>
-              <a:t>28.04.2026</a:t>
+              <a:t>03.05.2026</a:t>
             </a:fld>
             <a:endParaRPr lang="ru-RU"/>
           </a:p>
@@ -931,7 +931,7 @@
           <a:p>
             <a:fld id="{C37D7D5F-75DD-7D4C-8231-B51C8FBAD87E}" type="datetime1">
               <a:rPr lang="ru-RU" smtClean="0"/>
-              <a:t>28.04.2026</a:t>
+              <a:t>03.05.2026</a:t>
             </a:fld>
             <a:endParaRPr lang="ru-RU"/>
           </a:p>
@@ -1139,7 +1139,7 @@
           <a:p>
             <a:fld id="{8CA4CD92-8BC8-7F42-A4AC-74BE4FBDEFBF}" type="datetime1">
               <a:rPr lang="ru-RU" smtClean="0"/>
-              <a:t>28.04.2026</a:t>
+              <a:t>03.05.2026</a:t>
             </a:fld>
             <a:endParaRPr lang="ru-RU"/>
           </a:p>
@@ -1337,7 +1337,7 @@
           <a:p>
             <a:fld id="{AD86D4C3-C482-8D47-AEDA-F24D432152B4}" type="datetime1">
               <a:rPr lang="ru-RU" smtClean="0"/>
-              <a:t>28.04.2026</a:t>
+              <a:t>03.05.2026</a:t>
             </a:fld>
             <a:endParaRPr lang="ru-RU"/>
           </a:p>
@@ -1612,7 +1612,7 @@
           <a:p>
             <a:fld id="{6E8693C7-0C3C-3D4E-827B-EA584AF6C465}" type="datetime1">
               <a:rPr lang="ru-RU" smtClean="0"/>
-              <a:t>28.04.2026</a:t>
+              <a:t>03.05.2026</a:t>
             </a:fld>
             <a:endParaRPr lang="ru-RU"/>
           </a:p>
@@ -1877,7 +1877,7 @@
           <a:p>
             <a:fld id="{36DB63EE-D3F0-B14D-A1DF-4D0885D56E4A}" type="datetime1">
               <a:rPr lang="ru-RU" smtClean="0"/>
-              <a:t>28.04.2026</a:t>
+              <a:t>03.05.2026</a:t>
             </a:fld>
             <a:endParaRPr lang="ru-RU"/>
           </a:p>
@@ -2289,7 +2289,7 @@
           <a:p>
             <a:fld id="{CA70F580-4A02-7749-8695-6F7A14F168A5}" type="datetime1">
               <a:rPr lang="ru-RU" smtClean="0"/>
-              <a:t>28.04.2026</a:t>
+              <a:t>03.05.2026</a:t>
             </a:fld>
             <a:endParaRPr lang="ru-RU"/>
           </a:p>
@@ -2430,7 +2430,7 @@
           <a:p>
             <a:fld id="{EA1A2E72-AE73-9645-9180-4139BDD17A06}" type="datetime1">
               <a:rPr lang="ru-RU" smtClean="0"/>
-              <a:t>28.04.2026</a:t>
+              <a:t>03.05.2026</a:t>
             </a:fld>
             <a:endParaRPr lang="ru-RU"/>
           </a:p>
@@ -2543,7 +2543,7 @@
           <a:p>
             <a:fld id="{C7CB39E5-2434-9D49-A354-72490D6D8D81}" type="datetime1">
               <a:rPr lang="ru-RU" smtClean="0"/>
-              <a:t>28.04.2026</a:t>
+              <a:t>03.05.2026</a:t>
             </a:fld>
             <a:endParaRPr lang="ru-RU"/>
           </a:p>
@@ -2854,7 +2854,7 @@
           <a:p>
             <a:fld id="{1C738D45-2A78-F24B-B5AB-66E869CA231F}" type="datetime1">
               <a:rPr lang="ru-RU" smtClean="0"/>
-              <a:t>28.04.2026</a:t>
+              <a:t>03.05.2026</a:t>
             </a:fld>
             <a:endParaRPr lang="ru-RU"/>
           </a:p>
@@ -3142,7 +3142,7 @@
           <a:p>
             <a:fld id="{F6F4DE2A-573E-8A49-A1E4-A11F8F365BD0}" type="datetime1">
               <a:rPr lang="ru-RU" smtClean="0"/>
-              <a:t>28.04.2026</a:t>
+              <a:t>03.05.2026</a:t>
             </a:fld>
             <a:endParaRPr lang="ru-RU"/>
           </a:p>
@@ -3383,7 +3383,7 @@
           <a:p>
             <a:fld id="{B4849629-F3D2-184C-BCB4-85078938F85A}" type="datetime1">
               <a:rPr lang="ru-RU" smtClean="0"/>
-              <a:t>28.04.2026</a:t>
+              <a:t>03.05.2026</a:t>
             </a:fld>
             <a:endParaRPr lang="ru-RU"/>
           </a:p>
@@ -4334,902 +4334,6 @@
         <p:cNvPr id="1" name="">
           <a:extLst>
             <a:ext uri="{FF2B5EF4-FFF2-40B4-BE49-F238E27FC236}">
-              <a16:creationId xmlns:a16="http://schemas.microsoft.com/office/drawing/2014/main" id="{C84D3CBB-CF12-1504-9B5C-874A57CDACE5}"/>
-            </a:ext>
-          </a:extLst>
-        </p:cNvPr>
-        <p:cNvGrpSpPr/>
-        <p:nvPr/>
-      </p:nvGrpSpPr>
-      <p:grpSpPr>
-        <a:xfrm>
-          <a:off x="0" y="0"/>
-          <a:ext cx="0" cy="0"/>
-          <a:chOff x="0" y="0"/>
-          <a:chExt cx="0" cy="0"/>
-        </a:xfrm>
-      </p:grpSpPr>
-      <p:sp>
-        <p:nvSpPr>
-          <p:cNvPr id="2" name="Заголовок 1">
-            <a:extLst>
-              <a:ext uri="{FF2B5EF4-FFF2-40B4-BE49-F238E27FC236}">
-                <a16:creationId xmlns:a16="http://schemas.microsoft.com/office/drawing/2014/main" id="{484CE8DC-9FA5-BECD-A892-CC098A30E19D}"/>
-              </a:ext>
-            </a:extLst>
-          </p:cNvPr>
-          <p:cNvSpPr>
-            <a:spLocks noGrp="1"/>
-          </p:cNvSpPr>
-          <p:nvPr>
-            <p:ph type="title"/>
-          </p:nvPr>
-        </p:nvSpPr>
-        <p:spPr>
-          <a:xfrm>
-            <a:off x="838200" y="365127"/>
-            <a:ext cx="10515600" cy="694240"/>
-          </a:xfrm>
-        </p:spPr>
-        <p:txBody>
-          <a:bodyPr>
-            <a:normAutofit/>
-          </a:bodyPr>
-          <a:lstStyle/>
-          <a:p>
-            <a:r>
-              <a:rPr lang="ru-RU" sz="3200" dirty="0">
-                <a:latin typeface="Times New Roman" panose="02020603050405020304" pitchFamily="18" charset="0"/>
-                <a:cs typeface="Times New Roman" panose="02020603050405020304" pitchFamily="18" charset="0"/>
-              </a:rPr>
-              <a:t>Описание этапов разработки модели</a:t>
-            </a:r>
-          </a:p>
-        </p:txBody>
-      </p:sp>
-      <p:sp>
-        <p:nvSpPr>
-          <p:cNvPr id="4" name="Заголовок 1">
-            <a:extLst>
-              <a:ext uri="{FF2B5EF4-FFF2-40B4-BE49-F238E27FC236}">
-                <a16:creationId xmlns:a16="http://schemas.microsoft.com/office/drawing/2014/main" id="{3488EE80-2AF6-DAC9-FB37-8D40C3DAAE20}"/>
-              </a:ext>
-            </a:extLst>
-          </p:cNvPr>
-          <p:cNvSpPr txBox="1">
-            <a:spLocks/>
-          </p:cNvSpPr>
-          <p:nvPr/>
-        </p:nvSpPr>
-        <p:spPr>
-          <a:xfrm>
-            <a:off x="838200" y="904373"/>
-            <a:ext cx="10515600" cy="694240"/>
-          </a:xfrm>
-          <a:prstGeom prst="rect">
-            <a:avLst/>
-          </a:prstGeom>
-        </p:spPr>
-        <p:txBody>
-          <a:bodyPr vert="horz" lIns="91440" tIns="45720" rIns="91440" bIns="45720" rtlCol="0" anchor="ctr">
-            <a:normAutofit/>
-          </a:bodyPr>
-          <a:lstStyle>
-            <a:lvl1pPr algn="l" defTabSz="914353" rtl="0" eaLnBrk="1" latinLnBrk="0" hangingPunct="1">
-              <a:lnSpc>
-                <a:spcPct val="90000"/>
-              </a:lnSpc>
-              <a:spcBef>
-                <a:spcPct val="0"/>
-              </a:spcBef>
-              <a:buNone/>
-              <a:defRPr sz="4400" kern="1200">
-                <a:solidFill>
-                  <a:schemeClr val="tx1"/>
-                </a:solidFill>
-                <a:latin typeface="+mj-lt"/>
-                <a:ea typeface="+mj-ea"/>
-                <a:cs typeface="+mj-cs"/>
-              </a:defRPr>
-            </a:lvl1pPr>
-          </a:lstStyle>
-          <a:p>
-            <a:endParaRPr lang="ru-RU" sz="3200" dirty="0">
-              <a:latin typeface="Times New Roman" panose="02020603050405020304" pitchFamily="18" charset="0"/>
-              <a:cs typeface="Times New Roman" panose="02020603050405020304" pitchFamily="18" charset="0"/>
-            </a:endParaRPr>
-          </a:p>
-        </p:txBody>
-      </p:sp>
-      <p:sp>
-        <p:nvSpPr>
-          <p:cNvPr id="7" name="TextBox 6">
-            <a:extLst>
-              <a:ext uri="{FF2B5EF4-FFF2-40B4-BE49-F238E27FC236}">
-                <a16:creationId xmlns:a16="http://schemas.microsoft.com/office/drawing/2014/main" id="{01CB85C5-A698-B1DF-688B-C90ACB0C99E9}"/>
-              </a:ext>
-            </a:extLst>
-          </p:cNvPr>
-          <p:cNvSpPr txBox="1"/>
-          <p:nvPr/>
-        </p:nvSpPr>
-        <p:spPr>
-          <a:xfrm>
-            <a:off x="11353800" y="5992297"/>
-            <a:ext cx="838200" cy="369332"/>
-          </a:xfrm>
-          <a:prstGeom prst="rect">
-            <a:avLst/>
-          </a:prstGeom>
-          <a:noFill/>
-        </p:spPr>
-        <p:txBody>
-          <a:bodyPr wrap="square" rtlCol="0">
-            <a:spAutoFit/>
-          </a:bodyPr>
-          <a:lstStyle/>
-          <a:p>
-            <a:r>
-              <a:rPr lang="ru-RU" dirty="0">
-                <a:latin typeface="Times New Roman" panose="02020603050405020304" pitchFamily="18" charset="0"/>
-                <a:cs typeface="Times New Roman" panose="02020603050405020304" pitchFamily="18" charset="0"/>
-              </a:rPr>
-              <a:t>10</a:t>
-            </a:r>
-          </a:p>
-        </p:txBody>
-      </p:sp>
-      <p:sp>
-        <p:nvSpPr>
-          <p:cNvPr id="5" name="Выноска: стрелка вниз 4">
-            <a:extLst>
-              <a:ext uri="{FF2B5EF4-FFF2-40B4-BE49-F238E27FC236}">
-                <a16:creationId xmlns:a16="http://schemas.microsoft.com/office/drawing/2014/main" id="{777C7D84-BB91-F630-E45A-A0DBC2ED060F}"/>
-              </a:ext>
-            </a:extLst>
-          </p:cNvPr>
-          <p:cNvSpPr/>
-          <p:nvPr/>
-        </p:nvSpPr>
-        <p:spPr>
-          <a:xfrm>
-            <a:off x="838200" y="1045452"/>
-            <a:ext cx="10515600" cy="693227"/>
-          </a:xfrm>
-          <a:prstGeom prst="downArrowCallout">
-            <a:avLst/>
-          </a:prstGeom>
-          <a:solidFill>
-            <a:schemeClr val="accent1"/>
-          </a:solidFill>
-        </p:spPr>
-        <p:style>
-          <a:lnRef idx="2">
-            <a:schemeClr val="accent1">
-              <a:shade val="15000"/>
-            </a:schemeClr>
-          </a:lnRef>
-          <a:fillRef idx="1">
-            <a:schemeClr val="accent1"/>
-          </a:fillRef>
-          <a:effectRef idx="0">
-            <a:schemeClr val="accent1"/>
-          </a:effectRef>
-          <a:fontRef idx="minor">
-            <a:schemeClr val="lt1"/>
-          </a:fontRef>
-        </p:style>
-        <p:txBody>
-          <a:bodyPr rtlCol="0" anchor="ctr"/>
-          <a:lstStyle/>
-          <a:p>
-            <a:pPr algn="ctr"/>
-            <a:endParaRPr lang="ru-RU"/>
-          </a:p>
-        </p:txBody>
-      </p:sp>
-      <p:sp>
-        <p:nvSpPr>
-          <p:cNvPr id="8" name="TextBox 7">
-            <a:extLst>
-              <a:ext uri="{FF2B5EF4-FFF2-40B4-BE49-F238E27FC236}">
-                <a16:creationId xmlns:a16="http://schemas.microsoft.com/office/drawing/2014/main" id="{80233201-5DB3-F97F-834D-3D32CF0442A6}"/>
-              </a:ext>
-            </a:extLst>
-          </p:cNvPr>
-          <p:cNvSpPr txBox="1"/>
-          <p:nvPr/>
-        </p:nvSpPr>
-        <p:spPr>
-          <a:xfrm>
-            <a:off x="3047432" y="1044439"/>
-            <a:ext cx="6097136" cy="461665"/>
-          </a:xfrm>
-          <a:prstGeom prst="rect">
-            <a:avLst/>
-          </a:prstGeom>
-          <a:noFill/>
-        </p:spPr>
-        <p:txBody>
-          <a:bodyPr wrap="square">
-            <a:spAutoFit/>
-          </a:bodyPr>
-          <a:lstStyle/>
-          <a:p>
-            <a:pPr algn="ctr"/>
-            <a:r>
-              <a:rPr lang="ru-RU" sz="2400" dirty="0">
-                <a:solidFill>
-                  <a:schemeClr val="bg1"/>
-                </a:solidFill>
-                <a:effectLst/>
-                <a:latin typeface="Times New Roman" panose="02020603050405020304" pitchFamily="18" charset="0"/>
-                <a:ea typeface="SimSun" panose="02010600030101010101" pitchFamily="2" charset="-122"/>
-                <a:cs typeface="Times New Roman" panose="02020603050405020304" pitchFamily="18" charset="0"/>
-              </a:rPr>
-              <a:t>Проектирование архитектуры решения</a:t>
-            </a:r>
-            <a:endParaRPr lang="ru-RU" sz="2400" dirty="0">
-              <a:solidFill>
-                <a:schemeClr val="bg1"/>
-              </a:solidFill>
-              <a:latin typeface="Times New Roman" panose="02020603050405020304" pitchFamily="18" charset="0"/>
-              <a:cs typeface="Times New Roman" panose="02020603050405020304" pitchFamily="18" charset="0"/>
-            </a:endParaRPr>
-          </a:p>
-        </p:txBody>
-      </p:sp>
-      <p:sp>
-        <p:nvSpPr>
-          <p:cNvPr id="9" name="Выноска: стрелка вниз 8">
-            <a:extLst>
-              <a:ext uri="{FF2B5EF4-FFF2-40B4-BE49-F238E27FC236}">
-                <a16:creationId xmlns:a16="http://schemas.microsoft.com/office/drawing/2014/main" id="{6AC33718-28CB-FE41-AD4D-65FD2DB3D7B1}"/>
-              </a:ext>
-            </a:extLst>
-          </p:cNvPr>
-          <p:cNvSpPr/>
-          <p:nvPr/>
-        </p:nvSpPr>
-        <p:spPr>
-          <a:xfrm>
-            <a:off x="838135" y="4509498"/>
-            <a:ext cx="10515578" cy="722331"/>
-          </a:xfrm>
-          <a:prstGeom prst="downArrowCallout">
-            <a:avLst/>
-          </a:prstGeom>
-          <a:solidFill>
-            <a:schemeClr val="accent1"/>
-          </a:solidFill>
-        </p:spPr>
-        <p:style>
-          <a:lnRef idx="2">
-            <a:schemeClr val="accent1">
-              <a:shade val="15000"/>
-            </a:schemeClr>
-          </a:lnRef>
-          <a:fillRef idx="1">
-            <a:schemeClr val="accent1"/>
-          </a:fillRef>
-          <a:effectRef idx="0">
-            <a:schemeClr val="accent1"/>
-          </a:effectRef>
-          <a:fontRef idx="minor">
-            <a:schemeClr val="lt1"/>
-          </a:fontRef>
-        </p:style>
-        <p:txBody>
-          <a:bodyPr rtlCol="0" anchor="ctr"/>
-          <a:lstStyle/>
-          <a:p>
-            <a:pPr algn="ctr"/>
-            <a:endParaRPr lang="ru-RU"/>
-          </a:p>
-        </p:txBody>
-      </p:sp>
-      <p:sp>
-        <p:nvSpPr>
-          <p:cNvPr id="10" name="TextBox 9">
-            <a:extLst>
-              <a:ext uri="{FF2B5EF4-FFF2-40B4-BE49-F238E27FC236}">
-                <a16:creationId xmlns:a16="http://schemas.microsoft.com/office/drawing/2014/main" id="{86AB9496-35E7-CB43-9DB6-ED832BCBE5CF}"/>
-              </a:ext>
-            </a:extLst>
-          </p:cNvPr>
-          <p:cNvSpPr txBox="1"/>
-          <p:nvPr/>
-        </p:nvSpPr>
-        <p:spPr>
-          <a:xfrm>
-            <a:off x="4661975" y="4496623"/>
-            <a:ext cx="2867895" cy="461665"/>
-          </a:xfrm>
-          <a:prstGeom prst="rect">
-            <a:avLst/>
-          </a:prstGeom>
-          <a:noFill/>
-        </p:spPr>
-        <p:txBody>
-          <a:bodyPr wrap="square">
-            <a:spAutoFit/>
-          </a:bodyPr>
-          <a:lstStyle/>
-          <a:p>
-            <a:pPr algn="ctr"/>
-            <a:r>
-              <a:rPr lang="ru-RU" sz="2400" dirty="0">
-                <a:solidFill>
-                  <a:schemeClr val="bg1"/>
-                </a:solidFill>
-                <a:effectLst/>
-                <a:latin typeface="Times New Roman" panose="02020603050405020304" pitchFamily="18" charset="0"/>
-                <a:ea typeface="SimSun" panose="02010600030101010101" pitchFamily="2" charset="-122"/>
-                <a:cs typeface="Times New Roman" panose="02020603050405020304" pitchFamily="18" charset="0"/>
-              </a:rPr>
-              <a:t>Реализация моделей</a:t>
-            </a:r>
-            <a:endParaRPr lang="ru-RU" sz="2400" dirty="0">
-              <a:solidFill>
-                <a:schemeClr val="bg1"/>
-              </a:solidFill>
-              <a:latin typeface="Times New Roman" panose="02020603050405020304" pitchFamily="18" charset="0"/>
-              <a:cs typeface="Times New Roman" panose="02020603050405020304" pitchFamily="18" charset="0"/>
-            </a:endParaRPr>
-          </a:p>
-        </p:txBody>
-      </p:sp>
-      <p:sp>
-        <p:nvSpPr>
-          <p:cNvPr id="11" name="Выноска: стрелка вниз 10">
-            <a:extLst>
-              <a:ext uri="{FF2B5EF4-FFF2-40B4-BE49-F238E27FC236}">
-                <a16:creationId xmlns:a16="http://schemas.microsoft.com/office/drawing/2014/main" id="{EAB87037-BA68-348B-AA68-F06A3D1B0C8B}"/>
-              </a:ext>
-            </a:extLst>
-          </p:cNvPr>
-          <p:cNvSpPr/>
-          <p:nvPr/>
-        </p:nvSpPr>
-        <p:spPr>
-          <a:xfrm>
-            <a:off x="838135" y="3705277"/>
-            <a:ext cx="10515578" cy="774576"/>
-          </a:xfrm>
-          <a:prstGeom prst="downArrowCallout">
-            <a:avLst/>
-          </a:prstGeom>
-          <a:solidFill>
-            <a:schemeClr val="accent1"/>
-          </a:solidFill>
-        </p:spPr>
-        <p:style>
-          <a:lnRef idx="2">
-            <a:schemeClr val="accent1">
-              <a:shade val="15000"/>
-            </a:schemeClr>
-          </a:lnRef>
-          <a:fillRef idx="1">
-            <a:schemeClr val="accent1"/>
-          </a:fillRef>
-          <a:effectRef idx="0">
-            <a:schemeClr val="accent1"/>
-          </a:effectRef>
-          <a:fontRef idx="minor">
-            <a:schemeClr val="lt1"/>
-          </a:fontRef>
-        </p:style>
-        <p:txBody>
-          <a:bodyPr rtlCol="0" anchor="ctr"/>
-          <a:lstStyle/>
-          <a:p>
-            <a:pPr algn="ctr"/>
-            <a:endParaRPr lang="ru-RU"/>
-          </a:p>
-        </p:txBody>
-      </p:sp>
-      <p:sp>
-        <p:nvSpPr>
-          <p:cNvPr id="13" name="Выноска: стрелка вниз 12">
-            <a:extLst>
-              <a:ext uri="{FF2B5EF4-FFF2-40B4-BE49-F238E27FC236}">
-                <a16:creationId xmlns:a16="http://schemas.microsoft.com/office/drawing/2014/main" id="{543FBCF8-E3F2-C1BB-3F8D-9DAF4BE58ADE}"/>
-              </a:ext>
-            </a:extLst>
-          </p:cNvPr>
-          <p:cNvSpPr/>
-          <p:nvPr/>
-        </p:nvSpPr>
-        <p:spPr>
-          <a:xfrm>
-            <a:off x="838125" y="5251710"/>
-            <a:ext cx="10515588" cy="723846"/>
-          </a:xfrm>
-          <a:prstGeom prst="downArrowCallout">
-            <a:avLst/>
-          </a:prstGeom>
-          <a:solidFill>
-            <a:schemeClr val="accent1"/>
-          </a:solidFill>
-        </p:spPr>
-        <p:style>
-          <a:lnRef idx="2">
-            <a:schemeClr val="accent1">
-              <a:shade val="15000"/>
-            </a:schemeClr>
-          </a:lnRef>
-          <a:fillRef idx="1">
-            <a:schemeClr val="accent1"/>
-          </a:fillRef>
-          <a:effectRef idx="0">
-            <a:schemeClr val="accent1"/>
-          </a:effectRef>
-          <a:fontRef idx="minor">
-            <a:schemeClr val="lt1"/>
-          </a:fontRef>
-        </p:style>
-        <p:txBody>
-          <a:bodyPr rtlCol="0" anchor="ctr"/>
-          <a:lstStyle/>
-          <a:p>
-            <a:pPr algn="ctr"/>
-            <a:endParaRPr lang="ru-RU"/>
-          </a:p>
-        </p:txBody>
-      </p:sp>
-      <p:sp>
-        <p:nvSpPr>
-          <p:cNvPr id="14" name="TextBox 13">
-            <a:extLst>
-              <a:ext uri="{FF2B5EF4-FFF2-40B4-BE49-F238E27FC236}">
-                <a16:creationId xmlns:a16="http://schemas.microsoft.com/office/drawing/2014/main" id="{F80B9FD2-DABD-F8DD-48F1-CDC0EB4F5B42}"/>
-              </a:ext>
-            </a:extLst>
-          </p:cNvPr>
-          <p:cNvSpPr txBox="1"/>
-          <p:nvPr/>
-        </p:nvSpPr>
-        <p:spPr>
-          <a:xfrm>
-            <a:off x="5072378" y="5234940"/>
-            <a:ext cx="2047082" cy="461665"/>
-          </a:xfrm>
-          <a:prstGeom prst="rect">
-            <a:avLst/>
-          </a:prstGeom>
-          <a:noFill/>
-        </p:spPr>
-        <p:txBody>
-          <a:bodyPr wrap="square">
-            <a:spAutoFit/>
-          </a:bodyPr>
-          <a:lstStyle/>
-          <a:p>
-            <a:pPr algn="ctr"/>
-            <a:r>
-              <a:rPr lang="ru-RU" sz="2400" dirty="0">
-                <a:solidFill>
-                  <a:schemeClr val="bg1"/>
-                </a:solidFill>
-                <a:effectLst/>
-                <a:latin typeface="Times New Roman" panose="02020603050405020304" pitchFamily="18" charset="0"/>
-                <a:ea typeface="SimSun" panose="02010600030101010101" pitchFamily="2" charset="-122"/>
-                <a:cs typeface="Times New Roman" panose="02020603050405020304" pitchFamily="18" charset="0"/>
-              </a:rPr>
-              <a:t>Расчёт метрик</a:t>
-            </a:r>
-            <a:endParaRPr lang="ru-RU" sz="2400" dirty="0">
-              <a:solidFill>
-                <a:schemeClr val="bg1"/>
-              </a:solidFill>
-              <a:latin typeface="Times New Roman" panose="02020603050405020304" pitchFamily="18" charset="0"/>
-              <a:cs typeface="Times New Roman" panose="02020603050405020304" pitchFamily="18" charset="0"/>
-            </a:endParaRPr>
-          </a:p>
-        </p:txBody>
-      </p:sp>
-      <p:sp>
-        <p:nvSpPr>
-          <p:cNvPr id="15" name="Прямоугольник 14">
-            <a:extLst>
-              <a:ext uri="{FF2B5EF4-FFF2-40B4-BE49-F238E27FC236}">
-                <a16:creationId xmlns:a16="http://schemas.microsoft.com/office/drawing/2014/main" id="{5FF79CE5-57A9-479B-2DD0-D41A7A2B5316}"/>
-              </a:ext>
-            </a:extLst>
-          </p:cNvPr>
-          <p:cNvSpPr/>
-          <p:nvPr/>
-        </p:nvSpPr>
-        <p:spPr>
-          <a:xfrm>
-            <a:off x="838125" y="5990197"/>
-            <a:ext cx="10515588" cy="479347"/>
-          </a:xfrm>
-          <a:prstGeom prst="rect">
-            <a:avLst/>
-          </a:prstGeom>
-          <a:solidFill>
-            <a:schemeClr val="accent1"/>
-          </a:solidFill>
-        </p:spPr>
-        <p:style>
-          <a:lnRef idx="2">
-            <a:schemeClr val="accent1">
-              <a:shade val="15000"/>
-            </a:schemeClr>
-          </a:lnRef>
-          <a:fillRef idx="1">
-            <a:schemeClr val="accent1"/>
-          </a:fillRef>
-          <a:effectRef idx="0">
-            <a:schemeClr val="accent1"/>
-          </a:effectRef>
-          <a:fontRef idx="minor">
-            <a:schemeClr val="lt1"/>
-          </a:fontRef>
-        </p:style>
-        <p:txBody>
-          <a:bodyPr rtlCol="0" anchor="ctr"/>
-          <a:lstStyle/>
-          <a:p>
-            <a:pPr algn="ctr"/>
-            <a:endParaRPr lang="ru-RU"/>
-          </a:p>
-        </p:txBody>
-      </p:sp>
-      <p:sp>
-        <p:nvSpPr>
-          <p:cNvPr id="16" name="TextBox 15">
-            <a:extLst>
-              <a:ext uri="{FF2B5EF4-FFF2-40B4-BE49-F238E27FC236}">
-                <a16:creationId xmlns:a16="http://schemas.microsoft.com/office/drawing/2014/main" id="{F5FA89AF-DD65-F496-F3B0-F4CF76E20218}"/>
-              </a:ext>
-            </a:extLst>
-          </p:cNvPr>
-          <p:cNvSpPr txBox="1"/>
-          <p:nvPr/>
-        </p:nvSpPr>
-        <p:spPr>
-          <a:xfrm>
-            <a:off x="4143463" y="5972074"/>
-            <a:ext cx="3904911" cy="461665"/>
-          </a:xfrm>
-          <a:prstGeom prst="rect">
-            <a:avLst/>
-          </a:prstGeom>
-          <a:noFill/>
-        </p:spPr>
-        <p:txBody>
-          <a:bodyPr wrap="square">
-            <a:spAutoFit/>
-          </a:bodyPr>
-          <a:lstStyle/>
-          <a:p>
-            <a:pPr algn="ctr"/>
-            <a:r>
-              <a:rPr lang="ru-RU" sz="2400" dirty="0">
-                <a:solidFill>
-                  <a:schemeClr val="bg1"/>
-                </a:solidFill>
-                <a:effectLst/>
-                <a:latin typeface="Times New Roman" panose="02020603050405020304" pitchFamily="18" charset="0"/>
-                <a:ea typeface="SimSun" panose="02010600030101010101" pitchFamily="2" charset="-122"/>
-                <a:cs typeface="Times New Roman" panose="02020603050405020304" pitchFamily="18" charset="0"/>
-              </a:rPr>
-              <a:t>Анализ важности признаков</a:t>
-            </a:r>
-            <a:endParaRPr lang="ru-RU" sz="2400" dirty="0">
-              <a:solidFill>
-                <a:schemeClr val="bg1"/>
-              </a:solidFill>
-              <a:latin typeface="Times New Roman" panose="02020603050405020304" pitchFamily="18" charset="0"/>
-              <a:cs typeface="Times New Roman" panose="02020603050405020304" pitchFamily="18" charset="0"/>
-            </a:endParaRPr>
-          </a:p>
-        </p:txBody>
-      </p:sp>
-      <p:sp>
-        <p:nvSpPr>
-          <p:cNvPr id="3" name="Выноска: стрелка вниз 2">
-            <a:extLst>
-              <a:ext uri="{FF2B5EF4-FFF2-40B4-BE49-F238E27FC236}">
-                <a16:creationId xmlns:a16="http://schemas.microsoft.com/office/drawing/2014/main" id="{A4D89E93-6B28-CB0B-ACA8-35E7DF535DC8}"/>
-              </a:ext>
-            </a:extLst>
-          </p:cNvPr>
-          <p:cNvSpPr/>
-          <p:nvPr/>
-        </p:nvSpPr>
-        <p:spPr>
-          <a:xfrm>
-            <a:off x="838135" y="2522864"/>
-            <a:ext cx="10515578" cy="1152692"/>
-          </a:xfrm>
-          <a:prstGeom prst="downArrowCallout">
-            <a:avLst/>
-          </a:prstGeom>
-          <a:solidFill>
-            <a:schemeClr val="accent1"/>
-          </a:solidFill>
-        </p:spPr>
-        <p:style>
-          <a:lnRef idx="2">
-            <a:schemeClr val="accent1">
-              <a:shade val="15000"/>
-            </a:schemeClr>
-          </a:lnRef>
-          <a:fillRef idx="1">
-            <a:schemeClr val="accent1"/>
-          </a:fillRef>
-          <a:effectRef idx="0">
-            <a:schemeClr val="accent1"/>
-          </a:effectRef>
-          <a:fontRef idx="minor">
-            <a:schemeClr val="lt1"/>
-          </a:fontRef>
-        </p:style>
-        <p:txBody>
-          <a:bodyPr rtlCol="0" anchor="ctr"/>
-          <a:lstStyle/>
-          <a:p>
-            <a:pPr algn="ctr"/>
-            <a:endParaRPr lang="ru-RU"/>
-          </a:p>
-        </p:txBody>
-      </p:sp>
-      <p:sp>
-        <p:nvSpPr>
-          <p:cNvPr id="6" name="TextBox 5">
-            <a:extLst>
-              <a:ext uri="{FF2B5EF4-FFF2-40B4-BE49-F238E27FC236}">
-                <a16:creationId xmlns:a16="http://schemas.microsoft.com/office/drawing/2014/main" id="{53F189FC-2681-5142-5A2F-D30E26B7F3C8}"/>
-              </a:ext>
-            </a:extLst>
-          </p:cNvPr>
-          <p:cNvSpPr txBox="1"/>
-          <p:nvPr/>
-        </p:nvSpPr>
-        <p:spPr>
-          <a:xfrm>
-            <a:off x="838134" y="2494290"/>
-            <a:ext cx="10515579" cy="830997"/>
-          </a:xfrm>
-          <a:prstGeom prst="rect">
-            <a:avLst/>
-          </a:prstGeom>
-          <a:noFill/>
-        </p:spPr>
-        <p:txBody>
-          <a:bodyPr wrap="square">
-            <a:spAutoFit/>
-          </a:bodyPr>
-          <a:lstStyle/>
-          <a:p>
-            <a:pPr algn="ctr"/>
-            <a:r>
-              <a:rPr lang="ru-RU" sz="2400" dirty="0">
-                <a:solidFill>
-                  <a:schemeClr val="bg1"/>
-                </a:solidFill>
-                <a:latin typeface="Times New Roman" panose="02020603050405020304" pitchFamily="18" charset="0"/>
-                <a:ea typeface="SimSun" panose="02010600030101010101" pitchFamily="2" charset="-122"/>
-                <a:cs typeface="Times New Roman" panose="02020603050405020304" pitchFamily="18" charset="0"/>
-              </a:rPr>
-              <a:t>Временная валидация </a:t>
-            </a:r>
-            <a:r>
-              <a:rPr lang="en-US" sz="2400" dirty="0">
-                <a:solidFill>
-                  <a:schemeClr val="bg1"/>
-                </a:solidFill>
-                <a:latin typeface="Times New Roman" panose="02020603050405020304" pitchFamily="18" charset="0"/>
-                <a:ea typeface="SimSun" panose="02010600030101010101" pitchFamily="2" charset="-122"/>
-                <a:cs typeface="Times New Roman" panose="02020603050405020304" pitchFamily="18" charset="0"/>
-              </a:rPr>
-              <a:t>—</a:t>
-            </a:r>
-            <a:r>
-              <a:rPr lang="ru-RU" sz="2400" dirty="0">
-                <a:solidFill>
-                  <a:schemeClr val="bg1"/>
-                </a:solidFill>
-                <a:latin typeface="Times New Roman" panose="02020603050405020304" pitchFamily="18" charset="0"/>
-                <a:ea typeface="SimSun" panose="02010600030101010101" pitchFamily="2" charset="-122"/>
-                <a:cs typeface="Times New Roman" panose="02020603050405020304" pitchFamily="18" charset="0"/>
-              </a:rPr>
-              <a:t> обучение на данных до 2021, тест на 2022–2026 (без случайного разбиения)</a:t>
-            </a:r>
-            <a:endParaRPr lang="ru-RU" sz="2400" dirty="0">
-              <a:solidFill>
-                <a:schemeClr val="bg1"/>
-              </a:solidFill>
-              <a:latin typeface="Times New Roman" panose="02020603050405020304" pitchFamily="18" charset="0"/>
-              <a:cs typeface="Times New Roman" panose="02020603050405020304" pitchFamily="18" charset="0"/>
-            </a:endParaRPr>
-          </a:p>
-        </p:txBody>
-      </p:sp>
-      <p:sp>
-        <p:nvSpPr>
-          <p:cNvPr id="17" name="TextBox 16">
-            <a:extLst>
-              <a:ext uri="{FF2B5EF4-FFF2-40B4-BE49-F238E27FC236}">
-                <a16:creationId xmlns:a16="http://schemas.microsoft.com/office/drawing/2014/main" id="{A5B18D17-CA70-73BC-F954-269D1763A363}"/>
-              </a:ext>
-            </a:extLst>
-          </p:cNvPr>
-          <p:cNvSpPr txBox="1"/>
-          <p:nvPr/>
-        </p:nvSpPr>
-        <p:spPr>
-          <a:xfrm>
-            <a:off x="838134" y="3728370"/>
-            <a:ext cx="10515600" cy="461665"/>
-          </a:xfrm>
-          <a:prstGeom prst="rect">
-            <a:avLst/>
-          </a:prstGeom>
-          <a:noFill/>
-        </p:spPr>
-        <p:txBody>
-          <a:bodyPr wrap="square">
-            <a:spAutoFit/>
-          </a:bodyPr>
-          <a:lstStyle/>
-          <a:p>
-            <a:pPr algn="ctr"/>
-            <a:r>
-              <a:rPr lang="ru-RU" sz="2400" dirty="0">
-                <a:solidFill>
-                  <a:schemeClr val="bg1"/>
-                </a:solidFill>
-                <a:latin typeface="Times New Roman" panose="02020603050405020304" pitchFamily="18" charset="0"/>
-                <a:ea typeface="SimSun" panose="02010600030101010101" pitchFamily="2" charset="-122"/>
-                <a:cs typeface="Times New Roman" panose="02020603050405020304" pitchFamily="18" charset="0"/>
-              </a:rPr>
-              <a:t>Подбор </a:t>
-            </a:r>
-            <a:r>
-              <a:rPr lang="ru-RU" sz="2400" dirty="0" err="1">
-                <a:solidFill>
-                  <a:schemeClr val="bg1"/>
-                </a:solidFill>
-                <a:latin typeface="Times New Roman" panose="02020603050405020304" pitchFamily="18" charset="0"/>
-                <a:ea typeface="SimSun" panose="02010600030101010101" pitchFamily="2" charset="-122"/>
-                <a:cs typeface="Times New Roman" panose="02020603050405020304" pitchFamily="18" charset="0"/>
-              </a:rPr>
-              <a:t>гиперпараметров</a:t>
-            </a:r>
-            <a:endParaRPr lang="ru-RU" sz="2400" dirty="0">
-              <a:solidFill>
-                <a:schemeClr val="bg1"/>
-              </a:solidFill>
-              <a:latin typeface="Times New Roman" panose="02020603050405020304" pitchFamily="18" charset="0"/>
-              <a:cs typeface="Times New Roman" panose="02020603050405020304" pitchFamily="18" charset="0"/>
-            </a:endParaRPr>
-          </a:p>
-        </p:txBody>
-      </p:sp>
-      <p:sp>
-        <p:nvSpPr>
-          <p:cNvPr id="12" name="Выноска: стрелка вниз 11">
-            <a:extLst>
-              <a:ext uri="{FF2B5EF4-FFF2-40B4-BE49-F238E27FC236}">
-                <a16:creationId xmlns:a16="http://schemas.microsoft.com/office/drawing/2014/main" id="{8DC2911D-2067-A7F4-9976-24A0AEAF0906}"/>
-              </a:ext>
-            </a:extLst>
-          </p:cNvPr>
-          <p:cNvSpPr/>
-          <p:nvPr/>
-        </p:nvSpPr>
-        <p:spPr>
-          <a:xfrm>
-            <a:off x="838135" y="1767303"/>
-            <a:ext cx="10515579" cy="731844"/>
-          </a:xfrm>
-          <a:prstGeom prst="downArrowCallout">
-            <a:avLst/>
-          </a:prstGeom>
-          <a:solidFill>
-            <a:schemeClr val="accent1"/>
-          </a:solidFill>
-        </p:spPr>
-        <p:style>
-          <a:lnRef idx="2">
-            <a:schemeClr val="accent1">
-              <a:shade val="15000"/>
-            </a:schemeClr>
-          </a:lnRef>
-          <a:fillRef idx="1">
-            <a:schemeClr val="accent1"/>
-          </a:fillRef>
-          <a:effectRef idx="0">
-            <a:schemeClr val="accent1"/>
-          </a:effectRef>
-          <a:fontRef idx="minor">
-            <a:schemeClr val="lt1"/>
-          </a:fontRef>
-        </p:style>
-        <p:txBody>
-          <a:bodyPr rtlCol="0" anchor="ctr"/>
-          <a:lstStyle/>
-          <a:p>
-            <a:pPr algn="ctr"/>
-            <a:endParaRPr lang="ru-RU"/>
-          </a:p>
-        </p:txBody>
-      </p:sp>
-      <p:sp>
-        <p:nvSpPr>
-          <p:cNvPr id="18" name="TextBox 17">
-            <a:extLst>
-              <a:ext uri="{FF2B5EF4-FFF2-40B4-BE49-F238E27FC236}">
-                <a16:creationId xmlns:a16="http://schemas.microsoft.com/office/drawing/2014/main" id="{9403D532-C8B9-9FAC-0474-B695478989A1}"/>
-              </a:ext>
-            </a:extLst>
-          </p:cNvPr>
-          <p:cNvSpPr txBox="1"/>
-          <p:nvPr/>
-        </p:nvSpPr>
-        <p:spPr>
-          <a:xfrm>
-            <a:off x="838135" y="1752662"/>
-            <a:ext cx="10515579" cy="461665"/>
-          </a:xfrm>
-          <a:prstGeom prst="rect">
-            <a:avLst/>
-          </a:prstGeom>
-          <a:noFill/>
-        </p:spPr>
-        <p:txBody>
-          <a:bodyPr wrap="square">
-            <a:spAutoFit/>
-          </a:bodyPr>
-          <a:lstStyle/>
-          <a:p>
-            <a:pPr algn="ctr"/>
-            <a:r>
-              <a:rPr lang="ru-RU" sz="2400" dirty="0">
-                <a:solidFill>
-                  <a:schemeClr val="bg1"/>
-                </a:solidFill>
-                <a:latin typeface="Times New Roman" panose="02020603050405020304" pitchFamily="18" charset="0"/>
-                <a:ea typeface="SimSun" panose="02010600030101010101" pitchFamily="2" charset="-122"/>
-                <a:cs typeface="Times New Roman" panose="02020603050405020304" pitchFamily="18" charset="0"/>
-              </a:rPr>
-              <a:t>Генерация признаков</a:t>
-            </a:r>
-            <a:endParaRPr lang="ru-RU" sz="2400" dirty="0">
-              <a:solidFill>
-                <a:schemeClr val="bg1"/>
-              </a:solidFill>
-              <a:latin typeface="Times New Roman" panose="02020603050405020304" pitchFamily="18" charset="0"/>
-              <a:cs typeface="Times New Roman" panose="02020603050405020304" pitchFamily="18" charset="0"/>
-            </a:endParaRPr>
-          </a:p>
-        </p:txBody>
-      </p:sp>
-    </p:spTree>
-    <p:extLst>
-      <p:ext uri="{BB962C8B-B14F-4D97-AF65-F5344CB8AC3E}">
-        <p14:creationId xmlns:p14="http://schemas.microsoft.com/office/powerpoint/2010/main" val="601765989"/>
-      </p:ext>
-    </p:extLst>
-  </p:cSld>
-  <p:clrMapOvr>
-    <a:masterClrMapping/>
-  </p:clrMapOvr>
-</p:sld>
-</file>
-
-<file path=ppt/slides/slide11.xml><?xml version="1.0" encoding="utf-8"?>
-<p:sld xmlns:a="http://schemas.openxmlformats.org/drawingml/2006/main" xmlns:r="http://schemas.openxmlformats.org/officeDocument/2006/relationships" xmlns:p="http://schemas.openxmlformats.org/presentationml/2006/main">
-  <p:cSld>
-    <p:spTree>
-      <p:nvGrpSpPr>
-        <p:cNvPr id="1" name="">
-          <a:extLst>
-            <a:ext uri="{FF2B5EF4-FFF2-40B4-BE49-F238E27FC236}">
               <a16:creationId xmlns:a16="http://schemas.microsoft.com/office/drawing/2014/main" id="{2AB933D3-81F9-228B-C0E4-18D04F445A0C}"/>
             </a:ext>
           </a:extLst>
@@ -5316,7 +4420,7 @@
                 <a:latin typeface="Times New Roman" panose="02020603050405020304" pitchFamily="18" charset="0"/>
                 <a:cs typeface="Times New Roman" panose="02020603050405020304" pitchFamily="18" charset="0"/>
               </a:rPr>
-              <a:t>11</a:t>
+              <a:t>10</a:t>
             </a:r>
           </a:p>
         </p:txBody>
@@ -5805,6 +4909,682 @@
     <p:extLst>
       <p:ext uri="{BB962C8B-B14F-4D97-AF65-F5344CB8AC3E}">
         <p14:creationId xmlns:p14="http://schemas.microsoft.com/office/powerpoint/2010/main" val="2150988447"/>
+      </p:ext>
+    </p:extLst>
+  </p:cSld>
+  <p:clrMapOvr>
+    <a:masterClrMapping/>
+  </p:clrMapOvr>
+</p:sld>
+</file>
+
+<file path=ppt/slides/slide11.xml><?xml version="1.0" encoding="utf-8"?>
+<p:sld xmlns:a="http://schemas.openxmlformats.org/drawingml/2006/main" xmlns:r="http://schemas.openxmlformats.org/officeDocument/2006/relationships" xmlns:p="http://schemas.openxmlformats.org/presentationml/2006/main">
+  <p:cSld>
+    <p:spTree>
+      <p:nvGrpSpPr>
+        <p:cNvPr id="1" name="">
+          <a:extLst>
+            <a:ext uri="{FF2B5EF4-FFF2-40B4-BE49-F238E27FC236}">
+              <a16:creationId xmlns:a16="http://schemas.microsoft.com/office/drawing/2014/main" id="{C7D1FD52-06F0-390D-67F9-ADF5292E68F9}"/>
+            </a:ext>
+          </a:extLst>
+        </p:cNvPr>
+        <p:cNvGrpSpPr/>
+        <p:nvPr/>
+      </p:nvGrpSpPr>
+      <p:grpSpPr>
+        <a:xfrm>
+          <a:off x="0" y="0"/>
+          <a:ext cx="0" cy="0"/>
+          <a:chOff x="0" y="0"/>
+          <a:chExt cx="0" cy="0"/>
+        </a:xfrm>
+      </p:grpSpPr>
+      <p:sp>
+        <p:nvSpPr>
+          <p:cNvPr id="2" name="Заголовок 1">
+            <a:extLst>
+              <a:ext uri="{FF2B5EF4-FFF2-40B4-BE49-F238E27FC236}">
+                <a16:creationId xmlns:a16="http://schemas.microsoft.com/office/drawing/2014/main" id="{C8138F05-915A-9210-6D4D-8B38B9395265}"/>
+              </a:ext>
+            </a:extLst>
+          </p:cNvPr>
+          <p:cNvSpPr>
+            <a:spLocks noGrp="1"/>
+          </p:cNvSpPr>
+          <p:nvPr>
+            <p:ph type="title"/>
+          </p:nvPr>
+        </p:nvSpPr>
+        <p:spPr>
+          <a:xfrm>
+            <a:off x="838200" y="365127"/>
+            <a:ext cx="10515600" cy="694240"/>
+          </a:xfrm>
+        </p:spPr>
+        <p:txBody>
+          <a:bodyPr>
+            <a:normAutofit/>
+          </a:bodyPr>
+          <a:lstStyle/>
+          <a:p>
+            <a:r>
+              <a:rPr lang="ru-RU" sz="3200" dirty="0">
+                <a:latin typeface="Times New Roman" panose="02020603050405020304" pitchFamily="18" charset="0"/>
+                <a:cs typeface="Times New Roman" panose="02020603050405020304" pitchFamily="18" charset="0"/>
+              </a:rPr>
+              <a:t>Распределение трансферных сумм</a:t>
+            </a:r>
+          </a:p>
+        </p:txBody>
+      </p:sp>
+      <p:sp>
+        <p:nvSpPr>
+          <p:cNvPr id="4" name="Заголовок 1">
+            <a:extLst>
+              <a:ext uri="{FF2B5EF4-FFF2-40B4-BE49-F238E27FC236}">
+                <a16:creationId xmlns:a16="http://schemas.microsoft.com/office/drawing/2014/main" id="{5108CEA8-4673-EA76-0D80-184690B72B0B}"/>
+              </a:ext>
+            </a:extLst>
+          </p:cNvPr>
+          <p:cNvSpPr txBox="1">
+            <a:spLocks/>
+          </p:cNvSpPr>
+          <p:nvPr/>
+        </p:nvSpPr>
+        <p:spPr>
+          <a:xfrm>
+            <a:off x="838200" y="904373"/>
+            <a:ext cx="10515600" cy="694240"/>
+          </a:xfrm>
+          <a:prstGeom prst="rect">
+            <a:avLst/>
+          </a:prstGeom>
+        </p:spPr>
+        <p:txBody>
+          <a:bodyPr vert="horz" lIns="91440" tIns="45720" rIns="91440" bIns="45720" rtlCol="0" anchor="ctr">
+            <a:normAutofit/>
+          </a:bodyPr>
+          <a:lstStyle>
+            <a:lvl1pPr algn="l" defTabSz="914353" rtl="0" eaLnBrk="1" latinLnBrk="0" hangingPunct="1">
+              <a:lnSpc>
+                <a:spcPct val="90000"/>
+              </a:lnSpc>
+              <a:spcBef>
+                <a:spcPct val="0"/>
+              </a:spcBef>
+              <a:buNone/>
+              <a:defRPr sz="4400" kern="1200">
+                <a:solidFill>
+                  <a:schemeClr val="tx1"/>
+                </a:solidFill>
+                <a:latin typeface="+mj-lt"/>
+                <a:ea typeface="+mj-ea"/>
+                <a:cs typeface="+mj-cs"/>
+              </a:defRPr>
+            </a:lvl1pPr>
+          </a:lstStyle>
+          <a:p>
+            <a:endParaRPr lang="ru-RU" sz="3200" dirty="0">
+              <a:latin typeface="Times New Roman" panose="02020603050405020304" pitchFamily="18" charset="0"/>
+              <a:cs typeface="Times New Roman" panose="02020603050405020304" pitchFamily="18" charset="0"/>
+            </a:endParaRPr>
+          </a:p>
+        </p:txBody>
+      </p:sp>
+      <p:sp>
+        <p:nvSpPr>
+          <p:cNvPr id="7" name="TextBox 6">
+            <a:extLst>
+              <a:ext uri="{FF2B5EF4-FFF2-40B4-BE49-F238E27FC236}">
+                <a16:creationId xmlns:a16="http://schemas.microsoft.com/office/drawing/2014/main" id="{CD42D683-BF63-2941-121A-156D964D861A}"/>
+              </a:ext>
+            </a:extLst>
+          </p:cNvPr>
+          <p:cNvSpPr txBox="1"/>
+          <p:nvPr/>
+        </p:nvSpPr>
+        <p:spPr>
+          <a:xfrm>
+            <a:off x="11353800" y="5992297"/>
+            <a:ext cx="838200" cy="369332"/>
+          </a:xfrm>
+          <a:prstGeom prst="rect">
+            <a:avLst/>
+          </a:prstGeom>
+          <a:noFill/>
+        </p:spPr>
+        <p:txBody>
+          <a:bodyPr wrap="square" rtlCol="0">
+            <a:spAutoFit/>
+          </a:bodyPr>
+          <a:lstStyle/>
+          <a:p>
+            <a:r>
+              <a:rPr lang="ru-RU" dirty="0">
+                <a:latin typeface="Times New Roman" panose="02020603050405020304" pitchFamily="18" charset="0"/>
+                <a:cs typeface="Times New Roman" panose="02020603050405020304" pitchFamily="18" charset="0"/>
+              </a:rPr>
+              <a:t>11</a:t>
+            </a:r>
+          </a:p>
+        </p:txBody>
+      </p:sp>
+      <p:sp>
+        <p:nvSpPr>
+          <p:cNvPr id="5" name="Rectangle 2">
+            <a:extLst>
+              <a:ext uri="{FF2B5EF4-FFF2-40B4-BE49-F238E27FC236}">
+                <a16:creationId xmlns:a16="http://schemas.microsoft.com/office/drawing/2014/main" id="{52CC7CAA-12FD-62F1-D27C-F2E1805A1BA3}"/>
+              </a:ext>
+            </a:extLst>
+          </p:cNvPr>
+          <p:cNvSpPr>
+            <a:spLocks noChangeArrowheads="1"/>
+          </p:cNvSpPr>
+          <p:nvPr/>
+        </p:nvSpPr>
+        <p:spPr bwMode="auto">
+          <a:xfrm>
+            <a:off x="838200" y="1059367"/>
+            <a:ext cx="12192000" cy="457200"/>
+          </a:xfrm>
+          <a:prstGeom prst="rect">
+            <a:avLst/>
+          </a:prstGeom>
+          <a:noFill/>
+          <a:ln>
+            <a:noFill/>
+          </a:ln>
+          <a:effectLst/>
+          <a:extLst>
+            <a:ext uri="{909E8E84-426E-40DD-AFC4-6F175D3DCCD1}">
+              <a14:hiddenFill xmlns:a14="http://schemas.microsoft.com/office/drawing/2010/main">
+                <a:solidFill>
+                  <a:schemeClr val="accent1"/>
+                </a:solidFill>
+              </a14:hiddenFill>
+            </a:ext>
+            <a:ext uri="{91240B29-F687-4F45-9708-019B960494DF}">
+              <a14:hiddenLine xmlns:a14="http://schemas.microsoft.com/office/drawing/2010/main" w="9525">
+                <a:solidFill>
+                  <a:schemeClr val="tx1"/>
+                </a:solidFill>
+                <a:miter lim="800000"/>
+                <a:headEnd/>
+                <a:tailEnd/>
+              </a14:hiddenLine>
+            </a:ext>
+            <a:ext uri="{AF507438-7753-43E0-B8FC-AC1667EBCBE1}">
+              <a14:hiddenEffects xmlns:a14="http://schemas.microsoft.com/office/drawing/2010/main">
+                <a:effectLst>
+                  <a:outerShdw dist="35921" dir="2700000" algn="ctr" rotWithShape="0">
+                    <a:schemeClr val="bg2"/>
+                  </a:outerShdw>
+                </a:effectLst>
+              </a14:hiddenEffects>
+            </a:ext>
+          </a:extLst>
+        </p:spPr>
+        <p:txBody>
+          <a:bodyPr vert="horz" wrap="none" lIns="91440" tIns="45720" rIns="91440" bIns="45720" numCol="1" anchor="ctr" anchorCtr="0" compatLnSpc="1">
+            <a:prstTxWarp prst="textNoShape">
+              <a:avLst/>
+            </a:prstTxWarp>
+            <a:spAutoFit/>
+          </a:bodyPr>
+          <a:lstStyle/>
+          <a:p>
+            <a:endParaRPr lang="ru-RU"/>
+          </a:p>
+        </p:txBody>
+      </p:sp>
+      <p:pic>
+        <p:nvPicPr>
+          <p:cNvPr id="1025" name="Рисунок 3">
+            <a:extLst>
+              <a:ext uri="{FF2B5EF4-FFF2-40B4-BE49-F238E27FC236}">
+                <a16:creationId xmlns:a16="http://schemas.microsoft.com/office/drawing/2014/main" id="{D23CF6BA-8D66-03C9-EFF5-A94B9072022F}"/>
+              </a:ext>
+            </a:extLst>
+          </p:cNvPr>
+          <p:cNvPicPr>
+            <a:picLocks noChangeAspect="1" noChangeArrowheads="1"/>
+          </p:cNvPicPr>
+          <p:nvPr/>
+        </p:nvPicPr>
+        <p:blipFill>
+          <a:blip r:embed="rId2">
+            <a:extLst>
+              <a:ext uri="{28A0092B-C50C-407E-A947-70E740481C1C}">
+                <a14:useLocalDpi xmlns:a14="http://schemas.microsoft.com/office/drawing/2010/main" val="0"/>
+              </a:ext>
+            </a:extLst>
+          </a:blip>
+          <a:srcRect/>
+          <a:stretch>
+            <a:fillRect/>
+          </a:stretch>
+        </p:blipFill>
+        <p:spPr bwMode="auto">
+          <a:xfrm>
+            <a:off x="147435" y="1114742"/>
+            <a:ext cx="5529465" cy="4130849"/>
+          </a:xfrm>
+          <a:prstGeom prst="rect">
+            <a:avLst/>
+          </a:prstGeom>
+          <a:noFill/>
+          <a:extLst>
+            <a:ext uri="{909E8E84-426E-40DD-AFC4-6F175D3DCCD1}">
+              <a14:hiddenFill xmlns:a14="http://schemas.microsoft.com/office/drawing/2010/main">
+                <a:solidFill>
+                  <a:srgbClr val="FFFFFF"/>
+                </a:solidFill>
+              </a14:hiddenFill>
+            </a:ext>
+          </a:extLst>
+        </p:spPr>
+      </p:pic>
+      <p:sp>
+        <p:nvSpPr>
+          <p:cNvPr id="6" name="Rectangle 3">
+            <a:extLst>
+              <a:ext uri="{FF2B5EF4-FFF2-40B4-BE49-F238E27FC236}">
+                <a16:creationId xmlns:a16="http://schemas.microsoft.com/office/drawing/2014/main" id="{BF574BD0-4866-EB5A-C621-5369F1560966}"/>
+              </a:ext>
+            </a:extLst>
+          </p:cNvPr>
+          <p:cNvSpPr>
+            <a:spLocks noChangeArrowheads="1"/>
+          </p:cNvSpPr>
+          <p:nvPr/>
+        </p:nvSpPr>
+        <p:spPr bwMode="auto">
+          <a:xfrm>
+            <a:off x="1101147" y="5220038"/>
+            <a:ext cx="3622040" cy="523220"/>
+          </a:xfrm>
+          <a:prstGeom prst="rect">
+            <a:avLst/>
+          </a:prstGeom>
+          <a:noFill/>
+          <a:ln>
+            <a:noFill/>
+          </a:ln>
+          <a:effectLst/>
+          <a:extLst>
+            <a:ext uri="{909E8E84-426E-40DD-AFC4-6F175D3DCCD1}">
+              <a14:hiddenFill xmlns:a14="http://schemas.microsoft.com/office/drawing/2010/main">
+                <a:solidFill>
+                  <a:schemeClr val="accent1"/>
+                </a:solidFill>
+              </a14:hiddenFill>
+            </a:ext>
+            <a:ext uri="{91240B29-F687-4F45-9708-019B960494DF}">
+              <a14:hiddenLine xmlns:a14="http://schemas.microsoft.com/office/drawing/2010/main" w="9525">
+                <a:solidFill>
+                  <a:schemeClr val="tx1"/>
+                </a:solidFill>
+                <a:miter lim="800000"/>
+                <a:headEnd/>
+                <a:tailEnd/>
+              </a14:hiddenLine>
+            </a:ext>
+            <a:ext uri="{AF507438-7753-43E0-B8FC-AC1667EBCBE1}">
+              <a14:hiddenEffects xmlns:a14="http://schemas.microsoft.com/office/drawing/2010/main">
+                <a:effectLst>
+                  <a:outerShdw dist="35921" dir="2700000" algn="ctr" rotWithShape="0">
+                    <a:schemeClr val="bg2"/>
+                  </a:outerShdw>
+                </a:effectLst>
+              </a14:hiddenEffects>
+            </a:ext>
+          </a:extLst>
+        </p:spPr>
+        <p:txBody>
+          <a:bodyPr vert="horz" wrap="square" lIns="91440" tIns="45720" rIns="91440" bIns="45720" numCol="1" anchor="ctr" anchorCtr="0" compatLnSpc="1">
+            <a:prstTxWarp prst="textNoShape">
+              <a:avLst/>
+            </a:prstTxWarp>
+            <a:spAutoFit/>
+          </a:bodyPr>
+          <a:lstStyle/>
+          <a:p>
+            <a:pPr marL="0" marR="0" lvl="0" indent="0" algn="ctr" defTabSz="914400" rtl="0" eaLnBrk="0" fontAlgn="base" latinLnBrk="0" hangingPunct="0">
+              <a:lnSpc>
+                <a:spcPct val="100000"/>
+              </a:lnSpc>
+              <a:spcBef>
+                <a:spcPct val="0"/>
+              </a:spcBef>
+              <a:spcAft>
+                <a:spcPct val="0"/>
+              </a:spcAft>
+              <a:buClrTx/>
+              <a:buSzTx/>
+              <a:buFontTx/>
+              <a:buNone/>
+              <a:tabLst/>
+            </a:pPr>
+            <a:r>
+              <a:rPr kumimoji="0" lang="ru-RU" altLang="ru-RU" sz="1400" b="1" i="0" u="none" strike="noStrike" cap="none" normalizeH="0" baseline="0" dirty="0">
+                <a:ln>
+                  <a:noFill/>
+                </a:ln>
+                <a:solidFill>
+                  <a:schemeClr val="tx1"/>
+                </a:solidFill>
+                <a:effectLst/>
+                <a:latin typeface="Times New Roman" panose="02020603050405020304" pitchFamily="18" charset="0"/>
+                <a:ea typeface="SimSun" panose="02010600030101010101" pitchFamily="2" charset="-122"/>
+                <a:cs typeface="Times New Roman" panose="02020603050405020304" pitchFamily="18" charset="0"/>
+              </a:rPr>
+              <a:t>Р</a:t>
+            </a:r>
+            <a:r>
+              <a:rPr kumimoji="0" lang="ru-RU" altLang="ru-RU" sz="1400" b="1" i="0" u="none" strike="noStrike" cap="none" normalizeH="0" baseline="0" dirty="0" bmk="">
+                <a:ln>
+                  <a:noFill/>
+                </a:ln>
+                <a:solidFill>
+                  <a:schemeClr val="tx1"/>
+                </a:solidFill>
+                <a:effectLst/>
+                <a:latin typeface="Times New Roman" panose="02020603050405020304" pitchFamily="18" charset="0"/>
+                <a:ea typeface="SimSun" panose="02010600030101010101" pitchFamily="2" charset="-122"/>
+                <a:cs typeface="Times New Roman" panose="02020603050405020304" pitchFamily="18" charset="0"/>
+              </a:rPr>
+              <a:t>исунок 4</a:t>
+            </a:r>
+            <a:r>
+              <a:rPr kumimoji="0" lang="ru-RU" altLang="ru-RU" sz="1400" b="1" i="0" u="none" strike="noStrike" cap="none" normalizeH="0" baseline="0" dirty="0" bmk="_Ref226977492">
+                <a:ln>
+                  <a:noFill/>
+                </a:ln>
+                <a:solidFill>
+                  <a:schemeClr val="tx1"/>
+                </a:solidFill>
+                <a:effectLst/>
+                <a:latin typeface="Times New Roman" panose="02020603050405020304" pitchFamily="18" charset="0"/>
+                <a:ea typeface="SimSun" panose="02010600030101010101" pitchFamily="2" charset="-122"/>
+                <a:cs typeface="Times New Roman" panose="02020603050405020304" pitchFamily="18" charset="0"/>
+              </a:rPr>
+              <a:t> — Распределение трансферных сумм</a:t>
+            </a:r>
+            <a:endParaRPr kumimoji="0" lang="ru-RU" altLang="ru-RU" sz="2000" b="0" i="0" u="none" strike="noStrike" cap="none" normalizeH="0" baseline="0" dirty="0">
+              <a:ln>
+                <a:noFill/>
+              </a:ln>
+              <a:solidFill>
+                <a:schemeClr val="tx1"/>
+              </a:solidFill>
+              <a:effectLst/>
+              <a:latin typeface="Arial" panose="020B0604020202020204" pitchFamily="34" charset="0"/>
+            </a:endParaRPr>
+          </a:p>
+        </p:txBody>
+      </p:sp>
+      <p:sp>
+        <p:nvSpPr>
+          <p:cNvPr id="8" name="Rectangle 5">
+            <a:extLst>
+              <a:ext uri="{FF2B5EF4-FFF2-40B4-BE49-F238E27FC236}">
+                <a16:creationId xmlns:a16="http://schemas.microsoft.com/office/drawing/2014/main" id="{139E837B-36A5-F873-3B3E-9EE46B63BC14}"/>
+              </a:ext>
+            </a:extLst>
+          </p:cNvPr>
+          <p:cNvSpPr>
+            <a:spLocks noChangeArrowheads="1"/>
+          </p:cNvSpPr>
+          <p:nvPr/>
+        </p:nvSpPr>
+        <p:spPr bwMode="auto">
+          <a:xfrm>
+            <a:off x="5676900" y="657542"/>
+            <a:ext cx="12192000" cy="457200"/>
+          </a:xfrm>
+          <a:prstGeom prst="rect">
+            <a:avLst/>
+          </a:prstGeom>
+          <a:noFill/>
+          <a:ln>
+            <a:noFill/>
+          </a:ln>
+          <a:effectLst/>
+          <a:extLst>
+            <a:ext uri="{909E8E84-426E-40DD-AFC4-6F175D3DCCD1}">
+              <a14:hiddenFill xmlns:a14="http://schemas.microsoft.com/office/drawing/2010/main">
+                <a:solidFill>
+                  <a:schemeClr val="accent1"/>
+                </a:solidFill>
+              </a14:hiddenFill>
+            </a:ext>
+            <a:ext uri="{91240B29-F687-4F45-9708-019B960494DF}">
+              <a14:hiddenLine xmlns:a14="http://schemas.microsoft.com/office/drawing/2010/main" w="9525">
+                <a:solidFill>
+                  <a:schemeClr val="tx1"/>
+                </a:solidFill>
+                <a:miter lim="800000"/>
+                <a:headEnd/>
+                <a:tailEnd/>
+              </a14:hiddenLine>
+            </a:ext>
+            <a:ext uri="{AF507438-7753-43E0-B8FC-AC1667EBCBE1}">
+              <a14:hiddenEffects xmlns:a14="http://schemas.microsoft.com/office/drawing/2010/main">
+                <a:effectLst>
+                  <a:outerShdw dist="35921" dir="2700000" algn="ctr" rotWithShape="0">
+                    <a:schemeClr val="bg2"/>
+                  </a:outerShdw>
+                </a:effectLst>
+              </a14:hiddenEffects>
+            </a:ext>
+          </a:extLst>
+        </p:spPr>
+        <p:txBody>
+          <a:bodyPr vert="horz" wrap="none" lIns="91440" tIns="45720" rIns="91440" bIns="45720" numCol="1" anchor="ctr" anchorCtr="0" compatLnSpc="1">
+            <a:prstTxWarp prst="textNoShape">
+              <a:avLst/>
+            </a:prstTxWarp>
+            <a:spAutoFit/>
+          </a:bodyPr>
+          <a:lstStyle/>
+          <a:p>
+            <a:endParaRPr lang="ru-RU"/>
+          </a:p>
+        </p:txBody>
+      </p:sp>
+      <p:pic>
+        <p:nvPicPr>
+          <p:cNvPr id="1028" name="Рисунок 2">
+            <a:extLst>
+              <a:ext uri="{FF2B5EF4-FFF2-40B4-BE49-F238E27FC236}">
+                <a16:creationId xmlns:a16="http://schemas.microsoft.com/office/drawing/2014/main" id="{55EA6BE4-136C-82FE-BD96-795F12006775}"/>
+              </a:ext>
+            </a:extLst>
+          </p:cNvPr>
+          <p:cNvPicPr>
+            <a:picLocks noChangeAspect="1" noChangeArrowheads="1"/>
+          </p:cNvPicPr>
+          <p:nvPr/>
+        </p:nvPicPr>
+        <p:blipFill>
+          <a:blip r:embed="rId3">
+            <a:extLst>
+              <a:ext uri="{28A0092B-C50C-407E-A947-70E740481C1C}">
+                <a14:useLocalDpi xmlns:a14="http://schemas.microsoft.com/office/drawing/2010/main" val="0"/>
+              </a:ext>
+            </a:extLst>
+          </a:blip>
+          <a:srcRect/>
+          <a:stretch>
+            <a:fillRect/>
+          </a:stretch>
+        </p:blipFill>
+        <p:spPr bwMode="auto">
+          <a:xfrm>
+            <a:off x="5715889" y="1186260"/>
+            <a:ext cx="6481394" cy="3864711"/>
+          </a:xfrm>
+          <a:prstGeom prst="rect">
+            <a:avLst/>
+          </a:prstGeom>
+          <a:noFill/>
+          <a:extLst>
+            <a:ext uri="{909E8E84-426E-40DD-AFC4-6F175D3DCCD1}">
+              <a14:hiddenFill xmlns:a14="http://schemas.microsoft.com/office/drawing/2010/main">
+                <a:solidFill>
+                  <a:srgbClr val="FFFFFF"/>
+                </a:solidFill>
+              </a14:hiddenFill>
+            </a:ext>
+          </a:extLst>
+        </p:spPr>
+      </p:pic>
+      <p:sp>
+        <p:nvSpPr>
+          <p:cNvPr id="9" name="Rectangle 6">
+            <a:extLst>
+              <a:ext uri="{FF2B5EF4-FFF2-40B4-BE49-F238E27FC236}">
+                <a16:creationId xmlns:a16="http://schemas.microsoft.com/office/drawing/2014/main" id="{6770A801-0DE1-2AEC-36F4-9488E4B5EB93}"/>
+              </a:ext>
+            </a:extLst>
+          </p:cNvPr>
+          <p:cNvSpPr>
+            <a:spLocks noChangeArrowheads="1"/>
+          </p:cNvSpPr>
+          <p:nvPr/>
+        </p:nvSpPr>
+        <p:spPr bwMode="auto">
+          <a:xfrm>
+            <a:off x="7091778" y="5050971"/>
+            <a:ext cx="3729615" cy="523220"/>
+          </a:xfrm>
+          <a:prstGeom prst="rect">
+            <a:avLst/>
+          </a:prstGeom>
+          <a:noFill/>
+          <a:ln>
+            <a:noFill/>
+          </a:ln>
+          <a:effectLst/>
+          <a:extLst>
+            <a:ext uri="{909E8E84-426E-40DD-AFC4-6F175D3DCCD1}">
+              <a14:hiddenFill xmlns:a14="http://schemas.microsoft.com/office/drawing/2010/main">
+                <a:solidFill>
+                  <a:schemeClr val="accent1"/>
+                </a:solidFill>
+              </a14:hiddenFill>
+            </a:ext>
+            <a:ext uri="{91240B29-F687-4F45-9708-019B960494DF}">
+              <a14:hiddenLine xmlns:a14="http://schemas.microsoft.com/office/drawing/2010/main" w="9525">
+                <a:solidFill>
+                  <a:schemeClr val="tx1"/>
+                </a:solidFill>
+                <a:miter lim="800000"/>
+                <a:headEnd/>
+                <a:tailEnd/>
+              </a14:hiddenLine>
+            </a:ext>
+            <a:ext uri="{AF507438-7753-43E0-B8FC-AC1667EBCBE1}">
+              <a14:hiddenEffects xmlns:a14="http://schemas.microsoft.com/office/drawing/2010/main">
+                <a:effectLst>
+                  <a:outerShdw dist="35921" dir="2700000" algn="ctr" rotWithShape="0">
+                    <a:schemeClr val="bg2"/>
+                  </a:outerShdw>
+                </a:effectLst>
+              </a14:hiddenEffects>
+            </a:ext>
+          </a:extLst>
+        </p:spPr>
+        <p:txBody>
+          <a:bodyPr vert="horz" wrap="square" lIns="91440" tIns="45720" rIns="91440" bIns="45720" numCol="1" anchor="ctr" anchorCtr="0" compatLnSpc="1">
+            <a:prstTxWarp prst="textNoShape">
+              <a:avLst/>
+            </a:prstTxWarp>
+            <a:spAutoFit/>
+          </a:bodyPr>
+          <a:lstStyle/>
+          <a:p>
+            <a:pPr marL="0" marR="0" lvl="0" indent="0" algn="ctr" defTabSz="914400" rtl="0" eaLnBrk="0" fontAlgn="base" latinLnBrk="0" hangingPunct="0">
+              <a:lnSpc>
+                <a:spcPct val="100000"/>
+              </a:lnSpc>
+              <a:spcBef>
+                <a:spcPct val="0"/>
+              </a:spcBef>
+              <a:spcAft>
+                <a:spcPct val="0"/>
+              </a:spcAft>
+              <a:buClrTx/>
+              <a:buSzTx/>
+              <a:buFontTx/>
+              <a:buNone/>
+              <a:tabLst/>
+            </a:pPr>
+            <a:r>
+              <a:rPr kumimoji="0" lang="ru-RU" altLang="ru-RU" sz="1400" b="1" i="0" u="none" strike="noStrike" cap="none" normalizeH="0" baseline="0" dirty="0">
+                <a:ln>
+                  <a:noFill/>
+                </a:ln>
+                <a:solidFill>
+                  <a:schemeClr val="tx1"/>
+                </a:solidFill>
+                <a:effectLst/>
+                <a:latin typeface="Times New Roman" panose="02020603050405020304" pitchFamily="18" charset="0"/>
+                <a:ea typeface="SimSun" panose="02010600030101010101" pitchFamily="2" charset="-122"/>
+                <a:cs typeface="Times New Roman" panose="02020603050405020304" pitchFamily="18" charset="0"/>
+              </a:rPr>
+              <a:t>Р</a:t>
+            </a:r>
+            <a:r>
+              <a:rPr kumimoji="0" lang="ru-RU" altLang="ru-RU" sz="1400" b="1" i="0" u="none" strike="noStrike" cap="none" normalizeH="0" baseline="0" dirty="0" bmk="">
+                <a:ln>
+                  <a:noFill/>
+                </a:ln>
+                <a:solidFill>
+                  <a:schemeClr val="tx1"/>
+                </a:solidFill>
+                <a:effectLst/>
+                <a:latin typeface="Times New Roman" panose="02020603050405020304" pitchFamily="18" charset="0"/>
+                <a:ea typeface="SimSun" panose="02010600030101010101" pitchFamily="2" charset="-122"/>
+                <a:cs typeface="Times New Roman" panose="02020603050405020304" pitchFamily="18" charset="0"/>
+              </a:rPr>
+              <a:t>исунок 5</a:t>
+            </a:r>
+            <a:r>
+              <a:rPr kumimoji="0" lang="ru-RU" altLang="ru-RU" sz="1400" b="1" i="0" u="none" strike="noStrike" cap="none" normalizeH="0" baseline="0" dirty="0" bmk="_Ref226977505">
+                <a:ln>
+                  <a:noFill/>
+                </a:ln>
+                <a:solidFill>
+                  <a:schemeClr val="tx1"/>
+                </a:solidFill>
+                <a:effectLst/>
+                <a:latin typeface="Times New Roman" panose="02020603050405020304" pitchFamily="18" charset="0"/>
+                <a:ea typeface="SimSun" panose="02010600030101010101" pitchFamily="2" charset="-122"/>
+                <a:cs typeface="Times New Roman" panose="02020603050405020304" pitchFamily="18" charset="0"/>
+              </a:rPr>
+              <a:t> — Распределение трансферных сумм после логарифмирования</a:t>
+            </a:r>
+            <a:endParaRPr kumimoji="0" lang="ru-RU" altLang="ru-RU" sz="2000" b="0" i="0" u="none" strike="noStrike" cap="none" normalizeH="0" baseline="0" dirty="0">
+              <a:ln>
+                <a:noFill/>
+              </a:ln>
+              <a:solidFill>
+                <a:schemeClr val="tx1"/>
+              </a:solidFill>
+              <a:effectLst/>
+              <a:latin typeface="Arial" panose="020B0604020202020204" pitchFamily="34" charset="0"/>
+            </a:endParaRPr>
+          </a:p>
+        </p:txBody>
+      </p:sp>
+    </p:spTree>
+    <p:extLst>
+      <p:ext uri="{BB962C8B-B14F-4D97-AF65-F5344CB8AC3E}">
+        <p14:creationId xmlns:p14="http://schemas.microsoft.com/office/powerpoint/2010/main" val="316138124"/>
       </p:ext>
     </p:extLst>
   </p:cSld>
@@ -6286,8 +6066,8 @@
           </a:p>
         </p:txBody>
       </p:sp>
-      <mc:AlternateContent xmlns:mc="http://schemas.openxmlformats.org/markup-compatibility/2006">
-        <mc:Choice xmlns:a14="http://schemas.microsoft.com/office/drawing/2010/main" Requires="a14">
+      <mc:AlternateContent xmlns:mc="http://schemas.openxmlformats.org/markup-compatibility/2006" xmlns:a14="http://schemas.microsoft.com/office/drawing/2010/main">
+        <mc:Choice Requires="a14">
           <p:graphicFrame>
             <p:nvGraphicFramePr>
               <p:cNvPr id="8" name="Таблица 7">
@@ -6765,7 +6545,7 @@
             </a:graphic>
           </p:graphicFrame>
         </mc:Choice>
-        <mc:Fallback>
+        <mc:Fallback xmlns="">
           <p:graphicFrame>
             <p:nvGraphicFramePr>
               <p:cNvPr id="8" name="Таблица 7">
@@ -7185,10 +6965,10 @@
       </mc:AlternateContent>
       <p:pic>
         <p:nvPicPr>
-          <p:cNvPr id="3" name="Рисунок 2">
-            <a:extLst>
-              <a:ext uri="{FF2B5EF4-FFF2-40B4-BE49-F238E27FC236}">
-                <a16:creationId xmlns:a16="http://schemas.microsoft.com/office/drawing/2014/main" id="{4353136E-EEC4-B704-EBC5-648A8A0EDDB5}"/>
+          <p:cNvPr id="10" name="Рисунок 9">
+            <a:extLst>
+              <a:ext uri="{FF2B5EF4-FFF2-40B4-BE49-F238E27FC236}">
+                <a16:creationId xmlns:a16="http://schemas.microsoft.com/office/drawing/2014/main" id="{C00C8136-13F5-9B2C-42E3-DFDE04C43CF2}"/>
               </a:ext>
             </a:extLst>
           </p:cNvPr>
@@ -7205,8 +6985,8 @@
         </p:blipFill>
         <p:spPr>
           <a:xfrm>
-            <a:off x="3965985" y="3605321"/>
-            <a:ext cx="4259937" cy="2887552"/>
+            <a:off x="3874724" y="3440120"/>
+            <a:ext cx="4442460" cy="3092450"/>
           </a:xfrm>
           <a:prstGeom prst="rect">
             <a:avLst/>
@@ -7379,8 +7159,8 @@
           </a:p>
         </p:txBody>
       </p:sp>
-      <mc:AlternateContent xmlns:mc="http://schemas.openxmlformats.org/markup-compatibility/2006">
-        <mc:Choice xmlns:a14="http://schemas.microsoft.com/office/drawing/2010/main" Requires="a14">
+      <mc:AlternateContent xmlns:mc="http://schemas.openxmlformats.org/markup-compatibility/2006" xmlns:a14="http://schemas.microsoft.com/office/drawing/2010/main">
+        <mc:Choice Requires="a14">
           <p:sp>
             <p:nvSpPr>
               <p:cNvPr id="11" name="TextBox 10">
@@ -7496,7 +7276,7 @@
             </p:txBody>
           </p:sp>
         </mc:Choice>
-        <mc:Fallback>
+        <mc:Fallback xmlns="">
           <p:sp>
             <p:nvSpPr>
               <p:cNvPr id="11" name="TextBox 10">
@@ -9892,8 +9672,8 @@
           </a:p>
         </p:txBody>
       </p:sp>
-      <mc:AlternateContent xmlns:mc="http://schemas.openxmlformats.org/markup-compatibility/2006">
-        <mc:Choice xmlns:a14="http://schemas.microsoft.com/office/drawing/2010/main" Requires="a14">
+      <mc:AlternateContent xmlns:mc="http://schemas.openxmlformats.org/markup-compatibility/2006" xmlns:a14="http://schemas.microsoft.com/office/drawing/2010/main">
+        <mc:Choice Requires="a14">
           <p:sp>
             <p:nvSpPr>
               <p:cNvPr id="3" name="Объект 2">
@@ -10163,7 +9943,7 @@
             </p:txBody>
           </p:sp>
         </mc:Choice>
-        <mc:Fallback>
+        <mc:Fallback xmlns="">
           <p:sp>
             <p:nvSpPr>
               <p:cNvPr id="3" name="Объект 2">
@@ -10792,7 +10572,7 @@
                 <a:latin typeface="Times New Roman" panose="02020603050405020304" pitchFamily="18" charset="0"/>
                 <a:cs typeface="Times New Roman" panose="02020603050405020304" pitchFamily="18" charset="0"/>
               </a:rPr>
-              <a:t>исследования  — процесс формирования стоимости игроков на рынке трансферов.</a:t>
+              <a:t>исследования — процесс формирования стоимости игроков на рынке трансферов.</a:t>
             </a:r>
           </a:p>
         </p:txBody>
@@ -10979,8 +10759,8 @@
         </p:nvSpPr>
         <p:spPr>
           <a:xfrm>
-            <a:off x="660452" y="1160903"/>
-            <a:ext cx="10657798" cy="3338330"/>
+            <a:off x="624903" y="1384837"/>
+            <a:ext cx="10657798" cy="3607041"/>
           </a:xfrm>
           <a:prstGeom prst="flowChartAlternateProcess">
             <a:avLst/>
@@ -11016,55 +10796,6 @@
       </p:sp>
       <p:sp>
         <p:nvSpPr>
-          <p:cNvPr id="12" name="Блок-схема: альтернативный процесс 11">
-            <a:extLst>
-              <a:ext uri="{FF2B5EF4-FFF2-40B4-BE49-F238E27FC236}">
-                <a16:creationId xmlns:a16="http://schemas.microsoft.com/office/drawing/2014/main" id="{302CE984-EEC4-361B-E64B-91AFBE94092E}"/>
-              </a:ext>
-            </a:extLst>
-          </p:cNvPr>
-          <p:cNvSpPr/>
-          <p:nvPr/>
-        </p:nvSpPr>
-        <p:spPr>
-          <a:xfrm>
-            <a:off x="696002" y="4645601"/>
-            <a:ext cx="10657798" cy="1569660"/>
-          </a:xfrm>
-          <a:prstGeom prst="flowChartAlternateProcess">
-            <a:avLst/>
-          </a:prstGeom>
-          <a:solidFill>
-            <a:schemeClr val="accent1"/>
-          </a:solidFill>
-        </p:spPr>
-        <p:style>
-          <a:lnRef idx="2">
-            <a:schemeClr val="accent2">
-              <a:shade val="15000"/>
-            </a:schemeClr>
-          </a:lnRef>
-          <a:fillRef idx="1">
-            <a:schemeClr val="accent2"/>
-          </a:fillRef>
-          <a:effectRef idx="0">
-            <a:schemeClr val="accent2"/>
-          </a:effectRef>
-          <a:fontRef idx="minor">
-            <a:schemeClr val="lt1"/>
-          </a:fontRef>
-        </p:style>
-        <p:txBody>
-          <a:bodyPr rtlCol="0" anchor="ctr"/>
-          <a:lstStyle/>
-          <a:p>
-            <a:pPr algn="ctr"/>
-            <a:endParaRPr lang="ru-RU"/>
-          </a:p>
-        </p:txBody>
-      </p:sp>
-      <p:sp>
-        <p:nvSpPr>
           <p:cNvPr id="2" name="Заголовок 1">
             <a:extLst>
               <a:ext uri="{FF2B5EF4-FFF2-40B4-BE49-F238E27FC236}">
@@ -11207,7 +10938,7 @@
         </p:nvSpPr>
         <p:spPr>
           <a:xfrm>
-            <a:off x="873750" y="1251493"/>
+            <a:off x="909299" y="1598613"/>
             <a:ext cx="9565650" cy="3046988"/>
           </a:xfrm>
           <a:prstGeom prst="rect">
@@ -11370,494 +11101,6 @@
           </a:p>
         </p:txBody>
       </p:sp>
-      <mc:AlternateContent xmlns:mc="http://schemas.openxmlformats.org/markup-compatibility/2006">
-        <mc:Choice xmlns:a14="http://schemas.microsoft.com/office/drawing/2010/main" Requires="a14">
-          <p:sp>
-            <p:nvSpPr>
-              <p:cNvPr id="10" name="TextBox 9">
-                <a:extLst>
-                  <a:ext uri="{FF2B5EF4-FFF2-40B4-BE49-F238E27FC236}">
-                    <a16:creationId xmlns:a16="http://schemas.microsoft.com/office/drawing/2014/main" id="{00457E9D-72A2-0FEA-021B-D8D2126E7731}"/>
-                  </a:ext>
-                </a:extLst>
-              </p:cNvPr>
-              <p:cNvSpPr txBox="1"/>
-              <p:nvPr/>
-            </p:nvSpPr>
-            <p:spPr>
-              <a:xfrm>
-                <a:off x="873750" y="4645601"/>
-                <a:ext cx="9746625" cy="1569660"/>
-              </a:xfrm>
-              <a:prstGeom prst="rect">
-                <a:avLst/>
-              </a:prstGeom>
-              <a:noFill/>
-            </p:spPr>
-            <p:txBody>
-              <a:bodyPr wrap="square">
-                <a:spAutoFit/>
-              </a:bodyPr>
-              <a:lstStyle/>
-              <a:p>
-                <a:pPr marL="0" indent="0">
-                  <a:buNone/>
-                </a:pPr>
-                <a:r>
-                  <a:rPr lang="ru-RU" sz="2400" b="0" dirty="0">
-                    <a:solidFill>
-                      <a:schemeClr val="bg1"/>
-                    </a:solidFill>
-                    <a:latin typeface="Times New Roman" panose="02020603050405020304" pitchFamily="18" charset="0"/>
-                    <a:ea typeface="Cambria Math" panose="02040503050406030204" pitchFamily="18" charset="0"/>
-                    <a:cs typeface="Times New Roman" panose="02020603050405020304" pitchFamily="18" charset="0"/>
-                  </a:rPr>
-                  <a:t>Критерии успешности</a:t>
-                </a:r>
-                <a:r>
-                  <a:rPr lang="ru-RU" sz="2400" dirty="0">
-                    <a:solidFill>
-                      <a:schemeClr val="bg1"/>
-                    </a:solidFill>
-                    <a:latin typeface="Times New Roman" panose="02020603050405020304" pitchFamily="18" charset="0"/>
-                    <a:ea typeface="Cambria Math" panose="02040503050406030204" pitchFamily="18" charset="0"/>
-                    <a:cs typeface="Times New Roman" panose="02020603050405020304" pitchFamily="18" charset="0"/>
-                  </a:rPr>
-                  <a:t>: </a:t>
-                </a:r>
-              </a:p>
-              <a:p>
-                <a:pPr indent="447675">
-                  <a:buFont typeface="Arial" panose="020B0604020202020204" pitchFamily="34" charset="0"/>
-                  <a:buChar char="•"/>
-                </a:pPr>
-                <a14:m>
-                  <m:oMath xmlns:m="http://schemas.openxmlformats.org/officeDocument/2006/math">
-                    <m:r>
-                      <a:rPr lang="en-US" sz="2400" i="1">
-                        <a:solidFill>
-                          <a:schemeClr val="bg1"/>
-                        </a:solidFill>
-                        <a:latin typeface="Cambria Math" panose="02040503050406030204" pitchFamily="18" charset="0"/>
-                        <a:ea typeface="Cambria Math" panose="02040503050406030204" pitchFamily="18" charset="0"/>
-                        <a:cs typeface="Times New Roman" panose="02020603050405020304" pitchFamily="18" charset="0"/>
-                      </a:rPr>
-                      <m:t>𝑀𝐴𝐸</m:t>
-                    </m:r>
-                    <m:r>
-                      <a:rPr lang="ru-RU" sz="2400" b="0" i="1" smtClean="0">
-                        <a:solidFill>
-                          <a:schemeClr val="bg1"/>
-                        </a:solidFill>
-                        <a:latin typeface="Cambria Math" panose="02040503050406030204" pitchFamily="18" charset="0"/>
-                        <a:ea typeface="Cambria Math" panose="02040503050406030204" pitchFamily="18" charset="0"/>
-                        <a:cs typeface="Times New Roman" panose="02020603050405020304" pitchFamily="18" charset="0"/>
-                      </a:rPr>
-                      <m:t> </m:t>
-                    </m:r>
-                    <m:r>
-                      <a:rPr lang="ru-RU" sz="2400" i="1">
-                        <a:solidFill>
-                          <a:schemeClr val="bg1"/>
-                        </a:solidFill>
-                        <a:latin typeface="Cambria Math" panose="02040503050406030204" pitchFamily="18" charset="0"/>
-                        <a:ea typeface="Cambria Math" panose="02040503050406030204" pitchFamily="18" charset="0"/>
-                        <a:cs typeface="Times New Roman" panose="02020603050405020304" pitchFamily="18" charset="0"/>
-                      </a:rPr>
-                      <m:t>(</m:t>
-                    </m:r>
-                    <m:r>
-                      <m:rPr>
-                        <m:nor/>
-                      </m:rPr>
-                      <a:rPr lang="ru-RU" sz="2400" dirty="0">
-                        <a:solidFill>
-                          <a:schemeClr val="bg1"/>
-                        </a:solidFill>
-                        <a:latin typeface="Times New Roman" panose="02020603050405020304" pitchFamily="18" charset="0"/>
-                        <a:cs typeface="Times New Roman" panose="02020603050405020304" pitchFamily="18" charset="0"/>
-                      </a:rPr>
-                      <m:t>средняя абсолютная ошибка</m:t>
-                    </m:r>
-                    <m:r>
-                      <a:rPr lang="ru-RU" sz="2400" i="1">
-                        <a:solidFill>
-                          <a:schemeClr val="bg1"/>
-                        </a:solidFill>
-                        <a:latin typeface="Cambria Math" panose="02040503050406030204" pitchFamily="18" charset="0"/>
-                        <a:ea typeface="Cambria Math" panose="02040503050406030204" pitchFamily="18" charset="0"/>
-                        <a:cs typeface="Times New Roman" panose="02020603050405020304" pitchFamily="18" charset="0"/>
-                      </a:rPr>
-                      <m:t>)</m:t>
-                    </m:r>
-                  </m:oMath>
-                </a14:m>
-                <a:r>
-                  <a:rPr lang="ru-RU" sz="2400" dirty="0">
-                    <a:solidFill>
-                      <a:schemeClr val="bg1"/>
-                    </a:solidFill>
-                    <a:latin typeface="Times New Roman" panose="02020603050405020304" pitchFamily="18" charset="0"/>
-                    <a:ea typeface="Cambria Math" panose="02040503050406030204" pitchFamily="18" charset="0"/>
-                    <a:cs typeface="Times New Roman" panose="02020603050405020304" pitchFamily="18" charset="0"/>
-                  </a:rPr>
-                  <a:t> </a:t>
-                </a:r>
-                <a14:m>
-                  <m:oMath xmlns:m="http://schemas.openxmlformats.org/officeDocument/2006/math">
-                    <m:r>
-                      <a:rPr lang="en-US" sz="2400" i="1">
-                        <a:solidFill>
-                          <a:schemeClr val="bg1"/>
-                        </a:solidFill>
-                        <a:latin typeface="Cambria Math" panose="02040503050406030204" pitchFamily="18" charset="0"/>
-                        <a:ea typeface="Cambria Math" panose="02040503050406030204" pitchFamily="18" charset="0"/>
-                        <a:cs typeface="Times New Roman" panose="02020603050405020304" pitchFamily="18" charset="0"/>
-                      </a:rPr>
-                      <m:t>≈</m:t>
-                    </m:r>
-                    <m:r>
-                      <a:rPr lang="ru-RU" sz="2400" i="1">
-                        <a:solidFill>
-                          <a:schemeClr val="bg1"/>
-                        </a:solidFill>
-                        <a:latin typeface="Cambria Math" panose="02040503050406030204" pitchFamily="18" charset="0"/>
-                        <a:ea typeface="Cambria Math" panose="02040503050406030204" pitchFamily="18" charset="0"/>
-                        <a:cs typeface="Times New Roman" panose="02020603050405020304" pitchFamily="18" charset="0"/>
-                      </a:rPr>
-                      <m:t>3,0 млн</m:t>
-                    </m:r>
-                  </m:oMath>
-                </a14:m>
-                <a:r>
-                  <a:rPr lang="ru-RU" sz="2400" dirty="0">
-                    <a:solidFill>
-                      <a:schemeClr val="bg1"/>
-                    </a:solidFill>
-                    <a:latin typeface="Times New Roman" panose="02020603050405020304" pitchFamily="18" charset="0"/>
-                    <a:ea typeface="Cambria Math" panose="02040503050406030204" pitchFamily="18" charset="0"/>
-                    <a:cs typeface="Times New Roman" panose="02020603050405020304" pitchFamily="18" charset="0"/>
-                  </a:rPr>
-                  <a:t> евро;</a:t>
-                </a:r>
-                <a:r>
-                  <a:rPr lang="en-US" sz="2400" dirty="0">
-                    <a:solidFill>
-                      <a:schemeClr val="bg1"/>
-                    </a:solidFill>
-                    <a:latin typeface="Times New Roman" panose="02020603050405020304" pitchFamily="18" charset="0"/>
-                    <a:ea typeface="Cambria Math" panose="02040503050406030204" pitchFamily="18" charset="0"/>
-                    <a:cs typeface="Times New Roman" panose="02020603050405020304" pitchFamily="18" charset="0"/>
-                  </a:rPr>
-                  <a:t> </a:t>
-                </a:r>
-                <a:endParaRPr lang="ru-RU" sz="2400" b="0" i="1" dirty="0">
-                  <a:solidFill>
-                    <a:schemeClr val="bg1"/>
-                  </a:solidFill>
-                  <a:latin typeface="Cambria Math" panose="02040503050406030204" pitchFamily="18" charset="0"/>
-                  <a:ea typeface="Cambria Math" panose="02040503050406030204" pitchFamily="18" charset="0"/>
-                  <a:cs typeface="Times New Roman" panose="02020603050405020304" pitchFamily="18" charset="0"/>
-                </a:endParaRPr>
-              </a:p>
-              <a:p>
-                <a:pPr indent="447675">
-                  <a:buFont typeface="Arial" panose="020B0604020202020204" pitchFamily="34" charset="0"/>
-                  <a:buChar char="•"/>
-                </a:pPr>
-                <a14:m>
-                  <m:oMath xmlns:m="http://schemas.openxmlformats.org/officeDocument/2006/math">
-                    <m:sSup>
-                      <m:sSupPr>
-                        <m:ctrlPr>
-                          <a:rPr lang="en-US" sz="2400" b="0" i="1" smtClean="0">
-                            <a:solidFill>
-                              <a:schemeClr val="bg1"/>
-                            </a:solidFill>
-                            <a:latin typeface="Cambria Math" panose="02040503050406030204" pitchFamily="18" charset="0"/>
-                            <a:ea typeface="Cambria Math" panose="02040503050406030204" pitchFamily="18" charset="0"/>
-                            <a:cs typeface="Times New Roman" panose="02020603050405020304" pitchFamily="18" charset="0"/>
-                          </a:rPr>
-                        </m:ctrlPr>
-                      </m:sSupPr>
-                      <m:e>
-                        <m:r>
-                          <a:rPr lang="en-US" sz="2400" b="0" i="1" smtClean="0">
-                            <a:solidFill>
-                              <a:schemeClr val="bg1"/>
-                            </a:solidFill>
-                            <a:latin typeface="Cambria Math" panose="02040503050406030204" pitchFamily="18" charset="0"/>
-                            <a:ea typeface="Cambria Math" panose="02040503050406030204" pitchFamily="18" charset="0"/>
-                            <a:cs typeface="Times New Roman" panose="02020603050405020304" pitchFamily="18" charset="0"/>
-                          </a:rPr>
-                          <m:t>𝑅</m:t>
-                        </m:r>
-                      </m:e>
-                      <m:sup>
-                        <m:r>
-                          <a:rPr lang="en-US" sz="2400" b="0" i="1" smtClean="0">
-                            <a:solidFill>
-                              <a:schemeClr val="bg1"/>
-                            </a:solidFill>
-                            <a:latin typeface="Cambria Math" panose="02040503050406030204" pitchFamily="18" charset="0"/>
-                            <a:ea typeface="Cambria Math" panose="02040503050406030204" pitchFamily="18" charset="0"/>
-                            <a:cs typeface="Times New Roman" panose="02020603050405020304" pitchFamily="18" charset="0"/>
-                          </a:rPr>
-                          <m:t>2</m:t>
-                        </m:r>
-                      </m:sup>
-                    </m:sSup>
-                    <m:r>
-                      <a:rPr lang="ru-RU" sz="2400" b="0" i="0" smtClean="0">
-                        <a:solidFill>
-                          <a:schemeClr val="bg1"/>
-                        </a:solidFill>
-                        <a:latin typeface="Cambria Math" panose="02040503050406030204" pitchFamily="18" charset="0"/>
-                        <a:ea typeface="Cambria Math" panose="02040503050406030204" pitchFamily="18" charset="0"/>
-                        <a:cs typeface="Times New Roman" panose="02020603050405020304" pitchFamily="18" charset="0"/>
-                      </a:rPr>
-                      <m:t> </m:t>
-                    </m:r>
-                  </m:oMath>
-                </a14:m>
-                <a:r>
-                  <a:rPr lang="ru-RU" sz="2400" dirty="0">
-                    <a:solidFill>
-                      <a:schemeClr val="bg1"/>
-                    </a:solidFill>
-                    <a:latin typeface="Times New Roman" panose="02020603050405020304" pitchFamily="18" charset="0"/>
-                    <a:ea typeface="Cambria Math" panose="02040503050406030204" pitchFamily="18" charset="0"/>
-                    <a:cs typeface="Times New Roman" panose="02020603050405020304" pitchFamily="18" charset="0"/>
-                  </a:rPr>
-                  <a:t>(</a:t>
-                </a:r>
-                <a:r>
-                  <a:rPr lang="ru-RU" sz="2400" dirty="0">
-                    <a:solidFill>
-                      <a:schemeClr val="bg1"/>
-                    </a:solidFill>
-                    <a:latin typeface="Times New Roman" panose="02020603050405020304" pitchFamily="18" charset="0"/>
-                    <a:cs typeface="Times New Roman" panose="02020603050405020304" pitchFamily="18" charset="0"/>
-                  </a:rPr>
-                  <a:t>коэффициент детерминации</a:t>
-                </a:r>
-                <a:r>
-                  <a:rPr lang="ru-RU" sz="2400" dirty="0">
-                    <a:solidFill>
-                      <a:schemeClr val="bg1"/>
-                    </a:solidFill>
-                    <a:latin typeface="Times New Roman" panose="02020603050405020304" pitchFamily="18" charset="0"/>
-                    <a:ea typeface="Cambria Math" panose="02040503050406030204" pitchFamily="18" charset="0"/>
-                    <a:cs typeface="Times New Roman" panose="02020603050405020304" pitchFamily="18" charset="0"/>
-                  </a:rPr>
-                  <a:t>) </a:t>
-                </a:r>
-                <a14:m>
-                  <m:oMath xmlns:m="http://schemas.openxmlformats.org/officeDocument/2006/math">
-                    <m:r>
-                      <a:rPr lang="en-US" sz="2400" i="1">
-                        <a:solidFill>
-                          <a:schemeClr val="bg1"/>
-                        </a:solidFill>
-                        <a:latin typeface="Cambria Math" panose="02040503050406030204" pitchFamily="18" charset="0"/>
-                        <a:ea typeface="Cambria Math" panose="02040503050406030204" pitchFamily="18" charset="0"/>
-                        <a:cs typeface="Times New Roman" panose="02020603050405020304" pitchFamily="18" charset="0"/>
-                      </a:rPr>
-                      <m:t>≥</m:t>
-                    </m:r>
-                    <m:r>
-                      <a:rPr lang="ru-RU" sz="2400" i="1">
-                        <a:solidFill>
-                          <a:schemeClr val="bg1"/>
-                        </a:solidFill>
-                        <a:latin typeface="Cambria Math" panose="02040503050406030204" pitchFamily="18" charset="0"/>
-                        <a:ea typeface="Cambria Math" panose="02040503050406030204" pitchFamily="18" charset="0"/>
-                        <a:cs typeface="Times New Roman" panose="02020603050405020304" pitchFamily="18" charset="0"/>
-                      </a:rPr>
-                      <m:t>0</m:t>
-                    </m:r>
-                    <m:r>
-                      <a:rPr lang="ru-RU" sz="2400" i="1" smtClean="0">
-                        <a:solidFill>
-                          <a:schemeClr val="bg1"/>
-                        </a:solidFill>
-                        <a:latin typeface="Cambria Math" panose="02040503050406030204" pitchFamily="18" charset="0"/>
-                        <a:ea typeface="Cambria Math" panose="02040503050406030204" pitchFamily="18" charset="0"/>
-                        <a:cs typeface="Times New Roman" panose="02020603050405020304" pitchFamily="18" charset="0"/>
-                      </a:rPr>
-                      <m:t>,</m:t>
-                    </m:r>
-                    <m:r>
-                      <a:rPr lang="ru-RU" sz="2400" i="1">
-                        <a:solidFill>
-                          <a:schemeClr val="bg1"/>
-                        </a:solidFill>
-                        <a:latin typeface="Cambria Math" panose="02040503050406030204" pitchFamily="18" charset="0"/>
-                        <a:ea typeface="Cambria Math" panose="02040503050406030204" pitchFamily="18" charset="0"/>
-                        <a:cs typeface="Times New Roman" panose="02020603050405020304" pitchFamily="18" charset="0"/>
-                      </a:rPr>
-                      <m:t>5</m:t>
-                    </m:r>
-                    <m:r>
-                      <a:rPr lang="ru-RU" sz="2400" b="0" i="0" smtClean="0">
-                        <a:solidFill>
-                          <a:schemeClr val="bg1"/>
-                        </a:solidFill>
-                        <a:latin typeface="Cambria Math" panose="02040503050406030204" pitchFamily="18" charset="0"/>
-                        <a:ea typeface="Cambria Math" panose="02040503050406030204" pitchFamily="18" charset="0"/>
-                        <a:cs typeface="Times New Roman" panose="02020603050405020304" pitchFamily="18" charset="0"/>
-                      </a:rPr>
-                      <m:t>;</m:t>
-                    </m:r>
-                  </m:oMath>
-                </a14:m>
-                <a:r>
-                  <a:rPr lang="en-US" sz="2400" dirty="0">
-                    <a:solidFill>
-                      <a:schemeClr val="bg1"/>
-                    </a:solidFill>
-                    <a:latin typeface="Times New Roman" panose="02020603050405020304" pitchFamily="18" charset="0"/>
-                    <a:ea typeface="Cambria Math" panose="02040503050406030204" pitchFamily="18" charset="0"/>
-                    <a:cs typeface="Times New Roman" panose="02020603050405020304" pitchFamily="18" charset="0"/>
-                  </a:rPr>
-                  <a:t> </a:t>
-                </a:r>
-                <a:endParaRPr lang="ru-RU" sz="2400" dirty="0">
-                  <a:solidFill>
-                    <a:schemeClr val="bg1"/>
-                  </a:solidFill>
-                  <a:latin typeface="Times New Roman" panose="02020603050405020304" pitchFamily="18" charset="0"/>
-                  <a:ea typeface="Cambria Math" panose="02040503050406030204" pitchFamily="18" charset="0"/>
-                  <a:cs typeface="Times New Roman" panose="02020603050405020304" pitchFamily="18" charset="0"/>
-                </a:endParaRPr>
-              </a:p>
-              <a:p>
-                <a:pPr indent="447675">
-                  <a:buFont typeface="Arial" panose="020B0604020202020204" pitchFamily="34" charset="0"/>
-                  <a:buChar char="•"/>
-                </a:pPr>
-                <a14:m>
-                  <m:oMath xmlns:m="http://schemas.openxmlformats.org/officeDocument/2006/math">
-                    <m:r>
-                      <a:rPr lang="en-US" sz="2400" b="0" i="1" smtClean="0">
-                        <a:solidFill>
-                          <a:schemeClr val="bg1"/>
-                        </a:solidFill>
-                        <a:latin typeface="Cambria Math" panose="02040503050406030204" pitchFamily="18" charset="0"/>
-                        <a:ea typeface="Cambria Math" panose="02040503050406030204" pitchFamily="18" charset="0"/>
-                        <a:cs typeface="Times New Roman" panose="02020603050405020304" pitchFamily="18" charset="0"/>
-                      </a:rPr>
-                      <m:t>𝑀𝐴𝑃𝐸</m:t>
-                    </m:r>
-                    <m:r>
-                      <a:rPr lang="ru-RU" sz="2400" b="0" i="1" smtClean="0">
-                        <a:solidFill>
-                          <a:schemeClr val="bg1"/>
-                        </a:solidFill>
-                        <a:latin typeface="Cambria Math" panose="02040503050406030204" pitchFamily="18" charset="0"/>
-                        <a:ea typeface="Cambria Math" panose="02040503050406030204" pitchFamily="18" charset="0"/>
-                        <a:cs typeface="Times New Roman" panose="02020603050405020304" pitchFamily="18" charset="0"/>
-                      </a:rPr>
-                      <m:t> </m:t>
-                    </m:r>
-                  </m:oMath>
-                </a14:m>
-                <a:r>
-                  <a:rPr lang="ru-RU" sz="2400" dirty="0">
-                    <a:solidFill>
-                      <a:schemeClr val="bg1"/>
-                    </a:solidFill>
-                    <a:latin typeface="Times New Roman" panose="02020603050405020304" pitchFamily="18" charset="0"/>
-                    <a:cs typeface="Times New Roman" panose="02020603050405020304" pitchFamily="18" charset="0"/>
-                  </a:rPr>
-                  <a:t>(средняя абсолютная процентная ошибка) </a:t>
-                </a:r>
-                <a14:m>
-                  <m:oMath xmlns:m="http://schemas.openxmlformats.org/officeDocument/2006/math">
-                    <m:r>
-                      <a:rPr lang="ru-RU" sz="2400" i="1">
-                        <a:solidFill>
-                          <a:schemeClr val="bg1"/>
-                        </a:solidFill>
-                        <a:latin typeface="Cambria Math" panose="02040503050406030204" pitchFamily="18" charset="0"/>
-                        <a:ea typeface="Cambria Math" panose="02040503050406030204" pitchFamily="18" charset="0"/>
-                        <a:cs typeface="Times New Roman" panose="02020603050405020304" pitchFamily="18" charset="0"/>
-                      </a:rPr>
-                      <m:t>≤5</m:t>
-                    </m:r>
-                    <m:r>
-                      <a:rPr lang="ru-RU" sz="2400" b="0" i="1" smtClean="0">
-                        <a:solidFill>
-                          <a:schemeClr val="bg1"/>
-                        </a:solidFill>
-                        <a:latin typeface="Cambria Math" panose="02040503050406030204" pitchFamily="18" charset="0"/>
-                        <a:ea typeface="Cambria Math" panose="02040503050406030204" pitchFamily="18" charset="0"/>
-                        <a:cs typeface="Times New Roman" panose="02020603050405020304" pitchFamily="18" charset="0"/>
-                      </a:rPr>
-                      <m:t>0%</m:t>
-                    </m:r>
-                  </m:oMath>
-                </a14:m>
-                <a:r>
-                  <a:rPr lang="en-US" sz="2400" dirty="0">
-                    <a:solidFill>
-                      <a:schemeClr val="bg1"/>
-                    </a:solidFill>
-                    <a:latin typeface="Times New Roman" panose="02020603050405020304" pitchFamily="18" charset="0"/>
-                    <a:ea typeface="Cambria Math" panose="02040503050406030204" pitchFamily="18" charset="0"/>
-                    <a:cs typeface="Times New Roman" panose="02020603050405020304" pitchFamily="18" charset="0"/>
-                  </a:rPr>
-                  <a:t>.</a:t>
-                </a:r>
-              </a:p>
-            </p:txBody>
-          </p:sp>
-        </mc:Choice>
-        <mc:Fallback>
-          <p:sp>
-            <p:nvSpPr>
-              <p:cNvPr id="10" name="TextBox 9">
-                <a:extLst>
-                  <a:ext uri="{FF2B5EF4-FFF2-40B4-BE49-F238E27FC236}">
-                    <a16:creationId xmlns:a16="http://schemas.microsoft.com/office/drawing/2014/main" id="{00457E9D-72A2-0FEA-021B-D8D2126E7731}"/>
-                  </a:ext>
-                </a:extLst>
-              </p:cNvPr>
-              <p:cNvSpPr txBox="1">
-                <a:spLocks noRot="1" noChangeAspect="1" noMove="1" noResize="1" noEditPoints="1" noAdjustHandles="1" noChangeArrowheads="1" noChangeShapeType="1" noTextEdit="1"/>
-              </p:cNvSpPr>
-              <p:nvPr/>
-            </p:nvSpPr>
-            <p:spPr>
-              <a:xfrm>
-                <a:off x="873750" y="4645601"/>
-                <a:ext cx="9746625" cy="1569660"/>
-              </a:xfrm>
-              <a:prstGeom prst="rect">
-                <a:avLst/>
-              </a:prstGeom>
-              <a:blipFill>
-                <a:blip r:embed="rId2"/>
-                <a:stretch>
-                  <a:fillRect l="-938" t="-3101" b="-7752"/>
-                </a:stretch>
-              </a:blipFill>
-            </p:spPr>
-            <p:txBody>
-              <a:bodyPr/>
-              <a:lstStyle/>
-              <a:p>
-                <a:r>
-                  <a:rPr lang="ru-RU">
-                    <a:noFill/>
-                  </a:rPr>
-                  <a:t> </a:t>
-                </a:r>
-              </a:p>
-            </p:txBody>
-          </p:sp>
-        </mc:Fallback>
-      </mc:AlternateContent>
     </p:spTree>
     <p:extLst>
       <p:ext uri="{BB962C8B-B14F-4D97-AF65-F5344CB8AC3E}">
@@ -12357,7 +11600,7 @@
                 <a:latin typeface="Times New Roman" panose="02020603050405020304" pitchFamily="18" charset="0"/>
                 <a:cs typeface="Times New Roman" panose="02020603050405020304" pitchFamily="18" charset="0"/>
               </a:rPr>
-              <a:t>Пик стоимости 26–29 лет. </a:t>
+              <a:t>Пик стоимости 26–29 лет.</a:t>
             </a:r>
           </a:p>
           <a:p>
@@ -13117,6 +12360,153 @@
       </p:grpSpPr>
       <p:sp>
         <p:nvSpPr>
+          <p:cNvPr id="10" name="Блок-схема: альтернативный процесс 9">
+            <a:extLst>
+              <a:ext uri="{FF2B5EF4-FFF2-40B4-BE49-F238E27FC236}">
+                <a16:creationId xmlns:a16="http://schemas.microsoft.com/office/drawing/2014/main" id="{6CB271A3-9F31-13AA-9DBF-9B36381495C6}"/>
+              </a:ext>
+            </a:extLst>
+          </p:cNvPr>
+          <p:cNvSpPr/>
+          <p:nvPr/>
+        </p:nvSpPr>
+        <p:spPr>
+          <a:xfrm>
+            <a:off x="696001" y="4989924"/>
+            <a:ext cx="10657798" cy="1414346"/>
+          </a:xfrm>
+          <a:prstGeom prst="flowChartAlternateProcess">
+            <a:avLst/>
+          </a:prstGeom>
+          <a:solidFill>
+            <a:schemeClr val="accent1"/>
+          </a:solidFill>
+        </p:spPr>
+        <p:style>
+          <a:lnRef idx="2">
+            <a:schemeClr val="accent2">
+              <a:shade val="15000"/>
+            </a:schemeClr>
+          </a:lnRef>
+          <a:fillRef idx="1">
+            <a:schemeClr val="accent2"/>
+          </a:fillRef>
+          <a:effectRef idx="0">
+            <a:schemeClr val="accent2"/>
+          </a:effectRef>
+          <a:fontRef idx="minor">
+            <a:schemeClr val="lt1"/>
+          </a:fontRef>
+        </p:style>
+        <p:txBody>
+          <a:bodyPr rtlCol="0" anchor="ctr"/>
+          <a:lstStyle/>
+          <a:p>
+            <a:pPr algn="ctr"/>
+            <a:endParaRPr lang="ru-RU"/>
+          </a:p>
+        </p:txBody>
+      </p:sp>
+      <p:sp>
+        <p:nvSpPr>
+          <p:cNvPr id="9" name="Блок-схема: альтернативный процесс 8">
+            <a:extLst>
+              <a:ext uri="{FF2B5EF4-FFF2-40B4-BE49-F238E27FC236}">
+                <a16:creationId xmlns:a16="http://schemas.microsoft.com/office/drawing/2014/main" id="{F4760A14-A543-8E19-8720-FF61ABE79733}"/>
+              </a:ext>
+            </a:extLst>
+          </p:cNvPr>
+          <p:cNvSpPr/>
+          <p:nvPr/>
+        </p:nvSpPr>
+        <p:spPr>
+          <a:xfrm>
+            <a:off x="660453" y="3097513"/>
+            <a:ext cx="10657798" cy="1727060"/>
+          </a:xfrm>
+          <a:prstGeom prst="flowChartAlternateProcess">
+            <a:avLst/>
+          </a:prstGeom>
+          <a:solidFill>
+            <a:schemeClr val="accent1"/>
+          </a:solidFill>
+        </p:spPr>
+        <p:style>
+          <a:lnRef idx="2">
+            <a:schemeClr val="accent2">
+              <a:shade val="15000"/>
+            </a:schemeClr>
+          </a:lnRef>
+          <a:fillRef idx="1">
+            <a:schemeClr val="accent2"/>
+          </a:fillRef>
+          <a:effectRef idx="0">
+            <a:schemeClr val="accent2"/>
+          </a:effectRef>
+          <a:fontRef idx="minor">
+            <a:schemeClr val="lt1"/>
+          </a:fontRef>
+        </p:style>
+        <p:txBody>
+          <a:bodyPr rtlCol="0" anchor="ctr"/>
+          <a:lstStyle/>
+          <a:p>
+            <a:pPr algn="ctr"/>
+            <a:endParaRPr lang="ru-RU"/>
+          </a:p>
+        </p:txBody>
+      </p:sp>
+      <p:sp>
+        <p:nvSpPr>
+          <p:cNvPr id="5" name="Блок-схема: альтернативный процесс 4">
+            <a:extLst>
+              <a:ext uri="{FF2B5EF4-FFF2-40B4-BE49-F238E27FC236}">
+                <a16:creationId xmlns:a16="http://schemas.microsoft.com/office/drawing/2014/main" id="{F1C4BEE4-4F01-656B-8CE3-FA8CFA16642E}"/>
+              </a:ext>
+            </a:extLst>
+          </p:cNvPr>
+          <p:cNvSpPr/>
+          <p:nvPr/>
+        </p:nvSpPr>
+        <p:spPr>
+          <a:xfrm>
+            <a:off x="696002" y="1160903"/>
+            <a:ext cx="10657798" cy="1739618"/>
+          </a:xfrm>
+          <a:prstGeom prst="flowChartAlternateProcess">
+            <a:avLst/>
+          </a:prstGeom>
+          <a:solidFill>
+            <a:schemeClr val="accent1"/>
+          </a:solidFill>
+        </p:spPr>
+        <p:style>
+          <a:lnRef idx="2">
+            <a:schemeClr val="accent2">
+              <a:shade val="15000"/>
+            </a:schemeClr>
+          </a:lnRef>
+          <a:fillRef idx="1">
+            <a:schemeClr val="accent2"/>
+          </a:fillRef>
+          <a:effectRef idx="0">
+            <a:schemeClr val="accent2"/>
+          </a:effectRef>
+          <a:fontRef idx="minor">
+            <a:schemeClr val="lt1"/>
+          </a:fontRef>
+        </p:style>
+        <p:txBody>
+          <a:bodyPr rtlCol="0" anchor="ctr"/>
+          <a:lstStyle/>
+          <a:p>
+            <a:pPr algn="ctr"/>
+            <a:endParaRPr lang="ru-RU"/>
+          </a:p>
+        </p:txBody>
+      </p:sp>
+      <p:sp>
+        <p:nvSpPr>
           <p:cNvPr id="2" name="Заголовок 1">
             <a:extLst>
               <a:ext uri="{FF2B5EF4-FFF2-40B4-BE49-F238E27FC236}">
@@ -13153,580 +12543,75 @@
           </a:p>
         </p:txBody>
       </p:sp>
-      <mc:AlternateContent xmlns:mc="http://schemas.openxmlformats.org/markup-compatibility/2006">
-        <mc:Choice xmlns:a14="http://schemas.microsoft.com/office/drawing/2010/main" Requires="a14">
-          <p:sp>
-            <p:nvSpPr>
-              <p:cNvPr id="3" name="Объект 2">
-                <a:extLst>
-                  <a:ext uri="{FF2B5EF4-FFF2-40B4-BE49-F238E27FC236}">
-                    <a16:creationId xmlns:a16="http://schemas.microsoft.com/office/drawing/2014/main" id="{B8483174-7622-A79B-D1C6-AAB3F569DE66}"/>
-                  </a:ext>
-                </a:extLst>
-              </p:cNvPr>
-              <p:cNvSpPr>
-                <a:spLocks noGrp="1"/>
-              </p:cNvSpPr>
-              <p:nvPr>
-                <p:ph idx="1"/>
-              </p:nvPr>
-            </p:nvSpPr>
-            <p:spPr/>
-            <p:txBody>
-              <a:bodyPr>
-                <a:normAutofit lnSpcReduction="10000"/>
-              </a:bodyPr>
-              <a:lstStyle/>
-              <a:p>
-                <a:pPr marL="0" indent="0">
-                  <a:buNone/>
-                </a:pPr>
-                <a:r>
-                  <a:rPr lang="ru-RU" dirty="0">
-                    <a:latin typeface="Times New Roman" panose="02020603050405020304" pitchFamily="18" charset="0"/>
-                    <a:cs typeface="Times New Roman" panose="02020603050405020304" pitchFamily="18" charset="0"/>
-                  </a:rPr>
-                  <a:t>Постановка задачи:</a:t>
-                </a:r>
-              </a:p>
-              <a:p>
-                <a:pPr marL="0" indent="0" algn="ctr">
-                  <a:buNone/>
-                </a:pPr>
-                <a:r>
-                  <a:rPr lang="ru-RU" dirty="0">
-                    <a:latin typeface="Times New Roman" panose="02020603050405020304" pitchFamily="18" charset="0"/>
-                    <a:cs typeface="Times New Roman" panose="02020603050405020304" pitchFamily="18" charset="0"/>
-                  </a:rPr>
-                  <a:t>Обучающая выборка: </a:t>
-                </a:r>
-                <a14:m>
-                  <m:oMath xmlns:m="http://schemas.openxmlformats.org/officeDocument/2006/math">
-                    <m:r>
-                      <a:rPr lang="en-US" b="0" i="1" smtClean="0">
-                        <a:latin typeface="Cambria Math" panose="02040503050406030204" pitchFamily="18" charset="0"/>
-                        <a:cs typeface="Times New Roman" panose="02020603050405020304" pitchFamily="18" charset="0"/>
-                      </a:rPr>
-                      <m:t>𝐷</m:t>
-                    </m:r>
-                    <m:r>
-                      <a:rPr lang="en-US" b="0" i="1" smtClean="0">
-                        <a:latin typeface="Cambria Math" panose="02040503050406030204" pitchFamily="18" charset="0"/>
-                        <a:cs typeface="Times New Roman" panose="02020603050405020304" pitchFamily="18" charset="0"/>
-                      </a:rPr>
-                      <m:t>=</m:t>
-                    </m:r>
-                    <m:sSubSup>
-                      <m:sSubSupPr>
-                        <m:ctrlPr>
-                          <a:rPr lang="en-US" b="0" i="1" smtClean="0">
-                            <a:latin typeface="Cambria Math" panose="02040503050406030204" pitchFamily="18" charset="0"/>
-                            <a:cs typeface="Times New Roman" panose="02020603050405020304" pitchFamily="18" charset="0"/>
-                          </a:rPr>
-                        </m:ctrlPr>
-                      </m:sSubSupPr>
-                      <m:e>
-                        <m:r>
-                          <a:rPr lang="en-US" b="0" i="1" smtClean="0">
-                            <a:latin typeface="Cambria Math" panose="02040503050406030204" pitchFamily="18" charset="0"/>
-                            <a:cs typeface="Times New Roman" panose="02020603050405020304" pitchFamily="18" charset="0"/>
-                          </a:rPr>
-                          <m:t>{(</m:t>
-                        </m:r>
-                        <m:sSub>
-                          <m:sSubPr>
-                            <m:ctrlPr>
-                              <a:rPr lang="en-US" b="0" i="1" smtClean="0">
-                                <a:latin typeface="Cambria Math" panose="02040503050406030204" pitchFamily="18" charset="0"/>
-                                <a:cs typeface="Times New Roman" panose="02020603050405020304" pitchFamily="18" charset="0"/>
-                              </a:rPr>
-                            </m:ctrlPr>
-                          </m:sSubPr>
-                          <m:e>
-                            <m:r>
-                              <a:rPr lang="en-US" b="0" i="1" smtClean="0">
-                                <a:latin typeface="Cambria Math" panose="02040503050406030204" pitchFamily="18" charset="0"/>
-                                <a:cs typeface="Times New Roman" panose="02020603050405020304" pitchFamily="18" charset="0"/>
-                              </a:rPr>
-                              <m:t>𝑥</m:t>
-                            </m:r>
-                          </m:e>
-                          <m:sub>
-                            <m:r>
-                              <a:rPr lang="en-US" b="0" i="1" smtClean="0">
-                                <a:latin typeface="Cambria Math" panose="02040503050406030204" pitchFamily="18" charset="0"/>
-                                <a:cs typeface="Times New Roman" panose="02020603050405020304" pitchFamily="18" charset="0"/>
-                              </a:rPr>
-                              <m:t>𝑖</m:t>
-                            </m:r>
-                          </m:sub>
-                        </m:sSub>
-                        <m:r>
-                          <a:rPr lang="en-US" b="0" i="1" smtClean="0">
-                            <a:latin typeface="Cambria Math" panose="02040503050406030204" pitchFamily="18" charset="0"/>
-                            <a:cs typeface="Times New Roman" panose="02020603050405020304" pitchFamily="18" charset="0"/>
-                          </a:rPr>
-                          <m:t>,</m:t>
-                        </m:r>
-                        <m:sSub>
-                          <m:sSubPr>
-                            <m:ctrlPr>
-                              <a:rPr lang="en-US" b="0" i="1" smtClean="0">
-                                <a:latin typeface="Cambria Math" panose="02040503050406030204" pitchFamily="18" charset="0"/>
-                                <a:cs typeface="Times New Roman" panose="02020603050405020304" pitchFamily="18" charset="0"/>
-                              </a:rPr>
-                            </m:ctrlPr>
-                          </m:sSubPr>
-                          <m:e>
-                            <m:r>
-                              <a:rPr lang="en-US" b="0" i="1" smtClean="0">
-                                <a:latin typeface="Cambria Math" panose="02040503050406030204" pitchFamily="18" charset="0"/>
-                                <a:cs typeface="Times New Roman" panose="02020603050405020304" pitchFamily="18" charset="0"/>
-                              </a:rPr>
-                              <m:t>𝑦</m:t>
-                            </m:r>
-                          </m:e>
-                          <m:sub>
-                            <m:r>
-                              <a:rPr lang="en-US" b="0" i="1" smtClean="0">
-                                <a:latin typeface="Cambria Math" panose="02040503050406030204" pitchFamily="18" charset="0"/>
-                                <a:cs typeface="Times New Roman" panose="02020603050405020304" pitchFamily="18" charset="0"/>
-                              </a:rPr>
-                              <m:t>𝑖</m:t>
-                            </m:r>
-                          </m:sub>
-                        </m:sSub>
-                        <m:r>
-                          <a:rPr lang="en-US" b="0" i="1" smtClean="0">
-                            <a:latin typeface="Cambria Math" panose="02040503050406030204" pitchFamily="18" charset="0"/>
-                            <a:cs typeface="Times New Roman" panose="02020603050405020304" pitchFamily="18" charset="0"/>
-                          </a:rPr>
-                          <m:t>)}</m:t>
-                        </m:r>
-                      </m:e>
-                      <m:sub>
-                        <m:r>
-                          <a:rPr lang="en-US" b="0" i="1" smtClean="0">
-                            <a:latin typeface="Cambria Math" panose="02040503050406030204" pitchFamily="18" charset="0"/>
-                            <a:cs typeface="Times New Roman" panose="02020603050405020304" pitchFamily="18" charset="0"/>
-                          </a:rPr>
-                          <m:t>𝑖</m:t>
-                        </m:r>
-                        <m:r>
-                          <a:rPr lang="en-US" b="0" i="1" smtClean="0">
-                            <a:latin typeface="Cambria Math" panose="02040503050406030204" pitchFamily="18" charset="0"/>
-                            <a:cs typeface="Times New Roman" panose="02020603050405020304" pitchFamily="18" charset="0"/>
-                          </a:rPr>
-                          <m:t>=1</m:t>
-                        </m:r>
-                      </m:sub>
-                      <m:sup>
-                        <m:r>
-                          <a:rPr lang="en-US" b="0" i="1" smtClean="0">
-                            <a:latin typeface="Cambria Math" panose="02040503050406030204" pitchFamily="18" charset="0"/>
-                            <a:cs typeface="Times New Roman" panose="02020603050405020304" pitchFamily="18" charset="0"/>
-                          </a:rPr>
-                          <m:t>𝑛</m:t>
-                        </m:r>
-                      </m:sup>
-                    </m:sSubSup>
-                  </m:oMath>
-                </a14:m>
-                <a:r>
-                  <a:rPr lang="ru-RU" dirty="0">
-                    <a:latin typeface="Times New Roman" panose="02020603050405020304" pitchFamily="18" charset="0"/>
-                    <a:cs typeface="Times New Roman" panose="02020603050405020304" pitchFamily="18" charset="0"/>
-                  </a:rPr>
-                  <a:t>,</a:t>
-                </a:r>
-              </a:p>
-              <a:p>
-                <a:pPr marL="0" indent="0" algn="ctr">
-                  <a:buNone/>
-                </a:pPr>
-                <a:r>
-                  <a:rPr lang="ru-RU" dirty="0">
-                    <a:latin typeface="Times New Roman" panose="02020603050405020304" pitchFamily="18" charset="0"/>
-                    <a:cs typeface="Times New Roman" panose="02020603050405020304" pitchFamily="18" charset="0"/>
-                  </a:rPr>
-                  <a:t>Целевая переменная логарифмируется: </a:t>
-                </a:r>
-                <a14:m>
-                  <m:oMath xmlns:m="http://schemas.openxmlformats.org/officeDocument/2006/math">
-                    <m:sSup>
-                      <m:sSupPr>
-                        <m:ctrlPr>
-                          <a:rPr lang="en-US" b="0" i="1" smtClean="0">
-                            <a:latin typeface="Cambria Math" panose="02040503050406030204" pitchFamily="18" charset="0"/>
-                            <a:cs typeface="Times New Roman" panose="02020603050405020304" pitchFamily="18" charset="0"/>
-                          </a:rPr>
-                        </m:ctrlPr>
-                      </m:sSupPr>
-                      <m:e>
-                        <m:r>
-                          <a:rPr lang="en-US" b="0" i="1" smtClean="0">
-                            <a:latin typeface="Cambria Math" panose="02040503050406030204" pitchFamily="18" charset="0"/>
-                            <a:cs typeface="Times New Roman" panose="02020603050405020304" pitchFamily="18" charset="0"/>
-                          </a:rPr>
-                          <m:t>𝑦</m:t>
-                        </m:r>
-                      </m:e>
-                      <m:sup>
-                        <m:r>
-                          <a:rPr lang="en-US" b="0" i="1" smtClean="0">
-                            <a:latin typeface="Cambria Math" panose="02040503050406030204" pitchFamily="18" charset="0"/>
-                            <a:cs typeface="Times New Roman" panose="02020603050405020304" pitchFamily="18" charset="0"/>
-                          </a:rPr>
-                          <m:t>′</m:t>
-                        </m:r>
-                      </m:sup>
-                    </m:sSup>
-                    <m:r>
-                      <a:rPr lang="en-US" b="0" i="1" smtClean="0">
-                        <a:latin typeface="Cambria Math" panose="02040503050406030204" pitchFamily="18" charset="0"/>
-                        <a:cs typeface="Times New Roman" panose="02020603050405020304" pitchFamily="18" charset="0"/>
-                      </a:rPr>
-                      <m:t>=</m:t>
-                    </m:r>
-                    <m:r>
-                      <m:rPr>
-                        <m:sty m:val="p"/>
-                      </m:rPr>
-                      <a:rPr lang="en-US" b="0" i="0" smtClean="0">
-                        <a:latin typeface="Cambria Math" panose="02040503050406030204" pitchFamily="18" charset="0"/>
-                        <a:cs typeface="Times New Roman" panose="02020603050405020304" pitchFamily="18" charset="0"/>
-                      </a:rPr>
-                      <m:t>ln</m:t>
-                    </m:r>
-                    <m:r>
-                      <a:rPr lang="en-US" b="0" i="1" smtClean="0">
-                        <a:latin typeface="Cambria Math" panose="02040503050406030204" pitchFamily="18" charset="0"/>
-                        <a:cs typeface="Times New Roman" panose="02020603050405020304" pitchFamily="18" charset="0"/>
-                      </a:rPr>
-                      <m:t>⁡(</m:t>
-                    </m:r>
-                    <m:r>
-                      <a:rPr lang="en-US" b="0" i="1" smtClean="0">
-                        <a:latin typeface="Cambria Math" panose="02040503050406030204" pitchFamily="18" charset="0"/>
-                        <a:cs typeface="Times New Roman" panose="02020603050405020304" pitchFamily="18" charset="0"/>
-                      </a:rPr>
-                      <m:t>𝑦</m:t>
-                    </m:r>
-                    <m:r>
-                      <a:rPr lang="en-US" b="0" i="1" smtClean="0">
-                        <a:latin typeface="Cambria Math" panose="02040503050406030204" pitchFamily="18" charset="0"/>
-                        <a:cs typeface="Times New Roman" panose="02020603050405020304" pitchFamily="18" charset="0"/>
-                      </a:rPr>
-                      <m:t>+1)</m:t>
-                    </m:r>
-                  </m:oMath>
-                </a14:m>
-                <a:r>
-                  <a:rPr lang="en-US" dirty="0">
-                    <a:latin typeface="Times New Roman" panose="02020603050405020304" pitchFamily="18" charset="0"/>
-                    <a:cs typeface="Times New Roman" panose="02020603050405020304" pitchFamily="18" charset="0"/>
-                  </a:rPr>
-                  <a:t> </a:t>
-                </a:r>
-                <a:r>
-                  <a:rPr lang="ru-RU" dirty="0">
-                    <a:latin typeface="Times New Roman" panose="02020603050405020304" pitchFamily="18" charset="0"/>
-                    <a:cs typeface="Times New Roman" panose="02020603050405020304" pitchFamily="18" charset="0"/>
-                  </a:rPr>
-                  <a:t>— для нормализации,</a:t>
-                </a:r>
-              </a:p>
-              <a:p>
-                <a:pPr marL="0" indent="0" algn="ctr">
-                  <a:buNone/>
-                </a:pPr>
-                <a:r>
-                  <a:rPr lang="ru-RU" dirty="0">
-                    <a:latin typeface="Times New Roman" panose="02020603050405020304" pitchFamily="18" charset="0"/>
-                    <a:ea typeface="Cambria Math" panose="02040503050406030204" pitchFamily="18" charset="0"/>
-                    <a:cs typeface="Times New Roman" panose="02020603050405020304" pitchFamily="18" charset="0"/>
-                  </a:rPr>
-                  <a:t>Требуется построить </a:t>
-                </a:r>
-                <a14:m>
-                  <m:oMath xmlns:m="http://schemas.openxmlformats.org/officeDocument/2006/math">
-                    <m:r>
-                      <a:rPr lang="en-US" b="0" i="1" smtClean="0">
-                        <a:latin typeface="Cambria Math" panose="02040503050406030204" pitchFamily="18" charset="0"/>
-                        <a:cs typeface="Times New Roman" panose="02020603050405020304" pitchFamily="18" charset="0"/>
-                      </a:rPr>
-                      <m:t>𝑓</m:t>
-                    </m:r>
-                    <m:r>
-                      <a:rPr lang="en-US" b="0" i="1" smtClean="0">
-                        <a:latin typeface="Cambria Math" panose="02040503050406030204" pitchFamily="18" charset="0"/>
-                        <a:cs typeface="Times New Roman" panose="02020603050405020304" pitchFamily="18" charset="0"/>
-                      </a:rPr>
-                      <m:t>:</m:t>
-                    </m:r>
-                    <m:r>
-                      <a:rPr lang="en-US" b="0" i="1" smtClean="0">
-                        <a:latin typeface="Cambria Math" panose="02040503050406030204" pitchFamily="18" charset="0"/>
-                        <a:cs typeface="Times New Roman" panose="02020603050405020304" pitchFamily="18" charset="0"/>
-                      </a:rPr>
-                      <m:t>𝑋</m:t>
-                    </m:r>
-                    <m:r>
-                      <a:rPr lang="en-US" b="0" i="1" smtClean="0">
-                        <a:latin typeface="Cambria Math" panose="02040503050406030204" pitchFamily="18" charset="0"/>
-                        <a:ea typeface="Cambria Math" panose="02040503050406030204" pitchFamily="18" charset="0"/>
-                        <a:cs typeface="Times New Roman" panose="02020603050405020304" pitchFamily="18" charset="0"/>
-                      </a:rPr>
-                      <m:t>→</m:t>
-                    </m:r>
-                    <m:r>
-                      <a:rPr lang="en-US" b="0" i="1" smtClean="0">
-                        <a:latin typeface="Cambria Math" panose="02040503050406030204" pitchFamily="18" charset="0"/>
-                        <a:ea typeface="Cambria Math" panose="02040503050406030204" pitchFamily="18" charset="0"/>
-                        <a:cs typeface="Times New Roman" panose="02020603050405020304" pitchFamily="18" charset="0"/>
-                      </a:rPr>
-                      <m:t>𝑌</m:t>
-                    </m:r>
-                  </m:oMath>
-                </a14:m>
-                <a:r>
-                  <a:rPr lang="ru-RU" b="0" dirty="0">
-                    <a:latin typeface="Times New Roman" panose="02020603050405020304" pitchFamily="18" charset="0"/>
-                    <a:ea typeface="Cambria Math" panose="02040503050406030204" pitchFamily="18" charset="0"/>
-                    <a:cs typeface="Times New Roman" panose="02020603050405020304" pitchFamily="18" charset="0"/>
-                  </a:rPr>
-                  <a:t>, минимизирующую </a:t>
-                </a:r>
-                <a14:m>
-                  <m:oMath xmlns:m="http://schemas.openxmlformats.org/officeDocument/2006/math">
-                    <m:r>
-                      <a:rPr lang="en-US" i="1">
-                        <a:latin typeface="Cambria Math" panose="02040503050406030204" pitchFamily="18" charset="0"/>
-                        <a:ea typeface="Cambria Math" panose="02040503050406030204" pitchFamily="18" charset="0"/>
-                        <a:cs typeface="Times New Roman" panose="02020603050405020304" pitchFamily="18" charset="0"/>
-                      </a:rPr>
-                      <m:t>𝑀𝐴𝐸</m:t>
-                    </m:r>
-                  </m:oMath>
-                </a14:m>
-                <a:r>
-                  <a:rPr lang="en-US" dirty="0">
-                    <a:latin typeface="Times New Roman" panose="02020603050405020304" pitchFamily="18" charset="0"/>
-                    <a:ea typeface="Cambria Math" panose="02040503050406030204" pitchFamily="18" charset="0"/>
-                    <a:cs typeface="Times New Roman" panose="02020603050405020304" pitchFamily="18" charset="0"/>
-                  </a:rPr>
-                  <a:t> </a:t>
-                </a:r>
-                <a:r>
-                  <a:rPr lang="ru-RU" dirty="0">
-                    <a:latin typeface="Times New Roman" panose="02020603050405020304" pitchFamily="18" charset="0"/>
-                    <a:cs typeface="Times New Roman" panose="02020603050405020304" pitchFamily="18" charset="0"/>
-                  </a:rPr>
-                  <a:t>и максимизирующую </a:t>
-                </a:r>
-                <a14:m>
-                  <m:oMath xmlns:m="http://schemas.openxmlformats.org/officeDocument/2006/math">
-                    <m:sSup>
-                      <m:sSupPr>
-                        <m:ctrlPr>
-                          <a:rPr lang="en-US" b="0" i="1" smtClean="0">
-                            <a:latin typeface="Cambria Math" panose="02040503050406030204" pitchFamily="18" charset="0"/>
-                            <a:ea typeface="Cambria Math" panose="02040503050406030204" pitchFamily="18" charset="0"/>
-                            <a:cs typeface="Times New Roman" panose="02020603050405020304" pitchFamily="18" charset="0"/>
-                          </a:rPr>
-                        </m:ctrlPr>
-                      </m:sSupPr>
-                      <m:e>
-                        <m:r>
-                          <a:rPr lang="en-US" b="0" i="1" smtClean="0">
-                            <a:latin typeface="Cambria Math" panose="02040503050406030204" pitchFamily="18" charset="0"/>
-                            <a:ea typeface="Cambria Math" panose="02040503050406030204" pitchFamily="18" charset="0"/>
-                            <a:cs typeface="Times New Roman" panose="02020603050405020304" pitchFamily="18" charset="0"/>
-                          </a:rPr>
-                          <m:t>𝑅</m:t>
-                        </m:r>
-                      </m:e>
-                      <m:sup>
-                        <m:r>
-                          <a:rPr lang="en-US" b="0" i="1" smtClean="0">
-                            <a:latin typeface="Cambria Math" panose="02040503050406030204" pitchFamily="18" charset="0"/>
-                            <a:ea typeface="Cambria Math" panose="02040503050406030204" pitchFamily="18" charset="0"/>
-                            <a:cs typeface="Times New Roman" panose="02020603050405020304" pitchFamily="18" charset="0"/>
-                          </a:rPr>
-                          <m:t>2</m:t>
-                        </m:r>
-                      </m:sup>
-                    </m:sSup>
-                  </m:oMath>
-                </a14:m>
-                <a:r>
-                  <a:rPr lang="ru-RU" dirty="0">
-                    <a:latin typeface="Times New Roman" panose="02020603050405020304" pitchFamily="18" charset="0"/>
-                    <a:ea typeface="Cambria Math" panose="02040503050406030204" pitchFamily="18" charset="0"/>
-                    <a:cs typeface="Times New Roman" panose="02020603050405020304" pitchFamily="18" charset="0"/>
-                  </a:rPr>
-                  <a:t>. </a:t>
-                </a:r>
-                <a:endParaRPr lang="ru-RU" dirty="0">
-                  <a:latin typeface="Times New Roman" panose="02020603050405020304" pitchFamily="18" charset="0"/>
-                  <a:cs typeface="Times New Roman" panose="02020603050405020304" pitchFamily="18" charset="0"/>
-                </a:endParaRPr>
-              </a:p>
-              <a:p>
-                <a:pPr marL="0" indent="0">
-                  <a:buNone/>
-                </a:pPr>
-                <a:r>
-                  <a:rPr lang="ru-RU" dirty="0">
-                    <a:latin typeface="Times New Roman" panose="02020603050405020304" pitchFamily="18" charset="0"/>
-                    <a:ea typeface="Cambria Math" panose="02040503050406030204" pitchFamily="18" charset="0"/>
-                    <a:cs typeface="Times New Roman" panose="02020603050405020304" pitchFamily="18" charset="0"/>
-                  </a:rPr>
-                  <a:t>Допущения: только открытые данные, только платные трансферы, временной сплит (обучение </a:t>
-                </a:r>
-                <a14:m>
-                  <m:oMath xmlns:m="http://schemas.openxmlformats.org/officeDocument/2006/math">
-                    <m:r>
-                      <a:rPr lang="en-US" i="1" dirty="0" smtClean="0">
-                        <a:latin typeface="Cambria Math" panose="02040503050406030204" pitchFamily="18" charset="0"/>
-                        <a:ea typeface="Cambria Math" panose="02040503050406030204" pitchFamily="18" charset="0"/>
-                        <a:cs typeface="Times New Roman" panose="02020603050405020304" pitchFamily="18" charset="0"/>
-                      </a:rPr>
-                      <m:t>≤</m:t>
-                    </m:r>
-                  </m:oMath>
-                </a14:m>
-                <a:r>
-                  <a:rPr lang="en-US" dirty="0">
-                    <a:latin typeface="Times New Roman" panose="02020603050405020304" pitchFamily="18" charset="0"/>
-                    <a:ea typeface="Cambria Math" panose="02040503050406030204" pitchFamily="18" charset="0"/>
-                    <a:cs typeface="Times New Roman" panose="02020603050405020304" pitchFamily="18" charset="0"/>
-                  </a:rPr>
-                  <a:t> 2021, </a:t>
-                </a:r>
-                <a:r>
-                  <a:rPr lang="ru-RU" dirty="0">
-                    <a:latin typeface="Times New Roman" panose="02020603050405020304" pitchFamily="18" charset="0"/>
-                    <a:ea typeface="Cambria Math" panose="02040503050406030204" pitchFamily="18" charset="0"/>
-                    <a:cs typeface="Times New Roman" panose="02020603050405020304" pitchFamily="18" charset="0"/>
-                  </a:rPr>
-                  <a:t>тест </a:t>
-                </a:r>
-                <a14:m>
-                  <m:oMath xmlns:m="http://schemas.openxmlformats.org/officeDocument/2006/math">
-                    <m:r>
-                      <a:rPr lang="en-US" i="1" dirty="0" smtClean="0">
-                        <a:latin typeface="Cambria Math" panose="02040503050406030204" pitchFamily="18" charset="0"/>
-                        <a:ea typeface="Cambria Math" panose="02040503050406030204" pitchFamily="18" charset="0"/>
-                        <a:cs typeface="Times New Roman" panose="02020603050405020304" pitchFamily="18" charset="0"/>
-                      </a:rPr>
-                      <m:t>≥</m:t>
-                    </m:r>
-                  </m:oMath>
-                </a14:m>
-                <a:r>
-                  <a:rPr lang="en-US" dirty="0">
-                    <a:latin typeface="Times New Roman" panose="02020603050405020304" pitchFamily="18" charset="0"/>
-                    <a:ea typeface="Cambria Math" panose="02040503050406030204" pitchFamily="18" charset="0"/>
-                    <a:cs typeface="Times New Roman" panose="02020603050405020304" pitchFamily="18" charset="0"/>
-                  </a:rPr>
-                  <a:t> 2022)</a:t>
-                </a:r>
-                <a:r>
-                  <a:rPr lang="ru-RU" dirty="0">
-                    <a:latin typeface="Times New Roman" panose="02020603050405020304" pitchFamily="18" charset="0"/>
-                    <a:ea typeface="Cambria Math" panose="02040503050406030204" pitchFamily="18" charset="0"/>
-                    <a:cs typeface="Times New Roman" panose="02020603050405020304" pitchFamily="18" charset="0"/>
-                  </a:rPr>
-                  <a:t>.</a:t>
-                </a:r>
-              </a:p>
-              <a:p>
-                <a:pPr marL="0" indent="0">
-                  <a:buNone/>
-                </a:pPr>
-                <a:r>
-                  <a:rPr lang="ru-RU" dirty="0">
-                    <a:latin typeface="Times New Roman" panose="02020603050405020304" pitchFamily="18" charset="0"/>
-                    <a:ea typeface="Cambria Math" panose="02040503050406030204" pitchFamily="18" charset="0"/>
-                    <a:cs typeface="Times New Roman" panose="02020603050405020304" pitchFamily="18" charset="0"/>
-                  </a:rPr>
-                  <a:t>Ограничения: модель не учитывает ход переговоров и субъективные факторы.</a:t>
-                </a:r>
-                <a:endParaRPr lang="en-US" dirty="0">
-                  <a:latin typeface="Times New Roman" panose="02020603050405020304" pitchFamily="18" charset="0"/>
-                  <a:ea typeface="Cambria Math" panose="02040503050406030204" pitchFamily="18" charset="0"/>
-                  <a:cs typeface="Times New Roman" panose="02020603050405020304" pitchFamily="18" charset="0"/>
-                </a:endParaRPr>
-              </a:p>
-              <a:p>
-                <a:endParaRPr lang="en-US" b="0" dirty="0">
-                  <a:latin typeface="Times New Roman" panose="02020603050405020304" pitchFamily="18" charset="0"/>
-                  <a:ea typeface="Cambria Math" panose="02040503050406030204" pitchFamily="18" charset="0"/>
-                  <a:cs typeface="Times New Roman" panose="02020603050405020304" pitchFamily="18" charset="0"/>
-                </a:endParaRPr>
-              </a:p>
-              <a:p>
-                <a:pPr marL="0" indent="0">
-                  <a:buNone/>
-                </a:pPr>
-                <a:endParaRPr lang="ru-RU" dirty="0">
-                  <a:latin typeface="Times New Roman" panose="02020603050405020304" pitchFamily="18" charset="0"/>
-                  <a:cs typeface="Times New Roman" panose="02020603050405020304" pitchFamily="18" charset="0"/>
-                </a:endParaRPr>
-              </a:p>
-              <a:p>
-                <a:pPr marL="0" indent="0">
-                  <a:buNone/>
-                </a:pPr>
-                <a:endParaRPr lang="ru-RU" dirty="0">
-                  <a:latin typeface="Times New Roman" panose="02020603050405020304" pitchFamily="18" charset="0"/>
-                  <a:cs typeface="Times New Roman" panose="02020603050405020304" pitchFamily="18" charset="0"/>
-                </a:endParaRPr>
-              </a:p>
-            </p:txBody>
-          </p:sp>
-        </mc:Choice>
-        <mc:Fallback>
-          <p:sp>
-            <p:nvSpPr>
-              <p:cNvPr id="3" name="Объект 2">
-                <a:extLst>
-                  <a:ext uri="{FF2B5EF4-FFF2-40B4-BE49-F238E27FC236}">
-                    <a16:creationId xmlns:a16="http://schemas.microsoft.com/office/drawing/2014/main" id="{B8483174-7622-A79B-D1C6-AAB3F569DE66}"/>
-                  </a:ext>
-                </a:extLst>
-              </p:cNvPr>
-              <p:cNvSpPr>
-                <a:spLocks noGrp="1" noRot="1" noChangeAspect="1" noMove="1" noResize="1" noEditPoints="1" noAdjustHandles="1" noChangeArrowheads="1" noChangeShapeType="1" noTextEdit="1"/>
-              </p:cNvSpPr>
-              <p:nvPr>
-                <p:ph idx="1"/>
-              </p:nvPr>
-            </p:nvSpPr>
-            <p:spPr>
-              <a:blipFill>
-                <a:blip r:embed="rId2"/>
-                <a:stretch>
-                  <a:fillRect l="-1217" t="-3361"/>
-                </a:stretch>
-              </a:blipFill>
-            </p:spPr>
-            <p:txBody>
-              <a:bodyPr/>
-              <a:lstStyle/>
-              <a:p>
-                <a:r>
-                  <a:rPr lang="ru-RU">
-                    <a:noFill/>
-                  </a:rPr>
-                  <a:t> </a:t>
-                </a:r>
-              </a:p>
-            </p:txBody>
-          </p:sp>
-        </mc:Fallback>
-      </mc:AlternateContent>
+      <p:sp>
+        <p:nvSpPr>
+          <p:cNvPr id="3" name="Объект 2">
+            <a:extLst>
+              <a:ext uri="{FF2B5EF4-FFF2-40B4-BE49-F238E27FC236}">
+                <a16:creationId xmlns:a16="http://schemas.microsoft.com/office/drawing/2014/main" id="{B8483174-7622-A79B-D1C6-AAB3F569DE66}"/>
+              </a:ext>
+            </a:extLst>
+          </p:cNvPr>
+          <p:cNvSpPr>
+            <a:spLocks noGrp="1"/>
+          </p:cNvSpPr>
+          <p:nvPr>
+            <p:ph idx="1"/>
+          </p:nvPr>
+        </p:nvSpPr>
+        <p:spPr>
+          <a:xfrm>
+            <a:off x="802650" y="5187153"/>
+            <a:ext cx="10515600" cy="1019887"/>
+          </a:xfrm>
+        </p:spPr>
+        <p:txBody>
+          <a:bodyPr>
+            <a:normAutofit/>
+          </a:bodyPr>
+          <a:lstStyle/>
+          <a:p>
+            <a:pPr marL="0" indent="0">
+              <a:buNone/>
+            </a:pPr>
+            <a:r>
+              <a:rPr lang="ru-RU" sz="2400" dirty="0">
+                <a:solidFill>
+                  <a:schemeClr val="bg1"/>
+                </a:solidFill>
+                <a:latin typeface="Times New Roman" panose="02020603050405020304" pitchFamily="18" charset="0"/>
+                <a:ea typeface="Cambria Math" panose="02040503050406030204" pitchFamily="18" charset="0"/>
+                <a:cs typeface="Times New Roman" panose="02020603050405020304" pitchFamily="18" charset="0"/>
+              </a:rPr>
+              <a:t>Допущения: только открытые данные, только платные трансферы.</a:t>
+            </a:r>
+          </a:p>
+          <a:p>
+            <a:pPr marL="0" indent="0">
+              <a:buNone/>
+            </a:pPr>
+            <a:r>
+              <a:rPr lang="ru-RU" sz="2400" dirty="0">
+                <a:solidFill>
+                  <a:schemeClr val="bg1"/>
+                </a:solidFill>
+                <a:latin typeface="Times New Roman" panose="02020603050405020304" pitchFamily="18" charset="0"/>
+                <a:ea typeface="Cambria Math" panose="02040503050406030204" pitchFamily="18" charset="0"/>
+                <a:cs typeface="Times New Roman" panose="02020603050405020304" pitchFamily="18" charset="0"/>
+              </a:rPr>
+              <a:t>Ограничения: модель не учитывает ход переговоров и субъективные факторы.</a:t>
+            </a:r>
+            <a:endParaRPr lang="en-US" sz="2400" dirty="0">
+              <a:solidFill>
+                <a:schemeClr val="bg1"/>
+              </a:solidFill>
+              <a:latin typeface="Times New Roman" panose="02020603050405020304" pitchFamily="18" charset="0"/>
+              <a:ea typeface="Cambria Math" panose="02040503050406030204" pitchFamily="18" charset="0"/>
+              <a:cs typeface="Times New Roman" panose="02020603050405020304" pitchFamily="18" charset="0"/>
+            </a:endParaRPr>
+          </a:p>
+        </p:txBody>
+      </p:sp>
       <p:sp>
         <p:nvSpPr>
           <p:cNvPr id="4" name="Заголовок 1">
@@ -13819,6 +12704,1036 @@
           </a:p>
         </p:txBody>
       </p:sp>
+      <mc:AlternateContent xmlns:mc="http://schemas.openxmlformats.org/markup-compatibility/2006" xmlns:a14="http://schemas.microsoft.com/office/drawing/2010/main">
+        <mc:Choice Requires="a14">
+          <p:sp>
+            <p:nvSpPr>
+              <p:cNvPr id="8" name="TextBox 7">
+                <a:extLst>
+                  <a:ext uri="{FF2B5EF4-FFF2-40B4-BE49-F238E27FC236}">
+                    <a16:creationId xmlns:a16="http://schemas.microsoft.com/office/drawing/2014/main" id="{DC44228F-21C9-5CDB-DFD2-DE37BC61FF2D}"/>
+                  </a:ext>
+                </a:extLst>
+              </p:cNvPr>
+              <p:cNvSpPr txBox="1"/>
+              <p:nvPr/>
+            </p:nvSpPr>
+            <p:spPr>
+              <a:xfrm>
+                <a:off x="838200" y="1205093"/>
+                <a:ext cx="10444500" cy="1570943"/>
+              </a:xfrm>
+              <a:prstGeom prst="rect">
+                <a:avLst/>
+              </a:prstGeom>
+              <a:noFill/>
+            </p:spPr>
+            <p:txBody>
+              <a:bodyPr wrap="square">
+                <a:spAutoFit/>
+              </a:bodyPr>
+              <a:lstStyle/>
+              <a:p>
+                <a:pPr marL="0" indent="0">
+                  <a:buNone/>
+                </a:pPr>
+                <a:r>
+                  <a:rPr lang="ru-RU" sz="2400" dirty="0">
+                    <a:solidFill>
+                      <a:schemeClr val="bg1"/>
+                    </a:solidFill>
+                    <a:latin typeface="Times New Roman" panose="02020603050405020304" pitchFamily="18" charset="0"/>
+                    <a:cs typeface="Times New Roman" panose="02020603050405020304" pitchFamily="18" charset="0"/>
+                  </a:rPr>
+                  <a:t>Постановка задачи:</a:t>
+                </a:r>
+              </a:p>
+              <a:p>
+                <a:pPr indent="447675">
+                  <a:buFont typeface="Arial" panose="020B0604020202020204" pitchFamily="34" charset="0"/>
+                  <a:buChar char="•"/>
+                </a:pPr>
+                <a:r>
+                  <a:rPr lang="ru-RU" sz="2400" dirty="0">
+                    <a:solidFill>
+                      <a:schemeClr val="bg1"/>
+                    </a:solidFill>
+                    <a:latin typeface="Times New Roman" panose="02020603050405020304" pitchFamily="18" charset="0"/>
+                    <a:cs typeface="Times New Roman" panose="02020603050405020304" pitchFamily="18" charset="0"/>
+                  </a:rPr>
+                  <a:t>Дана выборка: </a:t>
+                </a:r>
+                <a14:m>
+                  <m:oMath xmlns:m="http://schemas.openxmlformats.org/officeDocument/2006/math">
+                    <m:r>
+                      <a:rPr lang="en-US" sz="2400" b="0" i="1" smtClean="0">
+                        <a:solidFill>
+                          <a:schemeClr val="bg1"/>
+                        </a:solidFill>
+                        <a:latin typeface="Cambria Math" panose="02040503050406030204" pitchFamily="18" charset="0"/>
+                        <a:cs typeface="Times New Roman" panose="02020603050405020304" pitchFamily="18" charset="0"/>
+                      </a:rPr>
+                      <m:t>𝐷</m:t>
+                    </m:r>
+                    <m:r>
+                      <a:rPr lang="en-US" sz="2400" b="0" i="1" smtClean="0">
+                        <a:solidFill>
+                          <a:schemeClr val="bg1"/>
+                        </a:solidFill>
+                        <a:latin typeface="Cambria Math" panose="02040503050406030204" pitchFamily="18" charset="0"/>
+                        <a:cs typeface="Times New Roman" panose="02020603050405020304" pitchFamily="18" charset="0"/>
+                      </a:rPr>
+                      <m:t>=</m:t>
+                    </m:r>
+                    <m:sSubSup>
+                      <m:sSubSupPr>
+                        <m:ctrlPr>
+                          <a:rPr lang="en-US" sz="2400" b="0" i="1" smtClean="0">
+                            <a:solidFill>
+                              <a:schemeClr val="bg1"/>
+                            </a:solidFill>
+                            <a:latin typeface="Cambria Math" panose="02040503050406030204" pitchFamily="18" charset="0"/>
+                            <a:cs typeface="Times New Roman" panose="02020603050405020304" pitchFamily="18" charset="0"/>
+                          </a:rPr>
+                        </m:ctrlPr>
+                      </m:sSubSupPr>
+                      <m:e>
+                        <m:r>
+                          <a:rPr lang="en-US" sz="2400" b="0" i="1" smtClean="0">
+                            <a:solidFill>
+                              <a:schemeClr val="bg1"/>
+                            </a:solidFill>
+                            <a:latin typeface="Cambria Math" panose="02040503050406030204" pitchFamily="18" charset="0"/>
+                            <a:cs typeface="Times New Roman" panose="02020603050405020304" pitchFamily="18" charset="0"/>
+                          </a:rPr>
+                          <m:t>{(</m:t>
+                        </m:r>
+                        <m:sSub>
+                          <m:sSubPr>
+                            <m:ctrlPr>
+                              <a:rPr lang="en-US" sz="2400" b="0" i="1" smtClean="0">
+                                <a:solidFill>
+                                  <a:schemeClr val="bg1"/>
+                                </a:solidFill>
+                                <a:latin typeface="Cambria Math" panose="02040503050406030204" pitchFamily="18" charset="0"/>
+                                <a:cs typeface="Times New Roman" panose="02020603050405020304" pitchFamily="18" charset="0"/>
+                              </a:rPr>
+                            </m:ctrlPr>
+                          </m:sSubPr>
+                          <m:e>
+                            <m:r>
+                              <a:rPr lang="en-US" sz="2400" b="0" i="1" smtClean="0">
+                                <a:solidFill>
+                                  <a:schemeClr val="bg1"/>
+                                </a:solidFill>
+                                <a:latin typeface="Cambria Math" panose="02040503050406030204" pitchFamily="18" charset="0"/>
+                                <a:cs typeface="Times New Roman" panose="02020603050405020304" pitchFamily="18" charset="0"/>
+                              </a:rPr>
+                              <m:t>𝑥</m:t>
+                            </m:r>
+                          </m:e>
+                          <m:sub>
+                            <m:r>
+                              <a:rPr lang="en-US" sz="2400" b="0" i="1" smtClean="0">
+                                <a:solidFill>
+                                  <a:schemeClr val="bg1"/>
+                                </a:solidFill>
+                                <a:latin typeface="Cambria Math" panose="02040503050406030204" pitchFamily="18" charset="0"/>
+                                <a:cs typeface="Times New Roman" panose="02020603050405020304" pitchFamily="18" charset="0"/>
+                              </a:rPr>
+                              <m:t>𝑖</m:t>
+                            </m:r>
+                          </m:sub>
+                        </m:sSub>
+                        <m:r>
+                          <a:rPr lang="en-US" sz="2400" b="0" i="1" smtClean="0">
+                            <a:solidFill>
+                              <a:schemeClr val="bg1"/>
+                            </a:solidFill>
+                            <a:latin typeface="Cambria Math" panose="02040503050406030204" pitchFamily="18" charset="0"/>
+                            <a:cs typeface="Times New Roman" panose="02020603050405020304" pitchFamily="18" charset="0"/>
+                          </a:rPr>
+                          <m:t>,</m:t>
+                        </m:r>
+                        <m:sSub>
+                          <m:sSubPr>
+                            <m:ctrlPr>
+                              <a:rPr lang="en-US" sz="2400" b="0" i="1" smtClean="0">
+                                <a:solidFill>
+                                  <a:schemeClr val="bg1"/>
+                                </a:solidFill>
+                                <a:latin typeface="Cambria Math" panose="02040503050406030204" pitchFamily="18" charset="0"/>
+                                <a:cs typeface="Times New Roman" panose="02020603050405020304" pitchFamily="18" charset="0"/>
+                              </a:rPr>
+                            </m:ctrlPr>
+                          </m:sSubPr>
+                          <m:e>
+                            <m:r>
+                              <a:rPr lang="en-US" sz="2400" b="0" i="1" smtClean="0">
+                                <a:solidFill>
+                                  <a:schemeClr val="bg1"/>
+                                </a:solidFill>
+                                <a:latin typeface="Cambria Math" panose="02040503050406030204" pitchFamily="18" charset="0"/>
+                                <a:cs typeface="Times New Roman" panose="02020603050405020304" pitchFamily="18" charset="0"/>
+                              </a:rPr>
+                              <m:t>𝑦</m:t>
+                            </m:r>
+                          </m:e>
+                          <m:sub>
+                            <m:r>
+                              <a:rPr lang="en-US" sz="2400" b="0" i="1" smtClean="0">
+                                <a:solidFill>
+                                  <a:schemeClr val="bg1"/>
+                                </a:solidFill>
+                                <a:latin typeface="Cambria Math" panose="02040503050406030204" pitchFamily="18" charset="0"/>
+                                <a:cs typeface="Times New Roman" panose="02020603050405020304" pitchFamily="18" charset="0"/>
+                              </a:rPr>
+                              <m:t>𝑖</m:t>
+                            </m:r>
+                          </m:sub>
+                        </m:sSub>
+                        <m:r>
+                          <a:rPr lang="en-US" sz="2400" b="0" i="1" smtClean="0">
+                            <a:solidFill>
+                              <a:schemeClr val="bg1"/>
+                            </a:solidFill>
+                            <a:latin typeface="Cambria Math" panose="02040503050406030204" pitchFamily="18" charset="0"/>
+                            <a:cs typeface="Times New Roman" panose="02020603050405020304" pitchFamily="18" charset="0"/>
+                          </a:rPr>
+                          <m:t>)}</m:t>
+                        </m:r>
+                      </m:e>
+                      <m:sub>
+                        <m:r>
+                          <a:rPr lang="en-US" sz="2400" b="0" i="1" smtClean="0">
+                            <a:solidFill>
+                              <a:schemeClr val="bg1"/>
+                            </a:solidFill>
+                            <a:latin typeface="Cambria Math" panose="02040503050406030204" pitchFamily="18" charset="0"/>
+                            <a:cs typeface="Times New Roman" panose="02020603050405020304" pitchFamily="18" charset="0"/>
+                          </a:rPr>
+                          <m:t>𝑖</m:t>
+                        </m:r>
+                        <m:r>
+                          <a:rPr lang="en-US" sz="2400" b="0" i="1" smtClean="0">
+                            <a:solidFill>
+                              <a:schemeClr val="bg1"/>
+                            </a:solidFill>
+                            <a:latin typeface="Cambria Math" panose="02040503050406030204" pitchFamily="18" charset="0"/>
+                            <a:cs typeface="Times New Roman" panose="02020603050405020304" pitchFamily="18" charset="0"/>
+                          </a:rPr>
+                          <m:t>=1</m:t>
+                        </m:r>
+                      </m:sub>
+                      <m:sup>
+                        <m:r>
+                          <a:rPr lang="en-US" sz="2400" b="0" i="1" smtClean="0">
+                            <a:solidFill>
+                              <a:schemeClr val="bg1"/>
+                            </a:solidFill>
+                            <a:latin typeface="Cambria Math" panose="02040503050406030204" pitchFamily="18" charset="0"/>
+                            <a:cs typeface="Times New Roman" panose="02020603050405020304" pitchFamily="18" charset="0"/>
+                          </a:rPr>
+                          <m:t>𝑛</m:t>
+                        </m:r>
+                      </m:sup>
+                    </m:sSubSup>
+                  </m:oMath>
+                </a14:m>
+                <a:r>
+                  <a:rPr lang="ru-RU" sz="2400" dirty="0">
+                    <a:solidFill>
+                      <a:schemeClr val="bg1"/>
+                    </a:solidFill>
+                    <a:latin typeface="Times New Roman" panose="02020603050405020304" pitchFamily="18" charset="0"/>
+                    <a:cs typeface="Times New Roman" panose="02020603050405020304" pitchFamily="18" charset="0"/>
+                  </a:rPr>
+                  <a:t>, </a:t>
+                </a:r>
+                <a14:m>
+                  <m:oMath xmlns:m="http://schemas.openxmlformats.org/officeDocument/2006/math">
+                    <m:sSub>
+                      <m:sSubPr>
+                        <m:ctrlPr>
+                          <a:rPr lang="en-US" sz="2400" i="1">
+                            <a:solidFill>
+                              <a:schemeClr val="bg1"/>
+                            </a:solidFill>
+                            <a:latin typeface="Cambria Math" panose="02040503050406030204" pitchFamily="18" charset="0"/>
+                            <a:cs typeface="Times New Roman" panose="02020603050405020304" pitchFamily="18" charset="0"/>
+                          </a:rPr>
+                        </m:ctrlPr>
+                      </m:sSubPr>
+                      <m:e>
+                        <m:r>
+                          <a:rPr lang="en-US" sz="2400" i="1">
+                            <a:solidFill>
+                              <a:schemeClr val="bg1"/>
+                            </a:solidFill>
+                            <a:latin typeface="Cambria Math" panose="02040503050406030204" pitchFamily="18" charset="0"/>
+                            <a:cs typeface="Times New Roman" panose="02020603050405020304" pitchFamily="18" charset="0"/>
+                          </a:rPr>
+                          <m:t>𝑥</m:t>
+                        </m:r>
+                      </m:e>
+                      <m:sub>
+                        <m:r>
+                          <a:rPr lang="en-US" sz="2400" i="1">
+                            <a:solidFill>
+                              <a:schemeClr val="bg1"/>
+                            </a:solidFill>
+                            <a:latin typeface="Cambria Math" panose="02040503050406030204" pitchFamily="18" charset="0"/>
+                            <a:cs typeface="Times New Roman" panose="02020603050405020304" pitchFamily="18" charset="0"/>
+                          </a:rPr>
+                          <m:t>𝑖</m:t>
+                        </m:r>
+                      </m:sub>
+                    </m:sSub>
+                  </m:oMath>
+                </a14:m>
+                <a:r>
+                  <a:rPr lang="ru-RU" sz="2400" dirty="0">
+                    <a:solidFill>
+                      <a:schemeClr val="bg1"/>
+                    </a:solidFill>
+                    <a:latin typeface="Times New Roman" panose="02020603050405020304" pitchFamily="18" charset="0"/>
+                    <a:cs typeface="Times New Roman" panose="02020603050405020304" pitchFamily="18" charset="0"/>
+                  </a:rPr>
+                  <a:t> </a:t>
+                </a:r>
+                <a:r>
+                  <a:rPr lang="en-US" sz="2400" dirty="0">
+                    <a:solidFill>
+                      <a:schemeClr val="bg1"/>
+                    </a:solidFill>
+                    <a:latin typeface="Times New Roman" panose="02020603050405020304" pitchFamily="18" charset="0"/>
+                    <a:ea typeface="Cambria Math" panose="02040503050406030204" pitchFamily="18" charset="0"/>
+                    <a:cs typeface="Times New Roman" panose="02020603050405020304" pitchFamily="18" charset="0"/>
+                  </a:rPr>
+                  <a:t>—</a:t>
+                </a:r>
+                <a:r>
+                  <a:rPr lang="ru-RU" sz="2400" dirty="0">
+                    <a:solidFill>
+                      <a:schemeClr val="bg1"/>
+                    </a:solidFill>
+                    <a:latin typeface="Times New Roman" panose="02020603050405020304" pitchFamily="18" charset="0"/>
+                    <a:cs typeface="Times New Roman" panose="02020603050405020304" pitchFamily="18" charset="0"/>
+                  </a:rPr>
+                  <a:t> признаки</a:t>
+                </a:r>
+                <a:r>
+                  <a:rPr lang="en-US" sz="2400" dirty="0">
+                    <a:solidFill>
+                      <a:schemeClr val="bg1"/>
+                    </a:solidFill>
+                    <a:latin typeface="Times New Roman" panose="02020603050405020304" pitchFamily="18" charset="0"/>
+                    <a:cs typeface="Times New Roman" panose="02020603050405020304" pitchFamily="18" charset="0"/>
+                  </a:rPr>
+                  <a:t> </a:t>
+                </a:r>
+                <a:r>
+                  <a:rPr lang="ru-RU" sz="2400" dirty="0">
+                    <a:solidFill>
+                      <a:schemeClr val="bg1"/>
+                    </a:solidFill>
+                    <a:latin typeface="Times New Roman" panose="02020603050405020304" pitchFamily="18" charset="0"/>
+                    <a:cs typeface="Times New Roman" panose="02020603050405020304" pitchFamily="18" charset="0"/>
+                  </a:rPr>
+                  <a:t>игрока, </a:t>
+                </a:r>
+                <a14:m>
+                  <m:oMath xmlns:m="http://schemas.openxmlformats.org/officeDocument/2006/math">
+                    <m:sSub>
+                      <m:sSubPr>
+                        <m:ctrlPr>
+                          <a:rPr lang="en-US" sz="2400" i="1">
+                            <a:solidFill>
+                              <a:schemeClr val="bg1"/>
+                            </a:solidFill>
+                            <a:latin typeface="Cambria Math" panose="02040503050406030204" pitchFamily="18" charset="0"/>
+                            <a:cs typeface="Times New Roman" panose="02020603050405020304" pitchFamily="18" charset="0"/>
+                          </a:rPr>
+                        </m:ctrlPr>
+                      </m:sSubPr>
+                      <m:e>
+                        <m:r>
+                          <a:rPr lang="en-US" sz="2400" i="1">
+                            <a:solidFill>
+                              <a:schemeClr val="bg1"/>
+                            </a:solidFill>
+                            <a:latin typeface="Cambria Math" panose="02040503050406030204" pitchFamily="18" charset="0"/>
+                            <a:cs typeface="Times New Roman" panose="02020603050405020304" pitchFamily="18" charset="0"/>
+                          </a:rPr>
+                          <m:t>𝑦</m:t>
+                        </m:r>
+                      </m:e>
+                      <m:sub>
+                        <m:r>
+                          <a:rPr lang="en-US" sz="2400" i="1">
+                            <a:solidFill>
+                              <a:schemeClr val="bg1"/>
+                            </a:solidFill>
+                            <a:latin typeface="Cambria Math" panose="02040503050406030204" pitchFamily="18" charset="0"/>
+                            <a:cs typeface="Times New Roman" panose="02020603050405020304" pitchFamily="18" charset="0"/>
+                          </a:rPr>
+                          <m:t>𝑖</m:t>
+                        </m:r>
+                      </m:sub>
+                    </m:sSub>
+                  </m:oMath>
+                </a14:m>
+                <a:r>
+                  <a:rPr lang="ru-RU" sz="2400" dirty="0">
+                    <a:solidFill>
+                      <a:schemeClr val="bg1"/>
+                    </a:solidFill>
+                    <a:latin typeface="Times New Roman" panose="02020603050405020304" pitchFamily="18" charset="0"/>
+                    <a:cs typeface="Times New Roman" panose="02020603050405020304" pitchFamily="18" charset="0"/>
+                  </a:rPr>
+                  <a:t> </a:t>
+                </a:r>
+                <a:r>
+                  <a:rPr lang="en-US" sz="2400" dirty="0">
+                    <a:solidFill>
+                      <a:schemeClr val="bg1"/>
+                    </a:solidFill>
+                    <a:latin typeface="Times New Roman" panose="02020603050405020304" pitchFamily="18" charset="0"/>
+                    <a:ea typeface="Cambria Math" panose="02040503050406030204" pitchFamily="18" charset="0"/>
+                    <a:cs typeface="Times New Roman" panose="02020603050405020304" pitchFamily="18" charset="0"/>
+                  </a:rPr>
+                  <a:t>—</a:t>
+                </a:r>
+                <a:r>
+                  <a:rPr lang="ru-RU" sz="2400" dirty="0">
+                    <a:solidFill>
+                      <a:schemeClr val="bg1"/>
+                    </a:solidFill>
+                    <a:latin typeface="Times New Roman" panose="02020603050405020304" pitchFamily="18" charset="0"/>
+                    <a:cs typeface="Times New Roman" panose="02020603050405020304" pitchFamily="18" charset="0"/>
+                  </a:rPr>
+                  <a:t> стоимость</a:t>
+                </a:r>
+                <a:r>
+                  <a:rPr lang="en-US" sz="2400" dirty="0">
+                    <a:solidFill>
+                      <a:schemeClr val="bg1"/>
+                    </a:solidFill>
+                    <a:latin typeface="Times New Roman" panose="02020603050405020304" pitchFamily="18" charset="0"/>
+                    <a:cs typeface="Times New Roman" panose="02020603050405020304" pitchFamily="18" charset="0"/>
+                  </a:rPr>
+                  <a:t> </a:t>
+                </a:r>
+                <a:r>
+                  <a:rPr lang="ru-RU" sz="2400" dirty="0">
+                    <a:solidFill>
+                      <a:schemeClr val="bg1"/>
+                    </a:solidFill>
+                    <a:latin typeface="Times New Roman" panose="02020603050405020304" pitchFamily="18" charset="0"/>
+                    <a:cs typeface="Times New Roman" panose="02020603050405020304" pitchFamily="18" charset="0"/>
+                  </a:rPr>
+                  <a:t>трансфера</a:t>
+                </a:r>
+                <a:r>
+                  <a:rPr lang="en-US" sz="2400" dirty="0">
+                    <a:solidFill>
+                      <a:schemeClr val="bg1"/>
+                    </a:solidFill>
+                    <a:latin typeface="Times New Roman" panose="02020603050405020304" pitchFamily="18" charset="0"/>
+                    <a:cs typeface="Times New Roman" panose="02020603050405020304" pitchFamily="18" charset="0"/>
+                  </a:rPr>
+                  <a:t>;</a:t>
+                </a:r>
+                <a:endParaRPr lang="ru-RU" sz="2400" dirty="0">
+                  <a:solidFill>
+                    <a:schemeClr val="bg1"/>
+                  </a:solidFill>
+                  <a:latin typeface="Times New Roman" panose="02020603050405020304" pitchFamily="18" charset="0"/>
+                  <a:cs typeface="Times New Roman" panose="02020603050405020304" pitchFamily="18" charset="0"/>
+                </a:endParaRPr>
+              </a:p>
+              <a:p>
+                <a:pPr indent="447675">
+                  <a:buFont typeface="Arial" panose="020B0604020202020204" pitchFamily="34" charset="0"/>
+                  <a:buChar char="•"/>
+                </a:pPr>
+                <a:r>
+                  <a:rPr lang="ru-RU" sz="2400" dirty="0">
+                    <a:solidFill>
+                      <a:schemeClr val="bg1"/>
+                    </a:solidFill>
+                    <a:latin typeface="Times New Roman" panose="02020603050405020304" pitchFamily="18" charset="0"/>
+                    <a:ea typeface="Cambria Math" panose="02040503050406030204" pitchFamily="18" charset="0"/>
+                    <a:cs typeface="Times New Roman" panose="02020603050405020304" pitchFamily="18" charset="0"/>
+                  </a:rPr>
+                  <a:t>Требуется построить </a:t>
+                </a:r>
+                <a14:m>
+                  <m:oMath xmlns:m="http://schemas.openxmlformats.org/officeDocument/2006/math">
+                    <m:r>
+                      <a:rPr lang="en-US" sz="2400" b="0" i="1" smtClean="0">
+                        <a:solidFill>
+                          <a:schemeClr val="bg1"/>
+                        </a:solidFill>
+                        <a:latin typeface="Cambria Math" panose="02040503050406030204" pitchFamily="18" charset="0"/>
+                        <a:cs typeface="Times New Roman" panose="02020603050405020304" pitchFamily="18" charset="0"/>
+                      </a:rPr>
+                      <m:t>𝑓</m:t>
+                    </m:r>
+                    <m:r>
+                      <a:rPr lang="en-US" sz="2400" b="0" i="1" smtClean="0">
+                        <a:solidFill>
+                          <a:schemeClr val="bg1"/>
+                        </a:solidFill>
+                        <a:latin typeface="Cambria Math" panose="02040503050406030204" pitchFamily="18" charset="0"/>
+                        <a:cs typeface="Times New Roman" panose="02020603050405020304" pitchFamily="18" charset="0"/>
+                      </a:rPr>
+                      <m:t>:</m:t>
+                    </m:r>
+                    <m:r>
+                      <a:rPr lang="en-US" sz="2400" b="0" i="1" smtClean="0">
+                        <a:solidFill>
+                          <a:schemeClr val="bg1"/>
+                        </a:solidFill>
+                        <a:latin typeface="Cambria Math" panose="02040503050406030204" pitchFamily="18" charset="0"/>
+                        <a:cs typeface="Times New Roman" panose="02020603050405020304" pitchFamily="18" charset="0"/>
+                      </a:rPr>
+                      <m:t>𝑋</m:t>
+                    </m:r>
+                    <m:r>
+                      <a:rPr lang="en-US" sz="2400" b="0" i="1" smtClean="0">
+                        <a:solidFill>
+                          <a:schemeClr val="bg1"/>
+                        </a:solidFill>
+                        <a:latin typeface="Cambria Math" panose="02040503050406030204" pitchFamily="18" charset="0"/>
+                        <a:ea typeface="Cambria Math" panose="02040503050406030204" pitchFamily="18" charset="0"/>
+                        <a:cs typeface="Times New Roman" panose="02020603050405020304" pitchFamily="18" charset="0"/>
+                      </a:rPr>
+                      <m:t>→</m:t>
+                    </m:r>
+                    <m:r>
+                      <a:rPr lang="en-US" sz="2400" b="0" i="1" smtClean="0">
+                        <a:solidFill>
+                          <a:schemeClr val="bg1"/>
+                        </a:solidFill>
+                        <a:latin typeface="Cambria Math" panose="02040503050406030204" pitchFamily="18" charset="0"/>
+                        <a:ea typeface="Cambria Math" panose="02040503050406030204" pitchFamily="18" charset="0"/>
+                        <a:cs typeface="Times New Roman" panose="02020603050405020304" pitchFamily="18" charset="0"/>
+                      </a:rPr>
+                      <m:t>𝑌</m:t>
+                    </m:r>
+                  </m:oMath>
+                </a14:m>
+                <a:r>
+                  <a:rPr lang="ru-RU" sz="2400" b="0" dirty="0">
+                    <a:solidFill>
+                      <a:schemeClr val="bg1"/>
+                    </a:solidFill>
+                    <a:latin typeface="Times New Roman" panose="02020603050405020304" pitchFamily="18" charset="0"/>
+                    <a:ea typeface="Cambria Math" panose="02040503050406030204" pitchFamily="18" charset="0"/>
+                    <a:cs typeface="Times New Roman" panose="02020603050405020304" pitchFamily="18" charset="0"/>
+                  </a:rPr>
+                  <a:t>, с минимальной ошибкой</a:t>
+                </a:r>
+                <a:r>
+                  <a:rPr lang="ru-RU" sz="2400" dirty="0">
+                    <a:solidFill>
+                      <a:schemeClr val="bg1"/>
+                    </a:solidFill>
+                    <a:latin typeface="Times New Roman" panose="02020603050405020304" pitchFamily="18" charset="0"/>
+                    <a:ea typeface="Cambria Math" panose="02040503050406030204" pitchFamily="18" charset="0"/>
+                    <a:cs typeface="Times New Roman" panose="02020603050405020304" pitchFamily="18" charset="0"/>
+                  </a:rPr>
+                  <a:t>. </a:t>
+                </a:r>
+                <a:endParaRPr lang="ru-RU" sz="2400" dirty="0">
+                  <a:solidFill>
+                    <a:schemeClr val="bg1"/>
+                  </a:solidFill>
+                  <a:latin typeface="Times New Roman" panose="02020603050405020304" pitchFamily="18" charset="0"/>
+                  <a:cs typeface="Times New Roman" panose="02020603050405020304" pitchFamily="18" charset="0"/>
+                </a:endParaRPr>
+              </a:p>
+            </p:txBody>
+          </p:sp>
+        </mc:Choice>
+        <mc:Fallback xmlns="">
+          <p:sp>
+            <p:nvSpPr>
+              <p:cNvPr id="8" name="TextBox 7">
+                <a:extLst>
+                  <a:ext uri="{FF2B5EF4-FFF2-40B4-BE49-F238E27FC236}">
+                    <a16:creationId xmlns:a16="http://schemas.microsoft.com/office/drawing/2014/main" id="{DC44228F-21C9-5CDB-DFD2-DE37BC61FF2D}"/>
+                  </a:ext>
+                </a:extLst>
+              </p:cNvPr>
+              <p:cNvSpPr txBox="1">
+                <a:spLocks noRot="1" noChangeAspect="1" noMove="1" noResize="1" noEditPoints="1" noAdjustHandles="1" noChangeArrowheads="1" noChangeShapeType="1" noTextEdit="1"/>
+              </p:cNvSpPr>
+              <p:nvPr/>
+            </p:nvSpPr>
+            <p:spPr>
+              <a:xfrm>
+                <a:off x="838200" y="1205093"/>
+                <a:ext cx="10444500" cy="1570943"/>
+              </a:xfrm>
+              <a:prstGeom prst="rect">
+                <a:avLst/>
+              </a:prstGeom>
+              <a:blipFill>
+                <a:blip r:embed="rId2"/>
+                <a:stretch>
+                  <a:fillRect l="-934" t="-3113" b="-8171"/>
+                </a:stretch>
+              </a:blipFill>
+            </p:spPr>
+            <p:txBody>
+              <a:bodyPr/>
+              <a:lstStyle/>
+              <a:p>
+                <a:r>
+                  <a:rPr lang="ru-RU">
+                    <a:noFill/>
+                  </a:rPr>
+                  <a:t> </a:t>
+                </a:r>
+              </a:p>
+            </p:txBody>
+          </p:sp>
+        </mc:Fallback>
+      </mc:AlternateContent>
+      <mc:AlternateContent xmlns:mc="http://schemas.openxmlformats.org/markup-compatibility/2006" xmlns:a14="http://schemas.microsoft.com/office/drawing/2010/main">
+        <mc:Choice Requires="a14">
+          <p:sp>
+            <p:nvSpPr>
+              <p:cNvPr id="11" name="TextBox 10">
+                <a:extLst>
+                  <a:ext uri="{FF2B5EF4-FFF2-40B4-BE49-F238E27FC236}">
+                    <a16:creationId xmlns:a16="http://schemas.microsoft.com/office/drawing/2014/main" id="{7998FA91-88FB-1D49-CFF8-ACB75931B88F}"/>
+                  </a:ext>
+                </a:extLst>
+              </p:cNvPr>
+              <p:cNvSpPr txBox="1"/>
+              <p:nvPr/>
+            </p:nvSpPr>
+            <p:spPr>
+              <a:xfrm>
+                <a:off x="873750" y="3148770"/>
+                <a:ext cx="10444500" cy="1569660"/>
+              </a:xfrm>
+              <a:prstGeom prst="rect">
+                <a:avLst/>
+              </a:prstGeom>
+              <a:noFill/>
+            </p:spPr>
+            <p:txBody>
+              <a:bodyPr wrap="square">
+                <a:spAutoFit/>
+              </a:bodyPr>
+              <a:lstStyle/>
+              <a:p>
+                <a:pPr marL="0" indent="0">
+                  <a:buNone/>
+                </a:pPr>
+                <a:r>
+                  <a:rPr lang="ru-RU" sz="2400" dirty="0">
+                    <a:solidFill>
+                      <a:schemeClr val="bg1"/>
+                    </a:solidFill>
+                    <a:latin typeface="Times New Roman" panose="02020603050405020304" pitchFamily="18" charset="0"/>
+                    <a:cs typeface="Times New Roman" panose="02020603050405020304" pitchFamily="18" charset="0"/>
+                  </a:rPr>
+                  <a:t>Метрики:</a:t>
+                </a:r>
+              </a:p>
+              <a:p>
+                <a:pPr indent="447675">
+                  <a:buFont typeface="Arial" panose="020B0604020202020204" pitchFamily="34" charset="0"/>
+                  <a:buChar char="•"/>
+                </a:pPr>
+                <a14:m>
+                  <m:oMath xmlns:m="http://schemas.openxmlformats.org/officeDocument/2006/math">
+                    <m:r>
+                      <a:rPr lang="en-US" sz="2400" i="1" smtClean="0">
+                        <a:solidFill>
+                          <a:schemeClr val="bg1"/>
+                        </a:solidFill>
+                        <a:latin typeface="Cambria Math" panose="02040503050406030204" pitchFamily="18" charset="0"/>
+                        <a:ea typeface="Cambria Math" panose="02040503050406030204" pitchFamily="18" charset="0"/>
+                        <a:cs typeface="Times New Roman" panose="02020603050405020304" pitchFamily="18" charset="0"/>
+                      </a:rPr>
+                      <m:t>𝑀𝐴𝐸</m:t>
+                    </m:r>
+                    <m:r>
+                      <a:rPr lang="ru-RU" sz="2400" i="1">
+                        <a:solidFill>
+                          <a:schemeClr val="bg1"/>
+                        </a:solidFill>
+                        <a:latin typeface="Cambria Math" panose="02040503050406030204" pitchFamily="18" charset="0"/>
+                        <a:ea typeface="Cambria Math" panose="02040503050406030204" pitchFamily="18" charset="0"/>
+                        <a:cs typeface="Times New Roman" panose="02020603050405020304" pitchFamily="18" charset="0"/>
+                      </a:rPr>
+                      <m:t> (</m:t>
+                    </m:r>
+                    <m:r>
+                      <m:rPr>
+                        <m:nor/>
+                      </m:rPr>
+                      <a:rPr lang="ru-RU" sz="2400" dirty="0">
+                        <a:solidFill>
+                          <a:schemeClr val="bg1"/>
+                        </a:solidFill>
+                        <a:latin typeface="Times New Roman" panose="02020603050405020304" pitchFamily="18" charset="0"/>
+                        <a:cs typeface="Times New Roman" panose="02020603050405020304" pitchFamily="18" charset="0"/>
+                      </a:rPr>
+                      <m:t>средняя абсолютная ошибка</m:t>
+                    </m:r>
+                    <m:r>
+                      <a:rPr lang="ru-RU" sz="2400" i="1">
+                        <a:solidFill>
+                          <a:schemeClr val="bg1"/>
+                        </a:solidFill>
+                        <a:latin typeface="Cambria Math" panose="02040503050406030204" pitchFamily="18" charset="0"/>
+                        <a:ea typeface="Cambria Math" panose="02040503050406030204" pitchFamily="18" charset="0"/>
+                        <a:cs typeface="Times New Roman" panose="02020603050405020304" pitchFamily="18" charset="0"/>
+                      </a:rPr>
+                      <m:t>)</m:t>
+                    </m:r>
+                  </m:oMath>
+                </a14:m>
+                <a:r>
+                  <a:rPr lang="ru-RU" sz="2400" dirty="0">
+                    <a:solidFill>
+                      <a:schemeClr val="bg1"/>
+                    </a:solidFill>
+                    <a:latin typeface="Times New Roman" panose="02020603050405020304" pitchFamily="18" charset="0"/>
+                    <a:ea typeface="Cambria Math" panose="02040503050406030204" pitchFamily="18" charset="0"/>
+                    <a:cs typeface="Times New Roman" panose="02020603050405020304" pitchFamily="18" charset="0"/>
+                  </a:rPr>
+                  <a:t> </a:t>
+                </a:r>
+                <a14:m>
+                  <m:oMath xmlns:m="http://schemas.openxmlformats.org/officeDocument/2006/math">
+                    <m:r>
+                      <a:rPr lang="en-US" sz="2400" i="1">
+                        <a:solidFill>
+                          <a:schemeClr val="bg1"/>
+                        </a:solidFill>
+                        <a:latin typeface="Cambria Math" panose="02040503050406030204" pitchFamily="18" charset="0"/>
+                        <a:ea typeface="Cambria Math" panose="02040503050406030204" pitchFamily="18" charset="0"/>
+                        <a:cs typeface="Times New Roman" panose="02020603050405020304" pitchFamily="18" charset="0"/>
+                      </a:rPr>
+                      <m:t>≈</m:t>
+                    </m:r>
+                    <m:r>
+                      <a:rPr lang="ru-RU" sz="2400" i="1">
+                        <a:solidFill>
+                          <a:schemeClr val="bg1"/>
+                        </a:solidFill>
+                        <a:latin typeface="Cambria Math" panose="02040503050406030204" pitchFamily="18" charset="0"/>
+                        <a:ea typeface="Cambria Math" panose="02040503050406030204" pitchFamily="18" charset="0"/>
+                        <a:cs typeface="Times New Roman" panose="02020603050405020304" pitchFamily="18" charset="0"/>
+                      </a:rPr>
+                      <m:t>3,0 млн</m:t>
+                    </m:r>
+                  </m:oMath>
+                </a14:m>
+                <a:r>
+                  <a:rPr lang="ru-RU" sz="2400" dirty="0">
+                    <a:solidFill>
+                      <a:schemeClr val="bg1"/>
+                    </a:solidFill>
+                    <a:latin typeface="Times New Roman" panose="02020603050405020304" pitchFamily="18" charset="0"/>
+                    <a:ea typeface="Cambria Math" panose="02040503050406030204" pitchFamily="18" charset="0"/>
+                    <a:cs typeface="Times New Roman" panose="02020603050405020304" pitchFamily="18" charset="0"/>
+                  </a:rPr>
+                  <a:t> евро;</a:t>
+                </a:r>
+                <a:r>
+                  <a:rPr lang="en-US" sz="2400" dirty="0">
+                    <a:solidFill>
+                      <a:schemeClr val="bg1"/>
+                    </a:solidFill>
+                    <a:latin typeface="Times New Roman" panose="02020603050405020304" pitchFamily="18" charset="0"/>
+                    <a:ea typeface="Cambria Math" panose="02040503050406030204" pitchFamily="18" charset="0"/>
+                    <a:cs typeface="Times New Roman" panose="02020603050405020304" pitchFamily="18" charset="0"/>
+                  </a:rPr>
+                  <a:t> </a:t>
+                </a:r>
+                <a:endParaRPr lang="ru-RU" sz="2400" i="1" dirty="0">
+                  <a:solidFill>
+                    <a:schemeClr val="bg1"/>
+                  </a:solidFill>
+                  <a:latin typeface="Cambria Math" panose="02040503050406030204" pitchFamily="18" charset="0"/>
+                  <a:ea typeface="Cambria Math" panose="02040503050406030204" pitchFamily="18" charset="0"/>
+                  <a:cs typeface="Times New Roman" panose="02020603050405020304" pitchFamily="18" charset="0"/>
+                </a:endParaRPr>
+              </a:p>
+              <a:p>
+                <a:pPr indent="447675">
+                  <a:buFont typeface="Arial" panose="020B0604020202020204" pitchFamily="34" charset="0"/>
+                  <a:buChar char="•"/>
+                </a:pPr>
+                <a14:m>
+                  <m:oMath xmlns:m="http://schemas.openxmlformats.org/officeDocument/2006/math">
+                    <m:sSup>
+                      <m:sSupPr>
+                        <m:ctrlPr>
+                          <a:rPr lang="en-US" sz="2400" i="1">
+                            <a:solidFill>
+                              <a:schemeClr val="bg1"/>
+                            </a:solidFill>
+                            <a:latin typeface="Cambria Math" panose="02040503050406030204" pitchFamily="18" charset="0"/>
+                            <a:ea typeface="Cambria Math" panose="02040503050406030204" pitchFamily="18" charset="0"/>
+                            <a:cs typeface="Times New Roman" panose="02020603050405020304" pitchFamily="18" charset="0"/>
+                          </a:rPr>
+                        </m:ctrlPr>
+                      </m:sSupPr>
+                      <m:e>
+                        <m:r>
+                          <a:rPr lang="en-US" sz="2400" i="1">
+                            <a:solidFill>
+                              <a:schemeClr val="bg1"/>
+                            </a:solidFill>
+                            <a:latin typeface="Cambria Math" panose="02040503050406030204" pitchFamily="18" charset="0"/>
+                            <a:ea typeface="Cambria Math" panose="02040503050406030204" pitchFamily="18" charset="0"/>
+                            <a:cs typeface="Times New Roman" panose="02020603050405020304" pitchFamily="18" charset="0"/>
+                          </a:rPr>
+                          <m:t>𝑅</m:t>
+                        </m:r>
+                      </m:e>
+                      <m:sup>
+                        <m:r>
+                          <a:rPr lang="en-US" sz="2400" i="1">
+                            <a:solidFill>
+                              <a:schemeClr val="bg1"/>
+                            </a:solidFill>
+                            <a:latin typeface="Cambria Math" panose="02040503050406030204" pitchFamily="18" charset="0"/>
+                            <a:ea typeface="Cambria Math" panose="02040503050406030204" pitchFamily="18" charset="0"/>
+                            <a:cs typeface="Times New Roman" panose="02020603050405020304" pitchFamily="18" charset="0"/>
+                          </a:rPr>
+                          <m:t>2</m:t>
+                        </m:r>
+                      </m:sup>
+                    </m:sSup>
+                    <m:r>
+                      <a:rPr lang="ru-RU" sz="2400">
+                        <a:solidFill>
+                          <a:schemeClr val="bg1"/>
+                        </a:solidFill>
+                        <a:latin typeface="Cambria Math" panose="02040503050406030204" pitchFamily="18" charset="0"/>
+                        <a:ea typeface="Cambria Math" panose="02040503050406030204" pitchFamily="18" charset="0"/>
+                        <a:cs typeface="Times New Roman" panose="02020603050405020304" pitchFamily="18" charset="0"/>
+                      </a:rPr>
+                      <m:t> </m:t>
+                    </m:r>
+                  </m:oMath>
+                </a14:m>
+                <a:r>
+                  <a:rPr lang="ru-RU" sz="2400" dirty="0">
+                    <a:solidFill>
+                      <a:schemeClr val="bg1"/>
+                    </a:solidFill>
+                    <a:latin typeface="Times New Roman" panose="02020603050405020304" pitchFamily="18" charset="0"/>
+                    <a:ea typeface="Cambria Math" panose="02040503050406030204" pitchFamily="18" charset="0"/>
+                    <a:cs typeface="Times New Roman" panose="02020603050405020304" pitchFamily="18" charset="0"/>
+                  </a:rPr>
+                  <a:t>(</a:t>
+                </a:r>
+                <a:r>
+                  <a:rPr lang="ru-RU" sz="2400" dirty="0">
+                    <a:solidFill>
+                      <a:schemeClr val="bg1"/>
+                    </a:solidFill>
+                    <a:latin typeface="Times New Roman" panose="02020603050405020304" pitchFamily="18" charset="0"/>
+                    <a:cs typeface="Times New Roman" panose="02020603050405020304" pitchFamily="18" charset="0"/>
+                  </a:rPr>
+                  <a:t>коэффициент детерминации</a:t>
+                </a:r>
+                <a:r>
+                  <a:rPr lang="ru-RU" sz="2400" dirty="0">
+                    <a:solidFill>
+                      <a:schemeClr val="bg1"/>
+                    </a:solidFill>
+                    <a:latin typeface="Times New Roman" panose="02020603050405020304" pitchFamily="18" charset="0"/>
+                    <a:ea typeface="Cambria Math" panose="02040503050406030204" pitchFamily="18" charset="0"/>
+                    <a:cs typeface="Times New Roman" panose="02020603050405020304" pitchFamily="18" charset="0"/>
+                  </a:rPr>
+                  <a:t>) </a:t>
+                </a:r>
+                <a14:m>
+                  <m:oMath xmlns:m="http://schemas.openxmlformats.org/officeDocument/2006/math">
+                    <m:r>
+                      <a:rPr lang="en-US" sz="2400" i="1">
+                        <a:solidFill>
+                          <a:schemeClr val="bg1"/>
+                        </a:solidFill>
+                        <a:latin typeface="Cambria Math" panose="02040503050406030204" pitchFamily="18" charset="0"/>
+                        <a:ea typeface="Cambria Math" panose="02040503050406030204" pitchFamily="18" charset="0"/>
+                        <a:cs typeface="Times New Roman" panose="02020603050405020304" pitchFamily="18" charset="0"/>
+                      </a:rPr>
+                      <m:t>≥</m:t>
+                    </m:r>
+                    <m:r>
+                      <a:rPr lang="ru-RU" sz="2400" i="1">
+                        <a:solidFill>
+                          <a:schemeClr val="bg1"/>
+                        </a:solidFill>
+                        <a:latin typeface="Cambria Math" panose="02040503050406030204" pitchFamily="18" charset="0"/>
+                        <a:ea typeface="Cambria Math" panose="02040503050406030204" pitchFamily="18" charset="0"/>
+                        <a:cs typeface="Times New Roman" panose="02020603050405020304" pitchFamily="18" charset="0"/>
+                      </a:rPr>
+                      <m:t>0,5</m:t>
+                    </m:r>
+                    <m:r>
+                      <a:rPr lang="ru-RU" sz="2400">
+                        <a:solidFill>
+                          <a:schemeClr val="bg1"/>
+                        </a:solidFill>
+                        <a:latin typeface="Cambria Math" panose="02040503050406030204" pitchFamily="18" charset="0"/>
+                        <a:ea typeface="Cambria Math" panose="02040503050406030204" pitchFamily="18" charset="0"/>
+                        <a:cs typeface="Times New Roman" panose="02020603050405020304" pitchFamily="18" charset="0"/>
+                      </a:rPr>
+                      <m:t>;</m:t>
+                    </m:r>
+                  </m:oMath>
+                </a14:m>
+                <a:r>
+                  <a:rPr lang="en-US" sz="2400" dirty="0">
+                    <a:solidFill>
+                      <a:schemeClr val="bg1"/>
+                    </a:solidFill>
+                    <a:latin typeface="Times New Roman" panose="02020603050405020304" pitchFamily="18" charset="0"/>
+                    <a:ea typeface="Cambria Math" panose="02040503050406030204" pitchFamily="18" charset="0"/>
+                    <a:cs typeface="Times New Roman" panose="02020603050405020304" pitchFamily="18" charset="0"/>
+                  </a:rPr>
+                  <a:t> </a:t>
+                </a:r>
+                <a:endParaRPr lang="ru-RU" sz="2400" dirty="0">
+                  <a:solidFill>
+                    <a:schemeClr val="bg1"/>
+                  </a:solidFill>
+                  <a:latin typeface="Times New Roman" panose="02020603050405020304" pitchFamily="18" charset="0"/>
+                  <a:ea typeface="Cambria Math" panose="02040503050406030204" pitchFamily="18" charset="0"/>
+                  <a:cs typeface="Times New Roman" panose="02020603050405020304" pitchFamily="18" charset="0"/>
+                </a:endParaRPr>
+              </a:p>
+              <a:p>
+                <a:pPr indent="447675">
+                  <a:buFont typeface="Arial" panose="020B0604020202020204" pitchFamily="34" charset="0"/>
+                  <a:buChar char="•"/>
+                </a:pPr>
+                <a14:m>
+                  <m:oMath xmlns:m="http://schemas.openxmlformats.org/officeDocument/2006/math">
+                    <m:r>
+                      <a:rPr lang="en-US" sz="2400" i="1">
+                        <a:solidFill>
+                          <a:schemeClr val="bg1"/>
+                        </a:solidFill>
+                        <a:latin typeface="Cambria Math" panose="02040503050406030204" pitchFamily="18" charset="0"/>
+                        <a:ea typeface="Cambria Math" panose="02040503050406030204" pitchFamily="18" charset="0"/>
+                        <a:cs typeface="Times New Roman" panose="02020603050405020304" pitchFamily="18" charset="0"/>
+                      </a:rPr>
+                      <m:t>𝑀𝐴𝑃𝐸</m:t>
+                    </m:r>
+                    <m:r>
+                      <a:rPr lang="ru-RU" sz="2400" i="1">
+                        <a:solidFill>
+                          <a:schemeClr val="bg1"/>
+                        </a:solidFill>
+                        <a:latin typeface="Cambria Math" panose="02040503050406030204" pitchFamily="18" charset="0"/>
+                        <a:ea typeface="Cambria Math" panose="02040503050406030204" pitchFamily="18" charset="0"/>
+                        <a:cs typeface="Times New Roman" panose="02020603050405020304" pitchFamily="18" charset="0"/>
+                      </a:rPr>
+                      <m:t> </m:t>
+                    </m:r>
+                  </m:oMath>
+                </a14:m>
+                <a:r>
+                  <a:rPr lang="ru-RU" sz="2400" dirty="0">
+                    <a:solidFill>
+                      <a:schemeClr val="bg1"/>
+                    </a:solidFill>
+                    <a:latin typeface="Times New Roman" panose="02020603050405020304" pitchFamily="18" charset="0"/>
+                    <a:cs typeface="Times New Roman" panose="02020603050405020304" pitchFamily="18" charset="0"/>
+                  </a:rPr>
+                  <a:t>(средняя абсолютная процентная ошибка) </a:t>
+                </a:r>
+                <a14:m>
+                  <m:oMath xmlns:m="http://schemas.openxmlformats.org/officeDocument/2006/math">
+                    <m:r>
+                      <a:rPr lang="ru-RU" sz="2400" i="1">
+                        <a:solidFill>
+                          <a:schemeClr val="bg1"/>
+                        </a:solidFill>
+                        <a:latin typeface="Cambria Math" panose="02040503050406030204" pitchFamily="18" charset="0"/>
+                        <a:ea typeface="Cambria Math" panose="02040503050406030204" pitchFamily="18" charset="0"/>
+                        <a:cs typeface="Times New Roman" panose="02020603050405020304" pitchFamily="18" charset="0"/>
+                      </a:rPr>
+                      <m:t>≤50%</m:t>
+                    </m:r>
+                  </m:oMath>
+                </a14:m>
+                <a:r>
+                  <a:rPr lang="en-US" sz="2400" dirty="0">
+                    <a:solidFill>
+                      <a:schemeClr val="bg1"/>
+                    </a:solidFill>
+                    <a:latin typeface="Times New Roman" panose="02020603050405020304" pitchFamily="18" charset="0"/>
+                    <a:ea typeface="Cambria Math" panose="02040503050406030204" pitchFamily="18" charset="0"/>
+                    <a:cs typeface="Times New Roman" panose="02020603050405020304" pitchFamily="18" charset="0"/>
+                  </a:rPr>
+                  <a:t>.</a:t>
+                </a:r>
+              </a:p>
+            </p:txBody>
+          </p:sp>
+        </mc:Choice>
+        <mc:Fallback xmlns="">
+          <p:sp>
+            <p:nvSpPr>
+              <p:cNvPr id="11" name="TextBox 10">
+                <a:extLst>
+                  <a:ext uri="{FF2B5EF4-FFF2-40B4-BE49-F238E27FC236}">
+                    <a16:creationId xmlns:a16="http://schemas.microsoft.com/office/drawing/2014/main" id="{7998FA91-88FB-1D49-CFF8-ACB75931B88F}"/>
+                  </a:ext>
+                </a:extLst>
+              </p:cNvPr>
+              <p:cNvSpPr txBox="1">
+                <a:spLocks noRot="1" noChangeAspect="1" noMove="1" noResize="1" noEditPoints="1" noAdjustHandles="1" noChangeArrowheads="1" noChangeShapeType="1" noTextEdit="1"/>
+              </p:cNvSpPr>
+              <p:nvPr/>
+            </p:nvSpPr>
+            <p:spPr>
+              <a:xfrm>
+                <a:off x="873750" y="3148770"/>
+                <a:ext cx="10444500" cy="1569660"/>
+              </a:xfrm>
+              <a:prstGeom prst="rect">
+                <a:avLst/>
+              </a:prstGeom>
+              <a:blipFill>
+                <a:blip r:embed="rId3"/>
+                <a:stretch>
+                  <a:fillRect l="-875" t="-3113" b="-8171"/>
+                </a:stretch>
+              </a:blipFill>
+            </p:spPr>
+            <p:txBody>
+              <a:bodyPr/>
+              <a:lstStyle/>
+              <a:p>
+                <a:r>
+                  <a:rPr lang="ru-RU">
+                    <a:noFill/>
+                  </a:rPr>
+                  <a:t> </a:t>
+                </a:r>
+              </a:p>
+            </p:txBody>
+          </p:sp>
+        </mc:Fallback>
+      </mc:AlternateContent>
     </p:spTree>
     <p:extLst>
       <p:ext uri="{BB962C8B-B14F-4D97-AF65-F5344CB8AC3E}">
@@ -15071,7 +14986,7 @@
                 <a:ea typeface="SimSun" panose="02010600030101010101" pitchFamily="2" charset="-122"/>
                 <a:cs typeface="Times New Roman" panose="02020603050405020304" pitchFamily="18" charset="0"/>
               </a:rPr>
-              <a:t>3</a:t>
+              <a:t>3 </a:t>
             </a:r>
             <a:r>
               <a:rPr kumimoji="0" lang="ru-RU" altLang="ru-RU" sz="1400" b="1" i="0" u="none" strike="noStrike" cap="none" normalizeH="0" baseline="0" dirty="0" bmk="_Ref226977492">
@@ -15262,7 +15177,7 @@
         <p:cNvPr id="1" name="">
           <a:extLst>
             <a:ext uri="{FF2B5EF4-FFF2-40B4-BE49-F238E27FC236}">
-              <a16:creationId xmlns:a16="http://schemas.microsoft.com/office/drawing/2014/main" id="{C7D1FD52-06F0-390D-67F9-ADF5292E68F9}"/>
+              <a16:creationId xmlns:a16="http://schemas.microsoft.com/office/drawing/2014/main" id="{C84D3CBB-CF12-1504-9B5C-874A57CDACE5}"/>
             </a:ext>
           </a:extLst>
         </p:cNvPr>
@@ -15282,7 +15197,7 @@
           <p:cNvPr id="2" name="Заголовок 1">
             <a:extLst>
               <a:ext uri="{FF2B5EF4-FFF2-40B4-BE49-F238E27FC236}">
-                <a16:creationId xmlns:a16="http://schemas.microsoft.com/office/drawing/2014/main" id="{C8138F05-915A-9210-6D4D-8B38B9395265}"/>
+                <a16:creationId xmlns:a16="http://schemas.microsoft.com/office/drawing/2014/main" id="{484CE8DC-9FA5-BECD-A892-CC098A30E19D}"/>
               </a:ext>
             </a:extLst>
           </p:cNvPr>
@@ -15310,7 +15225,7 @@
                 <a:latin typeface="Times New Roman" panose="02020603050405020304" pitchFamily="18" charset="0"/>
                 <a:cs typeface="Times New Roman" panose="02020603050405020304" pitchFamily="18" charset="0"/>
               </a:rPr>
-              <a:t>Распределение трансферных сумм</a:t>
+              <a:t>Описание этапов разработки модели</a:t>
             </a:r>
           </a:p>
         </p:txBody>
@@ -15320,7 +15235,7 @@
           <p:cNvPr id="4" name="Заголовок 1">
             <a:extLst>
               <a:ext uri="{FF2B5EF4-FFF2-40B4-BE49-F238E27FC236}">
-                <a16:creationId xmlns:a16="http://schemas.microsoft.com/office/drawing/2014/main" id="{5108CEA8-4673-EA76-0D80-184690B72B0B}"/>
+                <a16:creationId xmlns:a16="http://schemas.microsoft.com/office/drawing/2014/main" id="{3488EE80-2AF6-DAC9-FB37-8D40C3DAAE20}"/>
               </a:ext>
             </a:extLst>
           </p:cNvPr>
@@ -15374,7 +15289,7 @@
           <p:cNvPr id="7" name="TextBox 6">
             <a:extLst>
               <a:ext uri="{FF2B5EF4-FFF2-40B4-BE49-F238E27FC236}">
-                <a16:creationId xmlns:a16="http://schemas.microsoft.com/office/drawing/2014/main" id="{CD42D683-BF63-2941-121A-156D964D861A}"/>
+                <a16:creationId xmlns:a16="http://schemas.microsoft.com/office/drawing/2014/main" id="{01CB85C5-A698-B1DF-688B-C90ACB0C99E9}"/>
               </a:ext>
             </a:extLst>
           </p:cNvPr>
@@ -15409,510 +15324,730 @@
       </p:sp>
       <p:sp>
         <p:nvSpPr>
-          <p:cNvPr id="5" name="Rectangle 2">
-            <a:extLst>
-              <a:ext uri="{FF2B5EF4-FFF2-40B4-BE49-F238E27FC236}">
-                <a16:creationId xmlns:a16="http://schemas.microsoft.com/office/drawing/2014/main" id="{52CC7CAA-12FD-62F1-D27C-F2E1805A1BA3}"/>
-              </a:ext>
-            </a:extLst>
-          </p:cNvPr>
-          <p:cNvSpPr>
-            <a:spLocks noChangeArrowheads="1"/>
-          </p:cNvSpPr>
+          <p:cNvPr id="5" name="Выноска: стрелка вниз 4">
+            <a:extLst>
+              <a:ext uri="{FF2B5EF4-FFF2-40B4-BE49-F238E27FC236}">
+                <a16:creationId xmlns:a16="http://schemas.microsoft.com/office/drawing/2014/main" id="{777C7D84-BB91-F630-E45A-A0DBC2ED060F}"/>
+              </a:ext>
+            </a:extLst>
+          </p:cNvPr>
+          <p:cNvSpPr/>
           <p:nvPr/>
         </p:nvSpPr>
-        <p:spPr bwMode="auto">
+        <p:spPr>
           <a:xfrm>
-            <a:off x="838200" y="1059367"/>
-            <a:ext cx="12192000" cy="457200"/>
+            <a:off x="838200" y="1045452"/>
+            <a:ext cx="10515600" cy="693227"/>
+          </a:xfrm>
+          <a:prstGeom prst="downArrowCallout">
+            <a:avLst/>
+          </a:prstGeom>
+          <a:solidFill>
+            <a:schemeClr val="accent1"/>
+          </a:solidFill>
+        </p:spPr>
+        <p:style>
+          <a:lnRef idx="2">
+            <a:schemeClr val="accent1">
+              <a:shade val="15000"/>
+            </a:schemeClr>
+          </a:lnRef>
+          <a:fillRef idx="1">
+            <a:schemeClr val="accent1"/>
+          </a:fillRef>
+          <a:effectRef idx="0">
+            <a:schemeClr val="accent1"/>
+          </a:effectRef>
+          <a:fontRef idx="minor">
+            <a:schemeClr val="lt1"/>
+          </a:fontRef>
+        </p:style>
+        <p:txBody>
+          <a:bodyPr rtlCol="0" anchor="ctr"/>
+          <a:lstStyle/>
+          <a:p>
+            <a:pPr algn="ctr"/>
+            <a:endParaRPr lang="ru-RU"/>
+          </a:p>
+        </p:txBody>
+      </p:sp>
+      <p:sp>
+        <p:nvSpPr>
+          <p:cNvPr id="8" name="TextBox 7">
+            <a:extLst>
+              <a:ext uri="{FF2B5EF4-FFF2-40B4-BE49-F238E27FC236}">
+                <a16:creationId xmlns:a16="http://schemas.microsoft.com/office/drawing/2014/main" id="{80233201-5DB3-F97F-834D-3D32CF0442A6}"/>
+              </a:ext>
+            </a:extLst>
+          </p:cNvPr>
+          <p:cNvSpPr txBox="1"/>
+          <p:nvPr/>
+        </p:nvSpPr>
+        <p:spPr>
+          <a:xfrm>
+            <a:off x="3047432" y="1044439"/>
+            <a:ext cx="6097136" cy="461665"/>
           </a:xfrm>
           <a:prstGeom prst="rect">
             <a:avLst/>
           </a:prstGeom>
           <a:noFill/>
-          <a:ln>
-            <a:noFill/>
-          </a:ln>
-          <a:effectLst/>
-          <a:extLst>
-            <a:ext uri="{909E8E84-426E-40DD-AFC4-6F175D3DCCD1}">
-              <a14:hiddenFill xmlns:a14="http://schemas.microsoft.com/office/drawing/2010/main">
-                <a:solidFill>
-                  <a:schemeClr val="accent1"/>
-                </a:solidFill>
-              </a14:hiddenFill>
-            </a:ext>
-            <a:ext uri="{91240B29-F687-4F45-9708-019B960494DF}">
-              <a14:hiddenLine xmlns:a14="http://schemas.microsoft.com/office/drawing/2010/main" w="9525">
-                <a:solidFill>
-                  <a:schemeClr val="tx1"/>
-                </a:solidFill>
-                <a:miter lim="800000"/>
-                <a:headEnd/>
-                <a:tailEnd/>
-              </a14:hiddenLine>
-            </a:ext>
-            <a:ext uri="{AF507438-7753-43E0-B8FC-AC1667EBCBE1}">
-              <a14:hiddenEffects xmlns:a14="http://schemas.microsoft.com/office/drawing/2010/main">
-                <a:effectLst>
-                  <a:outerShdw dist="35921" dir="2700000" algn="ctr" rotWithShape="0">
-                    <a:schemeClr val="bg2"/>
-                  </a:outerShdw>
-                </a:effectLst>
-              </a14:hiddenEffects>
-            </a:ext>
-          </a:extLst>
         </p:spPr>
         <p:txBody>
-          <a:bodyPr vert="horz" wrap="none" lIns="91440" tIns="45720" rIns="91440" bIns="45720" numCol="1" anchor="ctr" anchorCtr="0" compatLnSpc="1">
-            <a:prstTxWarp prst="textNoShape">
-              <a:avLst/>
-            </a:prstTxWarp>
+          <a:bodyPr wrap="square">
             <a:spAutoFit/>
           </a:bodyPr>
           <a:lstStyle/>
           <a:p>
-            <a:endParaRPr lang="ru-RU"/>
-          </a:p>
-        </p:txBody>
-      </p:sp>
-      <p:pic>
-        <p:nvPicPr>
-          <p:cNvPr id="1025" name="Рисунок 3">
-            <a:extLst>
-              <a:ext uri="{FF2B5EF4-FFF2-40B4-BE49-F238E27FC236}">
-                <a16:creationId xmlns:a16="http://schemas.microsoft.com/office/drawing/2014/main" id="{D23CF6BA-8D66-03C9-EFF5-A94B9072022F}"/>
-              </a:ext>
-            </a:extLst>
-          </p:cNvPr>
-          <p:cNvPicPr>
-            <a:picLocks noChangeAspect="1" noChangeArrowheads="1"/>
-          </p:cNvPicPr>
-          <p:nvPr/>
-        </p:nvPicPr>
-        <p:blipFill>
-          <a:blip r:embed="rId2">
-            <a:extLst>
-              <a:ext uri="{28A0092B-C50C-407E-A947-70E740481C1C}">
-                <a14:useLocalDpi xmlns:a14="http://schemas.microsoft.com/office/drawing/2010/main" val="0"/>
-              </a:ext>
-            </a:extLst>
-          </a:blip>
-          <a:srcRect/>
-          <a:stretch>
-            <a:fillRect/>
-          </a:stretch>
-        </p:blipFill>
-        <p:spPr bwMode="auto">
-          <a:xfrm>
-            <a:off x="147435" y="1114742"/>
-            <a:ext cx="5529465" cy="4130849"/>
-          </a:xfrm>
-          <a:prstGeom prst="rect">
-            <a:avLst/>
-          </a:prstGeom>
-          <a:noFill/>
-          <a:extLst>
-            <a:ext uri="{909E8E84-426E-40DD-AFC4-6F175D3DCCD1}">
-              <a14:hiddenFill xmlns:a14="http://schemas.microsoft.com/office/drawing/2010/main">
+            <a:pPr algn="ctr"/>
+            <a:r>
+              <a:rPr lang="ru-RU" sz="2400" dirty="0">
                 <a:solidFill>
-                  <a:srgbClr val="FFFFFF"/>
-                </a:solidFill>
-              </a14:hiddenFill>
-            </a:ext>
-          </a:extLst>
-        </p:spPr>
-      </p:pic>
-      <p:sp>
-        <p:nvSpPr>
-          <p:cNvPr id="6" name="Rectangle 3">
-            <a:extLst>
-              <a:ext uri="{FF2B5EF4-FFF2-40B4-BE49-F238E27FC236}">
-                <a16:creationId xmlns:a16="http://schemas.microsoft.com/office/drawing/2014/main" id="{BF574BD0-4866-EB5A-C621-5369F1560966}"/>
-              </a:ext>
-            </a:extLst>
-          </p:cNvPr>
-          <p:cNvSpPr>
-            <a:spLocks noChangeArrowheads="1"/>
-          </p:cNvSpPr>
-          <p:nvPr/>
-        </p:nvSpPr>
-        <p:spPr bwMode="auto">
-          <a:xfrm>
-            <a:off x="1101147" y="5220038"/>
-            <a:ext cx="3622040" cy="523220"/>
-          </a:xfrm>
-          <a:prstGeom prst="rect">
-            <a:avLst/>
-          </a:prstGeom>
-          <a:noFill/>
-          <a:ln>
-            <a:noFill/>
-          </a:ln>
-          <a:effectLst/>
-          <a:extLst>
-            <a:ext uri="{909E8E84-426E-40DD-AFC4-6F175D3DCCD1}">
-              <a14:hiddenFill xmlns:a14="http://schemas.microsoft.com/office/drawing/2010/main">
-                <a:solidFill>
-                  <a:schemeClr val="accent1"/>
-                </a:solidFill>
-              </a14:hiddenFill>
-            </a:ext>
-            <a:ext uri="{91240B29-F687-4F45-9708-019B960494DF}">
-              <a14:hiddenLine xmlns:a14="http://schemas.microsoft.com/office/drawing/2010/main" w="9525">
-                <a:solidFill>
-                  <a:schemeClr val="tx1"/>
-                </a:solidFill>
-                <a:miter lim="800000"/>
-                <a:headEnd/>
-                <a:tailEnd/>
-              </a14:hiddenLine>
-            </a:ext>
-            <a:ext uri="{AF507438-7753-43E0-B8FC-AC1667EBCBE1}">
-              <a14:hiddenEffects xmlns:a14="http://schemas.microsoft.com/office/drawing/2010/main">
-                <a:effectLst>
-                  <a:outerShdw dist="35921" dir="2700000" algn="ctr" rotWithShape="0">
-                    <a:schemeClr val="bg2"/>
-                  </a:outerShdw>
-                </a:effectLst>
-              </a14:hiddenEffects>
-            </a:ext>
-          </a:extLst>
-        </p:spPr>
-        <p:txBody>
-          <a:bodyPr vert="horz" wrap="square" lIns="91440" tIns="45720" rIns="91440" bIns="45720" numCol="1" anchor="ctr" anchorCtr="0" compatLnSpc="1">
-            <a:prstTxWarp prst="textNoShape">
-              <a:avLst/>
-            </a:prstTxWarp>
-            <a:spAutoFit/>
-          </a:bodyPr>
-          <a:lstStyle/>
-          <a:p>
-            <a:pPr marL="0" marR="0" lvl="0" indent="0" algn="ctr" defTabSz="914400" rtl="0" eaLnBrk="0" fontAlgn="base" latinLnBrk="0" hangingPunct="0">
-              <a:lnSpc>
-                <a:spcPct val="100000"/>
-              </a:lnSpc>
-              <a:spcBef>
-                <a:spcPct val="0"/>
-              </a:spcBef>
-              <a:spcAft>
-                <a:spcPct val="0"/>
-              </a:spcAft>
-              <a:buClrTx/>
-              <a:buSzTx/>
-              <a:buFontTx/>
-              <a:buNone/>
-              <a:tabLst/>
-            </a:pPr>
-            <a:r>
-              <a:rPr kumimoji="0" lang="ru-RU" altLang="ru-RU" sz="1400" b="1" i="0" u="none" strike="noStrike" cap="none" normalizeH="0" baseline="0" dirty="0">
-                <a:ln>
-                  <a:noFill/>
-                </a:ln>
-                <a:solidFill>
-                  <a:schemeClr val="tx1"/>
+                  <a:schemeClr val="bg1"/>
                 </a:solidFill>
                 <a:effectLst/>
                 <a:latin typeface="Times New Roman" panose="02020603050405020304" pitchFamily="18" charset="0"/>
                 <a:ea typeface="SimSun" panose="02010600030101010101" pitchFamily="2" charset="-122"/>
                 <a:cs typeface="Times New Roman" panose="02020603050405020304" pitchFamily="18" charset="0"/>
               </a:rPr>
-              <a:t>Р</a:t>
-            </a:r>
-            <a:r>
-              <a:rPr kumimoji="0" lang="ru-RU" altLang="ru-RU" sz="1400" b="1" i="0" u="none" strike="noStrike" cap="none" normalizeH="0" baseline="0" dirty="0" bmk="">
-                <a:ln>
-                  <a:noFill/>
-                </a:ln>
+              <a:t>Проектирование архитектуры решения</a:t>
+            </a:r>
+            <a:endParaRPr lang="ru-RU" sz="2400" dirty="0">
+              <a:solidFill>
+                <a:schemeClr val="bg1"/>
+              </a:solidFill>
+              <a:latin typeface="Times New Roman" panose="02020603050405020304" pitchFamily="18" charset="0"/>
+              <a:cs typeface="Times New Roman" panose="02020603050405020304" pitchFamily="18" charset="0"/>
+            </a:endParaRPr>
+          </a:p>
+        </p:txBody>
+      </p:sp>
+      <p:sp>
+        <p:nvSpPr>
+          <p:cNvPr id="9" name="Выноска: стрелка вниз 8">
+            <a:extLst>
+              <a:ext uri="{FF2B5EF4-FFF2-40B4-BE49-F238E27FC236}">
+                <a16:creationId xmlns:a16="http://schemas.microsoft.com/office/drawing/2014/main" id="{6AC33718-28CB-FE41-AD4D-65FD2DB3D7B1}"/>
+              </a:ext>
+            </a:extLst>
+          </p:cNvPr>
+          <p:cNvSpPr/>
+          <p:nvPr/>
+        </p:nvSpPr>
+        <p:spPr>
+          <a:xfrm>
+            <a:off x="838135" y="4509498"/>
+            <a:ext cx="10515578" cy="722331"/>
+          </a:xfrm>
+          <a:prstGeom prst="downArrowCallout">
+            <a:avLst/>
+          </a:prstGeom>
+          <a:solidFill>
+            <a:schemeClr val="accent1"/>
+          </a:solidFill>
+        </p:spPr>
+        <p:style>
+          <a:lnRef idx="2">
+            <a:schemeClr val="accent1">
+              <a:shade val="15000"/>
+            </a:schemeClr>
+          </a:lnRef>
+          <a:fillRef idx="1">
+            <a:schemeClr val="accent1"/>
+          </a:fillRef>
+          <a:effectRef idx="0">
+            <a:schemeClr val="accent1"/>
+          </a:effectRef>
+          <a:fontRef idx="minor">
+            <a:schemeClr val="lt1"/>
+          </a:fontRef>
+        </p:style>
+        <p:txBody>
+          <a:bodyPr rtlCol="0" anchor="ctr"/>
+          <a:lstStyle/>
+          <a:p>
+            <a:pPr algn="ctr"/>
+            <a:endParaRPr lang="ru-RU"/>
+          </a:p>
+        </p:txBody>
+      </p:sp>
+      <p:sp>
+        <p:nvSpPr>
+          <p:cNvPr id="10" name="TextBox 9">
+            <a:extLst>
+              <a:ext uri="{FF2B5EF4-FFF2-40B4-BE49-F238E27FC236}">
+                <a16:creationId xmlns:a16="http://schemas.microsoft.com/office/drawing/2014/main" id="{86AB9496-35E7-CB43-9DB6-ED832BCBE5CF}"/>
+              </a:ext>
+            </a:extLst>
+          </p:cNvPr>
+          <p:cNvSpPr txBox="1"/>
+          <p:nvPr/>
+        </p:nvSpPr>
+        <p:spPr>
+          <a:xfrm>
+            <a:off x="4661975" y="4496623"/>
+            <a:ext cx="2867895" cy="461665"/>
+          </a:xfrm>
+          <a:prstGeom prst="rect">
+            <a:avLst/>
+          </a:prstGeom>
+          <a:noFill/>
+        </p:spPr>
+        <p:txBody>
+          <a:bodyPr wrap="square">
+            <a:spAutoFit/>
+          </a:bodyPr>
+          <a:lstStyle/>
+          <a:p>
+            <a:pPr algn="ctr"/>
+            <a:r>
+              <a:rPr lang="ru-RU" sz="2400" dirty="0">
                 <a:solidFill>
-                  <a:schemeClr val="tx1"/>
+                  <a:schemeClr val="bg1"/>
                 </a:solidFill>
                 <a:effectLst/>
                 <a:latin typeface="Times New Roman" panose="02020603050405020304" pitchFamily="18" charset="0"/>
                 <a:ea typeface="SimSun" panose="02010600030101010101" pitchFamily="2" charset="-122"/>
                 <a:cs typeface="Times New Roman" panose="02020603050405020304" pitchFamily="18" charset="0"/>
               </a:rPr>
-              <a:t>исунок 4</a:t>
-            </a:r>
-            <a:r>
-              <a:rPr kumimoji="0" lang="ru-RU" altLang="ru-RU" sz="1400" b="1" i="0" u="none" strike="noStrike" cap="none" normalizeH="0" baseline="0" dirty="0" bmk="_Ref226977492">
-                <a:ln>
-                  <a:noFill/>
-                </a:ln>
+              <a:t>Реализация моделей</a:t>
+            </a:r>
+            <a:endParaRPr lang="ru-RU" sz="2400" dirty="0">
+              <a:solidFill>
+                <a:schemeClr val="bg1"/>
+              </a:solidFill>
+              <a:latin typeface="Times New Roman" panose="02020603050405020304" pitchFamily="18" charset="0"/>
+              <a:cs typeface="Times New Roman" panose="02020603050405020304" pitchFamily="18" charset="0"/>
+            </a:endParaRPr>
+          </a:p>
+        </p:txBody>
+      </p:sp>
+      <p:sp>
+        <p:nvSpPr>
+          <p:cNvPr id="11" name="Выноска: стрелка вниз 10">
+            <a:extLst>
+              <a:ext uri="{FF2B5EF4-FFF2-40B4-BE49-F238E27FC236}">
+                <a16:creationId xmlns:a16="http://schemas.microsoft.com/office/drawing/2014/main" id="{EAB87037-BA68-348B-AA68-F06A3D1B0C8B}"/>
+              </a:ext>
+            </a:extLst>
+          </p:cNvPr>
+          <p:cNvSpPr/>
+          <p:nvPr/>
+        </p:nvSpPr>
+        <p:spPr>
+          <a:xfrm>
+            <a:off x="838135" y="3705277"/>
+            <a:ext cx="10515578" cy="774576"/>
+          </a:xfrm>
+          <a:prstGeom prst="downArrowCallout">
+            <a:avLst/>
+          </a:prstGeom>
+          <a:solidFill>
+            <a:schemeClr val="accent1"/>
+          </a:solidFill>
+        </p:spPr>
+        <p:style>
+          <a:lnRef idx="2">
+            <a:schemeClr val="accent1">
+              <a:shade val="15000"/>
+            </a:schemeClr>
+          </a:lnRef>
+          <a:fillRef idx="1">
+            <a:schemeClr val="accent1"/>
+          </a:fillRef>
+          <a:effectRef idx="0">
+            <a:schemeClr val="accent1"/>
+          </a:effectRef>
+          <a:fontRef idx="minor">
+            <a:schemeClr val="lt1"/>
+          </a:fontRef>
+        </p:style>
+        <p:txBody>
+          <a:bodyPr rtlCol="0" anchor="ctr"/>
+          <a:lstStyle/>
+          <a:p>
+            <a:pPr algn="ctr"/>
+            <a:endParaRPr lang="ru-RU"/>
+          </a:p>
+        </p:txBody>
+      </p:sp>
+      <p:sp>
+        <p:nvSpPr>
+          <p:cNvPr id="13" name="Выноска: стрелка вниз 12">
+            <a:extLst>
+              <a:ext uri="{FF2B5EF4-FFF2-40B4-BE49-F238E27FC236}">
+                <a16:creationId xmlns:a16="http://schemas.microsoft.com/office/drawing/2014/main" id="{543FBCF8-E3F2-C1BB-3F8D-9DAF4BE58ADE}"/>
+              </a:ext>
+            </a:extLst>
+          </p:cNvPr>
+          <p:cNvSpPr/>
+          <p:nvPr/>
+        </p:nvSpPr>
+        <p:spPr>
+          <a:xfrm>
+            <a:off x="838125" y="5251710"/>
+            <a:ext cx="10515588" cy="723846"/>
+          </a:xfrm>
+          <a:prstGeom prst="downArrowCallout">
+            <a:avLst/>
+          </a:prstGeom>
+          <a:solidFill>
+            <a:schemeClr val="accent1"/>
+          </a:solidFill>
+        </p:spPr>
+        <p:style>
+          <a:lnRef idx="2">
+            <a:schemeClr val="accent1">
+              <a:shade val="15000"/>
+            </a:schemeClr>
+          </a:lnRef>
+          <a:fillRef idx="1">
+            <a:schemeClr val="accent1"/>
+          </a:fillRef>
+          <a:effectRef idx="0">
+            <a:schemeClr val="accent1"/>
+          </a:effectRef>
+          <a:fontRef idx="minor">
+            <a:schemeClr val="lt1"/>
+          </a:fontRef>
+        </p:style>
+        <p:txBody>
+          <a:bodyPr rtlCol="0" anchor="ctr"/>
+          <a:lstStyle/>
+          <a:p>
+            <a:pPr algn="ctr"/>
+            <a:endParaRPr lang="ru-RU"/>
+          </a:p>
+        </p:txBody>
+      </p:sp>
+      <p:sp>
+        <p:nvSpPr>
+          <p:cNvPr id="14" name="TextBox 13">
+            <a:extLst>
+              <a:ext uri="{FF2B5EF4-FFF2-40B4-BE49-F238E27FC236}">
+                <a16:creationId xmlns:a16="http://schemas.microsoft.com/office/drawing/2014/main" id="{F80B9FD2-DABD-F8DD-48F1-CDC0EB4F5B42}"/>
+              </a:ext>
+            </a:extLst>
+          </p:cNvPr>
+          <p:cNvSpPr txBox="1"/>
+          <p:nvPr/>
+        </p:nvSpPr>
+        <p:spPr>
+          <a:xfrm>
+            <a:off x="5072378" y="5234940"/>
+            <a:ext cx="2047082" cy="461665"/>
+          </a:xfrm>
+          <a:prstGeom prst="rect">
+            <a:avLst/>
+          </a:prstGeom>
+          <a:noFill/>
+        </p:spPr>
+        <p:txBody>
+          <a:bodyPr wrap="square">
+            <a:spAutoFit/>
+          </a:bodyPr>
+          <a:lstStyle/>
+          <a:p>
+            <a:pPr algn="ctr"/>
+            <a:r>
+              <a:rPr lang="ru-RU" sz="2400" dirty="0">
                 <a:solidFill>
-                  <a:schemeClr val="tx1"/>
+                  <a:schemeClr val="bg1"/>
                 </a:solidFill>
                 <a:effectLst/>
                 <a:latin typeface="Times New Roman" panose="02020603050405020304" pitchFamily="18" charset="0"/>
                 <a:ea typeface="SimSun" panose="02010600030101010101" pitchFamily="2" charset="-122"/>
                 <a:cs typeface="Times New Roman" panose="02020603050405020304" pitchFamily="18" charset="0"/>
               </a:rPr>
-              <a:t> — Распределение трансферных сумм</a:t>
-            </a:r>
-            <a:endParaRPr kumimoji="0" lang="ru-RU" altLang="ru-RU" sz="2000" b="0" i="0" u="none" strike="noStrike" cap="none" normalizeH="0" baseline="0" dirty="0">
-              <a:ln>
-                <a:noFill/>
-              </a:ln>
+              <a:t>Расчёт метрик</a:t>
+            </a:r>
+            <a:endParaRPr lang="ru-RU" sz="2400" dirty="0">
               <a:solidFill>
-                <a:schemeClr val="tx1"/>
+                <a:schemeClr val="bg1"/>
               </a:solidFill>
-              <a:effectLst/>
-              <a:latin typeface="Arial" panose="020B0604020202020204" pitchFamily="34" charset="0"/>
+              <a:latin typeface="Times New Roman" panose="02020603050405020304" pitchFamily="18" charset="0"/>
+              <a:cs typeface="Times New Roman" panose="02020603050405020304" pitchFamily="18" charset="0"/>
             </a:endParaRPr>
           </a:p>
         </p:txBody>
       </p:sp>
       <p:sp>
         <p:nvSpPr>
-          <p:cNvPr id="8" name="Rectangle 5">
-            <a:extLst>
-              <a:ext uri="{FF2B5EF4-FFF2-40B4-BE49-F238E27FC236}">
-                <a16:creationId xmlns:a16="http://schemas.microsoft.com/office/drawing/2014/main" id="{139E837B-36A5-F873-3B3E-9EE46B63BC14}"/>
-              </a:ext>
-            </a:extLst>
-          </p:cNvPr>
-          <p:cNvSpPr>
-            <a:spLocks noChangeArrowheads="1"/>
-          </p:cNvSpPr>
+          <p:cNvPr id="15" name="Прямоугольник 14">
+            <a:extLst>
+              <a:ext uri="{FF2B5EF4-FFF2-40B4-BE49-F238E27FC236}">
+                <a16:creationId xmlns:a16="http://schemas.microsoft.com/office/drawing/2014/main" id="{5FF79CE5-57A9-479B-2DD0-D41A7A2B5316}"/>
+              </a:ext>
+            </a:extLst>
+          </p:cNvPr>
+          <p:cNvSpPr/>
           <p:nvPr/>
         </p:nvSpPr>
-        <p:spPr bwMode="auto">
+        <p:spPr>
           <a:xfrm>
-            <a:off x="5676900" y="657542"/>
-            <a:ext cx="12192000" cy="457200"/>
+            <a:off x="838125" y="5990197"/>
+            <a:ext cx="10515588" cy="479347"/>
+          </a:xfrm>
+          <a:prstGeom prst="rect">
+            <a:avLst/>
+          </a:prstGeom>
+          <a:solidFill>
+            <a:schemeClr val="accent1"/>
+          </a:solidFill>
+        </p:spPr>
+        <p:style>
+          <a:lnRef idx="2">
+            <a:schemeClr val="accent1">
+              <a:shade val="15000"/>
+            </a:schemeClr>
+          </a:lnRef>
+          <a:fillRef idx="1">
+            <a:schemeClr val="accent1"/>
+          </a:fillRef>
+          <a:effectRef idx="0">
+            <a:schemeClr val="accent1"/>
+          </a:effectRef>
+          <a:fontRef idx="minor">
+            <a:schemeClr val="lt1"/>
+          </a:fontRef>
+        </p:style>
+        <p:txBody>
+          <a:bodyPr rtlCol="0" anchor="ctr"/>
+          <a:lstStyle/>
+          <a:p>
+            <a:pPr algn="ctr"/>
+            <a:endParaRPr lang="ru-RU"/>
+          </a:p>
+        </p:txBody>
+      </p:sp>
+      <p:sp>
+        <p:nvSpPr>
+          <p:cNvPr id="16" name="TextBox 15">
+            <a:extLst>
+              <a:ext uri="{FF2B5EF4-FFF2-40B4-BE49-F238E27FC236}">
+                <a16:creationId xmlns:a16="http://schemas.microsoft.com/office/drawing/2014/main" id="{F5FA89AF-DD65-F496-F3B0-F4CF76E20218}"/>
+              </a:ext>
+            </a:extLst>
+          </p:cNvPr>
+          <p:cNvSpPr txBox="1"/>
+          <p:nvPr/>
+        </p:nvSpPr>
+        <p:spPr>
+          <a:xfrm>
+            <a:off x="4143463" y="5972074"/>
+            <a:ext cx="3904911" cy="461665"/>
           </a:xfrm>
           <a:prstGeom prst="rect">
             <a:avLst/>
           </a:prstGeom>
           <a:noFill/>
-          <a:ln>
-            <a:noFill/>
-          </a:ln>
-          <a:effectLst/>
-          <a:extLst>
-            <a:ext uri="{909E8E84-426E-40DD-AFC4-6F175D3DCCD1}">
-              <a14:hiddenFill xmlns:a14="http://schemas.microsoft.com/office/drawing/2010/main">
-                <a:solidFill>
-                  <a:schemeClr val="accent1"/>
-                </a:solidFill>
-              </a14:hiddenFill>
-            </a:ext>
-            <a:ext uri="{91240B29-F687-4F45-9708-019B960494DF}">
-              <a14:hiddenLine xmlns:a14="http://schemas.microsoft.com/office/drawing/2010/main" w="9525">
-                <a:solidFill>
-                  <a:schemeClr val="tx1"/>
-                </a:solidFill>
-                <a:miter lim="800000"/>
-                <a:headEnd/>
-                <a:tailEnd/>
-              </a14:hiddenLine>
-            </a:ext>
-            <a:ext uri="{AF507438-7753-43E0-B8FC-AC1667EBCBE1}">
-              <a14:hiddenEffects xmlns:a14="http://schemas.microsoft.com/office/drawing/2010/main">
-                <a:effectLst>
-                  <a:outerShdw dist="35921" dir="2700000" algn="ctr" rotWithShape="0">
-                    <a:schemeClr val="bg2"/>
-                  </a:outerShdw>
-                </a:effectLst>
-              </a14:hiddenEffects>
-            </a:ext>
-          </a:extLst>
         </p:spPr>
         <p:txBody>
-          <a:bodyPr vert="horz" wrap="none" lIns="91440" tIns="45720" rIns="91440" bIns="45720" numCol="1" anchor="ctr" anchorCtr="0" compatLnSpc="1">
-            <a:prstTxWarp prst="textNoShape">
-              <a:avLst/>
-            </a:prstTxWarp>
+          <a:bodyPr wrap="square">
             <a:spAutoFit/>
           </a:bodyPr>
           <a:lstStyle/>
           <a:p>
-            <a:endParaRPr lang="ru-RU"/>
-          </a:p>
-        </p:txBody>
-      </p:sp>
-      <p:pic>
-        <p:nvPicPr>
-          <p:cNvPr id="1028" name="Рисунок 2">
-            <a:extLst>
-              <a:ext uri="{FF2B5EF4-FFF2-40B4-BE49-F238E27FC236}">
-                <a16:creationId xmlns:a16="http://schemas.microsoft.com/office/drawing/2014/main" id="{55EA6BE4-136C-82FE-BD96-795F12006775}"/>
-              </a:ext>
-            </a:extLst>
-          </p:cNvPr>
-          <p:cNvPicPr>
-            <a:picLocks noChangeAspect="1" noChangeArrowheads="1"/>
-          </p:cNvPicPr>
-          <p:nvPr/>
-        </p:nvPicPr>
-        <p:blipFill>
-          <a:blip r:embed="rId3">
-            <a:extLst>
-              <a:ext uri="{28A0092B-C50C-407E-A947-70E740481C1C}">
-                <a14:useLocalDpi xmlns:a14="http://schemas.microsoft.com/office/drawing/2010/main" val="0"/>
-              </a:ext>
-            </a:extLst>
-          </a:blip>
-          <a:srcRect/>
-          <a:stretch>
-            <a:fillRect/>
-          </a:stretch>
-        </p:blipFill>
-        <p:spPr bwMode="auto">
-          <a:xfrm>
-            <a:off x="5715889" y="1186260"/>
-            <a:ext cx="6481394" cy="3864711"/>
-          </a:xfrm>
-          <a:prstGeom prst="rect">
-            <a:avLst/>
-          </a:prstGeom>
-          <a:noFill/>
-          <a:extLst>
-            <a:ext uri="{909E8E84-426E-40DD-AFC4-6F175D3DCCD1}">
-              <a14:hiddenFill xmlns:a14="http://schemas.microsoft.com/office/drawing/2010/main">
+            <a:pPr algn="ctr"/>
+            <a:r>
+              <a:rPr lang="ru-RU" sz="2400" dirty="0">
                 <a:solidFill>
-                  <a:srgbClr val="FFFFFF"/>
-                </a:solidFill>
-              </a14:hiddenFill>
-            </a:ext>
-          </a:extLst>
-        </p:spPr>
-      </p:pic>
-      <p:sp>
-        <p:nvSpPr>
-          <p:cNvPr id="9" name="Rectangle 6">
-            <a:extLst>
-              <a:ext uri="{FF2B5EF4-FFF2-40B4-BE49-F238E27FC236}">
-                <a16:creationId xmlns:a16="http://schemas.microsoft.com/office/drawing/2014/main" id="{6770A801-0DE1-2AEC-36F4-9488E4B5EB93}"/>
-              </a:ext>
-            </a:extLst>
-          </p:cNvPr>
-          <p:cNvSpPr>
-            <a:spLocks noChangeArrowheads="1"/>
-          </p:cNvSpPr>
-          <p:nvPr/>
-        </p:nvSpPr>
-        <p:spPr bwMode="auto">
-          <a:xfrm>
-            <a:off x="7091778" y="5050971"/>
-            <a:ext cx="3729615" cy="523220"/>
-          </a:xfrm>
-          <a:prstGeom prst="rect">
-            <a:avLst/>
-          </a:prstGeom>
-          <a:noFill/>
-          <a:ln>
-            <a:noFill/>
-          </a:ln>
-          <a:effectLst/>
-          <a:extLst>
-            <a:ext uri="{909E8E84-426E-40DD-AFC4-6F175D3DCCD1}">
-              <a14:hiddenFill xmlns:a14="http://schemas.microsoft.com/office/drawing/2010/main">
-                <a:solidFill>
-                  <a:schemeClr val="accent1"/>
-                </a:solidFill>
-              </a14:hiddenFill>
-            </a:ext>
-            <a:ext uri="{91240B29-F687-4F45-9708-019B960494DF}">
-              <a14:hiddenLine xmlns:a14="http://schemas.microsoft.com/office/drawing/2010/main" w="9525">
-                <a:solidFill>
-                  <a:schemeClr val="tx1"/>
-                </a:solidFill>
-                <a:miter lim="800000"/>
-                <a:headEnd/>
-                <a:tailEnd/>
-              </a14:hiddenLine>
-            </a:ext>
-            <a:ext uri="{AF507438-7753-43E0-B8FC-AC1667EBCBE1}">
-              <a14:hiddenEffects xmlns:a14="http://schemas.microsoft.com/office/drawing/2010/main">
-                <a:effectLst>
-                  <a:outerShdw dist="35921" dir="2700000" algn="ctr" rotWithShape="0">
-                    <a:schemeClr val="bg2"/>
-                  </a:outerShdw>
-                </a:effectLst>
-              </a14:hiddenEffects>
-            </a:ext>
-          </a:extLst>
-        </p:spPr>
-        <p:txBody>
-          <a:bodyPr vert="horz" wrap="square" lIns="91440" tIns="45720" rIns="91440" bIns="45720" numCol="1" anchor="ctr" anchorCtr="0" compatLnSpc="1">
-            <a:prstTxWarp prst="textNoShape">
-              <a:avLst/>
-            </a:prstTxWarp>
-            <a:spAutoFit/>
-          </a:bodyPr>
-          <a:lstStyle/>
-          <a:p>
-            <a:pPr marL="0" marR="0" lvl="0" indent="0" algn="ctr" defTabSz="914400" rtl="0" eaLnBrk="0" fontAlgn="base" latinLnBrk="0" hangingPunct="0">
-              <a:lnSpc>
-                <a:spcPct val="100000"/>
-              </a:lnSpc>
-              <a:spcBef>
-                <a:spcPct val="0"/>
-              </a:spcBef>
-              <a:spcAft>
-                <a:spcPct val="0"/>
-              </a:spcAft>
-              <a:buClrTx/>
-              <a:buSzTx/>
-              <a:buFontTx/>
-              <a:buNone/>
-              <a:tabLst/>
-            </a:pPr>
-            <a:r>
-              <a:rPr kumimoji="0" lang="ru-RU" altLang="ru-RU" sz="1400" b="1" i="0" u="none" strike="noStrike" cap="none" normalizeH="0" baseline="0" dirty="0">
-                <a:ln>
-                  <a:noFill/>
-                </a:ln>
-                <a:solidFill>
-                  <a:schemeClr val="tx1"/>
+                  <a:schemeClr val="bg1"/>
                 </a:solidFill>
                 <a:effectLst/>
                 <a:latin typeface="Times New Roman" panose="02020603050405020304" pitchFamily="18" charset="0"/>
                 <a:ea typeface="SimSun" panose="02010600030101010101" pitchFamily="2" charset="-122"/>
                 <a:cs typeface="Times New Roman" panose="02020603050405020304" pitchFamily="18" charset="0"/>
               </a:rPr>
-              <a:t>Р</a:t>
-            </a:r>
-            <a:r>
-              <a:rPr kumimoji="0" lang="ru-RU" altLang="ru-RU" sz="1400" b="1" i="0" u="none" strike="noStrike" cap="none" normalizeH="0" baseline="0" dirty="0" bmk="">
-                <a:ln>
-                  <a:noFill/>
-                </a:ln>
+              <a:t>Анализ важности признаков</a:t>
+            </a:r>
+            <a:endParaRPr lang="ru-RU" sz="2400" dirty="0">
+              <a:solidFill>
+                <a:schemeClr val="bg1"/>
+              </a:solidFill>
+              <a:latin typeface="Times New Roman" panose="02020603050405020304" pitchFamily="18" charset="0"/>
+              <a:cs typeface="Times New Roman" panose="02020603050405020304" pitchFamily="18" charset="0"/>
+            </a:endParaRPr>
+          </a:p>
+        </p:txBody>
+      </p:sp>
+      <p:sp>
+        <p:nvSpPr>
+          <p:cNvPr id="3" name="Выноска: стрелка вниз 2">
+            <a:extLst>
+              <a:ext uri="{FF2B5EF4-FFF2-40B4-BE49-F238E27FC236}">
+                <a16:creationId xmlns:a16="http://schemas.microsoft.com/office/drawing/2014/main" id="{A4D89E93-6B28-CB0B-ACA8-35E7DF535DC8}"/>
+              </a:ext>
+            </a:extLst>
+          </p:cNvPr>
+          <p:cNvSpPr/>
+          <p:nvPr/>
+        </p:nvSpPr>
+        <p:spPr>
+          <a:xfrm>
+            <a:off x="838135" y="2522864"/>
+            <a:ext cx="10515578" cy="1152692"/>
+          </a:xfrm>
+          <a:prstGeom prst="downArrowCallout">
+            <a:avLst/>
+          </a:prstGeom>
+          <a:solidFill>
+            <a:schemeClr val="accent1"/>
+          </a:solidFill>
+        </p:spPr>
+        <p:style>
+          <a:lnRef idx="2">
+            <a:schemeClr val="accent1">
+              <a:shade val="15000"/>
+            </a:schemeClr>
+          </a:lnRef>
+          <a:fillRef idx="1">
+            <a:schemeClr val="accent1"/>
+          </a:fillRef>
+          <a:effectRef idx="0">
+            <a:schemeClr val="accent1"/>
+          </a:effectRef>
+          <a:fontRef idx="minor">
+            <a:schemeClr val="lt1"/>
+          </a:fontRef>
+        </p:style>
+        <p:txBody>
+          <a:bodyPr rtlCol="0" anchor="ctr"/>
+          <a:lstStyle/>
+          <a:p>
+            <a:pPr algn="ctr"/>
+            <a:endParaRPr lang="ru-RU"/>
+          </a:p>
+        </p:txBody>
+      </p:sp>
+      <p:sp>
+        <p:nvSpPr>
+          <p:cNvPr id="6" name="TextBox 5">
+            <a:extLst>
+              <a:ext uri="{FF2B5EF4-FFF2-40B4-BE49-F238E27FC236}">
+                <a16:creationId xmlns:a16="http://schemas.microsoft.com/office/drawing/2014/main" id="{53F189FC-2681-5142-5A2F-D30E26B7F3C8}"/>
+              </a:ext>
+            </a:extLst>
+          </p:cNvPr>
+          <p:cNvSpPr txBox="1"/>
+          <p:nvPr/>
+        </p:nvSpPr>
+        <p:spPr>
+          <a:xfrm>
+            <a:off x="838134" y="2494290"/>
+            <a:ext cx="10515579" cy="830997"/>
+          </a:xfrm>
+          <a:prstGeom prst="rect">
+            <a:avLst/>
+          </a:prstGeom>
+          <a:noFill/>
+        </p:spPr>
+        <p:txBody>
+          <a:bodyPr wrap="square">
+            <a:spAutoFit/>
+          </a:bodyPr>
+          <a:lstStyle/>
+          <a:p>
+            <a:pPr algn="ctr"/>
+            <a:r>
+              <a:rPr lang="ru-RU" sz="2400" dirty="0">
                 <a:solidFill>
-                  <a:schemeClr val="tx1"/>
+                  <a:schemeClr val="bg1"/>
                 </a:solidFill>
-                <a:effectLst/>
                 <a:latin typeface="Times New Roman" panose="02020603050405020304" pitchFamily="18" charset="0"/>
                 <a:ea typeface="SimSun" panose="02010600030101010101" pitchFamily="2" charset="-122"/>
                 <a:cs typeface="Times New Roman" panose="02020603050405020304" pitchFamily="18" charset="0"/>
               </a:rPr>
-              <a:t>исунок 5</a:t>
-            </a:r>
-            <a:r>
-              <a:rPr kumimoji="0" lang="ru-RU" altLang="ru-RU" sz="1400" b="1" i="0" u="none" strike="noStrike" cap="none" normalizeH="0" baseline="0" dirty="0" bmk="_Ref226977505">
-                <a:ln>
-                  <a:noFill/>
-                </a:ln>
+              <a:t>Временная валидация </a:t>
+            </a:r>
+            <a:r>
+              <a:rPr lang="en-US" sz="2400" dirty="0">
                 <a:solidFill>
-                  <a:schemeClr val="tx1"/>
+                  <a:schemeClr val="bg1"/>
                 </a:solidFill>
-                <a:effectLst/>
                 <a:latin typeface="Times New Roman" panose="02020603050405020304" pitchFamily="18" charset="0"/>
                 <a:ea typeface="SimSun" panose="02010600030101010101" pitchFamily="2" charset="-122"/>
                 <a:cs typeface="Times New Roman" panose="02020603050405020304" pitchFamily="18" charset="0"/>
               </a:rPr>
-              <a:t> — Распределение трансферных сумм после логарифмирования</a:t>
-            </a:r>
-            <a:endParaRPr kumimoji="0" lang="ru-RU" altLang="ru-RU" sz="2000" b="0" i="0" u="none" strike="noStrike" cap="none" normalizeH="0" baseline="0" dirty="0">
-              <a:ln>
-                <a:noFill/>
-              </a:ln>
+              <a:t>—</a:t>
+            </a:r>
+            <a:r>
+              <a:rPr lang="ru-RU" sz="2400" dirty="0">
+                <a:solidFill>
+                  <a:schemeClr val="bg1"/>
+                </a:solidFill>
+                <a:latin typeface="Times New Roman" panose="02020603050405020304" pitchFamily="18" charset="0"/>
+                <a:ea typeface="SimSun" panose="02010600030101010101" pitchFamily="2" charset="-122"/>
+                <a:cs typeface="Times New Roman" panose="02020603050405020304" pitchFamily="18" charset="0"/>
+              </a:rPr>
+              <a:t> обучение на данных до 2021, тест на 2022–2026 (без случайного разбиения)</a:t>
+            </a:r>
+            <a:endParaRPr lang="ru-RU" sz="2400" dirty="0">
               <a:solidFill>
-                <a:schemeClr val="tx1"/>
+                <a:schemeClr val="bg1"/>
               </a:solidFill>
-              <a:effectLst/>
-              <a:latin typeface="Arial" panose="020B0604020202020204" pitchFamily="34" charset="0"/>
+              <a:latin typeface="Times New Roman" panose="02020603050405020304" pitchFamily="18" charset="0"/>
+              <a:cs typeface="Times New Roman" panose="02020603050405020304" pitchFamily="18" charset="0"/>
+            </a:endParaRPr>
+          </a:p>
+        </p:txBody>
+      </p:sp>
+      <p:sp>
+        <p:nvSpPr>
+          <p:cNvPr id="17" name="TextBox 16">
+            <a:extLst>
+              <a:ext uri="{FF2B5EF4-FFF2-40B4-BE49-F238E27FC236}">
+                <a16:creationId xmlns:a16="http://schemas.microsoft.com/office/drawing/2014/main" id="{A5B18D17-CA70-73BC-F954-269D1763A363}"/>
+              </a:ext>
+            </a:extLst>
+          </p:cNvPr>
+          <p:cNvSpPr txBox="1"/>
+          <p:nvPr/>
+        </p:nvSpPr>
+        <p:spPr>
+          <a:xfrm>
+            <a:off x="838134" y="3728370"/>
+            <a:ext cx="10515600" cy="461665"/>
+          </a:xfrm>
+          <a:prstGeom prst="rect">
+            <a:avLst/>
+          </a:prstGeom>
+          <a:noFill/>
+        </p:spPr>
+        <p:txBody>
+          <a:bodyPr wrap="square">
+            <a:spAutoFit/>
+          </a:bodyPr>
+          <a:lstStyle/>
+          <a:p>
+            <a:pPr algn="ctr"/>
+            <a:r>
+              <a:rPr lang="ru-RU" sz="2400" dirty="0">
+                <a:solidFill>
+                  <a:schemeClr val="bg1"/>
+                </a:solidFill>
+                <a:latin typeface="Times New Roman" panose="02020603050405020304" pitchFamily="18" charset="0"/>
+                <a:ea typeface="SimSun" panose="02010600030101010101" pitchFamily="2" charset="-122"/>
+                <a:cs typeface="Times New Roman" panose="02020603050405020304" pitchFamily="18" charset="0"/>
+              </a:rPr>
+              <a:t>Подбор </a:t>
+            </a:r>
+            <a:r>
+              <a:rPr lang="ru-RU" sz="2400" dirty="0" err="1">
+                <a:solidFill>
+                  <a:schemeClr val="bg1"/>
+                </a:solidFill>
+                <a:latin typeface="Times New Roman" panose="02020603050405020304" pitchFamily="18" charset="0"/>
+                <a:ea typeface="SimSun" panose="02010600030101010101" pitchFamily="2" charset="-122"/>
+                <a:cs typeface="Times New Roman" panose="02020603050405020304" pitchFamily="18" charset="0"/>
+              </a:rPr>
+              <a:t>гиперпараметров</a:t>
+            </a:r>
+            <a:endParaRPr lang="ru-RU" sz="2400" dirty="0">
+              <a:solidFill>
+                <a:schemeClr val="bg1"/>
+              </a:solidFill>
+              <a:latin typeface="Times New Roman" panose="02020603050405020304" pitchFamily="18" charset="0"/>
+              <a:cs typeface="Times New Roman" panose="02020603050405020304" pitchFamily="18" charset="0"/>
+            </a:endParaRPr>
+          </a:p>
+        </p:txBody>
+      </p:sp>
+      <p:sp>
+        <p:nvSpPr>
+          <p:cNvPr id="12" name="Выноска: стрелка вниз 11">
+            <a:extLst>
+              <a:ext uri="{FF2B5EF4-FFF2-40B4-BE49-F238E27FC236}">
+                <a16:creationId xmlns:a16="http://schemas.microsoft.com/office/drawing/2014/main" id="{8DC2911D-2067-A7F4-9976-24A0AEAF0906}"/>
+              </a:ext>
+            </a:extLst>
+          </p:cNvPr>
+          <p:cNvSpPr/>
+          <p:nvPr/>
+        </p:nvSpPr>
+        <p:spPr>
+          <a:xfrm>
+            <a:off x="838135" y="1767303"/>
+            <a:ext cx="10515579" cy="731844"/>
+          </a:xfrm>
+          <a:prstGeom prst="downArrowCallout">
+            <a:avLst/>
+          </a:prstGeom>
+          <a:solidFill>
+            <a:schemeClr val="accent1"/>
+          </a:solidFill>
+        </p:spPr>
+        <p:style>
+          <a:lnRef idx="2">
+            <a:schemeClr val="accent1">
+              <a:shade val="15000"/>
+            </a:schemeClr>
+          </a:lnRef>
+          <a:fillRef idx="1">
+            <a:schemeClr val="accent1"/>
+          </a:fillRef>
+          <a:effectRef idx="0">
+            <a:schemeClr val="accent1"/>
+          </a:effectRef>
+          <a:fontRef idx="minor">
+            <a:schemeClr val="lt1"/>
+          </a:fontRef>
+        </p:style>
+        <p:txBody>
+          <a:bodyPr rtlCol="0" anchor="ctr"/>
+          <a:lstStyle/>
+          <a:p>
+            <a:pPr algn="ctr"/>
+            <a:endParaRPr lang="ru-RU"/>
+          </a:p>
+        </p:txBody>
+      </p:sp>
+      <p:sp>
+        <p:nvSpPr>
+          <p:cNvPr id="18" name="TextBox 17">
+            <a:extLst>
+              <a:ext uri="{FF2B5EF4-FFF2-40B4-BE49-F238E27FC236}">
+                <a16:creationId xmlns:a16="http://schemas.microsoft.com/office/drawing/2014/main" id="{9403D532-C8B9-9FAC-0474-B695478989A1}"/>
+              </a:ext>
+            </a:extLst>
+          </p:cNvPr>
+          <p:cNvSpPr txBox="1"/>
+          <p:nvPr/>
+        </p:nvSpPr>
+        <p:spPr>
+          <a:xfrm>
+            <a:off x="838135" y="1752662"/>
+            <a:ext cx="10515579" cy="461665"/>
+          </a:xfrm>
+          <a:prstGeom prst="rect">
+            <a:avLst/>
+          </a:prstGeom>
+          <a:noFill/>
+        </p:spPr>
+        <p:txBody>
+          <a:bodyPr wrap="square">
+            <a:spAutoFit/>
+          </a:bodyPr>
+          <a:lstStyle/>
+          <a:p>
+            <a:pPr algn="ctr"/>
+            <a:r>
+              <a:rPr lang="ru-RU" sz="2400" dirty="0">
+                <a:solidFill>
+                  <a:schemeClr val="bg1"/>
+                </a:solidFill>
+                <a:latin typeface="Times New Roman" panose="02020603050405020304" pitchFamily="18" charset="0"/>
+                <a:ea typeface="SimSun" panose="02010600030101010101" pitchFamily="2" charset="-122"/>
+                <a:cs typeface="Times New Roman" panose="02020603050405020304" pitchFamily="18" charset="0"/>
+              </a:rPr>
+              <a:t>Генерация признаков</a:t>
+            </a:r>
+            <a:endParaRPr lang="ru-RU" sz="2400" dirty="0">
+              <a:solidFill>
+                <a:schemeClr val="bg1"/>
+              </a:solidFill>
+              <a:latin typeface="Times New Roman" panose="02020603050405020304" pitchFamily="18" charset="0"/>
+              <a:cs typeface="Times New Roman" panose="02020603050405020304" pitchFamily="18" charset="0"/>
             </a:endParaRPr>
           </a:p>
         </p:txBody>
@@ -15920,7 +16055,7 @@
     </p:spTree>
     <p:extLst>
       <p:ext uri="{BB962C8B-B14F-4D97-AF65-F5344CB8AC3E}">
-        <p14:creationId xmlns:p14="http://schemas.microsoft.com/office/powerpoint/2010/main" val="316138124"/>
+        <p14:creationId xmlns:p14="http://schemas.microsoft.com/office/powerpoint/2010/main" val="601765989"/>
       </p:ext>
     </p:extLst>
   </p:cSld>

--- a/4 курс/8 семестр/Преддипломная практика/010304_22И1429_Ким_КС_презентация_предзащита.pptx
+++ b/4 курс/8 семестр/Преддипломная практика/010304_22И1429_Ким_КС_презентация_предзащита.pptx
@@ -5,7 +5,7 @@
     <p:sldMasterId id="2147483673" r:id="rId1"/>
   </p:sldMasterIdLst>
   <p:notesMasterIdLst>
-    <p:notesMasterId r:id="rId18"/>
+    <p:notesMasterId r:id="rId21"/>
   </p:notesMasterIdLst>
   <p:sldIdLst>
     <p:sldId id="256" r:id="rId2"/>
@@ -13,17 +13,20 @@
     <p:sldId id="277" r:id="rId4"/>
     <p:sldId id="279" r:id="rId5"/>
     <p:sldId id="273" r:id="rId6"/>
-    <p:sldId id="265" r:id="rId7"/>
+    <p:sldId id="284" r:id="rId7"/>
     <p:sldId id="264" r:id="rId8"/>
     <p:sldId id="271" r:id="rId9"/>
     <p:sldId id="263" r:id="rId10"/>
     <p:sldId id="262" r:id="rId11"/>
     <p:sldId id="280" r:id="rId12"/>
-    <p:sldId id="267" r:id="rId13"/>
-    <p:sldId id="274" r:id="rId14"/>
-    <p:sldId id="275" r:id="rId15"/>
-    <p:sldId id="270" r:id="rId16"/>
-    <p:sldId id="269" r:id="rId17"/>
+    <p:sldId id="283" r:id="rId13"/>
+    <p:sldId id="267" r:id="rId14"/>
+    <p:sldId id="285" r:id="rId15"/>
+    <p:sldId id="274" r:id="rId16"/>
+    <p:sldId id="275" r:id="rId17"/>
+    <p:sldId id="270" r:id="rId18"/>
+    <p:sldId id="269" r:id="rId19"/>
+    <p:sldId id="281" r:id="rId20"/>
   </p:sldIdLst>
   <p:sldSz cx="12192000" cy="6858000"/>
   <p:notesSz cx="6858000" cy="9144000"/>
@@ -212,7 +215,7 @@
           <a:p>
             <a:fld id="{75B8F736-CFBC-DB42-8902-918977A31BB8}" type="datetimeFigureOut">
               <a:rPr lang="ru-RU" smtClean="0"/>
-              <a:t>03.05.2026</a:t>
+              <a:t>11.05.2026</a:t>
             </a:fld>
             <a:endParaRPr lang="ru-RU"/>
           </a:p>
@@ -733,7 +736,7 @@
           <a:p>
             <a:fld id="{107550DB-F8F9-A345-8ACF-B172BB4CC835}" type="datetime1">
               <a:rPr lang="ru-RU" smtClean="0"/>
-              <a:t>03.05.2026</a:t>
+              <a:t>11.05.2026</a:t>
             </a:fld>
             <a:endParaRPr lang="ru-RU"/>
           </a:p>
@@ -931,7 +934,7 @@
           <a:p>
             <a:fld id="{C37D7D5F-75DD-7D4C-8231-B51C8FBAD87E}" type="datetime1">
               <a:rPr lang="ru-RU" smtClean="0"/>
-              <a:t>03.05.2026</a:t>
+              <a:t>11.05.2026</a:t>
             </a:fld>
             <a:endParaRPr lang="ru-RU"/>
           </a:p>
@@ -1139,7 +1142,7 @@
           <a:p>
             <a:fld id="{8CA4CD92-8BC8-7F42-A4AC-74BE4FBDEFBF}" type="datetime1">
               <a:rPr lang="ru-RU" smtClean="0"/>
-              <a:t>03.05.2026</a:t>
+              <a:t>11.05.2026</a:t>
             </a:fld>
             <a:endParaRPr lang="ru-RU"/>
           </a:p>
@@ -1337,7 +1340,7 @@
           <a:p>
             <a:fld id="{AD86D4C3-C482-8D47-AEDA-F24D432152B4}" type="datetime1">
               <a:rPr lang="ru-RU" smtClean="0"/>
-              <a:t>03.05.2026</a:t>
+              <a:t>11.05.2026</a:t>
             </a:fld>
             <a:endParaRPr lang="ru-RU"/>
           </a:p>
@@ -1612,7 +1615,7 @@
           <a:p>
             <a:fld id="{6E8693C7-0C3C-3D4E-827B-EA584AF6C465}" type="datetime1">
               <a:rPr lang="ru-RU" smtClean="0"/>
-              <a:t>03.05.2026</a:t>
+              <a:t>11.05.2026</a:t>
             </a:fld>
             <a:endParaRPr lang="ru-RU"/>
           </a:p>
@@ -1877,7 +1880,7 @@
           <a:p>
             <a:fld id="{36DB63EE-D3F0-B14D-A1DF-4D0885D56E4A}" type="datetime1">
               <a:rPr lang="ru-RU" smtClean="0"/>
-              <a:t>03.05.2026</a:t>
+              <a:t>11.05.2026</a:t>
             </a:fld>
             <a:endParaRPr lang="ru-RU"/>
           </a:p>
@@ -2289,7 +2292,7 @@
           <a:p>
             <a:fld id="{CA70F580-4A02-7749-8695-6F7A14F168A5}" type="datetime1">
               <a:rPr lang="ru-RU" smtClean="0"/>
-              <a:t>03.05.2026</a:t>
+              <a:t>11.05.2026</a:t>
             </a:fld>
             <a:endParaRPr lang="ru-RU"/>
           </a:p>
@@ -2430,7 +2433,7 @@
           <a:p>
             <a:fld id="{EA1A2E72-AE73-9645-9180-4139BDD17A06}" type="datetime1">
               <a:rPr lang="ru-RU" smtClean="0"/>
-              <a:t>03.05.2026</a:t>
+              <a:t>11.05.2026</a:t>
             </a:fld>
             <a:endParaRPr lang="ru-RU"/>
           </a:p>
@@ -2543,7 +2546,7 @@
           <a:p>
             <a:fld id="{C7CB39E5-2434-9D49-A354-72490D6D8D81}" type="datetime1">
               <a:rPr lang="ru-RU" smtClean="0"/>
-              <a:t>03.05.2026</a:t>
+              <a:t>11.05.2026</a:t>
             </a:fld>
             <a:endParaRPr lang="ru-RU"/>
           </a:p>
@@ -2854,7 +2857,7 @@
           <a:p>
             <a:fld id="{1C738D45-2A78-F24B-B5AB-66E869CA231F}" type="datetime1">
               <a:rPr lang="ru-RU" smtClean="0"/>
-              <a:t>03.05.2026</a:t>
+              <a:t>11.05.2026</a:t>
             </a:fld>
             <a:endParaRPr lang="ru-RU"/>
           </a:p>
@@ -3142,7 +3145,7 @@
           <a:p>
             <a:fld id="{F6F4DE2A-573E-8A49-A1E4-A11F8F365BD0}" type="datetime1">
               <a:rPr lang="ru-RU" smtClean="0"/>
-              <a:t>03.05.2026</a:t>
+              <a:t>11.05.2026</a:t>
             </a:fld>
             <a:endParaRPr lang="ru-RU"/>
           </a:p>
@@ -3383,7 +3386,7 @@
           <a:p>
             <a:fld id="{B4849629-F3D2-184C-BCB4-85078938F85A}" type="datetime1">
               <a:rPr lang="ru-RU" smtClean="0"/>
-              <a:t>03.05.2026</a:t>
+              <a:t>11.05.2026</a:t>
             </a:fld>
             <a:endParaRPr lang="ru-RU"/>
           </a:p>
@@ -5602,7 +5605,7 @@
         <p:cNvPr id="1" name="">
           <a:extLst>
             <a:ext uri="{FF2B5EF4-FFF2-40B4-BE49-F238E27FC236}">
-              <a16:creationId xmlns:a16="http://schemas.microsoft.com/office/drawing/2014/main" id="{72F18965-FEB1-4BD6-1031-C132034DD9DC}"/>
+              <a16:creationId xmlns:a16="http://schemas.microsoft.com/office/drawing/2014/main" id="{79D2699D-2780-01C5-6164-9C7B0CA8F99D}"/>
             </a:ext>
           </a:extLst>
         </p:cNvPr>
@@ -5619,48 +5622,67 @@
       </p:grpSpPr>
       <p:sp>
         <p:nvSpPr>
-          <p:cNvPr id="2" name="Заголовок 1">
-            <a:extLst>
-              <a:ext uri="{FF2B5EF4-FFF2-40B4-BE49-F238E27FC236}">
-                <a16:creationId xmlns:a16="http://schemas.microsoft.com/office/drawing/2014/main" id="{12779D9B-208D-6E25-22E8-C69E979256FC}"/>
-              </a:ext>
-            </a:extLst>
-          </p:cNvPr>
-          <p:cNvSpPr>
-            <a:spLocks noGrp="1"/>
+          <p:cNvPr id="10" name="Заголовок 1">
+            <a:extLst>
+              <a:ext uri="{FF2B5EF4-FFF2-40B4-BE49-F238E27FC236}">
+                <a16:creationId xmlns:a16="http://schemas.microsoft.com/office/drawing/2014/main" id="{E1BD518A-77EA-F1E0-96DD-35BE46985616}"/>
+              </a:ext>
+            </a:extLst>
+          </p:cNvPr>
+          <p:cNvSpPr txBox="1">
+            <a:spLocks/>
           </p:cNvSpPr>
-          <p:nvPr>
-            <p:ph type="title"/>
-          </p:nvPr>
+          <p:nvPr/>
         </p:nvSpPr>
         <p:spPr>
           <a:xfrm>
             <a:off x="838200" y="365127"/>
             <a:ext cx="10515600" cy="694240"/>
           </a:xfrm>
+          <a:prstGeom prst="rect">
+            <a:avLst/>
+          </a:prstGeom>
         </p:spPr>
         <p:txBody>
-          <a:bodyPr>
+          <a:bodyPr vert="horz" lIns="91440" tIns="45720" rIns="91440" bIns="45720" rtlCol="0" anchor="ctr">
             <a:normAutofit/>
           </a:bodyPr>
-          <a:lstStyle/>
+          <a:lstStyle>
+            <a:lvl1pPr algn="l" defTabSz="914400" rtl="0" eaLnBrk="1" latinLnBrk="0" hangingPunct="1">
+              <a:lnSpc>
+                <a:spcPct val="90000"/>
+              </a:lnSpc>
+              <a:spcBef>
+                <a:spcPct val="0"/>
+              </a:spcBef>
+              <a:buNone/>
+              <a:defRPr sz="4400" kern="1200">
+                <a:solidFill>
+                  <a:schemeClr val="tx1"/>
+                </a:solidFill>
+                <a:latin typeface="+mj-lt"/>
+                <a:ea typeface="+mj-ea"/>
+                <a:cs typeface="+mj-cs"/>
+              </a:defRPr>
+            </a:lvl1pPr>
+          </a:lstStyle>
           <a:p>
             <a:r>
               <a:rPr lang="ru-RU" sz="3200" dirty="0">
                 <a:latin typeface="Times New Roman" panose="02020603050405020304" pitchFamily="18" charset="0"/>
                 <a:cs typeface="Times New Roman" panose="02020603050405020304" pitchFamily="18" charset="0"/>
               </a:rPr>
-              <a:t>Реализация модели и анализ результатов</a:t>
-            </a:r>
-          </a:p>
-        </p:txBody>
-      </p:sp>
-      <p:sp>
-        <p:nvSpPr>
-          <p:cNvPr id="4" name="Заголовок 1">
-            <a:extLst>
-              <a:ext uri="{FF2B5EF4-FFF2-40B4-BE49-F238E27FC236}">
-                <a16:creationId xmlns:a16="http://schemas.microsoft.com/office/drawing/2014/main" id="{6590082B-0991-3885-E4E0-72D7D6C26141}"/>
+              <a:t> Зачем нужна регуляризация?</a:t>
+            </a:r>
+          </a:p>
+        </p:txBody>
+      </p:sp>
+      <p:sp>
+        <p:nvSpPr>
+          <p:cNvPr id="11" name="Заголовок 1">
+            <a:extLst>
+              <a:ext uri="{FF2B5EF4-FFF2-40B4-BE49-F238E27FC236}">
+                <a16:creationId xmlns:a16="http://schemas.microsoft.com/office/drawing/2014/main" id="{03D536AC-B69B-E1AA-D613-2F58E059CF80}"/>
               </a:ext>
             </a:extLst>
           </p:cNvPr>
@@ -5711,10 +5733,10 @@
       </p:sp>
       <p:sp>
         <p:nvSpPr>
-          <p:cNvPr id="7" name="TextBox 6">
-            <a:extLst>
-              <a:ext uri="{FF2B5EF4-FFF2-40B4-BE49-F238E27FC236}">
-                <a16:creationId xmlns:a16="http://schemas.microsoft.com/office/drawing/2014/main" id="{237DCE76-0CC6-85AF-BDA9-A295166D6565}"/>
+          <p:cNvPr id="12" name="TextBox 11">
+            <a:extLst>
+              <a:ext uri="{FF2B5EF4-FFF2-40B4-BE49-F238E27FC236}">
+                <a16:creationId xmlns:a16="http://schemas.microsoft.com/office/drawing/2014/main" id="{32867B9F-CDB0-2EF1-3AAD-E7B7A4C5D81F}"/>
               </a:ext>
             </a:extLst>
           </p:cNvPr>
@@ -5749,10 +5771,120 @@
       </p:sp>
       <p:sp>
         <p:nvSpPr>
-          <p:cNvPr id="6" name="Rectangle 1">
-            <a:extLst>
-              <a:ext uri="{FF2B5EF4-FFF2-40B4-BE49-F238E27FC236}">
-                <a16:creationId xmlns:a16="http://schemas.microsoft.com/office/drawing/2014/main" id="{A2AC97CE-9ACF-596F-A1BA-6D89BDB31667}"/>
+          <p:cNvPr id="13" name="TextBox 12">
+            <a:extLst>
+              <a:ext uri="{FF2B5EF4-FFF2-40B4-BE49-F238E27FC236}">
+                <a16:creationId xmlns:a16="http://schemas.microsoft.com/office/drawing/2014/main" id="{13DA3963-C344-29F8-8DAA-54C2D36BA6C7}"/>
+              </a:ext>
+            </a:extLst>
+          </p:cNvPr>
+          <p:cNvSpPr txBox="1"/>
+          <p:nvPr/>
+        </p:nvSpPr>
+        <p:spPr>
+          <a:xfrm>
+            <a:off x="641479" y="960885"/>
+            <a:ext cx="10909041" cy="923330"/>
+          </a:xfrm>
+          <a:prstGeom prst="rect">
+            <a:avLst/>
+          </a:prstGeom>
+          <a:noFill/>
+        </p:spPr>
+        <p:txBody>
+          <a:bodyPr wrap="square">
+            <a:spAutoFit/>
+          </a:bodyPr>
+          <a:lstStyle/>
+          <a:p>
+            <a:pPr indent="450000">
+              <a:buFont typeface="Arial" panose="020B0604020202020204" pitchFamily="34" charset="0"/>
+              <a:buChar char="•"/>
+            </a:pPr>
+            <a:r>
+              <a:rPr lang="ru-RU" dirty="0">
+                <a:latin typeface="Times New Roman" panose="02020603050405020304" pitchFamily="18" charset="0"/>
+                <a:cs typeface="Times New Roman" panose="02020603050405020304" pitchFamily="18" charset="0"/>
+              </a:rPr>
+              <a:t>Проблема: </a:t>
+            </a:r>
+            <a:r>
+              <a:rPr lang="ru-RU" dirty="0" err="1">
+                <a:latin typeface="Times New Roman" panose="02020603050405020304" pitchFamily="18" charset="0"/>
+                <a:cs typeface="Times New Roman" panose="02020603050405020304" pitchFamily="18" charset="0"/>
+              </a:rPr>
+              <a:t>мультиколлинеарность</a:t>
+            </a:r>
+            <a:r>
+              <a:rPr lang="ru-RU" dirty="0">
+                <a:latin typeface="Times New Roman" panose="02020603050405020304" pitchFamily="18" charset="0"/>
+                <a:cs typeface="Times New Roman" panose="02020603050405020304" pitchFamily="18" charset="0"/>
+              </a:rPr>
+              <a:t> (корреляция голов и передач ≈ 0,58).</a:t>
+            </a:r>
+          </a:p>
+          <a:p>
+            <a:pPr indent="450000">
+              <a:buFont typeface="Arial" panose="020B0604020202020204" pitchFamily="34" charset="0"/>
+              <a:buChar char="•"/>
+            </a:pPr>
+            <a:r>
+              <a:rPr lang="ru-RU" dirty="0">
+                <a:latin typeface="Times New Roman" panose="02020603050405020304" pitchFamily="18" charset="0"/>
+                <a:cs typeface="Times New Roman" panose="02020603050405020304" pitchFamily="18" charset="0"/>
+              </a:rPr>
+              <a:t>В обычной линейной регрессии это вызывает нестабильность коэффициентов.</a:t>
+            </a:r>
+          </a:p>
+          <a:p>
+            <a:pPr indent="450000">
+              <a:buFont typeface="Arial" panose="020B0604020202020204" pitchFamily="34" charset="0"/>
+              <a:buChar char="•"/>
+            </a:pPr>
+            <a:r>
+              <a:rPr lang="ru-RU" dirty="0">
+                <a:latin typeface="Times New Roman" panose="02020603050405020304" pitchFamily="18" charset="0"/>
+                <a:cs typeface="Times New Roman" panose="02020603050405020304" pitchFamily="18" charset="0"/>
+              </a:rPr>
+              <a:t>Решение: </a:t>
+            </a:r>
+            <a:r>
+              <a:rPr lang="ru-RU" dirty="0" err="1">
+                <a:latin typeface="Times New Roman" panose="02020603050405020304" pitchFamily="18" charset="0"/>
+                <a:cs typeface="Times New Roman" panose="02020603050405020304" pitchFamily="18" charset="0"/>
+              </a:rPr>
+              <a:t>Ridge</a:t>
+            </a:r>
+            <a:r>
+              <a:rPr lang="ru-RU" dirty="0">
+                <a:latin typeface="Times New Roman" panose="02020603050405020304" pitchFamily="18" charset="0"/>
+                <a:cs typeface="Times New Roman" panose="02020603050405020304" pitchFamily="18" charset="0"/>
+              </a:rPr>
+              <a:t> (L2) – сжимает коэффициенты, </a:t>
+            </a:r>
+            <a:r>
+              <a:rPr lang="ru-RU" dirty="0" err="1">
+                <a:latin typeface="Times New Roman" panose="02020603050405020304" pitchFamily="18" charset="0"/>
+                <a:cs typeface="Times New Roman" panose="02020603050405020304" pitchFamily="18" charset="0"/>
+              </a:rPr>
+              <a:t>Lasso</a:t>
+            </a:r>
+            <a:r>
+              <a:rPr lang="ru-RU" dirty="0">
+                <a:latin typeface="Times New Roman" panose="02020603050405020304" pitchFamily="18" charset="0"/>
+                <a:cs typeface="Times New Roman" panose="02020603050405020304" pitchFamily="18" charset="0"/>
+              </a:rPr>
+              <a:t> (L1) – может обнулять незначимые.</a:t>
+            </a:r>
+          </a:p>
+        </p:txBody>
+      </p:sp>
+      <p:sp>
+        <p:nvSpPr>
+          <p:cNvPr id="14" name="Rectangle 1">
+            <a:extLst>
+              <a:ext uri="{FF2B5EF4-FFF2-40B4-BE49-F238E27FC236}">
+                <a16:creationId xmlns:a16="http://schemas.microsoft.com/office/drawing/2014/main" id="{5D1F88CA-E67E-9C69-77F3-34466CE6C188}"/>
               </a:ext>
             </a:extLst>
           </p:cNvPr>
@@ -5763,7 +5895,976 @@
         </p:nvSpPr>
         <p:spPr bwMode="auto">
           <a:xfrm>
-            <a:off x="838156" y="1349607"/>
+            <a:off x="4423848" y="6463033"/>
+            <a:ext cx="3344302" cy="307777"/>
+          </a:xfrm>
+          <a:prstGeom prst="rect">
+            <a:avLst/>
+          </a:prstGeom>
+          <a:noFill/>
+          <a:ln>
+            <a:noFill/>
+          </a:ln>
+          <a:effectLst/>
+          <a:extLst>
+            <a:ext uri="{909E8E84-426E-40DD-AFC4-6F175D3DCCD1}">
+              <a14:hiddenFill xmlns:a14="http://schemas.microsoft.com/office/drawing/2010/main">
+                <a:solidFill>
+                  <a:schemeClr val="accent1"/>
+                </a:solidFill>
+              </a14:hiddenFill>
+            </a:ext>
+            <a:ext uri="{91240B29-F687-4F45-9708-019B960494DF}">
+              <a14:hiddenLine xmlns:a14="http://schemas.microsoft.com/office/drawing/2010/main" w="9525">
+                <a:solidFill>
+                  <a:schemeClr val="tx1"/>
+                </a:solidFill>
+                <a:miter lim="800000"/>
+                <a:headEnd/>
+                <a:tailEnd/>
+              </a14:hiddenLine>
+            </a:ext>
+            <a:ext uri="{AF507438-7753-43E0-B8FC-AC1667EBCBE1}">
+              <a14:hiddenEffects xmlns:a14="http://schemas.microsoft.com/office/drawing/2010/main">
+                <a:effectLst>
+                  <a:outerShdw dist="35921" dir="2700000" algn="ctr" rotWithShape="0">
+                    <a:schemeClr val="bg2"/>
+                  </a:outerShdw>
+                </a:effectLst>
+              </a14:hiddenEffects>
+            </a:ext>
+          </a:extLst>
+        </p:spPr>
+        <p:txBody>
+          <a:bodyPr vert="horz" wrap="square" lIns="91440" tIns="45720" rIns="91440" bIns="45720" numCol="1" anchor="ctr" anchorCtr="0" compatLnSpc="1">
+            <a:prstTxWarp prst="textNoShape">
+              <a:avLst/>
+            </a:prstTxWarp>
+            <a:spAutoFit/>
+          </a:bodyPr>
+          <a:lstStyle/>
+          <a:p>
+            <a:pPr lvl="0" algn="ctr" eaLnBrk="0" fontAlgn="base" hangingPunct="0">
+              <a:spcBef>
+                <a:spcPct val="0"/>
+              </a:spcBef>
+              <a:spcAft>
+                <a:spcPct val="0"/>
+              </a:spcAft>
+            </a:pPr>
+            <a:r>
+              <a:rPr lang="ru-RU" altLang="ru-RU" sz="1400" b="1" dirty="0">
+                <a:latin typeface="Times New Roman" panose="02020603050405020304" pitchFamily="18" charset="0"/>
+                <a:ea typeface="SimSun" panose="02010600030101010101" pitchFamily="2" charset="-122"/>
+                <a:cs typeface="Times New Roman" panose="02020603050405020304" pitchFamily="18" charset="0"/>
+              </a:rPr>
+              <a:t>Рисунок 6 — Матрица корреляции</a:t>
+            </a:r>
+            <a:endParaRPr lang="ru-RU" altLang="ru-RU" sz="2000" dirty="0">
+              <a:latin typeface="Arial" panose="020B0604020202020204" pitchFamily="34" charset="0"/>
+            </a:endParaRPr>
+          </a:p>
+        </p:txBody>
+      </p:sp>
+      <p:pic>
+        <p:nvPicPr>
+          <p:cNvPr id="15" name="Рисунок 14">
+            <a:extLst>
+              <a:ext uri="{FF2B5EF4-FFF2-40B4-BE49-F238E27FC236}">
+                <a16:creationId xmlns:a16="http://schemas.microsoft.com/office/drawing/2014/main" id="{01DBFE20-AF00-C8A6-04C1-431E864947D9}"/>
+              </a:ext>
+            </a:extLst>
+          </p:cNvPr>
+          <p:cNvPicPr>
+            <a:picLocks noChangeAspect="1"/>
+          </p:cNvPicPr>
+          <p:nvPr/>
+        </p:nvPicPr>
+        <p:blipFill>
+          <a:blip r:embed="rId2">
+            <a:extLst>
+              <a:ext uri="{28A0092B-C50C-407E-A947-70E740481C1C}">
+                <a14:useLocalDpi xmlns:a14="http://schemas.microsoft.com/office/drawing/2010/main" val="0"/>
+              </a:ext>
+            </a:extLst>
+          </a:blip>
+          <a:srcRect/>
+          <a:stretch>
+            <a:fillRect/>
+          </a:stretch>
+        </p:blipFill>
+        <p:spPr bwMode="auto">
+          <a:xfrm>
+            <a:off x="3440234" y="1940727"/>
+            <a:ext cx="5311530" cy="4424571"/>
+          </a:xfrm>
+          <a:prstGeom prst="rect">
+            <a:avLst/>
+          </a:prstGeom>
+          <a:noFill/>
+          <a:ln>
+            <a:solidFill>
+              <a:schemeClr val="bg1"/>
+            </a:solidFill>
+          </a:ln>
+        </p:spPr>
+      </p:pic>
+    </p:spTree>
+    <p:extLst>
+      <p:ext uri="{BB962C8B-B14F-4D97-AF65-F5344CB8AC3E}">
+        <p14:creationId xmlns:p14="http://schemas.microsoft.com/office/powerpoint/2010/main" val="1858294701"/>
+      </p:ext>
+    </p:extLst>
+  </p:cSld>
+  <p:clrMapOvr>
+    <a:masterClrMapping/>
+  </p:clrMapOvr>
+</p:sld>
+</file>
+
+<file path=ppt/slides/slide13.xml><?xml version="1.0" encoding="utf-8"?>
+<p:sld xmlns:a="http://schemas.openxmlformats.org/drawingml/2006/main" xmlns:r="http://schemas.openxmlformats.org/officeDocument/2006/relationships" xmlns:p="http://schemas.openxmlformats.org/presentationml/2006/main">
+  <p:cSld>
+    <p:spTree>
+      <p:nvGrpSpPr>
+        <p:cNvPr id="1" name="">
+          <a:extLst>
+            <a:ext uri="{FF2B5EF4-FFF2-40B4-BE49-F238E27FC236}">
+              <a16:creationId xmlns:a16="http://schemas.microsoft.com/office/drawing/2014/main" id="{72F18965-FEB1-4BD6-1031-C132034DD9DC}"/>
+            </a:ext>
+          </a:extLst>
+        </p:cNvPr>
+        <p:cNvGrpSpPr/>
+        <p:nvPr/>
+      </p:nvGrpSpPr>
+      <p:grpSpPr>
+        <a:xfrm>
+          <a:off x="0" y="0"/>
+          <a:ext cx="0" cy="0"/>
+          <a:chOff x="0" y="0"/>
+          <a:chExt cx="0" cy="0"/>
+        </a:xfrm>
+      </p:grpSpPr>
+      <p:sp>
+        <p:nvSpPr>
+          <p:cNvPr id="2" name="Заголовок 1">
+            <a:extLst>
+              <a:ext uri="{FF2B5EF4-FFF2-40B4-BE49-F238E27FC236}">
+                <a16:creationId xmlns:a16="http://schemas.microsoft.com/office/drawing/2014/main" id="{12779D9B-208D-6E25-22E8-C69E979256FC}"/>
+              </a:ext>
+            </a:extLst>
+          </p:cNvPr>
+          <p:cNvSpPr>
+            <a:spLocks noGrp="1"/>
+          </p:cNvSpPr>
+          <p:nvPr>
+            <p:ph type="title"/>
+          </p:nvPr>
+        </p:nvSpPr>
+        <p:spPr>
+          <a:xfrm>
+            <a:off x="838200" y="365127"/>
+            <a:ext cx="10515600" cy="694240"/>
+          </a:xfrm>
+        </p:spPr>
+        <p:txBody>
+          <a:bodyPr>
+            <a:normAutofit/>
+          </a:bodyPr>
+          <a:lstStyle/>
+          <a:p>
+            <a:r>
+              <a:rPr lang="ru-RU" sz="3200" dirty="0">
+                <a:latin typeface="Times New Roman" panose="02020603050405020304" pitchFamily="18" charset="0"/>
+                <a:cs typeface="Times New Roman" panose="02020603050405020304" pitchFamily="18" charset="0"/>
+              </a:rPr>
+              <a:t>Временная валидация и подбор </a:t>
+            </a:r>
+            <a:r>
+              <a:rPr lang="ru-RU" sz="3200" dirty="0" err="1">
+                <a:latin typeface="Times New Roman" panose="02020603050405020304" pitchFamily="18" charset="0"/>
+                <a:cs typeface="Times New Roman" panose="02020603050405020304" pitchFamily="18" charset="0"/>
+              </a:rPr>
+              <a:t>гиперпараметров</a:t>
+            </a:r>
+            <a:endParaRPr lang="ru-RU" sz="3200" dirty="0">
+              <a:latin typeface="Times New Roman" panose="02020603050405020304" pitchFamily="18" charset="0"/>
+              <a:cs typeface="Times New Roman" panose="02020603050405020304" pitchFamily="18" charset="0"/>
+            </a:endParaRPr>
+          </a:p>
+        </p:txBody>
+      </p:sp>
+      <p:sp>
+        <p:nvSpPr>
+          <p:cNvPr id="4" name="Заголовок 1">
+            <a:extLst>
+              <a:ext uri="{FF2B5EF4-FFF2-40B4-BE49-F238E27FC236}">
+                <a16:creationId xmlns:a16="http://schemas.microsoft.com/office/drawing/2014/main" id="{6590082B-0991-3885-E4E0-72D7D6C26141}"/>
+              </a:ext>
+            </a:extLst>
+          </p:cNvPr>
+          <p:cNvSpPr txBox="1">
+            <a:spLocks/>
+          </p:cNvSpPr>
+          <p:nvPr/>
+        </p:nvSpPr>
+        <p:spPr>
+          <a:xfrm>
+            <a:off x="838200" y="904373"/>
+            <a:ext cx="10515600" cy="694240"/>
+          </a:xfrm>
+          <a:prstGeom prst="rect">
+            <a:avLst/>
+          </a:prstGeom>
+        </p:spPr>
+        <p:txBody>
+          <a:bodyPr vert="horz" lIns="91440" tIns="45720" rIns="91440" bIns="45720" rtlCol="0" anchor="ctr">
+            <a:normAutofit/>
+          </a:bodyPr>
+          <a:lstStyle>
+            <a:lvl1pPr algn="l" defTabSz="914353" rtl="0" eaLnBrk="1" latinLnBrk="0" hangingPunct="1">
+              <a:lnSpc>
+                <a:spcPct val="90000"/>
+              </a:lnSpc>
+              <a:spcBef>
+                <a:spcPct val="0"/>
+              </a:spcBef>
+              <a:buNone/>
+              <a:defRPr sz="4400" kern="1200">
+                <a:solidFill>
+                  <a:schemeClr val="tx1"/>
+                </a:solidFill>
+                <a:latin typeface="+mj-lt"/>
+                <a:ea typeface="+mj-ea"/>
+                <a:cs typeface="+mj-cs"/>
+              </a:defRPr>
+            </a:lvl1pPr>
+          </a:lstStyle>
+          <a:p>
+            <a:endParaRPr lang="ru-RU" sz="3200" dirty="0">
+              <a:latin typeface="Times New Roman" panose="02020603050405020304" pitchFamily="18" charset="0"/>
+              <a:cs typeface="Times New Roman" panose="02020603050405020304" pitchFamily="18" charset="0"/>
+            </a:endParaRPr>
+          </a:p>
+        </p:txBody>
+      </p:sp>
+      <p:sp>
+        <p:nvSpPr>
+          <p:cNvPr id="7" name="TextBox 6">
+            <a:extLst>
+              <a:ext uri="{FF2B5EF4-FFF2-40B4-BE49-F238E27FC236}">
+                <a16:creationId xmlns:a16="http://schemas.microsoft.com/office/drawing/2014/main" id="{237DCE76-0CC6-85AF-BDA9-A295166D6565}"/>
+              </a:ext>
+            </a:extLst>
+          </p:cNvPr>
+          <p:cNvSpPr txBox="1"/>
+          <p:nvPr/>
+        </p:nvSpPr>
+        <p:spPr>
+          <a:xfrm>
+            <a:off x="11353780" y="5992297"/>
+            <a:ext cx="838220" cy="369332"/>
+          </a:xfrm>
+          <a:prstGeom prst="rect">
+            <a:avLst/>
+          </a:prstGeom>
+          <a:noFill/>
+        </p:spPr>
+        <p:txBody>
+          <a:bodyPr wrap="square" rtlCol="0">
+            <a:spAutoFit/>
+          </a:bodyPr>
+          <a:lstStyle/>
+          <a:p>
+            <a:r>
+              <a:rPr lang="ru-RU" dirty="0">
+                <a:latin typeface="Times New Roman" panose="02020603050405020304" pitchFamily="18" charset="0"/>
+                <a:cs typeface="Times New Roman" panose="02020603050405020304" pitchFamily="18" charset="0"/>
+              </a:rPr>
+              <a:t>13</a:t>
+            </a:r>
+          </a:p>
+        </p:txBody>
+      </p:sp>
+      <mc:AlternateContent xmlns:mc="http://schemas.openxmlformats.org/markup-compatibility/2006">
+        <mc:Choice xmlns:a14="http://schemas.microsoft.com/office/drawing/2010/main" Requires="a14">
+          <p:sp>
+            <p:nvSpPr>
+              <p:cNvPr id="9" name="TextBox 8">
+                <a:extLst>
+                  <a:ext uri="{FF2B5EF4-FFF2-40B4-BE49-F238E27FC236}">
+                    <a16:creationId xmlns:a16="http://schemas.microsoft.com/office/drawing/2014/main" id="{52B2A546-C6E3-D4B0-3B05-F6CD28644636}"/>
+                  </a:ext>
+                </a:extLst>
+              </p:cNvPr>
+              <p:cNvSpPr txBox="1"/>
+              <p:nvPr/>
+            </p:nvSpPr>
+            <p:spPr>
+              <a:xfrm>
+                <a:off x="838181" y="1263675"/>
+                <a:ext cx="10515599" cy="4893647"/>
+              </a:xfrm>
+              <a:prstGeom prst="rect">
+                <a:avLst/>
+              </a:prstGeom>
+              <a:noFill/>
+            </p:spPr>
+            <p:txBody>
+              <a:bodyPr wrap="square">
+                <a:spAutoFit/>
+              </a:bodyPr>
+              <a:lstStyle/>
+              <a:p>
+                <a:r>
+                  <a:rPr lang="ru-RU" sz="2400" dirty="0">
+                    <a:latin typeface="Times New Roman" panose="02020603050405020304" pitchFamily="18" charset="0"/>
+                    <a:cs typeface="Times New Roman" panose="02020603050405020304" pitchFamily="18" charset="0"/>
+                  </a:rPr>
+                  <a:t>Схема разделения данных:</a:t>
+                </a:r>
+              </a:p>
+              <a:p>
+                <a:pPr indent="450000">
+                  <a:buFont typeface="Arial" panose="020B0604020202020204" pitchFamily="34" charset="0"/>
+                  <a:buChar char="•"/>
+                </a:pPr>
+                <a:r>
+                  <a:rPr lang="ru-RU" sz="2400" dirty="0">
+                    <a:latin typeface="Times New Roman" panose="02020603050405020304" pitchFamily="18" charset="0"/>
+                    <a:cs typeface="Times New Roman" panose="02020603050405020304" pitchFamily="18" charset="0"/>
+                  </a:rPr>
+                  <a:t>Обучение: трансферы до 2021 г. (1973-2021, </a:t>
+                </a:r>
+                <a:r>
+                  <a:rPr lang="en-US" sz="2400" dirty="0">
+                    <a:latin typeface="Times New Roman" panose="02020603050405020304" pitchFamily="18" charset="0"/>
+                    <a:cs typeface="Times New Roman" panose="02020603050405020304" pitchFamily="18" charset="0"/>
+                  </a:rPr>
+                  <a:t>&gt;30 </a:t>
+                </a:r>
+                <a:r>
+                  <a:rPr lang="ru-RU" sz="2400" dirty="0">
+                    <a:latin typeface="Times New Roman" panose="02020603050405020304" pitchFamily="18" charset="0"/>
+                    <a:cs typeface="Times New Roman" panose="02020603050405020304" pitchFamily="18" charset="0"/>
+                  </a:rPr>
+                  <a:t>тыс. записей)</a:t>
+                </a:r>
+              </a:p>
+              <a:p>
+                <a:pPr indent="450000">
+                  <a:buFont typeface="Arial" panose="020B0604020202020204" pitchFamily="34" charset="0"/>
+                  <a:buChar char="•"/>
+                </a:pPr>
+                <a:r>
+                  <a:rPr lang="ru-RU" sz="2400" dirty="0">
+                    <a:latin typeface="Times New Roman" panose="02020603050405020304" pitchFamily="18" charset="0"/>
+                    <a:cs typeface="Times New Roman" panose="02020603050405020304" pitchFamily="18" charset="0"/>
+                  </a:rPr>
+                  <a:t>Тест: трансферы 2022-2026 </a:t>
+                </a:r>
+                <a:r>
+                  <a:rPr lang="ru-RU" sz="2400" dirty="0" err="1">
+                    <a:latin typeface="Times New Roman" panose="02020603050405020304" pitchFamily="18" charset="0"/>
+                    <a:cs typeface="Times New Roman" panose="02020603050405020304" pitchFamily="18" charset="0"/>
+                  </a:rPr>
+                  <a:t>гг</a:t>
+                </a:r>
+                <a:r>
+                  <a:rPr lang="ru-RU" sz="2400" dirty="0">
+                    <a:latin typeface="Times New Roman" panose="02020603050405020304" pitchFamily="18" charset="0"/>
+                    <a:cs typeface="Times New Roman" panose="02020603050405020304" pitchFamily="18" charset="0"/>
+                  </a:rPr>
+                  <a:t> (</a:t>
+                </a:r>
+                <a:r>
+                  <a:rPr lang="en-US" sz="2400" dirty="0">
+                    <a:latin typeface="Times New Roman" panose="02020603050405020304" pitchFamily="18" charset="0"/>
+                    <a:cs typeface="Times New Roman" panose="02020603050405020304" pitchFamily="18" charset="0"/>
+                  </a:rPr>
+                  <a:t>&gt;</a:t>
+                </a:r>
+                <a:r>
+                  <a:rPr lang="ru-RU" sz="2400" dirty="0">
+                    <a:latin typeface="Times New Roman" panose="02020603050405020304" pitchFamily="18" charset="0"/>
+                    <a:cs typeface="Times New Roman" panose="02020603050405020304" pitchFamily="18" charset="0"/>
+                  </a:rPr>
+                  <a:t>9 тыс. записей).</a:t>
+                </a:r>
+              </a:p>
+              <a:p>
+                <a:r>
+                  <a:rPr lang="ru-RU" sz="2400" dirty="0">
+                    <a:latin typeface="Times New Roman" panose="02020603050405020304" pitchFamily="18" charset="0"/>
+                    <a:cs typeface="Times New Roman" panose="02020603050405020304" pitchFamily="18" charset="0"/>
+                  </a:rPr>
+                  <a:t>Кросс‑валидация: </a:t>
+                </a:r>
+                <a:r>
+                  <a:rPr lang="ru-RU" sz="2400" dirty="0" err="1">
+                    <a:latin typeface="Times New Roman" panose="02020603050405020304" pitchFamily="18" charset="0"/>
+                    <a:cs typeface="Times New Roman" panose="02020603050405020304" pitchFamily="18" charset="0"/>
+                  </a:rPr>
+                  <a:t>TimeSeriesSplit</a:t>
+                </a:r>
+                <a:r>
+                  <a:rPr lang="en-US" sz="2400" dirty="0">
+                    <a:latin typeface="Times New Roman" panose="02020603050405020304" pitchFamily="18" charset="0"/>
+                    <a:cs typeface="Times New Roman" panose="02020603050405020304" pitchFamily="18" charset="0"/>
+                  </a:rPr>
+                  <a:t> — </a:t>
+                </a:r>
+                <a:r>
+                  <a:rPr lang="ru-RU" sz="2400" dirty="0">
+                    <a:latin typeface="Times New Roman" panose="02020603050405020304" pitchFamily="18" charset="0"/>
+                    <a:cs typeface="Times New Roman" panose="02020603050405020304" pitchFamily="18" charset="0"/>
+                  </a:rPr>
+                  <a:t>обучающая выборка всегда предшествует тестовой, исключая утечку будущей информации.</a:t>
+                </a:r>
+              </a:p>
+              <a:p>
+                <a:r>
+                  <a:rPr lang="ru-RU" sz="2400" dirty="0">
+                    <a:latin typeface="Times New Roman" panose="02020603050405020304" pitchFamily="18" charset="0"/>
+                    <a:cs typeface="Times New Roman" panose="02020603050405020304" pitchFamily="18" charset="0"/>
+                  </a:rPr>
+                  <a:t>Подбор </a:t>
+                </a:r>
+                <a:r>
+                  <a:rPr lang="ru-RU" sz="2400" dirty="0" err="1">
+                    <a:latin typeface="Times New Roman" panose="02020603050405020304" pitchFamily="18" charset="0"/>
+                    <a:cs typeface="Times New Roman" panose="02020603050405020304" pitchFamily="18" charset="0"/>
+                  </a:rPr>
+                  <a:t>гиперпараметров</a:t>
+                </a:r>
+                <a:r>
+                  <a:rPr lang="ru-RU" sz="2400" dirty="0">
+                    <a:latin typeface="Times New Roman" panose="02020603050405020304" pitchFamily="18" charset="0"/>
+                    <a:cs typeface="Times New Roman" panose="02020603050405020304" pitchFamily="18" charset="0"/>
+                  </a:rPr>
+                  <a:t>: </a:t>
+                </a:r>
+                <a:r>
+                  <a:rPr lang="ru-RU" sz="2400" dirty="0" err="1">
+                    <a:latin typeface="Times New Roman" panose="02020603050405020304" pitchFamily="18" charset="0"/>
+                    <a:cs typeface="Times New Roman" panose="02020603050405020304" pitchFamily="18" charset="0"/>
+                  </a:rPr>
+                  <a:t>GridSearchCV</a:t>
+                </a:r>
+                <a:r>
+                  <a:rPr lang="ru-RU" sz="2400" dirty="0">
+                    <a:latin typeface="Times New Roman" panose="02020603050405020304" pitchFamily="18" charset="0"/>
+                    <a:cs typeface="Times New Roman" panose="02020603050405020304" pitchFamily="18" charset="0"/>
+                  </a:rPr>
+                  <a:t>.</a:t>
+                </a:r>
+              </a:p>
+              <a:p>
+                <a:pPr indent="450000">
+                  <a:buFont typeface="Arial" panose="020B0604020202020204" pitchFamily="34" charset="0"/>
+                  <a:buChar char="•"/>
+                </a:pPr>
+                <a:r>
+                  <a:rPr lang="en-US" sz="2400" dirty="0">
+                    <a:latin typeface="Times New Roman" panose="02020603050405020304" pitchFamily="18" charset="0"/>
+                    <a:cs typeface="Times New Roman" panose="02020603050405020304" pitchFamily="18" charset="0"/>
+                  </a:rPr>
+                  <a:t>Ridge: </a:t>
+                </a:r>
+                <a:r>
+                  <a:rPr lang="el-GR" sz="2400" dirty="0">
+                    <a:latin typeface="Times New Roman" panose="02020603050405020304" pitchFamily="18" charset="0"/>
+                    <a:cs typeface="Times New Roman" panose="02020603050405020304" pitchFamily="18" charset="0"/>
+                  </a:rPr>
+                  <a:t>α ϵ {1;10;50};</a:t>
+                </a:r>
+              </a:p>
+              <a:p>
+                <a:pPr indent="450000">
+                  <a:buFont typeface="Arial" panose="020B0604020202020204" pitchFamily="34" charset="0"/>
+                  <a:buChar char="•"/>
+                </a:pPr>
+                <a:r>
+                  <a:rPr lang="en-US" sz="2400" dirty="0">
+                    <a:latin typeface="Times New Roman" panose="02020603050405020304" pitchFamily="18" charset="0"/>
+                    <a:cs typeface="Times New Roman" panose="02020603050405020304" pitchFamily="18" charset="0"/>
+                  </a:rPr>
+                  <a:t>Lasso: </a:t>
+                </a:r>
+                <a:r>
+                  <a:rPr lang="el-GR" sz="2400" dirty="0">
+                    <a:latin typeface="Times New Roman" panose="02020603050405020304" pitchFamily="18" charset="0"/>
+                    <a:cs typeface="Times New Roman" panose="02020603050405020304" pitchFamily="18" charset="0"/>
+                  </a:rPr>
+                  <a:t>α ϵ {0,001;0,01;0,1};</a:t>
+                </a:r>
+              </a:p>
+              <a:p>
+                <a:pPr indent="450000">
+                  <a:buFont typeface="Arial" panose="020B0604020202020204" pitchFamily="34" charset="0"/>
+                  <a:buChar char="•"/>
+                </a:pPr>
+                <a:r>
+                  <a:rPr lang="en-US" sz="2400" dirty="0">
+                    <a:latin typeface="Times New Roman" panose="02020603050405020304" pitchFamily="18" charset="0"/>
+                    <a:cs typeface="Times New Roman" panose="02020603050405020304" pitchFamily="18" charset="0"/>
+                  </a:rPr>
+                  <a:t>Random Forest: </a:t>
+                </a:r>
+                <a:r>
+                  <a:rPr lang="ru-RU" sz="2400" dirty="0">
+                    <a:latin typeface="Times New Roman" panose="02020603050405020304" pitchFamily="18" charset="0"/>
+                    <a:cs typeface="Times New Roman" panose="02020603050405020304" pitchFamily="18" charset="0"/>
+                  </a:rPr>
+                  <a:t>количество деревьев</a:t>
+                </a:r>
+                <a:r>
+                  <a:rPr lang="en-US" sz="2400" dirty="0">
+                    <a:latin typeface="Times New Roman" panose="02020603050405020304" pitchFamily="18" charset="0"/>
+                    <a:cs typeface="Times New Roman" panose="02020603050405020304" pitchFamily="18" charset="0"/>
+                  </a:rPr>
+                  <a:t> </a:t>
+                </a:r>
+                <a14:m>
+                  <m:oMath xmlns:m="http://schemas.openxmlformats.org/officeDocument/2006/math">
+                    <m:r>
+                      <a:rPr lang="en-US" sz="2400" i="1" smtClean="0">
+                        <a:latin typeface="Cambria Math" panose="02040503050406030204" pitchFamily="18" charset="0"/>
+                        <a:ea typeface="Cambria Math" panose="02040503050406030204" pitchFamily="18" charset="0"/>
+                        <a:cs typeface="Times New Roman" panose="02020603050405020304" pitchFamily="18" charset="0"/>
+                      </a:rPr>
+                      <m:t>𝜖</m:t>
+                    </m:r>
+                  </m:oMath>
+                </a14:m>
+                <a:r>
+                  <a:rPr lang="el-GR" sz="2400" dirty="0">
+                    <a:latin typeface="Times New Roman" panose="02020603050405020304" pitchFamily="18" charset="0"/>
+                    <a:cs typeface="Times New Roman" panose="02020603050405020304" pitchFamily="18" charset="0"/>
+                  </a:rPr>
+                  <a:t>{100;200}, </a:t>
+                </a:r>
+                <a:r>
+                  <a:rPr lang="ru-RU" sz="2400" dirty="0">
+                    <a:latin typeface="Times New Roman" panose="02020603050405020304" pitchFamily="18" charset="0"/>
+                    <a:cs typeface="Times New Roman" panose="02020603050405020304" pitchFamily="18" charset="0"/>
+                  </a:rPr>
+                  <a:t>глубина </a:t>
+                </a:r>
+                <a14:m>
+                  <m:oMath xmlns:m="http://schemas.openxmlformats.org/officeDocument/2006/math">
+                    <m:r>
+                      <a:rPr lang="en-US" sz="2400" i="1">
+                        <a:latin typeface="Cambria Math" panose="02040503050406030204" pitchFamily="18" charset="0"/>
+                        <a:ea typeface="Cambria Math" panose="02040503050406030204" pitchFamily="18" charset="0"/>
+                        <a:cs typeface="Times New Roman" panose="02020603050405020304" pitchFamily="18" charset="0"/>
+                      </a:rPr>
+                      <m:t>𝜖</m:t>
+                    </m:r>
+                  </m:oMath>
+                </a14:m>
+                <a:r>
+                  <a:rPr lang="el-GR" sz="2400" dirty="0">
+                    <a:latin typeface="Times New Roman" panose="02020603050405020304" pitchFamily="18" charset="0"/>
+                    <a:cs typeface="Times New Roman" panose="02020603050405020304" pitchFamily="18" charset="0"/>
+                  </a:rPr>
+                  <a:t>{15;20}, </a:t>
+                </a:r>
+                <a:r>
+                  <a:rPr lang="ru-RU" sz="2400" dirty="0">
+                    <a:latin typeface="Times New Roman" panose="02020603050405020304" pitchFamily="18" charset="0"/>
+                    <a:cs typeface="Times New Roman" panose="02020603050405020304" pitchFamily="18" charset="0"/>
+                  </a:rPr>
+                  <a:t>минимальное число объектов в листе </a:t>
+                </a:r>
+                <a14:m>
+                  <m:oMath xmlns:m="http://schemas.openxmlformats.org/officeDocument/2006/math">
+                    <m:r>
+                      <a:rPr lang="en-US" sz="2400" i="1">
+                        <a:latin typeface="Cambria Math" panose="02040503050406030204" pitchFamily="18" charset="0"/>
+                        <a:ea typeface="Cambria Math" panose="02040503050406030204" pitchFamily="18" charset="0"/>
+                        <a:cs typeface="Times New Roman" panose="02020603050405020304" pitchFamily="18" charset="0"/>
+                      </a:rPr>
+                      <m:t>𝜖</m:t>
+                    </m:r>
+                  </m:oMath>
+                </a14:m>
+                <a:r>
+                  <a:rPr lang="el-GR" sz="2400" dirty="0">
+                    <a:latin typeface="Times New Roman" panose="02020603050405020304" pitchFamily="18" charset="0"/>
+                    <a:cs typeface="Times New Roman" panose="02020603050405020304" pitchFamily="18" charset="0"/>
+                  </a:rPr>
+                  <a:t> {5;10};</a:t>
+                </a:r>
+              </a:p>
+              <a:p>
+                <a:pPr indent="450000">
+                  <a:buFont typeface="Arial" panose="020B0604020202020204" pitchFamily="34" charset="0"/>
+                  <a:buChar char="•"/>
+                </a:pPr>
+                <a:r>
+                  <a:rPr lang="en-US" sz="2400" dirty="0">
+                    <a:latin typeface="Times New Roman" panose="02020603050405020304" pitchFamily="18" charset="0"/>
+                    <a:cs typeface="Times New Roman" panose="02020603050405020304" pitchFamily="18" charset="0"/>
+                  </a:rPr>
+                  <a:t>Gradient Boosting: </a:t>
+                </a:r>
+                <a:r>
+                  <a:rPr lang="ru-RU" sz="2400" dirty="0">
+                    <a:latin typeface="Times New Roman" panose="02020603050405020304" pitchFamily="18" charset="0"/>
+                    <a:cs typeface="Times New Roman" panose="02020603050405020304" pitchFamily="18" charset="0"/>
+                  </a:rPr>
+                  <a:t>количество деревьев</a:t>
+                </a:r>
+                <a:r>
+                  <a:rPr lang="en-US" sz="2400" dirty="0">
+                    <a:latin typeface="Times New Roman" panose="02020603050405020304" pitchFamily="18" charset="0"/>
+                    <a:cs typeface="Times New Roman" panose="02020603050405020304" pitchFamily="18" charset="0"/>
+                  </a:rPr>
+                  <a:t> </a:t>
+                </a:r>
+                <a14:m>
+                  <m:oMath xmlns:m="http://schemas.openxmlformats.org/officeDocument/2006/math">
+                    <m:r>
+                      <a:rPr lang="en-US" sz="2400" i="1">
+                        <a:latin typeface="Cambria Math" panose="02040503050406030204" pitchFamily="18" charset="0"/>
+                        <a:ea typeface="Cambria Math" panose="02040503050406030204" pitchFamily="18" charset="0"/>
+                        <a:cs typeface="Times New Roman" panose="02020603050405020304" pitchFamily="18" charset="0"/>
+                      </a:rPr>
+                      <m:t>𝜖</m:t>
+                    </m:r>
+                  </m:oMath>
+                </a14:m>
+                <a:r>
+                  <a:rPr lang="el-GR" sz="2400" dirty="0">
+                    <a:latin typeface="Times New Roman" panose="02020603050405020304" pitchFamily="18" charset="0"/>
+                    <a:cs typeface="Times New Roman" panose="02020603050405020304" pitchFamily="18" charset="0"/>
+                  </a:rPr>
+                  <a:t>{100;200}, </a:t>
+                </a:r>
+                <a:r>
+                  <a:rPr lang="en-US" sz="2400" dirty="0" err="1">
+                    <a:latin typeface="Times New Roman" panose="02020603050405020304" pitchFamily="18" charset="0"/>
+                    <a:cs typeface="Times New Roman" panose="02020603050405020304" pitchFamily="18" charset="0"/>
+                  </a:rPr>
+                  <a:t>learning_rate</a:t>
+                </a:r>
+                <a:r>
+                  <a:rPr lang="en-US" sz="2400" dirty="0">
+                    <a:latin typeface="Times New Roman" panose="02020603050405020304" pitchFamily="18" charset="0"/>
+                    <a:cs typeface="Times New Roman" panose="02020603050405020304" pitchFamily="18" charset="0"/>
+                  </a:rPr>
+                  <a:t> </a:t>
+                </a:r>
+                <a:r>
+                  <a:rPr lang="ru-RU" sz="2400" dirty="0">
+                    <a:latin typeface="Times New Roman" panose="02020603050405020304" pitchFamily="18" charset="0"/>
+                    <a:cs typeface="Times New Roman" panose="02020603050405020304" pitchFamily="18" charset="0"/>
+                  </a:rPr>
+                  <a:t>количество деревьев</a:t>
+                </a:r>
+                <a:r>
+                  <a:rPr lang="en-US" sz="2400" dirty="0">
+                    <a:latin typeface="Times New Roman" panose="02020603050405020304" pitchFamily="18" charset="0"/>
+                    <a:cs typeface="Times New Roman" panose="02020603050405020304" pitchFamily="18" charset="0"/>
+                  </a:rPr>
+                  <a:t> </a:t>
+                </a:r>
+                <a14:m>
+                  <m:oMath xmlns:m="http://schemas.openxmlformats.org/officeDocument/2006/math">
+                    <m:r>
+                      <a:rPr lang="en-US" sz="2400" i="1">
+                        <a:latin typeface="Cambria Math" panose="02040503050406030204" pitchFamily="18" charset="0"/>
+                        <a:ea typeface="Cambria Math" panose="02040503050406030204" pitchFamily="18" charset="0"/>
+                        <a:cs typeface="Times New Roman" panose="02020603050405020304" pitchFamily="18" charset="0"/>
+                      </a:rPr>
+                      <m:t>𝜖</m:t>
+                    </m:r>
+                    <m:r>
+                      <a:rPr lang="en-US" sz="2400" i="1">
+                        <a:latin typeface="Cambria Math" panose="02040503050406030204" pitchFamily="18" charset="0"/>
+                        <a:ea typeface="Cambria Math" panose="02040503050406030204" pitchFamily="18" charset="0"/>
+                        <a:cs typeface="Times New Roman" panose="02020603050405020304" pitchFamily="18" charset="0"/>
+                      </a:rPr>
+                      <m:t> </m:t>
+                    </m:r>
+                  </m:oMath>
+                </a14:m>
+                <a:r>
+                  <a:rPr lang="el-GR" sz="2400" dirty="0">
+                    <a:latin typeface="Times New Roman" panose="02020603050405020304" pitchFamily="18" charset="0"/>
+                    <a:cs typeface="Times New Roman" panose="02020603050405020304" pitchFamily="18" charset="0"/>
+                  </a:rPr>
+                  <a:t>{0,01;0,05}, </a:t>
+                </a:r>
+                <a:r>
+                  <a:rPr lang="ru-RU" sz="2400" dirty="0">
+                    <a:latin typeface="Times New Roman" panose="02020603050405020304" pitchFamily="18" charset="0"/>
+                    <a:cs typeface="Times New Roman" panose="02020603050405020304" pitchFamily="18" charset="0"/>
+                  </a:rPr>
+                  <a:t>глубина </a:t>
+                </a:r>
+                <a14:m>
+                  <m:oMath xmlns:m="http://schemas.openxmlformats.org/officeDocument/2006/math">
+                    <m:r>
+                      <a:rPr lang="en-US" sz="2400" i="1">
+                        <a:latin typeface="Cambria Math" panose="02040503050406030204" pitchFamily="18" charset="0"/>
+                        <a:ea typeface="Cambria Math" panose="02040503050406030204" pitchFamily="18" charset="0"/>
+                        <a:cs typeface="Times New Roman" panose="02020603050405020304" pitchFamily="18" charset="0"/>
+                      </a:rPr>
+                      <m:t>𝜖</m:t>
+                    </m:r>
+                  </m:oMath>
+                </a14:m>
+                <a:r>
+                  <a:rPr lang="el-GR" sz="2400" dirty="0">
+                    <a:latin typeface="Times New Roman" panose="02020603050405020304" pitchFamily="18" charset="0"/>
+                    <a:cs typeface="Times New Roman" panose="02020603050405020304" pitchFamily="18" charset="0"/>
+                  </a:rPr>
+                  <a:t>{3;5};</a:t>
+                </a:r>
+              </a:p>
+              <a:p>
+                <a:pPr indent="450000">
+                  <a:buFont typeface="Arial" panose="020B0604020202020204" pitchFamily="34" charset="0"/>
+                  <a:buChar char="•"/>
+                </a:pPr>
+                <a:endParaRPr lang="ru-RU" sz="2400" dirty="0">
+                  <a:latin typeface="Times New Roman" panose="02020603050405020304" pitchFamily="18" charset="0"/>
+                  <a:cs typeface="Times New Roman" panose="02020603050405020304" pitchFamily="18" charset="0"/>
+                </a:endParaRPr>
+              </a:p>
+            </p:txBody>
+          </p:sp>
+        </mc:Choice>
+        <mc:Fallback>
+          <p:sp>
+            <p:nvSpPr>
+              <p:cNvPr id="9" name="TextBox 8">
+                <a:extLst>
+                  <a:ext uri="{FF2B5EF4-FFF2-40B4-BE49-F238E27FC236}">
+                    <a16:creationId xmlns:a16="http://schemas.microsoft.com/office/drawing/2014/main" id="{52B2A546-C6E3-D4B0-3B05-F6CD28644636}"/>
+                  </a:ext>
+                </a:extLst>
+              </p:cNvPr>
+              <p:cNvSpPr txBox="1">
+                <a:spLocks noRot="1" noChangeAspect="1" noMove="1" noResize="1" noEditPoints="1" noAdjustHandles="1" noChangeArrowheads="1" noChangeShapeType="1" noTextEdit="1"/>
+              </p:cNvSpPr>
+              <p:nvPr/>
+            </p:nvSpPr>
+            <p:spPr>
+              <a:xfrm>
+                <a:off x="838181" y="1263675"/>
+                <a:ext cx="10515599" cy="4893647"/>
+              </a:xfrm>
+              <a:prstGeom prst="rect">
+                <a:avLst/>
+              </a:prstGeom>
+              <a:blipFill>
+                <a:blip r:embed="rId2"/>
+                <a:stretch>
+                  <a:fillRect l="-870" t="-996" r="-464"/>
+                </a:stretch>
+              </a:blipFill>
+            </p:spPr>
+            <p:txBody>
+              <a:bodyPr/>
+              <a:lstStyle/>
+              <a:p>
+                <a:r>
+                  <a:rPr lang="ru-RU">
+                    <a:noFill/>
+                  </a:rPr>
+                  <a:t> </a:t>
+                </a:r>
+              </a:p>
+            </p:txBody>
+          </p:sp>
+        </mc:Fallback>
+      </mc:AlternateContent>
+    </p:spTree>
+    <p:extLst>
+      <p:ext uri="{BB962C8B-B14F-4D97-AF65-F5344CB8AC3E}">
+        <p14:creationId xmlns:p14="http://schemas.microsoft.com/office/powerpoint/2010/main" val="2812540693"/>
+      </p:ext>
+    </p:extLst>
+  </p:cSld>
+  <p:clrMapOvr>
+    <a:masterClrMapping/>
+  </p:clrMapOvr>
+</p:sld>
+</file>
+
+<file path=ppt/slides/slide14.xml><?xml version="1.0" encoding="utf-8"?>
+<p:sld xmlns:a="http://schemas.openxmlformats.org/drawingml/2006/main" xmlns:r="http://schemas.openxmlformats.org/officeDocument/2006/relationships" xmlns:p="http://schemas.openxmlformats.org/presentationml/2006/main">
+  <p:cSld>
+    <p:spTree>
+      <p:nvGrpSpPr>
+        <p:cNvPr id="1" name="">
+          <a:extLst>
+            <a:ext uri="{FF2B5EF4-FFF2-40B4-BE49-F238E27FC236}">
+              <a16:creationId xmlns:a16="http://schemas.microsoft.com/office/drawing/2014/main" id="{5270876B-FC3B-5A70-2C4B-B4F80E3756CE}"/>
+            </a:ext>
+          </a:extLst>
+        </p:cNvPr>
+        <p:cNvGrpSpPr/>
+        <p:nvPr/>
+      </p:nvGrpSpPr>
+      <p:grpSpPr>
+        <a:xfrm>
+          <a:off x="0" y="0"/>
+          <a:ext cx="0" cy="0"/>
+          <a:chOff x="0" y="0"/>
+          <a:chExt cx="0" cy="0"/>
+        </a:xfrm>
+      </p:grpSpPr>
+      <p:sp>
+        <p:nvSpPr>
+          <p:cNvPr id="2" name="Заголовок 1">
+            <a:extLst>
+              <a:ext uri="{FF2B5EF4-FFF2-40B4-BE49-F238E27FC236}">
+                <a16:creationId xmlns:a16="http://schemas.microsoft.com/office/drawing/2014/main" id="{CA9E7684-67B2-080B-99F0-3044C3DE59EA}"/>
+              </a:ext>
+            </a:extLst>
+          </p:cNvPr>
+          <p:cNvSpPr>
+            <a:spLocks noGrp="1"/>
+          </p:cNvSpPr>
+          <p:nvPr>
+            <p:ph type="title"/>
+          </p:nvPr>
+        </p:nvSpPr>
+        <p:spPr>
+          <a:xfrm>
+            <a:off x="838200" y="365127"/>
+            <a:ext cx="10515600" cy="694240"/>
+          </a:xfrm>
+        </p:spPr>
+        <p:txBody>
+          <a:bodyPr>
+            <a:normAutofit/>
+          </a:bodyPr>
+          <a:lstStyle/>
+          <a:p>
+            <a:r>
+              <a:rPr lang="ru-RU" sz="3200" dirty="0">
+                <a:latin typeface="Times New Roman" panose="02020603050405020304" pitchFamily="18" charset="0"/>
+                <a:cs typeface="Times New Roman" panose="02020603050405020304" pitchFamily="18" charset="0"/>
+              </a:rPr>
+              <a:t>Реализация модели и анализ результатов</a:t>
+            </a:r>
+          </a:p>
+        </p:txBody>
+      </p:sp>
+      <p:sp>
+        <p:nvSpPr>
+          <p:cNvPr id="4" name="Заголовок 1">
+            <a:extLst>
+              <a:ext uri="{FF2B5EF4-FFF2-40B4-BE49-F238E27FC236}">
+                <a16:creationId xmlns:a16="http://schemas.microsoft.com/office/drawing/2014/main" id="{E7A21849-2AAC-95F9-88BD-FC8DA585498B}"/>
+              </a:ext>
+            </a:extLst>
+          </p:cNvPr>
+          <p:cNvSpPr txBox="1">
+            <a:spLocks/>
+          </p:cNvSpPr>
+          <p:nvPr/>
+        </p:nvSpPr>
+        <p:spPr>
+          <a:xfrm>
+            <a:off x="838200" y="904373"/>
+            <a:ext cx="10515600" cy="694240"/>
+          </a:xfrm>
+          <a:prstGeom prst="rect">
+            <a:avLst/>
+          </a:prstGeom>
+        </p:spPr>
+        <p:txBody>
+          <a:bodyPr vert="horz" lIns="91440" tIns="45720" rIns="91440" bIns="45720" rtlCol="0" anchor="ctr">
+            <a:normAutofit/>
+          </a:bodyPr>
+          <a:lstStyle>
+            <a:lvl1pPr algn="l" defTabSz="914353" rtl="0" eaLnBrk="1" latinLnBrk="0" hangingPunct="1">
+              <a:lnSpc>
+                <a:spcPct val="90000"/>
+              </a:lnSpc>
+              <a:spcBef>
+                <a:spcPct val="0"/>
+              </a:spcBef>
+              <a:buNone/>
+              <a:defRPr sz="4400" kern="1200">
+                <a:solidFill>
+                  <a:schemeClr val="tx1"/>
+                </a:solidFill>
+                <a:latin typeface="+mj-lt"/>
+                <a:ea typeface="+mj-ea"/>
+                <a:cs typeface="+mj-cs"/>
+              </a:defRPr>
+            </a:lvl1pPr>
+          </a:lstStyle>
+          <a:p>
+            <a:endParaRPr lang="ru-RU" sz="3200" dirty="0">
+              <a:latin typeface="Times New Roman" panose="02020603050405020304" pitchFamily="18" charset="0"/>
+              <a:cs typeface="Times New Roman" panose="02020603050405020304" pitchFamily="18" charset="0"/>
+            </a:endParaRPr>
+          </a:p>
+        </p:txBody>
+      </p:sp>
+      <p:sp>
+        <p:nvSpPr>
+          <p:cNvPr id="7" name="TextBox 6">
+            <a:extLst>
+              <a:ext uri="{FF2B5EF4-FFF2-40B4-BE49-F238E27FC236}">
+                <a16:creationId xmlns:a16="http://schemas.microsoft.com/office/drawing/2014/main" id="{BEEA5F11-85FA-1E08-8F69-26D957EDEA46}"/>
+              </a:ext>
+            </a:extLst>
+          </p:cNvPr>
+          <p:cNvSpPr txBox="1"/>
+          <p:nvPr/>
+        </p:nvSpPr>
+        <p:spPr>
+          <a:xfrm>
+            <a:off x="11353780" y="5992297"/>
+            <a:ext cx="838220" cy="369332"/>
+          </a:xfrm>
+          <a:prstGeom prst="rect">
+            <a:avLst/>
+          </a:prstGeom>
+          <a:noFill/>
+        </p:spPr>
+        <p:txBody>
+          <a:bodyPr wrap="square" rtlCol="0">
+            <a:spAutoFit/>
+          </a:bodyPr>
+          <a:lstStyle/>
+          <a:p>
+            <a:r>
+              <a:rPr lang="ru-RU" dirty="0">
+                <a:latin typeface="Times New Roman" panose="02020603050405020304" pitchFamily="18" charset="0"/>
+                <a:cs typeface="Times New Roman" panose="02020603050405020304" pitchFamily="18" charset="0"/>
+              </a:rPr>
+              <a:t>14</a:t>
+            </a:r>
+          </a:p>
+        </p:txBody>
+      </p:sp>
+      <p:sp>
+        <p:nvSpPr>
+          <p:cNvPr id="6" name="Rectangle 1">
+            <a:extLst>
+              <a:ext uri="{FF2B5EF4-FFF2-40B4-BE49-F238E27FC236}">
+                <a16:creationId xmlns:a16="http://schemas.microsoft.com/office/drawing/2014/main" id="{ECBB7BB6-1B34-E39A-925A-33DEAD2D99F4}"/>
+              </a:ext>
+            </a:extLst>
+          </p:cNvPr>
+          <p:cNvSpPr>
+            <a:spLocks noChangeArrowheads="1"/>
+          </p:cNvSpPr>
+          <p:nvPr/>
+        </p:nvSpPr>
+        <p:spPr bwMode="auto">
+          <a:xfrm>
+            <a:off x="838180" y="1146485"/>
             <a:ext cx="10515599" cy="307777"/>
           </a:xfrm>
           <a:prstGeom prst="rect">
@@ -5911,80 +7012,10 @@
       </p:sp>
       <p:sp>
         <p:nvSpPr>
-          <p:cNvPr id="9" name="TextBox 8">
-            <a:extLst>
-              <a:ext uri="{FF2B5EF4-FFF2-40B4-BE49-F238E27FC236}">
-                <a16:creationId xmlns:a16="http://schemas.microsoft.com/office/drawing/2014/main" id="{52B2A546-C6E3-D4B0-3B05-F6CD28644636}"/>
-              </a:ext>
-            </a:extLst>
-          </p:cNvPr>
-          <p:cNvSpPr txBox="1"/>
-          <p:nvPr/>
-        </p:nvSpPr>
-        <p:spPr>
-          <a:xfrm>
-            <a:off x="838180" y="1026297"/>
-            <a:ext cx="10515599" cy="369332"/>
-          </a:xfrm>
-          <a:prstGeom prst="rect">
-            <a:avLst/>
-          </a:prstGeom>
-          <a:noFill/>
-        </p:spPr>
-        <p:txBody>
-          <a:bodyPr wrap="square">
-            <a:spAutoFit/>
-          </a:bodyPr>
-          <a:lstStyle/>
-          <a:p>
-            <a:r>
-              <a:rPr lang="ru-RU" dirty="0">
-                <a:latin typeface="Times New Roman" panose="02020603050405020304" pitchFamily="18" charset="0"/>
-                <a:cs typeface="Times New Roman" panose="02020603050405020304" pitchFamily="18" charset="0"/>
-              </a:rPr>
-              <a:t>Подбор через </a:t>
-            </a:r>
-            <a:r>
-              <a:rPr lang="en-US" dirty="0" err="1">
-                <a:latin typeface="Times New Roman" panose="02020603050405020304" pitchFamily="18" charset="0"/>
-                <a:cs typeface="Times New Roman" panose="02020603050405020304" pitchFamily="18" charset="0"/>
-              </a:rPr>
-              <a:t>GridSearchCV</a:t>
-            </a:r>
-            <a:r>
-              <a:rPr lang="en-US" dirty="0">
-                <a:latin typeface="Times New Roman" panose="02020603050405020304" pitchFamily="18" charset="0"/>
-                <a:cs typeface="Times New Roman" panose="02020603050405020304" pitchFamily="18" charset="0"/>
-              </a:rPr>
-              <a:t> </a:t>
-            </a:r>
-            <a:r>
-              <a:rPr lang="ru-RU" dirty="0">
-                <a:latin typeface="Times New Roman" panose="02020603050405020304" pitchFamily="18" charset="0"/>
-                <a:cs typeface="Times New Roman" panose="02020603050405020304" pitchFamily="18" charset="0"/>
-              </a:rPr>
-              <a:t>с </a:t>
-            </a:r>
-            <a:r>
-              <a:rPr lang="en-US" dirty="0" err="1">
-                <a:latin typeface="Times New Roman" panose="02020603050405020304" pitchFamily="18" charset="0"/>
-                <a:cs typeface="Times New Roman" panose="02020603050405020304" pitchFamily="18" charset="0"/>
-              </a:rPr>
-              <a:t>TimeSeriesSplit</a:t>
-            </a:r>
-            <a:endParaRPr lang="ru-RU" dirty="0">
-              <a:latin typeface="Times New Roman" panose="02020603050405020304" pitchFamily="18" charset="0"/>
-              <a:cs typeface="Times New Roman" panose="02020603050405020304" pitchFamily="18" charset="0"/>
-            </a:endParaRPr>
-          </a:p>
-        </p:txBody>
-      </p:sp>
-      <p:sp>
-        <p:nvSpPr>
           <p:cNvPr id="5" name="Rectangle 1">
             <a:extLst>
               <a:ext uri="{FF2B5EF4-FFF2-40B4-BE49-F238E27FC236}">
-                <a16:creationId xmlns:a16="http://schemas.microsoft.com/office/drawing/2014/main" id="{852206EC-2FA8-4421-2A7D-F9C54BDBBC2C}"/>
+                <a16:creationId xmlns:a16="http://schemas.microsoft.com/office/drawing/2014/main" id="{F60665CA-CF3C-C771-34A0-375DF6852B01}"/>
               </a:ext>
             </a:extLst>
           </p:cNvPr>
@@ -6066,14 +7097,14 @@
           </a:p>
         </p:txBody>
       </p:sp>
-      <mc:AlternateContent xmlns:mc="http://schemas.openxmlformats.org/markup-compatibility/2006" xmlns:a14="http://schemas.microsoft.com/office/drawing/2010/main">
-        <mc:Choice Requires="a14">
+      <mc:AlternateContent xmlns:mc="http://schemas.openxmlformats.org/markup-compatibility/2006">
+        <mc:Choice xmlns:a14="http://schemas.microsoft.com/office/drawing/2010/main" Requires="a14">
           <p:graphicFrame>
             <p:nvGraphicFramePr>
               <p:cNvPr id="8" name="Таблица 7">
                 <a:extLst>
                   <a:ext uri="{FF2B5EF4-FFF2-40B4-BE49-F238E27FC236}">
-                    <a16:creationId xmlns:a16="http://schemas.microsoft.com/office/drawing/2014/main" id="{DECF9C81-843F-DC5B-3994-257E26558BF2}"/>
+                    <a16:creationId xmlns:a16="http://schemas.microsoft.com/office/drawing/2014/main" id="{B96FBBD8-B6C5-71E6-E401-F173812B9CD3}"/>
                   </a:ext>
                 </a:extLst>
               </p:cNvPr>
@@ -6083,13 +7114,13 @@
               <p:nvPr>
                 <p:extLst>
                   <p:ext uri="{D42A27DB-BD31-4B8C-83A1-F6EECF244321}">
-                    <p14:modId xmlns:p14="http://schemas.microsoft.com/office/powerpoint/2010/main" val="335476771"/>
+                    <p14:modId xmlns:p14="http://schemas.microsoft.com/office/powerpoint/2010/main" val="3705347950"/>
                   </p:ext>
                 </p:extLst>
               </p:nvPr>
             </p:nvGraphicFramePr>
             <p:xfrm>
-              <a:off x="838156" y="1625616"/>
+              <a:off x="838180" y="1422494"/>
               <a:ext cx="10515600" cy="1854200"/>
             </p:xfrm>
             <a:graphic>
@@ -6545,13 +7576,13 @@
             </a:graphic>
           </p:graphicFrame>
         </mc:Choice>
-        <mc:Fallback xmlns="">
+        <mc:Fallback>
           <p:graphicFrame>
             <p:nvGraphicFramePr>
               <p:cNvPr id="8" name="Таблица 7">
                 <a:extLst>
                   <a:ext uri="{FF2B5EF4-FFF2-40B4-BE49-F238E27FC236}">
-                    <a16:creationId xmlns:a16="http://schemas.microsoft.com/office/drawing/2014/main" id="{DECF9C81-843F-DC5B-3994-257E26558BF2}"/>
+                    <a16:creationId xmlns:a16="http://schemas.microsoft.com/office/drawing/2014/main" id="{B96FBBD8-B6C5-71E6-E401-F173812B9CD3}"/>
                   </a:ext>
                 </a:extLst>
               </p:cNvPr>
@@ -6561,13 +7592,13 @@
               <p:nvPr>
                 <p:extLst>
                   <p:ext uri="{D42A27DB-BD31-4B8C-83A1-F6EECF244321}">
-                    <p14:modId xmlns:p14="http://schemas.microsoft.com/office/powerpoint/2010/main" val="335476771"/>
+                    <p14:modId xmlns:p14="http://schemas.microsoft.com/office/powerpoint/2010/main" val="3705347950"/>
                   </p:ext>
                 </p:extLst>
               </p:nvPr>
             </p:nvGraphicFramePr>
             <p:xfrm>
-              <a:off x="838156" y="1625616"/>
+              <a:off x="838180" y="1422494"/>
               <a:ext cx="10515600" cy="1854200"/>
             </p:xfrm>
             <a:graphic>
@@ -6968,7 +7999,7 @@
           <p:cNvPr id="10" name="Рисунок 9">
             <a:extLst>
               <a:ext uri="{FF2B5EF4-FFF2-40B4-BE49-F238E27FC236}">
-                <a16:creationId xmlns:a16="http://schemas.microsoft.com/office/drawing/2014/main" id="{C00C8136-13F5-9B2C-42E3-DFDE04C43CF2}"/>
+                <a16:creationId xmlns:a16="http://schemas.microsoft.com/office/drawing/2014/main" id="{A403F49E-38C0-66BC-6187-0643F48C5988}"/>
               </a:ext>
             </a:extLst>
           </p:cNvPr>
@@ -6996,7 +8027,7 @@
     </p:spTree>
     <p:extLst>
       <p:ext uri="{BB962C8B-B14F-4D97-AF65-F5344CB8AC3E}">
-        <p14:creationId xmlns:p14="http://schemas.microsoft.com/office/powerpoint/2010/main" val="2812540693"/>
+        <p14:creationId xmlns:p14="http://schemas.microsoft.com/office/powerpoint/2010/main" val="334078981"/>
       </p:ext>
     </p:extLst>
   </p:cSld>
@@ -7006,7 +8037,7 @@
 </p:sld>
 </file>
 
-<file path=ppt/slides/slide13.xml><?xml version="1.0" encoding="utf-8"?>
+<file path=ppt/slides/slide15.xml><?xml version="1.0" encoding="utf-8"?>
 <p:sld xmlns:a="http://schemas.openxmlformats.org/drawingml/2006/main" xmlns:r="http://schemas.openxmlformats.org/officeDocument/2006/relationships" xmlns:p="http://schemas.openxmlformats.org/presentationml/2006/main">
   <p:cSld>
     <p:spTree>
@@ -7154,7 +8185,7 @@
                 <a:latin typeface="Times New Roman" panose="02020603050405020304" pitchFamily="18" charset="0"/>
                 <a:cs typeface="Times New Roman" panose="02020603050405020304" pitchFamily="18" charset="0"/>
               </a:rPr>
-              <a:t>13</a:t>
+              <a:t>15</a:t>
             </a:r>
           </a:p>
         </p:txBody>
@@ -7672,7 +8703,7 @@
 </p:sld>
 </file>
 
-<file path=ppt/slides/slide14.xml><?xml version="1.0" encoding="utf-8"?>
+<file path=ppt/slides/slide16.xml><?xml version="1.0" encoding="utf-8"?>
 <p:sld xmlns:a="http://schemas.openxmlformats.org/drawingml/2006/main" xmlns:r="http://schemas.openxmlformats.org/officeDocument/2006/relationships" xmlns:p="http://schemas.openxmlformats.org/presentationml/2006/main">
   <p:cSld>
     <p:spTree>
@@ -7820,7 +8851,7 @@
                 <a:latin typeface="Times New Roman" panose="02020603050405020304" pitchFamily="18" charset="0"/>
                 <a:cs typeface="Times New Roman" panose="02020603050405020304" pitchFamily="18" charset="0"/>
               </a:rPr>
-              <a:t>14</a:t>
+              <a:t>16</a:t>
             </a:r>
           </a:p>
         </p:txBody>
@@ -9611,7 +10642,7 @@
 </p:sld>
 </file>
 
-<file path=ppt/slides/slide15.xml><?xml version="1.0" encoding="utf-8"?>
+<file path=ppt/slides/slide17.xml><?xml version="1.0" encoding="utf-8"?>
 <p:sld xmlns:a="http://schemas.openxmlformats.org/drawingml/2006/main" xmlns:r="http://schemas.openxmlformats.org/officeDocument/2006/relationships" xmlns:p="http://schemas.openxmlformats.org/presentationml/2006/main">
   <p:cSld>
     <p:spTree>
@@ -10074,7 +11105,7 @@
                 <a:latin typeface="Times New Roman" panose="02020603050405020304" pitchFamily="18" charset="0"/>
                 <a:cs typeface="Times New Roman" panose="02020603050405020304" pitchFamily="18" charset="0"/>
               </a:rPr>
-              <a:t>15</a:t>
+              <a:t>17</a:t>
             </a:r>
           </a:p>
         </p:txBody>
@@ -10092,7 +11123,7 @@
 </p:sld>
 </file>
 
-<file path=ppt/slides/slide16.xml><?xml version="1.0" encoding="utf-8"?>
+<file path=ppt/slides/slide18.xml><?xml version="1.0" encoding="utf-8"?>
 <p:sld xmlns:a="http://schemas.openxmlformats.org/drawingml/2006/main" xmlns:r="http://schemas.openxmlformats.org/officeDocument/2006/relationships" xmlns:p="http://schemas.openxmlformats.org/presentationml/2006/main">
   <p:cSld>
     <p:spTree>
@@ -10211,6 +11242,554 @@
     <p:extLst>
       <p:ext uri="{BB962C8B-B14F-4D97-AF65-F5344CB8AC3E}">
         <p14:creationId xmlns:p14="http://schemas.microsoft.com/office/powerpoint/2010/main" val="1129910788"/>
+      </p:ext>
+    </p:extLst>
+  </p:cSld>
+  <p:clrMapOvr>
+    <a:masterClrMapping/>
+  </p:clrMapOvr>
+</p:sld>
+</file>
+
+<file path=ppt/slides/slide19.xml><?xml version="1.0" encoding="utf-8"?>
+<p:sld xmlns:a="http://schemas.openxmlformats.org/drawingml/2006/main" xmlns:r="http://schemas.openxmlformats.org/officeDocument/2006/relationships" xmlns:p="http://schemas.openxmlformats.org/presentationml/2006/main">
+  <p:cSld>
+    <p:spTree>
+      <p:nvGrpSpPr>
+        <p:cNvPr id="1" name="">
+          <a:extLst>
+            <a:ext uri="{FF2B5EF4-FFF2-40B4-BE49-F238E27FC236}">
+              <a16:creationId xmlns:a16="http://schemas.microsoft.com/office/drawing/2014/main" id="{EDAE1FBF-AD12-D4A2-081C-496C0AF96FA5}"/>
+            </a:ext>
+          </a:extLst>
+        </p:cNvPr>
+        <p:cNvGrpSpPr/>
+        <p:nvPr/>
+      </p:nvGrpSpPr>
+      <p:grpSpPr>
+        <a:xfrm>
+          <a:off x="0" y="0"/>
+          <a:ext cx="0" cy="0"/>
+          <a:chOff x="0" y="0"/>
+          <a:chExt cx="0" cy="0"/>
+        </a:xfrm>
+      </p:grpSpPr>
+      <p:sp>
+        <p:nvSpPr>
+          <p:cNvPr id="7" name="Google Shape;170;p1">
+            <a:extLst>
+              <a:ext uri="{FF2B5EF4-FFF2-40B4-BE49-F238E27FC236}">
+                <a16:creationId xmlns:a16="http://schemas.microsoft.com/office/drawing/2014/main" id="{8FE41D9F-914F-3EC0-566D-484C24705FFC}"/>
+              </a:ext>
+            </a:extLst>
+          </p:cNvPr>
+          <p:cNvSpPr/>
+          <p:nvPr/>
+        </p:nvSpPr>
+        <p:spPr bwMode="auto">
+          <a:xfrm>
+            <a:off x="-4" y="2158305"/>
+            <a:ext cx="12192001" cy="646290"/>
+          </a:xfrm>
+          <a:prstGeom prst="rect">
+            <a:avLst/>
+          </a:prstGeom>
+          <a:noFill/>
+          <a:ln>
+            <a:noFill/>
+          </a:ln>
+        </p:spPr>
+        <p:txBody>
+          <a:bodyPr spcFirstLastPara="1" wrap="square" lIns="91425" tIns="45700" rIns="91425" bIns="45700" anchor="t" anchorCtr="0">
+            <a:spAutoFit/>
+          </a:bodyPr>
+          <a:lstStyle/>
+          <a:p>
+            <a:pPr algn="ctr">
+              <a:defRPr/>
+            </a:pPr>
+            <a:r>
+              <a:rPr lang="ru-RU" sz="2000" dirty="0">
+                <a:solidFill>
+                  <a:schemeClr val="dk1"/>
+                </a:solidFill>
+                <a:latin typeface="Century Gothic"/>
+                <a:ea typeface="Century Gothic"/>
+                <a:cs typeface="Century Gothic"/>
+              </a:rPr>
+              <a:t> </a:t>
+            </a:r>
+            <a:r>
+              <a:rPr lang="ru-RU" sz="2000" dirty="0">
+                <a:solidFill>
+                  <a:schemeClr val="dk1"/>
+                </a:solidFill>
+                <a:latin typeface="Times New Roman"/>
+                <a:ea typeface="Times New Roman"/>
+                <a:cs typeface="Times New Roman"/>
+              </a:rPr>
+              <a:t>Институт информационных технологий (ИИТ)</a:t>
+            </a:r>
+            <a:endParaRPr sz="2000" dirty="0"/>
+          </a:p>
+          <a:p>
+            <a:pPr algn="ctr">
+              <a:defRPr/>
+            </a:pPr>
+            <a:r>
+              <a:rPr lang="ru-RU" sz="1600" dirty="0">
+                <a:solidFill>
+                  <a:schemeClr val="dk1"/>
+                </a:solidFill>
+                <a:latin typeface="Times New Roman"/>
+                <a:ea typeface="Times New Roman"/>
+                <a:cs typeface="Times New Roman"/>
+              </a:rPr>
+              <a:t>Кафедра прикладной математики</a:t>
+            </a:r>
+            <a:endParaRPr sz="1600" dirty="0">
+              <a:solidFill>
+                <a:schemeClr val="dk1"/>
+              </a:solidFill>
+              <a:latin typeface="Century Gothic"/>
+              <a:ea typeface="Century Gothic"/>
+              <a:cs typeface="Century Gothic"/>
+            </a:endParaRPr>
+          </a:p>
+        </p:txBody>
+      </p:sp>
+      <p:sp>
+        <p:nvSpPr>
+          <p:cNvPr id="9" name="Google Shape;173;p1">
+            <a:extLst>
+              <a:ext uri="{FF2B5EF4-FFF2-40B4-BE49-F238E27FC236}">
+                <a16:creationId xmlns:a16="http://schemas.microsoft.com/office/drawing/2014/main" id="{AEBE3451-456A-1C86-81B4-D8BA38AC5E90}"/>
+              </a:ext>
+            </a:extLst>
+          </p:cNvPr>
+          <p:cNvSpPr/>
+          <p:nvPr/>
+        </p:nvSpPr>
+        <p:spPr bwMode="auto">
+          <a:xfrm>
+            <a:off x="0" y="6367586"/>
+            <a:ext cx="12191999" cy="338514"/>
+          </a:xfrm>
+          <a:prstGeom prst="rect">
+            <a:avLst/>
+          </a:prstGeom>
+          <a:noFill/>
+          <a:ln>
+            <a:noFill/>
+          </a:ln>
+        </p:spPr>
+        <p:txBody>
+          <a:bodyPr spcFirstLastPara="1" wrap="square" lIns="91425" tIns="45700" rIns="91425" bIns="45700" anchor="t" anchorCtr="0">
+            <a:spAutoFit/>
+          </a:bodyPr>
+          <a:lstStyle/>
+          <a:p>
+            <a:pPr algn="ctr">
+              <a:defRPr/>
+            </a:pPr>
+            <a:r>
+              <a:rPr lang="ru-RU" sz="1600" dirty="0">
+                <a:solidFill>
+                  <a:schemeClr val="dk1"/>
+                </a:solidFill>
+                <a:latin typeface="Times New Roman"/>
+                <a:ea typeface="Times New Roman"/>
+                <a:cs typeface="Times New Roman"/>
+              </a:rPr>
+              <a:t>Москва 2026</a:t>
+            </a:r>
+            <a:endParaRPr sz="1600" dirty="0"/>
+          </a:p>
+        </p:txBody>
+      </p:sp>
+      <p:sp>
+        <p:nvSpPr>
+          <p:cNvPr id="10" name="TextBox 9">
+            <a:extLst>
+              <a:ext uri="{FF2B5EF4-FFF2-40B4-BE49-F238E27FC236}">
+                <a16:creationId xmlns:a16="http://schemas.microsoft.com/office/drawing/2014/main" id="{E203F08C-8357-0E7E-F414-01207629489D}"/>
+              </a:ext>
+            </a:extLst>
+          </p:cNvPr>
+          <p:cNvSpPr txBox="1"/>
+          <p:nvPr/>
+        </p:nvSpPr>
+        <p:spPr bwMode="auto">
+          <a:xfrm>
+            <a:off x="117137" y="4713219"/>
+            <a:ext cx="12074863" cy="1077218"/>
+          </a:xfrm>
+          <a:prstGeom prst="rect">
+            <a:avLst/>
+          </a:prstGeom>
+          <a:noFill/>
+        </p:spPr>
+        <p:txBody>
+          <a:bodyPr wrap="square" rtlCol="0">
+            <a:spAutoFit/>
+          </a:bodyPr>
+          <a:lstStyle/>
+          <a:p>
+            <a:r>
+              <a:rPr lang="ru-RU" sz="1600" dirty="0">
+                <a:latin typeface="Times New Roman" panose="02020603050405020304" pitchFamily="18" charset="0"/>
+                <a:cs typeface="Times New Roman" panose="02020603050405020304" pitchFamily="18" charset="0"/>
+              </a:rPr>
+              <a:t>Автор: студент группы ИМБО-02-22</a:t>
+            </a:r>
+          </a:p>
+          <a:p>
+            <a:r>
+              <a:rPr lang="ru-RU" sz="1600" dirty="0">
+                <a:latin typeface="Times New Roman" panose="02020603050405020304" pitchFamily="18" charset="0"/>
+                <a:cs typeface="Times New Roman" panose="02020603050405020304" pitchFamily="18" charset="0"/>
+              </a:rPr>
+              <a:t>Ким Кирилл Сергеевич</a:t>
+            </a:r>
+            <a:br>
+              <a:rPr lang="ru-RU" sz="1600" dirty="0">
+                <a:latin typeface="Times New Roman" panose="02020603050405020304" pitchFamily="18" charset="0"/>
+                <a:cs typeface="Times New Roman" panose="02020603050405020304" pitchFamily="18" charset="0"/>
+              </a:rPr>
+            </a:br>
+            <a:r>
+              <a:rPr lang="ru-RU" sz="1600" dirty="0">
+                <a:latin typeface="Times New Roman" panose="02020603050405020304" pitchFamily="18" charset="0"/>
+                <a:cs typeface="Times New Roman" panose="02020603050405020304" pitchFamily="18" charset="0"/>
+              </a:rPr>
+              <a:t>Руководитель: к.ф.-м.н., доцент кафедры прикладной математики</a:t>
+            </a:r>
+          </a:p>
+          <a:p>
+            <a:r>
+              <a:rPr lang="ru-RU" sz="1600" dirty="0">
+                <a:latin typeface="Times New Roman" panose="02020603050405020304" pitchFamily="18" charset="0"/>
+                <a:cs typeface="Times New Roman" panose="02020603050405020304" pitchFamily="18" charset="0"/>
+              </a:rPr>
+              <a:t>Даева Софья Георгиевна</a:t>
+            </a:r>
+          </a:p>
+        </p:txBody>
+      </p:sp>
+      <p:sp>
+        <p:nvSpPr>
+          <p:cNvPr id="11" name="Google Shape;170;p1">
+            <a:extLst>
+              <a:ext uri="{FF2B5EF4-FFF2-40B4-BE49-F238E27FC236}">
+                <a16:creationId xmlns:a16="http://schemas.microsoft.com/office/drawing/2014/main" id="{07CBADD2-B68E-AFEF-9628-57F8D3038F2B}"/>
+              </a:ext>
+            </a:extLst>
+          </p:cNvPr>
+          <p:cNvSpPr/>
+          <p:nvPr/>
+        </p:nvSpPr>
+        <p:spPr bwMode="auto">
+          <a:xfrm>
+            <a:off x="-5" y="2735454"/>
+            <a:ext cx="12191999" cy="584735"/>
+          </a:xfrm>
+          <a:prstGeom prst="rect">
+            <a:avLst/>
+          </a:prstGeom>
+          <a:noFill/>
+          <a:ln>
+            <a:noFill/>
+          </a:ln>
+        </p:spPr>
+        <p:txBody>
+          <a:bodyPr spcFirstLastPara="1" wrap="square" lIns="91425" tIns="45700" rIns="91425" bIns="45700" anchor="t" anchorCtr="0">
+            <a:spAutoFit/>
+          </a:bodyPr>
+          <a:lstStyle/>
+          <a:p>
+            <a:pPr algn="ctr">
+              <a:defRPr/>
+            </a:pPr>
+            <a:r>
+              <a:rPr lang="ru-RU" sz="1600" dirty="0">
+                <a:solidFill>
+                  <a:schemeClr val="dk1"/>
+                </a:solidFill>
+                <a:latin typeface="Times New Roman"/>
+                <a:ea typeface="Times New Roman"/>
+                <a:cs typeface="Times New Roman"/>
+              </a:rPr>
+              <a:t>Направление «Прикладная математика»</a:t>
+            </a:r>
+          </a:p>
+          <a:p>
+            <a:pPr algn="ctr">
+              <a:defRPr/>
+            </a:pPr>
+            <a:r>
+              <a:rPr lang="ru-RU" sz="1600" dirty="0">
+                <a:solidFill>
+                  <a:schemeClr val="dk1"/>
+                </a:solidFill>
+                <a:latin typeface="Times New Roman"/>
+                <a:ea typeface="Century Gothic"/>
+                <a:cs typeface="Times New Roman"/>
+              </a:rPr>
+              <a:t>профиль «Анализ данных»</a:t>
+            </a:r>
+            <a:endParaRPr sz="1600" dirty="0">
+              <a:solidFill>
+                <a:schemeClr val="dk1"/>
+              </a:solidFill>
+              <a:latin typeface="Century Gothic"/>
+              <a:ea typeface="Century Gothic"/>
+              <a:cs typeface="Century Gothic"/>
+            </a:endParaRPr>
+          </a:p>
+        </p:txBody>
+      </p:sp>
+      <p:pic>
+        <p:nvPicPr>
+          <p:cNvPr id="13" name="Google Shape;168;p1">
+            <a:extLst>
+              <a:ext uri="{FF2B5EF4-FFF2-40B4-BE49-F238E27FC236}">
+                <a16:creationId xmlns:a16="http://schemas.microsoft.com/office/drawing/2014/main" id="{878D61B3-E710-8311-7419-7CF8961DD624}"/>
+              </a:ext>
+            </a:extLst>
+          </p:cNvPr>
+          <p:cNvPicPr/>
+          <p:nvPr/>
+        </p:nvPicPr>
+        <p:blipFill>
+          <a:blip r:embed="rId2">
+            <a:alphaModFix/>
+          </a:blip>
+          <a:stretch/>
+        </p:blipFill>
+        <p:spPr bwMode="auto">
+          <a:xfrm>
+            <a:off x="5652913" y="241186"/>
+            <a:ext cx="886165" cy="981423"/>
+          </a:xfrm>
+          <a:prstGeom prst="rect">
+            <a:avLst/>
+          </a:prstGeom>
+          <a:noFill/>
+          <a:ln>
+            <a:noFill/>
+          </a:ln>
+        </p:spPr>
+      </p:pic>
+      <p:sp>
+        <p:nvSpPr>
+          <p:cNvPr id="14" name="TextBox 13">
+            <a:extLst>
+              <a:ext uri="{FF2B5EF4-FFF2-40B4-BE49-F238E27FC236}">
+                <a16:creationId xmlns:a16="http://schemas.microsoft.com/office/drawing/2014/main" id="{C6ECC6C1-CADC-7E2C-2EC9-B9EAC1D8F823}"/>
+              </a:ext>
+            </a:extLst>
+          </p:cNvPr>
+          <p:cNvSpPr txBox="1"/>
+          <p:nvPr/>
+        </p:nvSpPr>
+        <p:spPr>
+          <a:xfrm>
+            <a:off x="1276342" y="1271423"/>
+            <a:ext cx="9639306" cy="981423"/>
+          </a:xfrm>
+          <a:prstGeom prst="rect">
+            <a:avLst/>
+          </a:prstGeom>
+          <a:noFill/>
+        </p:spPr>
+        <p:txBody>
+          <a:bodyPr wrap="none" rtlCol="0">
+            <a:spAutoFit/>
+          </a:bodyPr>
+          <a:lstStyle/>
+          <a:p>
+            <a:pPr marL="109728" marR="109728" indent="0" algn="ctr" rtl="0" eaLnBrk="1" fontAlgn="t" latinLnBrk="0" hangingPunct="1">
+              <a:lnSpc>
+                <a:spcPct val="107000"/>
+              </a:lnSpc>
+              <a:buNone/>
+            </a:pPr>
+            <a:r>
+              <a:rPr lang="ru-RU" sz="1800" b="0" i="0" u="none" strike="noStrike" kern="1200" dirty="0">
+                <a:solidFill>
+                  <a:srgbClr val="000000"/>
+                </a:solidFill>
+                <a:effectLst/>
+                <a:latin typeface="Times New Roman" panose="02020603050405020304" pitchFamily="18" charset="0"/>
+                <a:ea typeface="Times New Roman" panose="02020603050405020304" pitchFamily="18" charset="0"/>
+                <a:cs typeface="Times New Roman" panose="02020603050405020304" pitchFamily="18" charset="0"/>
+              </a:rPr>
+              <a:t>МИНИСТЕРСТВО НАУКИ И ВЫСШЕГО ОБРАЗОВАНИЯ РОССИЙСКОЙ ФЕДЕРАЦИИ</a:t>
+            </a:r>
+            <a:endParaRPr lang="ru-RU" sz="1800" b="0" i="0" u="none" strike="noStrike" dirty="0">
+              <a:effectLst/>
+              <a:latin typeface="Arial" panose="020B0604020202020204" pitchFamily="34" charset="0"/>
+            </a:endParaRPr>
+          </a:p>
+          <a:p>
+            <a:pPr marL="109728" marR="109728" indent="0" algn="ctr" rtl="0" eaLnBrk="1" fontAlgn="t" latinLnBrk="0" hangingPunct="1">
+              <a:lnSpc>
+                <a:spcPct val="107000"/>
+              </a:lnSpc>
+              <a:buNone/>
+            </a:pPr>
+            <a:r>
+              <a:rPr lang="ru-RU" sz="1800" b="0" i="0" u="none" strike="noStrike" kern="1200" dirty="0">
+                <a:solidFill>
+                  <a:srgbClr val="000000"/>
+                </a:solidFill>
+                <a:effectLst/>
+                <a:latin typeface="Times New Roman" panose="02020603050405020304" pitchFamily="18" charset="0"/>
+                <a:ea typeface="Times New Roman" panose="02020603050405020304" pitchFamily="18" charset="0"/>
+                <a:cs typeface="Times New Roman" panose="02020603050405020304" pitchFamily="18" charset="0"/>
+              </a:rPr>
+              <a:t>Федеральное государственное бюджетное образовательное учреждение высшего образования</a:t>
+            </a:r>
+            <a:endParaRPr lang="ru-RU" sz="1800" b="0" i="0" u="none" strike="noStrike" dirty="0">
+              <a:effectLst/>
+              <a:latin typeface="Arial" panose="020B0604020202020204" pitchFamily="34" charset="0"/>
+            </a:endParaRPr>
+          </a:p>
+          <a:p>
+            <a:pPr marL="109728" marR="109728" indent="0" algn="ctr" rtl="0" eaLnBrk="1" fontAlgn="t" latinLnBrk="0" hangingPunct="1">
+              <a:lnSpc>
+                <a:spcPct val="107000"/>
+              </a:lnSpc>
+            </a:pPr>
+            <a:r>
+              <a:rPr lang="ru-RU" sz="1800" b="1" i="0" u="none" strike="noStrike" kern="1200" dirty="0">
+                <a:solidFill>
+                  <a:srgbClr val="000000"/>
+                </a:solidFill>
+                <a:effectLst/>
+                <a:latin typeface="Times New Roman" panose="02020603050405020304" pitchFamily="18" charset="0"/>
+                <a:ea typeface="Times New Roman" panose="02020603050405020304" pitchFamily="18" charset="0"/>
+                <a:cs typeface="Times New Roman" panose="02020603050405020304" pitchFamily="18" charset="0"/>
+              </a:rPr>
+              <a:t>«МИРЭА - Российский технологический университет»</a:t>
+            </a:r>
+            <a:endParaRPr lang="ru-RU" sz="1800" b="0" i="0" u="none" strike="noStrike" dirty="0">
+              <a:effectLst/>
+              <a:latin typeface="Arial" panose="020B0604020202020204" pitchFamily="34" charset="0"/>
+            </a:endParaRPr>
+          </a:p>
+        </p:txBody>
+      </p:sp>
+      <p:sp>
+        <p:nvSpPr>
+          <p:cNvPr id="15" name="TextBox 14">
+            <a:extLst>
+              <a:ext uri="{FF2B5EF4-FFF2-40B4-BE49-F238E27FC236}">
+                <a16:creationId xmlns:a16="http://schemas.microsoft.com/office/drawing/2014/main" id="{C5F09BE3-7026-83DF-DF47-0A478733ECC9}"/>
+              </a:ext>
+            </a:extLst>
+          </p:cNvPr>
+          <p:cNvSpPr txBox="1"/>
+          <p:nvPr/>
+        </p:nvSpPr>
+        <p:spPr>
+          <a:xfrm>
+            <a:off x="5" y="3381744"/>
+            <a:ext cx="12191995" cy="665118"/>
+          </a:xfrm>
+          <a:prstGeom prst="rect">
+            <a:avLst/>
+          </a:prstGeom>
+          <a:noFill/>
+        </p:spPr>
+        <p:txBody>
+          <a:bodyPr wrap="square" rtlCol="0">
+            <a:spAutoFit/>
+          </a:bodyPr>
+          <a:lstStyle/>
+          <a:p>
+            <a:pPr marL="944245" marR="853439" lvl="0" indent="0" algn="ctr" defTabSz="914400" eaLnBrk="1" fontAlgn="auto" latinLnBrk="0" hangingPunct="1">
+              <a:lnSpc>
+                <a:spcPct val="107000"/>
+              </a:lnSpc>
+              <a:spcBef>
+                <a:spcPts val="0"/>
+              </a:spcBef>
+              <a:spcAft>
+                <a:spcPts val="0"/>
+              </a:spcAft>
+              <a:buClrTx/>
+              <a:buSzTx/>
+              <a:buFontTx/>
+              <a:buNone/>
+              <a:tabLst/>
+              <a:defRPr/>
+            </a:pPr>
+            <a:r>
+              <a:rPr lang="ru-RU" dirty="0">
+                <a:solidFill>
+                  <a:schemeClr val="dk1"/>
+                </a:solidFill>
+                <a:latin typeface="Times New Roman"/>
+                <a:ea typeface="Century Gothic"/>
+                <a:cs typeface="Times New Roman"/>
+              </a:rPr>
+              <a:t>Выпускная квалификационная работа бакалавра на тему:</a:t>
+            </a:r>
+          </a:p>
+          <a:p>
+            <a:pPr marR="853439" lvl="0" indent="942975" algn="ctr" defTabSz="914400" eaLnBrk="1" fontAlgn="auto" latinLnBrk="0" hangingPunct="1">
+              <a:lnSpc>
+                <a:spcPct val="107000"/>
+              </a:lnSpc>
+              <a:spcBef>
+                <a:spcPts val="0"/>
+              </a:spcBef>
+              <a:spcAft>
+                <a:spcPts val="0"/>
+              </a:spcAft>
+              <a:buClrTx/>
+              <a:buSzTx/>
+              <a:buFontTx/>
+              <a:buNone/>
+              <a:defRPr/>
+            </a:pPr>
+            <a:r>
+              <a:rPr lang="ru-RU" sz="1800" b="1" i="0" u="none" strike="noStrike" cap="none" dirty="0">
+                <a:solidFill>
+                  <a:schemeClr val="tx1"/>
+                </a:solidFill>
+                <a:effectLst/>
+                <a:latin typeface="Times New Roman" panose="02020603050405020304" pitchFamily="18" charset="0"/>
+                <a:ea typeface="+mn-ea"/>
+                <a:cs typeface="Times New Roman" panose="02020603050405020304" pitchFamily="18" charset="0"/>
+              </a:rPr>
+              <a:t>«Разработка модели оценки стоимости футбольных трансферов</a:t>
+            </a:r>
+            <a:r>
+              <a:rPr lang="ru-RU" sz="1800" b="1" dirty="0">
+                <a:solidFill>
+                  <a:schemeClr val="tx1"/>
+                </a:solidFill>
+                <a:effectLst/>
+                <a:latin typeface="Times New Roman" panose="02020603050405020304" pitchFamily="18" charset="0"/>
+                <a:ea typeface="+mn-ea"/>
+                <a:cs typeface="Times New Roman" panose="02020603050405020304" pitchFamily="18" charset="0"/>
+              </a:rPr>
+              <a:t>»</a:t>
+            </a:r>
+            <a:endParaRPr lang="ru-RU" sz="1800" b="1" u="none" strike="noStrike" cap="none" dirty="0">
+              <a:latin typeface="Times New Roman" panose="02020603050405020304" pitchFamily="18" charset="0"/>
+              <a:ea typeface="Times New Roman"/>
+              <a:cs typeface="Times New Roman" panose="02020603050405020304" pitchFamily="18" charset="0"/>
+            </a:endParaRPr>
+          </a:p>
+        </p:txBody>
+      </p:sp>
+    </p:spTree>
+    <p:extLst>
+      <p:ext uri="{BB962C8B-B14F-4D97-AF65-F5344CB8AC3E}">
+        <p14:creationId xmlns:p14="http://schemas.microsoft.com/office/powerpoint/2010/main" val="3044415067"/>
       </p:ext>
     </p:extLst>
   </p:cSld>
@@ -10613,7 +12192,7 @@
                 <a:latin typeface="Times New Roman" panose="02020603050405020304" pitchFamily="18" charset="0"/>
                 <a:cs typeface="Times New Roman" panose="02020603050405020304" pitchFamily="18" charset="0"/>
               </a:rPr>
-              <a:t>Актуальность: Объём трансферного рынка превышает 7 млрд евро в год. Решения о стоимости игроков принимаются на интуиции, что создаёт финансовые риски.</a:t>
+              <a:t>Актуальность: Объём трансферного рынка превышает 7 млрд евро в год. Решения о стоимости игроков принимаются на интуиции, что создаёт финансовые риски для клубов.</a:t>
             </a:r>
             <a:endParaRPr lang="ru-RU" sz="2400" dirty="0">
               <a:solidFill>
@@ -11600,7 +13179,7 @@
                 <a:latin typeface="Times New Roman" panose="02020603050405020304" pitchFamily="18" charset="0"/>
                 <a:cs typeface="Times New Roman" panose="02020603050405020304" pitchFamily="18" charset="0"/>
               </a:rPr>
-              <a:t>Пик стоимости 26–29 лет.</a:t>
+              <a:t>Пик стоимости 24–27 лет.</a:t>
             </a:r>
           </a:p>
           <a:p>
@@ -12343,7 +13922,7 @@
         <p:cNvPr id="1" name="">
           <a:extLst>
             <a:ext uri="{FF2B5EF4-FFF2-40B4-BE49-F238E27FC236}">
-              <a16:creationId xmlns:a16="http://schemas.microsoft.com/office/drawing/2014/main" id="{7A538267-C448-7C24-1925-E0A567245E96}"/>
+              <a16:creationId xmlns:a16="http://schemas.microsoft.com/office/drawing/2014/main" id="{FDDC8904-743B-F360-75DB-E836A33CBBAC}"/>
             </a:ext>
           </a:extLst>
         </p:cNvPr>
@@ -12363,7 +13942,7 @@
           <p:cNvPr id="10" name="Блок-схема: альтернативный процесс 9">
             <a:extLst>
               <a:ext uri="{FF2B5EF4-FFF2-40B4-BE49-F238E27FC236}">
-                <a16:creationId xmlns:a16="http://schemas.microsoft.com/office/drawing/2014/main" id="{6CB271A3-9F31-13AA-9DBF-9B36381495C6}"/>
+                <a16:creationId xmlns:a16="http://schemas.microsoft.com/office/drawing/2014/main" id="{3E8A0CC1-6505-A66C-7EC4-7AF021547173}"/>
               </a:ext>
             </a:extLst>
           </p:cNvPr>
@@ -12412,7 +13991,7 @@
           <p:cNvPr id="9" name="Блок-схема: альтернативный процесс 8">
             <a:extLst>
               <a:ext uri="{FF2B5EF4-FFF2-40B4-BE49-F238E27FC236}">
-                <a16:creationId xmlns:a16="http://schemas.microsoft.com/office/drawing/2014/main" id="{F4760A14-A543-8E19-8720-FF61ABE79733}"/>
+                <a16:creationId xmlns:a16="http://schemas.microsoft.com/office/drawing/2014/main" id="{98973623-E4A8-B862-9E71-3DE226FCD7B4}"/>
               </a:ext>
             </a:extLst>
           </p:cNvPr>
@@ -12461,7 +14040,7 @@
           <p:cNvPr id="5" name="Блок-схема: альтернативный процесс 4">
             <a:extLst>
               <a:ext uri="{FF2B5EF4-FFF2-40B4-BE49-F238E27FC236}">
-                <a16:creationId xmlns:a16="http://schemas.microsoft.com/office/drawing/2014/main" id="{F1C4BEE4-4F01-656B-8CE3-FA8CFA16642E}"/>
+                <a16:creationId xmlns:a16="http://schemas.microsoft.com/office/drawing/2014/main" id="{2ACED72E-CD9C-1EDF-AB98-CDDD40EF510C}"/>
               </a:ext>
             </a:extLst>
           </p:cNvPr>
@@ -12510,7 +14089,7 @@
           <p:cNvPr id="2" name="Заголовок 1">
             <a:extLst>
               <a:ext uri="{FF2B5EF4-FFF2-40B4-BE49-F238E27FC236}">
-                <a16:creationId xmlns:a16="http://schemas.microsoft.com/office/drawing/2014/main" id="{53C15AA9-F243-4776-7B62-FEFF97B15AC6}"/>
+                <a16:creationId xmlns:a16="http://schemas.microsoft.com/office/drawing/2014/main" id="{D43354AA-8E7C-59C6-7DF7-C7277F99169B}"/>
               </a:ext>
             </a:extLst>
           </p:cNvPr>
@@ -12548,7 +14127,7 @@
           <p:cNvPr id="3" name="Объект 2">
             <a:extLst>
               <a:ext uri="{FF2B5EF4-FFF2-40B4-BE49-F238E27FC236}">
-                <a16:creationId xmlns:a16="http://schemas.microsoft.com/office/drawing/2014/main" id="{B8483174-7622-A79B-D1C6-AAB3F569DE66}"/>
+                <a16:creationId xmlns:a16="http://schemas.microsoft.com/office/drawing/2014/main" id="{8E60FA61-4A60-6683-E2AC-504C031FF407}"/>
               </a:ext>
             </a:extLst>
           </p:cNvPr>
@@ -12617,7 +14196,7 @@
           <p:cNvPr id="4" name="Заголовок 1">
             <a:extLst>
               <a:ext uri="{FF2B5EF4-FFF2-40B4-BE49-F238E27FC236}">
-                <a16:creationId xmlns:a16="http://schemas.microsoft.com/office/drawing/2014/main" id="{8DDA4427-C7F0-9AF9-0762-C77AAACA8EF5}"/>
+                <a16:creationId xmlns:a16="http://schemas.microsoft.com/office/drawing/2014/main" id="{91374C44-3CD2-5CA4-A62B-25F408B4BC4B}"/>
               </a:ext>
             </a:extLst>
           </p:cNvPr>
@@ -12671,7 +14250,7 @@
           <p:cNvPr id="7" name="TextBox 6">
             <a:extLst>
               <a:ext uri="{FF2B5EF4-FFF2-40B4-BE49-F238E27FC236}">
-                <a16:creationId xmlns:a16="http://schemas.microsoft.com/office/drawing/2014/main" id="{CB64C224-3942-C627-0103-183D3F68AD45}"/>
+                <a16:creationId xmlns:a16="http://schemas.microsoft.com/office/drawing/2014/main" id="{457661B2-5CCC-90D3-BC9A-C65B860009B2}"/>
               </a:ext>
             </a:extLst>
           </p:cNvPr>
@@ -12704,14 +14283,14 @@
           </a:p>
         </p:txBody>
       </p:sp>
-      <mc:AlternateContent xmlns:mc="http://schemas.openxmlformats.org/markup-compatibility/2006" xmlns:a14="http://schemas.microsoft.com/office/drawing/2010/main">
-        <mc:Choice Requires="a14">
+      <mc:AlternateContent xmlns:mc="http://schemas.openxmlformats.org/markup-compatibility/2006">
+        <mc:Choice xmlns:a14="http://schemas.microsoft.com/office/drawing/2010/main" Requires="a14">
           <p:sp>
             <p:nvSpPr>
               <p:cNvPr id="8" name="TextBox 7">
                 <a:extLst>
                   <a:ext uri="{FF2B5EF4-FFF2-40B4-BE49-F238E27FC236}">
-                    <a16:creationId xmlns:a16="http://schemas.microsoft.com/office/drawing/2014/main" id="{DC44228F-21C9-5CDB-DFD2-DE37BC61FF2D}"/>
+                    <a16:creationId xmlns:a16="http://schemas.microsoft.com/office/drawing/2014/main" id="{BFF44311-C714-43B3-B435-2C61361A9F67}"/>
                   </a:ext>
                 </a:extLst>
               </p:cNvPr>
@@ -13257,13 +14836,13 @@
             </p:txBody>
           </p:sp>
         </mc:Choice>
-        <mc:Fallback xmlns="">
+        <mc:Fallback>
           <p:sp>
             <p:nvSpPr>
               <p:cNvPr id="8" name="TextBox 7">
                 <a:extLst>
                   <a:ext uri="{FF2B5EF4-FFF2-40B4-BE49-F238E27FC236}">
-                    <a16:creationId xmlns:a16="http://schemas.microsoft.com/office/drawing/2014/main" id="{DC44228F-21C9-5CDB-DFD2-DE37BC61FF2D}"/>
+                    <a16:creationId xmlns:a16="http://schemas.microsoft.com/office/drawing/2014/main" id="{BFF44311-C714-43B3-B435-2C61361A9F67}"/>
                   </a:ext>
                 </a:extLst>
               </p:cNvPr>
@@ -13302,14 +14881,14 @@
           </p:sp>
         </mc:Fallback>
       </mc:AlternateContent>
-      <mc:AlternateContent xmlns:mc="http://schemas.openxmlformats.org/markup-compatibility/2006" xmlns:a14="http://schemas.microsoft.com/office/drawing/2010/main">
-        <mc:Choice Requires="a14">
+      <mc:AlternateContent xmlns:mc="http://schemas.openxmlformats.org/markup-compatibility/2006">
+        <mc:Choice xmlns:a14="http://schemas.microsoft.com/office/drawing/2010/main" Requires="a14">
           <p:sp>
             <p:nvSpPr>
               <p:cNvPr id="11" name="TextBox 10">
                 <a:extLst>
                   <a:ext uri="{FF2B5EF4-FFF2-40B4-BE49-F238E27FC236}">
-                    <a16:creationId xmlns:a16="http://schemas.microsoft.com/office/drawing/2014/main" id="{7998FA91-88FB-1D49-CFF8-ACB75931B88F}"/>
+                    <a16:creationId xmlns:a16="http://schemas.microsoft.com/office/drawing/2014/main" id="{DAE90BD2-A288-7380-3D00-09A0C7D22D55}"/>
                   </a:ext>
                 </a:extLst>
               </p:cNvPr>
@@ -13343,7 +14922,7 @@
                     <a:latin typeface="Times New Roman" panose="02020603050405020304" pitchFamily="18" charset="0"/>
                     <a:cs typeface="Times New Roman" panose="02020603050405020304" pitchFamily="18" charset="0"/>
                   </a:rPr>
-                  <a:t>Метрики:</a:t>
+                  <a:t>Разделение метрик:</a:t>
                 </a:r>
               </a:p>
               <a:p>
@@ -13351,6 +14930,38 @@
                   <a:buFont typeface="Arial" panose="020B0604020202020204" pitchFamily="34" charset="0"/>
                   <a:buChar char="•"/>
                 </a:pPr>
+                <a:r>
+                  <a:rPr lang="ru-RU" sz="2400" dirty="0">
+                    <a:solidFill>
+                      <a:schemeClr val="bg1"/>
+                    </a:solidFill>
+                    <a:latin typeface="Times New Roman" panose="02020603050405020304" pitchFamily="18" charset="0"/>
+                    <a:ea typeface="Cambria Math" panose="02040503050406030204" pitchFamily="18" charset="0"/>
+                    <a:cs typeface="Times New Roman" panose="02020603050405020304" pitchFamily="18" charset="0"/>
+                  </a:rPr>
+                  <a:t>Функция потерь при обучении </a:t>
+                </a:r>
+                <a:r>
+                  <a:rPr lang="en-US" sz="2400" dirty="0">
+                    <a:solidFill>
+                      <a:schemeClr val="bg1"/>
+                    </a:solidFill>
+                    <a:latin typeface="Times New Roman" panose="02020603050405020304" pitchFamily="18" charset="0"/>
+                    <a:ea typeface="Cambria Math" panose="02040503050406030204" pitchFamily="18" charset="0"/>
+                    <a:cs typeface="Times New Roman" panose="02020603050405020304" pitchFamily="18" charset="0"/>
+                  </a:rPr>
+                  <a:t>—</a:t>
+                </a:r>
+                <a:r>
+                  <a:rPr lang="ru-RU" sz="2400" dirty="0">
+                    <a:solidFill>
+                      <a:schemeClr val="bg1"/>
+                    </a:solidFill>
+                    <a:ea typeface="Cambria Math" panose="02040503050406030204" pitchFamily="18" charset="0"/>
+                    <a:cs typeface="Times New Roman" panose="02020603050405020304" pitchFamily="18" charset="0"/>
+                  </a:rPr>
+                  <a:t> </a:t>
+                </a:r>
                 <a14:m>
                   <m:oMath xmlns:m="http://schemas.openxmlformats.org/officeDocument/2006/math">
                     <m:r>
@@ -13362,10 +14973,10 @@
                         <a:ea typeface="Cambria Math" panose="02040503050406030204" pitchFamily="18" charset="0"/>
                         <a:cs typeface="Times New Roman" panose="02020603050405020304" pitchFamily="18" charset="0"/>
                       </a:rPr>
-                      <m:t>𝑀𝐴𝐸</m:t>
+                      <m:t>𝑀</m:t>
                     </m:r>
                     <m:r>
-                      <a:rPr lang="ru-RU" sz="2400" i="1">
+                      <a:rPr lang="en-US" sz="2400" b="0" i="1" smtClean="0">
                         <a:solidFill>
                           <a:schemeClr val="bg1"/>
                         </a:solidFill>
@@ -13373,23 +14984,10 @@
                         <a:ea typeface="Cambria Math" panose="02040503050406030204" pitchFamily="18" charset="0"/>
                         <a:cs typeface="Times New Roman" panose="02020603050405020304" pitchFamily="18" charset="0"/>
                       </a:rPr>
-                      <m:t> (</m:t>
+                      <m:t>𝑆</m:t>
                     </m:r>
                     <m:r>
-                      <m:rPr>
-                        <m:nor/>
-                      </m:rPr>
-                      <a:rPr lang="ru-RU" sz="2400" dirty="0">
-                        <a:solidFill>
-                          <a:schemeClr val="bg1"/>
-                        </a:solidFill>
-                        <a:latin typeface="Times New Roman" panose="02020603050405020304" pitchFamily="18" charset="0"/>
-                        <a:cs typeface="Times New Roman" panose="02020603050405020304" pitchFamily="18" charset="0"/>
-                      </a:rPr>
-                      <m:t>средняя абсолютная ошибка</m:t>
-                    </m:r>
-                    <m:r>
-                      <a:rPr lang="ru-RU" sz="2400" i="1">
+                      <a:rPr lang="en-US" sz="2400" i="1" smtClean="0">
                         <a:solidFill>
                           <a:schemeClr val="bg1"/>
                         </a:solidFill>
@@ -13397,10 +14995,60 @@
                         <a:ea typeface="Cambria Math" panose="02040503050406030204" pitchFamily="18" charset="0"/>
                         <a:cs typeface="Times New Roman" panose="02020603050405020304" pitchFamily="18" charset="0"/>
                       </a:rPr>
-                      <m:t>)</m:t>
+                      <m:t>𝐸</m:t>
                     </m:r>
                   </m:oMath>
                 </a14:m>
+                <a:r>
+                  <a:rPr lang="en-US" sz="2400" dirty="0">
+                    <a:solidFill>
+                      <a:schemeClr val="bg1"/>
+                    </a:solidFill>
+                    <a:latin typeface="Times New Roman" panose="02020603050405020304" pitchFamily="18" charset="0"/>
+                    <a:ea typeface="Cambria Math" panose="02040503050406030204" pitchFamily="18" charset="0"/>
+                    <a:cs typeface="Times New Roman" panose="02020603050405020304" pitchFamily="18" charset="0"/>
+                  </a:rPr>
+                  <a:t> </a:t>
+                </a:r>
+                <a:r>
+                  <a:rPr lang="ru-RU" sz="2400" dirty="0">
+                    <a:solidFill>
+                      <a:schemeClr val="bg1"/>
+                    </a:solidFill>
+                    <a:latin typeface="Times New Roman" panose="02020603050405020304" pitchFamily="18" charset="0"/>
+                    <a:ea typeface="Cambria Math" panose="02040503050406030204" pitchFamily="18" charset="0"/>
+                    <a:cs typeface="Times New Roman" panose="02020603050405020304" pitchFamily="18" charset="0"/>
+                  </a:rPr>
+                  <a:t>на логарифмированной стоимости;</a:t>
+                </a:r>
+              </a:p>
+              <a:p>
+                <a:pPr indent="447675">
+                  <a:buFont typeface="Arial" panose="020B0604020202020204" pitchFamily="34" charset="0"/>
+                  <a:buChar char="•"/>
+                </a:pPr>
+                <a:r>
+                  <a:rPr lang="ru-RU" sz="2400" dirty="0">
+                    <a:solidFill>
+                      <a:schemeClr val="bg1"/>
+                    </a:solidFill>
+                    <a:latin typeface="Times New Roman" panose="02020603050405020304" pitchFamily="18" charset="0"/>
+                    <a:ea typeface="Cambria Math" panose="02040503050406030204" pitchFamily="18" charset="0"/>
+                    <a:cs typeface="Times New Roman" panose="02020603050405020304" pitchFamily="18" charset="0"/>
+                  </a:rPr>
+                  <a:t>Метрика отбора модели и </a:t>
+                </a:r>
+                <a:r>
+                  <a:rPr lang="ru-RU" sz="2400" dirty="0" err="1">
+                    <a:solidFill>
+                      <a:schemeClr val="bg1"/>
+                    </a:solidFill>
+                    <a:latin typeface="Times New Roman" panose="02020603050405020304" pitchFamily="18" charset="0"/>
+                    <a:ea typeface="Cambria Math" panose="02040503050406030204" pitchFamily="18" charset="0"/>
+                    <a:cs typeface="Times New Roman" panose="02020603050405020304" pitchFamily="18" charset="0"/>
+                  </a:rPr>
+                  <a:t>гиперпараметров</a:t>
+                </a:r>
                 <a:r>
                   <a:rPr lang="ru-RU" sz="2400" dirty="0">
                     <a:solidFill>
@@ -13412,32 +15060,17 @@
                   </a:rPr>
                   <a:t> </a:t>
                 </a:r>
-                <a14:m>
-                  <m:oMath xmlns:m="http://schemas.openxmlformats.org/officeDocument/2006/math">
-                    <m:r>
-                      <a:rPr lang="en-US" sz="2400" i="1">
-                        <a:solidFill>
-                          <a:schemeClr val="bg1"/>
-                        </a:solidFill>
-                        <a:latin typeface="Cambria Math" panose="02040503050406030204" pitchFamily="18" charset="0"/>
-                        <a:ea typeface="Cambria Math" panose="02040503050406030204" pitchFamily="18" charset="0"/>
-                        <a:cs typeface="Times New Roman" panose="02020603050405020304" pitchFamily="18" charset="0"/>
-                      </a:rPr>
-                      <m:t>≈</m:t>
-                    </m:r>
-                    <m:r>
-                      <a:rPr lang="ru-RU" sz="2400" i="1">
-                        <a:solidFill>
-                          <a:schemeClr val="bg1"/>
-                        </a:solidFill>
-                        <a:latin typeface="Cambria Math" panose="02040503050406030204" pitchFamily="18" charset="0"/>
-                        <a:ea typeface="Cambria Math" panose="02040503050406030204" pitchFamily="18" charset="0"/>
-                        <a:cs typeface="Times New Roman" panose="02020603050405020304" pitchFamily="18" charset="0"/>
-                      </a:rPr>
-                      <m:t>3,0 млн</m:t>
-                    </m:r>
-                  </m:oMath>
-                </a14:m>
+                <a:r>
+                  <a:rPr lang="en-US" sz="2400" dirty="0">
+                    <a:solidFill>
+                      <a:schemeClr val="bg1"/>
+                    </a:solidFill>
+                    <a:latin typeface="Times New Roman" panose="02020603050405020304" pitchFamily="18" charset="0"/>
+                    <a:ea typeface="Cambria Math" panose="02040503050406030204" pitchFamily="18" charset="0"/>
+                    <a:cs typeface="Times New Roman" panose="02020603050405020304" pitchFamily="18" charset="0"/>
+                  </a:rPr>
+                  <a:t>—</a:t>
+                </a:r>
                 <a:r>
                   <a:rPr lang="ru-RU" sz="2400" dirty="0">
                     <a:solidFill>
@@ -13447,33 +15080,8 @@
                     <a:ea typeface="Cambria Math" panose="02040503050406030204" pitchFamily="18" charset="0"/>
                     <a:cs typeface="Times New Roman" panose="02020603050405020304" pitchFamily="18" charset="0"/>
                   </a:rPr>
-                  <a:t> евро;</a:t>
-                </a:r>
-                <a:r>
-                  <a:rPr lang="en-US" sz="2400" dirty="0">
-                    <a:solidFill>
-                      <a:schemeClr val="bg1"/>
-                    </a:solidFill>
-                    <a:latin typeface="Times New Roman" panose="02020603050405020304" pitchFamily="18" charset="0"/>
-                    <a:ea typeface="Cambria Math" panose="02040503050406030204" pitchFamily="18" charset="0"/>
-                    <a:cs typeface="Times New Roman" panose="02020603050405020304" pitchFamily="18" charset="0"/>
-                  </a:rPr>
                   <a:t> </a:t>
                 </a:r>
-                <a:endParaRPr lang="ru-RU" sz="2400" i="1" dirty="0">
-                  <a:solidFill>
-                    <a:schemeClr val="bg1"/>
-                  </a:solidFill>
-                  <a:latin typeface="Cambria Math" panose="02040503050406030204" pitchFamily="18" charset="0"/>
-                  <a:ea typeface="Cambria Math" panose="02040503050406030204" pitchFamily="18" charset="0"/>
-                  <a:cs typeface="Times New Roman" panose="02020603050405020304" pitchFamily="18" charset="0"/>
-                </a:endParaRPr>
-              </a:p>
-              <a:p>
-                <a:pPr indent="447675">
-                  <a:buFont typeface="Arial" panose="020B0604020202020204" pitchFamily="34" charset="0"/>
-                  <a:buChar char="•"/>
-                </a:pPr>
                 <a14:m>
                   <m:oMath xmlns:m="http://schemas.openxmlformats.org/officeDocument/2006/math">
                     <m:sSup>
@@ -13516,17 +15124,6 @@
                         </m:r>
                       </m:sup>
                     </m:sSup>
-                    <m:r>
-                      <a:rPr lang="ru-RU" sz="2400">
-                        <a:solidFill>
-                          <a:schemeClr val="bg1"/>
-                        </a:solidFill>
-                        <a:latin typeface="Cambria Math" panose="02040503050406030204" pitchFamily="18" charset="0"/>
-                        <a:ea typeface="Cambria Math" panose="02040503050406030204" pitchFamily="18" charset="0"/>
-                        <a:cs typeface="Times New Roman" panose="02020603050405020304" pitchFamily="18" charset="0"/>
-                      </a:rPr>
-                      <m:t> </m:t>
-                    </m:r>
                   </m:oMath>
                 </a14:m>
                 <a:r>
@@ -13538,66 +15135,8 @@
                     <a:ea typeface="Cambria Math" panose="02040503050406030204" pitchFamily="18" charset="0"/>
                     <a:cs typeface="Times New Roman" panose="02020603050405020304" pitchFamily="18" charset="0"/>
                   </a:rPr>
-                  <a:t>(</a:t>
+                  <a:t>;</a:t>
                 </a:r>
-                <a:r>
-                  <a:rPr lang="ru-RU" sz="2400" dirty="0">
-                    <a:solidFill>
-                      <a:schemeClr val="bg1"/>
-                    </a:solidFill>
-                    <a:latin typeface="Times New Roman" panose="02020603050405020304" pitchFamily="18" charset="0"/>
-                    <a:cs typeface="Times New Roman" panose="02020603050405020304" pitchFamily="18" charset="0"/>
-                  </a:rPr>
-                  <a:t>коэффициент детерминации</a:t>
-                </a:r>
-                <a:r>
-                  <a:rPr lang="ru-RU" sz="2400" dirty="0">
-                    <a:solidFill>
-                      <a:schemeClr val="bg1"/>
-                    </a:solidFill>
-                    <a:latin typeface="Times New Roman" panose="02020603050405020304" pitchFamily="18" charset="0"/>
-                    <a:ea typeface="Cambria Math" panose="02040503050406030204" pitchFamily="18" charset="0"/>
-                    <a:cs typeface="Times New Roman" panose="02020603050405020304" pitchFamily="18" charset="0"/>
-                  </a:rPr>
-                  <a:t>) </a:t>
-                </a:r>
-                <a14:m>
-                  <m:oMath xmlns:m="http://schemas.openxmlformats.org/officeDocument/2006/math">
-                    <m:r>
-                      <a:rPr lang="en-US" sz="2400" i="1">
-                        <a:solidFill>
-                          <a:schemeClr val="bg1"/>
-                        </a:solidFill>
-                        <a:latin typeface="Cambria Math" panose="02040503050406030204" pitchFamily="18" charset="0"/>
-                        <a:ea typeface="Cambria Math" panose="02040503050406030204" pitchFamily="18" charset="0"/>
-                        <a:cs typeface="Times New Roman" panose="02020603050405020304" pitchFamily="18" charset="0"/>
-                      </a:rPr>
-                      <m:t>≥</m:t>
-                    </m:r>
-                    <m:r>
-                      <a:rPr lang="ru-RU" sz="2400" i="1">
-                        <a:solidFill>
-                          <a:schemeClr val="bg1"/>
-                        </a:solidFill>
-                        <a:latin typeface="Cambria Math" panose="02040503050406030204" pitchFamily="18" charset="0"/>
-                        <a:ea typeface="Cambria Math" panose="02040503050406030204" pitchFamily="18" charset="0"/>
-                        <a:cs typeface="Times New Roman" panose="02020603050405020304" pitchFamily="18" charset="0"/>
-                      </a:rPr>
-                      <m:t>0,5</m:t>
-                    </m:r>
-                    <m:r>
-                      <a:rPr lang="ru-RU" sz="2400">
-                        <a:solidFill>
-                          <a:schemeClr val="bg1"/>
-                        </a:solidFill>
-                        <a:latin typeface="Cambria Math" panose="02040503050406030204" pitchFamily="18" charset="0"/>
-                        <a:ea typeface="Cambria Math" panose="02040503050406030204" pitchFamily="18" charset="0"/>
-                        <a:cs typeface="Times New Roman" panose="02020603050405020304" pitchFamily="18" charset="0"/>
-                      </a:rPr>
-                      <m:t>;</m:t>
-                    </m:r>
-                  </m:oMath>
-                </a14:m>
                 <a:r>
                   <a:rPr lang="en-US" sz="2400" dirty="0">
                     <a:solidFill>
@@ -13623,6 +15162,83 @@
                   <a:buFont typeface="Arial" panose="020B0604020202020204" pitchFamily="34" charset="0"/>
                   <a:buChar char="•"/>
                 </a:pPr>
+                <a:r>
+                  <a:rPr lang="ru-RU" sz="2400" dirty="0">
+                    <a:solidFill>
+                      <a:schemeClr val="bg1"/>
+                    </a:solidFill>
+                    <a:latin typeface="Times New Roman" panose="02020603050405020304" pitchFamily="18" charset="0"/>
+                    <a:ea typeface="Cambria Math" panose="02040503050406030204" pitchFamily="18" charset="0"/>
+                    <a:cs typeface="Times New Roman" panose="02020603050405020304" pitchFamily="18" charset="0"/>
+                  </a:rPr>
+                  <a:t>Итоговые метрики качества </a:t>
+                </a:r>
+                <a:r>
+                  <a:rPr lang="en-US" sz="2400" dirty="0">
+                    <a:solidFill>
+                      <a:schemeClr val="bg1"/>
+                    </a:solidFill>
+                    <a:latin typeface="Times New Roman" panose="02020603050405020304" pitchFamily="18" charset="0"/>
+                    <a:ea typeface="Cambria Math" panose="02040503050406030204" pitchFamily="18" charset="0"/>
+                    <a:cs typeface="Times New Roman" panose="02020603050405020304" pitchFamily="18" charset="0"/>
+                  </a:rPr>
+                  <a:t>— MAE (€), </a:t>
+                </a:r>
+                <a14:m>
+                  <m:oMath xmlns:m="http://schemas.openxmlformats.org/officeDocument/2006/math">
+                    <m:sSup>
+                      <m:sSupPr>
+                        <m:ctrlPr>
+                          <a:rPr lang="en-US" sz="2400" i="1">
+                            <a:solidFill>
+                              <a:schemeClr val="bg1"/>
+                            </a:solidFill>
+                            <a:latin typeface="Cambria Math" panose="02040503050406030204" pitchFamily="18" charset="0"/>
+                            <a:ea typeface="Cambria Math" panose="02040503050406030204" pitchFamily="18" charset="0"/>
+                            <a:cs typeface="Times New Roman" panose="02020603050405020304" pitchFamily="18" charset="0"/>
+                          </a:rPr>
+                        </m:ctrlPr>
+                      </m:sSupPr>
+                      <m:e>
+                        <m:r>
+                          <a:rPr lang="en-US" sz="2400" i="1">
+                            <a:solidFill>
+                              <a:schemeClr val="bg1"/>
+                            </a:solidFill>
+                            <a:latin typeface="Cambria Math" panose="02040503050406030204" pitchFamily="18" charset="0"/>
+                            <a:ea typeface="Cambria Math" panose="02040503050406030204" pitchFamily="18" charset="0"/>
+                            <a:cs typeface="Times New Roman" panose="02020603050405020304" pitchFamily="18" charset="0"/>
+                          </a:rPr>
+                          <m:t>𝑅</m:t>
+                        </m:r>
+                      </m:e>
+                      <m:sup>
+                        <m:r>
+                          <a:rPr lang="en-US" sz="2400" i="1">
+                            <a:solidFill>
+                              <a:schemeClr val="bg1"/>
+                            </a:solidFill>
+                            <a:latin typeface="Cambria Math" panose="02040503050406030204" pitchFamily="18" charset="0"/>
+                            <a:ea typeface="Cambria Math" panose="02040503050406030204" pitchFamily="18" charset="0"/>
+                            <a:cs typeface="Times New Roman" panose="02020603050405020304" pitchFamily="18" charset="0"/>
+                          </a:rPr>
+                          <m:t>2</m:t>
+                        </m:r>
+                      </m:sup>
+                    </m:sSup>
+                  </m:oMath>
+                </a14:m>
+                <a:r>
+                  <a:rPr lang="en-US" sz="2400" dirty="0">
+                    <a:solidFill>
+                      <a:schemeClr val="bg1"/>
+                    </a:solidFill>
+                    <a:latin typeface="Times New Roman" panose="02020603050405020304" pitchFamily="18" charset="0"/>
+                    <a:ea typeface="Cambria Math" panose="02040503050406030204" pitchFamily="18" charset="0"/>
+                    <a:cs typeface="Times New Roman" panose="02020603050405020304" pitchFamily="18" charset="0"/>
+                  </a:rPr>
+                  <a:t>, </a:t>
+                </a:r>
                 <a14:m>
                   <m:oMath xmlns:m="http://schemas.openxmlformats.org/officeDocument/2006/math">
                     <m:r>
@@ -13657,23 +15273,28 @@
                     <a:latin typeface="Times New Roman" panose="02020603050405020304" pitchFamily="18" charset="0"/>
                     <a:cs typeface="Times New Roman" panose="02020603050405020304" pitchFamily="18" charset="0"/>
                   </a:rPr>
-                  <a:t>(средняя абсолютная процентная ошибка) </a:t>
+                  <a:t>(</a:t>
                 </a:r>
-                <a14:m>
-                  <m:oMath xmlns:m="http://schemas.openxmlformats.org/officeDocument/2006/math">
-                    <m:r>
-                      <a:rPr lang="ru-RU" sz="2400" i="1">
-                        <a:solidFill>
-                          <a:schemeClr val="bg1"/>
-                        </a:solidFill>
-                        <a:latin typeface="Cambria Math" panose="02040503050406030204" pitchFamily="18" charset="0"/>
-                        <a:ea typeface="Cambria Math" panose="02040503050406030204" pitchFamily="18" charset="0"/>
-                        <a:cs typeface="Times New Roman" panose="02020603050405020304" pitchFamily="18" charset="0"/>
-                      </a:rPr>
-                      <m:t>≤50%</m:t>
-                    </m:r>
-                  </m:oMath>
-                </a14:m>
+                <a:r>
+                  <a:rPr lang="en-US" sz="2400" dirty="0">
+                    <a:solidFill>
+                      <a:schemeClr val="bg1"/>
+                    </a:solidFill>
+                    <a:latin typeface="Times New Roman" panose="02020603050405020304" pitchFamily="18" charset="0"/>
+                    <a:cs typeface="Times New Roman" panose="02020603050405020304" pitchFamily="18" charset="0"/>
+                  </a:rPr>
+                  <a:t>%</a:t>
+                </a:r>
+                <a:r>
+                  <a:rPr lang="ru-RU" sz="2400" dirty="0">
+                    <a:solidFill>
+                      <a:schemeClr val="bg1"/>
+                    </a:solidFill>
+                    <a:latin typeface="Times New Roman" panose="02020603050405020304" pitchFamily="18" charset="0"/>
+                    <a:cs typeface="Times New Roman" panose="02020603050405020304" pitchFamily="18" charset="0"/>
+                  </a:rPr>
+                  <a:t>)</a:t>
+                </a:r>
                 <a:r>
                   <a:rPr lang="en-US" sz="2400" dirty="0">
                     <a:solidFill>
@@ -13689,13 +15310,13 @@
             </p:txBody>
           </p:sp>
         </mc:Choice>
-        <mc:Fallback xmlns="">
+        <mc:Fallback>
           <p:sp>
             <p:nvSpPr>
               <p:cNvPr id="11" name="TextBox 10">
                 <a:extLst>
                   <a:ext uri="{FF2B5EF4-FFF2-40B4-BE49-F238E27FC236}">
-                    <a16:creationId xmlns:a16="http://schemas.microsoft.com/office/drawing/2014/main" id="{7998FA91-88FB-1D49-CFF8-ACB75931B88F}"/>
+                    <a16:creationId xmlns:a16="http://schemas.microsoft.com/office/drawing/2014/main" id="{DAE90BD2-A288-7380-3D00-09A0C7D22D55}"/>
                   </a:ext>
                 </a:extLst>
               </p:cNvPr>
@@ -13737,7 +15358,7 @@
     </p:spTree>
     <p:extLst>
       <p:ext uri="{BB962C8B-B14F-4D97-AF65-F5344CB8AC3E}">
-        <p14:creationId xmlns:p14="http://schemas.microsoft.com/office/powerpoint/2010/main" val="171244041"/>
+        <p14:creationId xmlns:p14="http://schemas.microsoft.com/office/powerpoint/2010/main" val="598159433"/>
       </p:ext>
     </p:extLst>
   </p:cSld>
@@ -13915,13 +15536,13 @@
           <p:nvPr>
             <p:extLst>
               <p:ext uri="{D42A27DB-BD31-4B8C-83A1-F6EECF244321}">
-                <p14:modId xmlns:p14="http://schemas.microsoft.com/office/powerpoint/2010/main" val="179735116"/>
+                <p14:modId xmlns:p14="http://schemas.microsoft.com/office/powerpoint/2010/main" val="107017590"/>
               </p:ext>
             </p:extLst>
           </p:nvPr>
         </p:nvGraphicFramePr>
         <p:xfrm>
-          <a:off x="838200" y="2534349"/>
+          <a:off x="838200" y="2364172"/>
           <a:ext cx="10515600" cy="2666145"/>
         </p:xfrm>
         <a:graphic>
@@ -14503,7 +16124,7 @@
         </p:nvSpPr>
         <p:spPr bwMode="auto">
           <a:xfrm>
-            <a:off x="838200" y="2226572"/>
+            <a:off x="838200" y="2056395"/>
             <a:ext cx="4459066" cy="307777"/>
           </a:xfrm>
           <a:prstGeom prst="rect">
@@ -14797,75 +16418,6 @@
               </a:rPr>
               <a:t>8</a:t>
             </a:r>
-          </a:p>
-        </p:txBody>
-      </p:sp>
-      <p:sp>
-        <p:nvSpPr>
-          <p:cNvPr id="5" name="Rectangle 2">
-            <a:extLst>
-              <a:ext uri="{FF2B5EF4-FFF2-40B4-BE49-F238E27FC236}">
-                <a16:creationId xmlns:a16="http://schemas.microsoft.com/office/drawing/2014/main" id="{32F0E469-0859-5188-ABBE-BAA5B1E4C539}"/>
-              </a:ext>
-            </a:extLst>
-          </p:cNvPr>
-          <p:cNvSpPr>
-            <a:spLocks noChangeArrowheads="1"/>
-          </p:cNvSpPr>
-          <p:nvPr/>
-        </p:nvSpPr>
-        <p:spPr bwMode="auto">
-          <a:xfrm>
-            <a:off x="838200" y="1059367"/>
-            <a:ext cx="12192000" cy="457200"/>
-          </a:xfrm>
-          <a:prstGeom prst="rect">
-            <a:avLst/>
-          </a:prstGeom>
-          <a:noFill/>
-          <a:ln>
-            <a:noFill/>
-          </a:ln>
-          <a:effectLst/>
-          <a:extLst>
-            <a:ext uri="{909E8E84-426E-40DD-AFC4-6F175D3DCCD1}">
-              <a14:hiddenFill xmlns:a14="http://schemas.microsoft.com/office/drawing/2010/main">
-                <a:solidFill>
-                  <a:schemeClr val="accent1"/>
-                </a:solidFill>
-              </a14:hiddenFill>
-            </a:ext>
-            <a:ext uri="{91240B29-F687-4F45-9708-019B960494DF}">
-              <a14:hiddenLine xmlns:a14="http://schemas.microsoft.com/office/drawing/2010/main" w="9525">
-                <a:solidFill>
-                  <a:schemeClr val="tx1"/>
-                </a:solidFill>
-                <a:miter lim="800000"/>
-                <a:headEnd/>
-                <a:tailEnd/>
-              </a14:hiddenLine>
-            </a:ext>
-            <a:ext uri="{AF507438-7753-43E0-B8FC-AC1667EBCBE1}">
-              <a14:hiddenEffects xmlns:a14="http://schemas.microsoft.com/office/drawing/2010/main">
-                <a:effectLst>
-                  <a:outerShdw dist="35921" dir="2700000" algn="ctr" rotWithShape="0">
-                    <a:schemeClr val="bg2"/>
-                  </a:outerShdw>
-                </a:effectLst>
-              </a14:hiddenEffects>
-            </a:ext>
-          </a:extLst>
-        </p:spPr>
-        <p:txBody>
-          <a:bodyPr vert="horz" wrap="none" lIns="91440" tIns="45720" rIns="91440" bIns="45720" numCol="1" anchor="ctr" anchorCtr="0" compatLnSpc="1">
-            <a:prstTxWarp prst="textNoShape">
-              <a:avLst/>
-            </a:prstTxWarp>
-            <a:spAutoFit/>
-          </a:bodyPr>
-          <a:lstStyle/>
-          <a:p>
-            <a:endParaRPr lang="ru-RU"/>
           </a:p>
         </p:txBody>
       </p:sp>
@@ -15144,8 +16696,8 @@
         </p:blipFill>
         <p:spPr bwMode="auto">
           <a:xfrm>
-            <a:off x="4134810" y="-8925"/>
-            <a:ext cx="4573485" cy="6501798"/>
+            <a:off x="4148130" y="40569"/>
+            <a:ext cx="4538670" cy="6452304"/>
           </a:xfrm>
           <a:prstGeom prst="rect">
             <a:avLst/>
@@ -15436,7 +16988,7 @@
         </p:nvSpPr>
         <p:spPr>
           <a:xfrm>
-            <a:off x="838135" y="4509498"/>
+            <a:off x="838211" y="4276923"/>
             <a:ext cx="10515578" cy="722331"/>
           </a:xfrm>
           <a:prstGeom prst="downArrowCallout">
@@ -15485,7 +17037,7 @@
         </p:nvSpPr>
         <p:spPr>
           <a:xfrm>
-            <a:off x="4661975" y="4496623"/>
+            <a:off x="4661944" y="4266175"/>
             <a:ext cx="2867895" cy="461665"/>
           </a:xfrm>
           <a:prstGeom prst="rect">
@@ -15536,7 +17088,7 @@
         </p:nvSpPr>
         <p:spPr>
           <a:xfrm>
-            <a:off x="838135" y="3705277"/>
+            <a:off x="838104" y="3474829"/>
             <a:ext cx="10515578" cy="774576"/>
           </a:xfrm>
           <a:prstGeom prst="downArrowCallout">
@@ -15585,7 +17137,7 @@
         </p:nvSpPr>
         <p:spPr>
           <a:xfrm>
-            <a:off x="838125" y="5251710"/>
+            <a:off x="838094" y="5016024"/>
             <a:ext cx="10515588" cy="723846"/>
           </a:xfrm>
           <a:prstGeom prst="downArrowCallout">
@@ -15634,7 +17186,7 @@
         </p:nvSpPr>
         <p:spPr>
           <a:xfrm>
-            <a:off x="5072378" y="5234940"/>
+            <a:off x="5072347" y="4999254"/>
             <a:ext cx="2047082" cy="461665"/>
           </a:xfrm>
           <a:prstGeom prst="rect">
@@ -15685,7 +17237,7 @@
         </p:nvSpPr>
         <p:spPr>
           <a:xfrm>
-            <a:off x="838125" y="5990197"/>
+            <a:off x="838094" y="5754511"/>
             <a:ext cx="10515588" cy="479347"/>
           </a:xfrm>
           <a:prstGeom prst="rect">
@@ -15734,7 +17286,7 @@
         </p:nvSpPr>
         <p:spPr>
           <a:xfrm>
-            <a:off x="4143463" y="5972074"/>
+            <a:off x="4143432" y="5736388"/>
             <a:ext cx="3904911" cy="461665"/>
           </a:xfrm>
           <a:prstGeom prst="rect">
@@ -15786,7 +17338,7 @@
         <p:spPr>
           <a:xfrm>
             <a:off x="838135" y="2522864"/>
-            <a:ext cx="10515578" cy="1152692"/>
+            <a:ext cx="10515569" cy="906136"/>
           </a:xfrm>
           <a:prstGeom prst="downArrowCallout">
             <a:avLst/>
@@ -15834,8 +17386,8 @@
         </p:nvSpPr>
         <p:spPr>
           <a:xfrm>
-            <a:off x="838134" y="2494290"/>
-            <a:ext cx="10515579" cy="830997"/>
+            <a:off x="838125" y="2587393"/>
+            <a:ext cx="10515579" cy="461665"/>
           </a:xfrm>
           <a:prstGeom prst="rect">
             <a:avLst/>
@@ -15858,29 +17410,7 @@
                 <a:ea typeface="SimSun" panose="02010600030101010101" pitchFamily="2" charset="-122"/>
                 <a:cs typeface="Times New Roman" panose="02020603050405020304" pitchFamily="18" charset="0"/>
               </a:rPr>
-              <a:t>Временная валидация </a:t>
-            </a:r>
-            <a:r>
-              <a:rPr lang="en-US" sz="2400" dirty="0">
-                <a:solidFill>
-                  <a:schemeClr val="bg1"/>
-                </a:solidFill>
-                <a:latin typeface="Times New Roman" panose="02020603050405020304" pitchFamily="18" charset="0"/>
-                <a:ea typeface="SimSun" panose="02010600030101010101" pitchFamily="2" charset="-122"/>
-                <a:cs typeface="Times New Roman" panose="02020603050405020304" pitchFamily="18" charset="0"/>
-              </a:rPr>
-              <a:t>—</a:t>
-            </a:r>
-            <a:r>
-              <a:rPr lang="ru-RU" sz="2400" dirty="0">
-                <a:solidFill>
-                  <a:schemeClr val="bg1"/>
-                </a:solidFill>
-                <a:latin typeface="Times New Roman" panose="02020603050405020304" pitchFamily="18" charset="0"/>
-                <a:ea typeface="SimSun" panose="02010600030101010101" pitchFamily="2" charset="-122"/>
-                <a:cs typeface="Times New Roman" panose="02020603050405020304" pitchFamily="18" charset="0"/>
-              </a:rPr>
-              <a:t> обучение на данных до 2021, тест на 2022–2026 (без случайного разбиения)</a:t>
+              <a:t>Временная валидация</a:t>
             </a:r>
             <a:endParaRPr lang="ru-RU" sz="2400" dirty="0">
               <a:solidFill>
@@ -15906,7 +17436,7 @@
         </p:nvSpPr>
         <p:spPr>
           <a:xfrm>
-            <a:off x="838134" y="3728370"/>
+            <a:off x="838094" y="3470433"/>
             <a:ext cx="10515600" cy="461665"/>
           </a:xfrm>
           <a:prstGeom prst="rect">

--- a/4 курс/8 семестр/Преддипломная практика/010304_22И1429_Ким_КС_презентация_предзащита.pptx
+++ b/4 курс/8 семестр/Преддипломная практика/010304_22И1429_Ким_КС_презентация_предзащита.pptx
@@ -215,7 +215,7 @@
           <a:p>
             <a:fld id="{75B8F736-CFBC-DB42-8902-918977A31BB8}" type="datetimeFigureOut">
               <a:rPr lang="ru-RU" smtClean="0"/>
-              <a:t>11.05.2026</a:t>
+              <a:t>12.05.2026</a:t>
             </a:fld>
             <a:endParaRPr lang="ru-RU"/>
           </a:p>
@@ -736,7 +736,7 @@
           <a:p>
             <a:fld id="{107550DB-F8F9-A345-8ACF-B172BB4CC835}" type="datetime1">
               <a:rPr lang="ru-RU" smtClean="0"/>
-              <a:t>11.05.2026</a:t>
+              <a:t>12.05.2026</a:t>
             </a:fld>
             <a:endParaRPr lang="ru-RU"/>
           </a:p>
@@ -934,7 +934,7 @@
           <a:p>
             <a:fld id="{C37D7D5F-75DD-7D4C-8231-B51C8FBAD87E}" type="datetime1">
               <a:rPr lang="ru-RU" smtClean="0"/>
-              <a:t>11.05.2026</a:t>
+              <a:t>12.05.2026</a:t>
             </a:fld>
             <a:endParaRPr lang="ru-RU"/>
           </a:p>
@@ -1142,7 +1142,7 @@
           <a:p>
             <a:fld id="{8CA4CD92-8BC8-7F42-A4AC-74BE4FBDEFBF}" type="datetime1">
               <a:rPr lang="ru-RU" smtClean="0"/>
-              <a:t>11.05.2026</a:t>
+              <a:t>12.05.2026</a:t>
             </a:fld>
             <a:endParaRPr lang="ru-RU"/>
           </a:p>
@@ -1340,7 +1340,7 @@
           <a:p>
             <a:fld id="{AD86D4C3-C482-8D47-AEDA-F24D432152B4}" type="datetime1">
               <a:rPr lang="ru-RU" smtClean="0"/>
-              <a:t>11.05.2026</a:t>
+              <a:t>12.05.2026</a:t>
             </a:fld>
             <a:endParaRPr lang="ru-RU"/>
           </a:p>
@@ -1615,7 +1615,7 @@
           <a:p>
             <a:fld id="{6E8693C7-0C3C-3D4E-827B-EA584AF6C465}" type="datetime1">
               <a:rPr lang="ru-RU" smtClean="0"/>
-              <a:t>11.05.2026</a:t>
+              <a:t>12.05.2026</a:t>
             </a:fld>
             <a:endParaRPr lang="ru-RU"/>
           </a:p>
@@ -1880,7 +1880,7 @@
           <a:p>
             <a:fld id="{36DB63EE-D3F0-B14D-A1DF-4D0885D56E4A}" type="datetime1">
               <a:rPr lang="ru-RU" smtClean="0"/>
-              <a:t>11.05.2026</a:t>
+              <a:t>12.05.2026</a:t>
             </a:fld>
             <a:endParaRPr lang="ru-RU"/>
           </a:p>
@@ -2292,7 +2292,7 @@
           <a:p>
             <a:fld id="{CA70F580-4A02-7749-8695-6F7A14F168A5}" type="datetime1">
               <a:rPr lang="ru-RU" smtClean="0"/>
-              <a:t>11.05.2026</a:t>
+              <a:t>12.05.2026</a:t>
             </a:fld>
             <a:endParaRPr lang="ru-RU"/>
           </a:p>
@@ -2433,7 +2433,7 @@
           <a:p>
             <a:fld id="{EA1A2E72-AE73-9645-9180-4139BDD17A06}" type="datetime1">
               <a:rPr lang="ru-RU" smtClean="0"/>
-              <a:t>11.05.2026</a:t>
+              <a:t>12.05.2026</a:t>
             </a:fld>
             <a:endParaRPr lang="ru-RU"/>
           </a:p>
@@ -2546,7 +2546,7 @@
           <a:p>
             <a:fld id="{C7CB39E5-2434-9D49-A354-72490D6D8D81}" type="datetime1">
               <a:rPr lang="ru-RU" smtClean="0"/>
-              <a:t>11.05.2026</a:t>
+              <a:t>12.05.2026</a:t>
             </a:fld>
             <a:endParaRPr lang="ru-RU"/>
           </a:p>
@@ -2857,7 +2857,7 @@
           <a:p>
             <a:fld id="{1C738D45-2A78-F24B-B5AB-66E869CA231F}" type="datetime1">
               <a:rPr lang="ru-RU" smtClean="0"/>
-              <a:t>11.05.2026</a:t>
+              <a:t>12.05.2026</a:t>
             </a:fld>
             <a:endParaRPr lang="ru-RU"/>
           </a:p>
@@ -3145,7 +3145,7 @@
           <a:p>
             <a:fld id="{F6F4DE2A-573E-8A49-A1E4-A11F8F365BD0}" type="datetime1">
               <a:rPr lang="ru-RU" smtClean="0"/>
-              <a:t>11.05.2026</a:t>
+              <a:t>12.05.2026</a:t>
             </a:fld>
             <a:endParaRPr lang="ru-RU"/>
           </a:p>
@@ -3386,7 +3386,7 @@
           <a:p>
             <a:fld id="{B4849629-F3D2-184C-BCB4-85078938F85A}" type="datetime1">
               <a:rPr lang="ru-RU" smtClean="0"/>
-              <a:t>11.05.2026</a:t>
+              <a:t>12.05.2026</a:t>
             </a:fld>
             <a:endParaRPr lang="ru-RU"/>
           </a:p>
@@ -5672,7 +5672,7 @@
                 <a:latin typeface="Times New Roman" panose="02020603050405020304" pitchFamily="18" charset="0"/>
                 <a:cs typeface="Times New Roman" panose="02020603050405020304" pitchFamily="18" charset="0"/>
               </a:rPr>
-              <a:t> Зачем нужна регуляризация?</a:t>
+              <a:t>Обоснование необходимости регуляризации</a:t>
             </a:r>
           </a:p>
         </p:txBody>
@@ -6186,8 +6186,8 @@
           </a:p>
         </p:txBody>
       </p:sp>
-      <mc:AlternateContent xmlns:mc="http://schemas.openxmlformats.org/markup-compatibility/2006">
-        <mc:Choice xmlns:a14="http://schemas.microsoft.com/office/drawing/2010/main" Requires="a14">
+      <mc:AlternateContent xmlns:mc="http://schemas.openxmlformats.org/markup-compatibility/2006" xmlns:a14="http://schemas.microsoft.com/office/drawing/2010/main">
+        <mc:Choice Requires="a14">
           <p:sp>
             <p:nvSpPr>
               <p:cNvPr id="9" name="TextBox 8">
@@ -6637,7 +6637,7 @@
             </p:txBody>
           </p:sp>
         </mc:Choice>
-        <mc:Fallback>
+        <mc:Fallback xmlns="">
           <p:sp>
             <p:nvSpPr>
               <p:cNvPr id="9" name="TextBox 8">
@@ -7097,8 +7097,8 @@
           </a:p>
         </p:txBody>
       </p:sp>
-      <mc:AlternateContent xmlns:mc="http://schemas.openxmlformats.org/markup-compatibility/2006">
-        <mc:Choice xmlns:a14="http://schemas.microsoft.com/office/drawing/2010/main" Requires="a14">
+      <mc:AlternateContent xmlns:mc="http://schemas.openxmlformats.org/markup-compatibility/2006" xmlns:a14="http://schemas.microsoft.com/office/drawing/2010/main">
+        <mc:Choice Requires="a14">
           <p:graphicFrame>
             <p:nvGraphicFramePr>
               <p:cNvPr id="8" name="Таблица 7">
@@ -7576,7 +7576,7 @@
             </a:graphic>
           </p:graphicFrame>
         </mc:Choice>
-        <mc:Fallback>
+        <mc:Fallback xmlns="">
           <p:graphicFrame>
             <p:nvGraphicFramePr>
               <p:cNvPr id="8" name="Таблица 7">
@@ -8190,8 +8190,8 @@
           </a:p>
         </p:txBody>
       </p:sp>
-      <mc:AlternateContent xmlns:mc="http://schemas.openxmlformats.org/markup-compatibility/2006" xmlns:a14="http://schemas.microsoft.com/office/drawing/2010/main">
-        <mc:Choice Requires="a14">
+      <mc:AlternateContent xmlns:mc="http://schemas.openxmlformats.org/markup-compatibility/2006">
+        <mc:Choice xmlns:a14="http://schemas.microsoft.com/office/drawing/2010/main" Requires="a14">
           <p:sp>
             <p:nvSpPr>
               <p:cNvPr id="11" name="TextBox 10">
@@ -8225,7 +8225,7 @@
                     <a:latin typeface="Times New Roman" panose="02020603050405020304" pitchFamily="18" charset="0"/>
                     <a:cs typeface="Times New Roman" panose="02020603050405020304" pitchFamily="18" charset="0"/>
                   </a:rPr>
-                  <a:t>Логарифм рыночная стоимость — главный фактор (32,1%).</a:t>
+                  <a:t>Логарифм рыночной стоимости — главный фактор (32,1%).</a:t>
                 </a:r>
               </a:p>
               <a:p>
@@ -8255,7 +8255,7 @@
                     <a:latin typeface="Times New Roman" panose="02020603050405020304" pitchFamily="18" charset="0"/>
                     <a:cs typeface="Times New Roman" panose="02020603050405020304" pitchFamily="18" charset="0"/>
                   </a:rPr>
-                  <a:t> подтверждает значимость возраст и </a:t>
+                  <a:t> подтверждает значимость возраста и </a:t>
                 </a:r>
                 <a14:m>
                   <m:oMath xmlns:m="http://schemas.openxmlformats.org/officeDocument/2006/math">
@@ -8264,12 +8264,12 @@
                         <a:latin typeface="Cambria Math" panose="02040503050406030204" pitchFamily="18" charset="0"/>
                         <a:cs typeface="Times New Roman" panose="02020603050405020304" pitchFamily="18" charset="0"/>
                       </a:rPr>
-                      <m:t>возрас</m:t>
+                      <m:t>возраст</m:t>
                     </m:r>
                     <m:sSup>
                       <m:sSupPr>
                         <m:ctrlPr>
-                          <a:rPr lang="en-US" b="0" i="1" dirty="0" smtClean="0">
+                          <a:rPr lang="en-US" i="1" dirty="0" smtClean="0">
                             <a:latin typeface="Cambria Math" panose="02040503050406030204" pitchFamily="18" charset="0"/>
                             <a:cs typeface="Times New Roman" panose="02020603050405020304" pitchFamily="18" charset="0"/>
                           </a:rPr>
@@ -8281,12 +8281,12 @@
                             <a:latin typeface="Cambria Math" panose="02040503050406030204" pitchFamily="18" charset="0"/>
                             <a:cs typeface="Times New Roman" panose="02020603050405020304" pitchFamily="18" charset="0"/>
                           </a:rPr>
-                          <m:t>т</m:t>
+                          <m:t>а</m:t>
                         </m:r>
                       </m:e>
                       <m:sup>
                         <m:r>
-                          <a:rPr lang="en-US" b="0" i="1" dirty="0" smtClean="0">
+                          <a:rPr lang="en-US" i="1" dirty="0" smtClean="0">
                             <a:latin typeface="Cambria Math" panose="02040503050406030204" pitchFamily="18" charset="0"/>
                             <a:cs typeface="Times New Roman" panose="02020603050405020304" pitchFamily="18" charset="0"/>
                           </a:rPr>
@@ -8307,7 +8307,7 @@
             </p:txBody>
           </p:sp>
         </mc:Choice>
-        <mc:Fallback xmlns="">
+        <mc:Fallback>
           <p:sp>
             <p:nvSpPr>
               <p:cNvPr id="11" name="TextBox 10">
@@ -8368,8 +8368,8 @@
         </p:nvSpPr>
         <p:spPr bwMode="auto">
           <a:xfrm>
-            <a:off x="1855972" y="4945856"/>
-            <a:ext cx="3482626" cy="307777"/>
+            <a:off x="1181527" y="4830674"/>
+            <a:ext cx="4815416" cy="307777"/>
           </a:xfrm>
           <a:prstGeom prst="rect">
             <a:avLst/>
@@ -8469,7 +8469,22 @@
                 <a:ea typeface="SimSun" panose="02010600030101010101" pitchFamily="2" charset="-122"/>
                 <a:cs typeface="Times New Roman" panose="02020603050405020304" pitchFamily="18" charset="0"/>
               </a:rPr>
-              <a:t> — Анализ важных признаков</a:t>
+              <a:t> — Важность признаков (</a:t>
+            </a:r>
+            <a:r>
+              <a:rPr kumimoji="0" lang="en-US" altLang="ru-RU" sz="1400" b="1" i="0" u="none" strike="noStrike" cap="none" normalizeH="0" baseline="0" dirty="0">
+                <a:ln>
+                  <a:noFill/>
+                </a:ln>
+                <a:solidFill>
+                  <a:schemeClr val="tx1"/>
+                </a:solidFill>
+                <a:effectLst/>
+                <a:latin typeface="Times New Roman" panose="02020603050405020304" pitchFamily="18" charset="0"/>
+                <a:ea typeface="SimSun" panose="02010600030101010101" pitchFamily="2" charset="-122"/>
+                <a:cs typeface="Times New Roman" panose="02020603050405020304" pitchFamily="18" charset="0"/>
+              </a:rPr>
+              <a:t>feature importance)</a:t>
             </a:r>
             <a:endParaRPr kumimoji="0" lang="ru-RU" altLang="ru-RU" sz="2000" b="0" i="0" u="none" strike="noStrike" cap="none" normalizeH="0" baseline="0" dirty="0">
               <a:ln>
@@ -8500,8 +8515,8 @@
         </p:nvSpPr>
         <p:spPr bwMode="auto">
           <a:xfrm>
-            <a:off x="7374109" y="4876841"/>
-            <a:ext cx="3979690" cy="523220"/>
+            <a:off x="6614159" y="4830674"/>
+            <a:ext cx="5577841" cy="307777"/>
           </a:xfrm>
           <a:prstGeom prst="rect">
             <a:avLst/>
@@ -8578,7 +8593,30 @@
                 <a:ea typeface="SimSun" panose="02010600030101010101" pitchFamily="2" charset="-122"/>
                 <a:cs typeface="Times New Roman" panose="02020603050405020304" pitchFamily="18" charset="0"/>
               </a:rPr>
-              <a:t>Рисунок 8 — Анализ важных признаков по </a:t>
+              <a:t>Рисунок 8 — </a:t>
+            </a:r>
+            <a:r>
+              <a:rPr lang="ru-RU" altLang="ru-RU" sz="1400" b="1" dirty="0">
+                <a:latin typeface="Times New Roman" panose="02020603050405020304" pitchFamily="18" charset="0"/>
+                <a:ea typeface="SimSun" panose="02010600030101010101" pitchFamily="2" charset="-122"/>
+                <a:cs typeface="Times New Roman" panose="02020603050405020304" pitchFamily="18" charset="0"/>
+              </a:rPr>
+              <a:t>Ва</a:t>
+            </a:r>
+            <a:r>
+              <a:rPr kumimoji="0" lang="ru-RU" altLang="ru-RU" sz="1400" b="1" i="0" u="none" strike="noStrike" cap="none" normalizeH="0" baseline="0" dirty="0">
+                <a:ln>
+                  <a:noFill/>
+                </a:ln>
+                <a:solidFill>
+                  <a:schemeClr val="tx1"/>
+                </a:solidFill>
+                <a:effectLst/>
+                <a:latin typeface="Times New Roman" panose="02020603050405020304" pitchFamily="18" charset="0"/>
+                <a:ea typeface="SimSun" panose="02010600030101010101" pitchFamily="2" charset="-122"/>
+                <a:cs typeface="Times New Roman" panose="02020603050405020304" pitchFamily="18" charset="0"/>
+              </a:rPr>
+              <a:t>жность признаков (</a:t>
             </a:r>
             <a:r>
               <a:rPr kumimoji="0" lang="ru-RU" altLang="ru-RU" sz="1400" b="1" i="0" u="none" strike="noStrike" cap="none" normalizeH="0" baseline="0" dirty="0" err="1">
@@ -8594,6 +8632,36 @@
                 <a:cs typeface="Times New Roman" panose="02020603050405020304" pitchFamily="18" charset="0"/>
               </a:rPr>
               <a:t>permutation</a:t>
+            </a:r>
+            <a:r>
+              <a:rPr kumimoji="0" lang="ru-RU" altLang="ru-RU" sz="1400" b="1" i="0" u="none" strike="noStrike" cap="none" normalizeH="0" baseline="0" dirty="0">
+                <a:ln>
+                  <a:noFill/>
+                </a:ln>
+                <a:solidFill>
+                  <a:schemeClr val="tx1"/>
+                </a:solidFill>
+                <a:effectLst/>
+                <a:latin typeface="Times New Roman" panose="02020603050405020304" pitchFamily="18" charset="0"/>
+                <a:ea typeface="SimSun" panose="02010600030101010101" pitchFamily="2" charset="-122"/>
+                <a:cs typeface="Times New Roman" panose="02020603050405020304" pitchFamily="18" charset="0"/>
+              </a:rPr>
+              <a:t> </a:t>
+            </a:r>
+            <a:r>
+              <a:rPr kumimoji="0" lang="en-US" altLang="ru-RU" sz="1400" b="1" i="0" u="none" strike="noStrike" cap="none" normalizeH="0" baseline="0" dirty="0">
+                <a:ln>
+                  <a:noFill/>
+                </a:ln>
+                <a:solidFill>
+                  <a:schemeClr val="tx1"/>
+                </a:solidFill>
+                <a:effectLst/>
+                <a:latin typeface="Times New Roman" panose="02020603050405020304" pitchFamily="18" charset="0"/>
+                <a:ea typeface="SimSun" panose="02010600030101010101" pitchFamily="2" charset="-122"/>
+                <a:cs typeface="Times New Roman" panose="02020603050405020304" pitchFamily="18" charset="0"/>
+              </a:rPr>
+              <a:t>importance)</a:t>
             </a:r>
             <a:endParaRPr kumimoji="0" lang="ru-RU" altLang="ru-RU" sz="2000" b="0" i="0" u="none" strike="noStrike" cap="none" normalizeH="0" baseline="0" dirty="0">
               <a:ln>
@@ -14283,8 +14351,8 @@
           </a:p>
         </p:txBody>
       </p:sp>
-      <mc:AlternateContent xmlns:mc="http://schemas.openxmlformats.org/markup-compatibility/2006">
-        <mc:Choice xmlns:a14="http://schemas.microsoft.com/office/drawing/2010/main" Requires="a14">
+      <mc:AlternateContent xmlns:mc="http://schemas.openxmlformats.org/markup-compatibility/2006" xmlns:a14="http://schemas.microsoft.com/office/drawing/2010/main">
+        <mc:Choice Requires="a14">
           <p:sp>
             <p:nvSpPr>
               <p:cNvPr id="8" name="TextBox 7">
@@ -14836,7 +14904,7 @@
             </p:txBody>
           </p:sp>
         </mc:Choice>
-        <mc:Fallback>
+        <mc:Fallback xmlns="">
           <p:sp>
             <p:nvSpPr>
               <p:cNvPr id="8" name="TextBox 7">
@@ -14881,8 +14949,8 @@
           </p:sp>
         </mc:Fallback>
       </mc:AlternateContent>
-      <mc:AlternateContent xmlns:mc="http://schemas.openxmlformats.org/markup-compatibility/2006">
-        <mc:Choice xmlns:a14="http://schemas.microsoft.com/office/drawing/2010/main" Requires="a14">
+      <mc:AlternateContent xmlns:mc="http://schemas.openxmlformats.org/markup-compatibility/2006" xmlns:a14="http://schemas.microsoft.com/office/drawing/2010/main">
+        <mc:Choice Requires="a14">
           <p:sp>
             <p:nvSpPr>
               <p:cNvPr id="11" name="TextBox 10">
@@ -15310,7 +15378,7 @@
             </p:txBody>
           </p:sp>
         </mc:Choice>
-        <mc:Fallback>
+        <mc:Fallback xmlns="">
           <p:sp>
             <p:nvSpPr>
               <p:cNvPr id="11" name="TextBox 10">
